--- a/poc/deck/assets/review/Slide 4 interactive - test.pptx
+++ b/poc/deck/assets/review/Slide 4 interactive - test.pptx
@@ -1413,77 +1413,113 @@
           <a:lstStyle/>
           <a:p>
             <a:r>
-              <a:t>SLIDE 4  |  Codex to Production: one story through the harness   (about 2 min 45 sec)</a:t>
+              <a:t>SLIDE 4  |  Codex to Production: one campaign through the harness   (about 3 minutes)</a:t>
             </a:r>
           </a:p>
           <a:p>
             <a:r>
-              <a:t>MAIN POINT: the complete governed lifecycle of one change.</a:t>
+              <a:t>MAIN POINT: the complete governed lifecycle of one change, and every step waits for a human approval.</a:t>
             </a:r>
           </a:p>
           <a:p>
             <a:r>
-              <a:t>Advance with Enter, Down arrow, Space or a click. The slide opens on the full design; each click spotlights the next part.</a:t>
+              <a:t>Advance with Enter, Down arrow, Space or a click. The slide opens on the full design; each click spotlights the next part. Backspace or Up arrow goes back.</a:t>
             </a:r>
           </a:p>
           <a:p/>
           <a:p>
             <a:r>
-              <a:t>[OPEN, full diagram] This is the main execution slide. Imagine a Network Services story requiring a change to an HFN validation rule.</a:t>
+              <a:t>[OPEN, full diagram] This is the main execution slide. Let's follow one Marketing Cloud campaign: the CHF post-discharge SMS nudge, Jira story VBC-412.</a:t>
             </a:r>
           </a:p>
           <a:p/>
           <a:p>
             <a:r>
-              <a:t>[CLICK 1  Start in Salesforce] A team member starts from the Salesforce Agentic Harness console, provides the Jira key, selects the pod and adds the design context. Through Apex and a Named Credential, the request reaches the harness, and Codex uses the delivery skills for the run.</a:t>
+              <a:t>[CLICK 1  Start in Salesforce] The marketer starts from the Agentic Harness console in Salesforce, gives the Jira key, picks the Marketing Cloud pod and attaches the design. Through Apex and a Named Credential the request reaches the harness, and Codex runs the delivery skills.</a:t>
             </a:r>
           </a:p>
           <a:p/>
           <a:p>
             <a:r>
-              <a:t>[CLICK 2  Context first] Before proposing code, the agents query the knowledge graph to understand existing objects, automations, dependencies and ownership. That graph is populated from read-only connectors, with source references and snapshots. We deliberately provide a bounded context slice rather than a full org dump.</a:t>
+              <a:t>[CLICK 2  Context first] Before anything is built, the Requirements Agent checks what already exists: the data extensions, journeys and Data Cloud segments in Salesforce, the Jira history and the Confluence design. The graph is filled by read-only connectors, with sources and snapshots, and the agent gets a bounded slice, never a full org dump.</a:t>
             </a:r>
           </a:p>
           <a:p/>
           <a:p>
             <a:r>
-              <a:t>[CLICK 3  Orchestrated] In the center, Cloud Workflows coordinates the story. Agent workers handle requirements, design, development, review, testing and release preparation, with checkpoints and resumable runs.</a:t>
+              <a:t>[CLICK 3  Orchestrated] Cloud Workflows coordinates the story. Agent workers handle requirements, design, build, review, test and release, with checkpoints and resumable runs.</a:t>
             </a:r>
           </a:p>
           <a:p/>
           <a:p>
             <a:r>
-              <a:t>[CLICK 4  Gateway] Any action against Git, Salesforce or Copado passes through the MCP gateway and the allowed identity for that step. The Change Guardian checks cross-pod ownership and impact.</a:t>
+              <a:t>[CLICK 4  Gateway] Any action on Git, Salesforce, Marketing Cloud or Copado goes through the MCP gateway with the identity allowed for that step. The Change Guardian checks which other pods share the same data extensions, short code and STOP keyword.</a:t>
             </a:r>
           </a:p>
           <a:p/>
           <a:p>
             <a:r>
-              <a:t>[CLICK 5  Evals: pass] At every step we evaluate the output. A pass goes to the gate, with the evidence.</a:t>
+              <a:t>[CLICK 5  Evals: pass] Every output is scored before it moves on. A pass goes to the gate, with the evidence.</a:t>
             </a:r>
           </a:p>
           <a:p/>
           <a:p>
             <a:r>
-              <a:t>[CLICK 6  Evals: fail and retry] If a check fails, the harness sends the result back for correction, within a bounded retry limit: five attempts, then a named owner.</a:t>
+              <a:t>[CLICK 6  Evals: fail] If a check fails, the result goes back for correction, at most five times, then a named owner takes over.</a:t>
             </a:r>
           </a:p>
           <a:p/>
           <a:p>
             <a:r>
-              <a:t>[CLICK 7  People approve] People still approve the requirements, architecture, review and UAT, and CAB still controls the release. The owning team, not an agent, deploys to production.</a:t>
+              <a:t>Now the most important part: nothing moves without a person.</a:t>
             </a:r>
           </a:p>
           <a:p/>
           <a:p>
             <a:r>
-              <a:t>[CLICK 8  Evidence] We then keep the evidence in a change passport and report cycle time, defects, rework and cost per change.</a:t>
+              <a:t>[CLICK 7  H1] The Requirements Agent posts the brief to the Jira story as a comment. The product owner approves at H1, and only then does design start.</a:t>
             </a:r>
           </a:p>
           <a:p/>
           <a:p>
             <a:r>
-              <a:t>[CLICK 9  back to the full design] So the end-to-end story is not just automation: it is a controlled, auditable delivery process.</a:t>
+              <a:t>[CLICK 8  H2] The Architect Agent drafts the design in Confluence, reusing what exists; the Change Guardian names the affected pods. Architect and pod owners approve at H2.</a:t>
+            </a:r>
+          </a:p>
+          <a:p/>
+          <a:p>
+            <a:r>
+              <a:t>[CLICK 9  H3] The Developer Agent builds in the Marketing Cloud dev business unit; Review and Test Agents check it and the evals score it. Tech lead and security approve at H3.</a:t>
+            </a:r>
+          </a:p>
+          <a:p/>
+          <a:p>
+            <a:r>
+              <a:t>[CLICK 10  H4, step 06] The Release Agent promotes through Copado to SIT and UAT. Marketing and clinical owners test every message variant and sign off UAT.</a:t>
+            </a:r>
+          </a:p>
+          <a:p/>
+          <a:p>
+            <a:r>
+              <a:t>[CLICK 11  CAB] The CAB pack comes from the change passport. CAB approves the release, exactly as today.</a:t>
+            </a:r>
+          </a:p>
+          <a:p/>
+          <a:p>
+            <a:r>
+              <a:t>[CLICK 12  Production] The owning team activates the journey in production. No agent holds a production credential. Step 09 closes the story and resyncs the graph.</a:t>
+            </a:r>
+          </a:p>
+          <a:p/>
+          <a:p>
+            <a:r>
+              <a:t>[CLICK 13  Evidence] Every step and every approval is kept in the change passport, and we report cycle time, defects, rework and cost per change.</a:t>
+            </a:r>
+          </a:p>
+          <a:p/>
+          <a:p>
+            <a:r>
+              <a:t>[CLICK 14  back to the full design] So the whole execution runs on human approval at every step. It is not just automation: it is a controlled, auditable delivery process.</a:t>
             </a:r>
           </a:p>
         </p:txBody>
@@ -11771,7 +11807,7 @@
                 </a:solidFill>
                 <a:latin typeface="Trenda IG Text"/>
               </a:rPr>
-              <a:t>H4</a:t>
+              <a:t>06 UAT · H4</a:t>
             </a:r>
           </a:p>
           <a:p>
@@ -11783,7 +11819,7 @@
                 </a:solidFill>
                 <a:latin typeface="Trenda IG Text"/>
               </a:rPr>
-              <a:t>business UAT</a:t>
+              <a:t>business sign-off</a:t>
             </a:r>
           </a:p>
         </p:txBody>
@@ -12917,7 +12953,7 @@
           <p:spPr>
             <a:xfrm>
               <a:off x="3063240" y="2057400"/>
-              <a:ext cx="3749039" cy="658368"/>
+              <a:ext cx="3931920" cy="658368"/>
             </a:xfrm>
             <a:prstGeom prst="roundRect">
               <a:avLst>
@@ -12963,7 +12999,7 @@
           <p:spPr>
             <a:xfrm>
               <a:off x="3191256" y="2121408"/>
-              <a:ext cx="3493007" cy="566928"/>
+              <a:ext cx="3675887" cy="566928"/>
             </a:xfrm>
             <a:prstGeom prst="rect">
               <a:avLst/>
@@ -12988,7 +13024,7 @@
                   </a:solidFill>
                   <a:latin typeface="Trenda IG Text"/>
                 </a:rPr>
-                <a:t>1 / 8   </a:t>
+                <a:t>1 / 13   </a:t>
               </a:r>
               <a:r>
                 <a:rPr sz="800" b="1" i="0" spc="120">
@@ -13013,7 +13049,7 @@
                   </a:solidFill>
                   <a:latin typeface="Trenda IG Text"/>
                 </a:rPr>
-                <a:t>Story NS-1234: change an HFN validation rule. The Jira key, pod and design go in the LWC; Apex and a Named Credential reach the harness; Codex runs the ADLC skills.</a:t>
+                <a:t>Campaign story VBC-412: the CHF post-discharge SMS nudge. The marketer enters the Jira key, picks the Marketing Cloud pod and attaches the design; Apex reaches the harness and Codex runs the ADLC skills.</a:t>
               </a:r>
             </a:p>
           </p:txBody>
@@ -13393,7 +13429,7 @@
           <p:spPr>
             <a:xfrm>
               <a:off x="365760" y="2560320"/>
-              <a:ext cx="9235440" cy="320040"/>
+              <a:ext cx="9235440" cy="493776"/>
             </a:xfrm>
             <a:prstGeom prst="rect">
               <a:avLst/>
@@ -13437,7 +13473,7 @@
           <p:spPr>
             <a:xfrm>
               <a:off x="11777472" y="2560320"/>
-              <a:ext cx="45720" cy="320040"/>
+              <a:ext cx="45720" cy="493776"/>
             </a:xfrm>
             <a:prstGeom prst="rect">
               <a:avLst/>
@@ -13480,8 +13516,8 @@
           </p:nvSpPr>
           <p:spPr>
             <a:xfrm>
-              <a:off x="365760" y="2880360"/>
-              <a:ext cx="11457432" cy="3474720"/>
+              <a:off x="365760" y="3054096"/>
+              <a:ext cx="4206240" cy="292607"/>
             </a:xfrm>
             <a:prstGeom prst="rect">
               <a:avLst/>
@@ -13519,6 +13555,226 @@
         <p:sp>
           <p:nvSpPr>
             <p:cNvPr id="261" name="Shape 10"/>
+            <p:cNvSpPr/>
+            <p:nvPr/>
+          </p:nvSpPr>
+          <p:spPr>
+            <a:xfrm>
+              <a:off x="5879592" y="3054096"/>
+              <a:ext cx="3721608" cy="292607"/>
+            </a:xfrm>
+            <a:prstGeom prst="rect">
+              <a:avLst/>
+            </a:prstGeom>
+            <a:solidFill>
+              <a:srgbClr val="FFFFFF">
+                <a:alpha val="72000"/>
+              </a:srgbClr>
+            </a:solidFill>
+            <a:ln>
+              <a:noFill/>
+            </a:ln>
+            <a:effectLst/>
+          </p:spPr>
+          <p:style>
+            <a:lnRef idx="1">
+              <a:schemeClr val="accent1"/>
+            </a:lnRef>
+            <a:fillRef idx="3">
+              <a:schemeClr val="accent1"/>
+            </a:fillRef>
+            <a:effectRef idx="2">
+              <a:schemeClr val="accent1"/>
+            </a:effectRef>
+            <a:fontRef idx="minor">
+              <a:schemeClr val="lt1"/>
+            </a:fontRef>
+          </p:style>
+          <p:txBody>
+            <a:bodyPr rtlCol="0" anchor="ctr"/>
+            <a:lstStyle/>
+            <a:p/>
+          </p:txBody>
+        </p:sp>
+        <p:sp>
+          <p:nvSpPr>
+            <p:cNvPr id="262" name="Shape 11"/>
+            <p:cNvSpPr/>
+            <p:nvPr/>
+          </p:nvSpPr>
+          <p:spPr>
+            <a:xfrm>
+              <a:off x="11777472" y="3054096"/>
+              <a:ext cx="45720" cy="292607"/>
+            </a:xfrm>
+            <a:prstGeom prst="rect">
+              <a:avLst/>
+            </a:prstGeom>
+            <a:solidFill>
+              <a:srgbClr val="FFFFFF">
+                <a:alpha val="72000"/>
+              </a:srgbClr>
+            </a:solidFill>
+            <a:ln>
+              <a:noFill/>
+            </a:ln>
+            <a:effectLst/>
+          </p:spPr>
+          <p:style>
+            <a:lnRef idx="1">
+              <a:schemeClr val="accent1"/>
+            </a:lnRef>
+            <a:fillRef idx="3">
+              <a:schemeClr val="accent1"/>
+            </a:fillRef>
+            <a:effectRef idx="2">
+              <a:schemeClr val="accent1"/>
+            </a:effectRef>
+            <a:fontRef idx="minor">
+              <a:schemeClr val="lt1"/>
+            </a:fontRef>
+          </p:style>
+          <p:txBody>
+            <a:bodyPr rtlCol="0" anchor="ctr"/>
+            <a:lstStyle/>
+            <a:p/>
+          </p:txBody>
+        </p:sp>
+        <p:sp>
+          <p:nvSpPr>
+            <p:cNvPr id="263" name="Shape 12"/>
+            <p:cNvSpPr/>
+            <p:nvPr/>
+          </p:nvSpPr>
+          <p:spPr>
+            <a:xfrm>
+              <a:off x="365760" y="3346703"/>
+              <a:ext cx="9235440" cy="649224"/>
+            </a:xfrm>
+            <a:prstGeom prst="rect">
+              <a:avLst/>
+            </a:prstGeom>
+            <a:solidFill>
+              <a:srgbClr val="FFFFFF">
+                <a:alpha val="72000"/>
+              </a:srgbClr>
+            </a:solidFill>
+            <a:ln>
+              <a:noFill/>
+            </a:ln>
+            <a:effectLst/>
+          </p:spPr>
+          <p:style>
+            <a:lnRef idx="1">
+              <a:schemeClr val="accent1"/>
+            </a:lnRef>
+            <a:fillRef idx="3">
+              <a:schemeClr val="accent1"/>
+            </a:fillRef>
+            <a:effectRef idx="2">
+              <a:schemeClr val="accent1"/>
+            </a:effectRef>
+            <a:fontRef idx="minor">
+              <a:schemeClr val="lt1"/>
+            </a:fontRef>
+          </p:style>
+          <p:txBody>
+            <a:bodyPr rtlCol="0" anchor="ctr"/>
+            <a:lstStyle/>
+            <a:p/>
+          </p:txBody>
+        </p:sp>
+        <p:sp>
+          <p:nvSpPr>
+            <p:cNvPr id="264" name="Shape 13"/>
+            <p:cNvSpPr/>
+            <p:nvPr/>
+          </p:nvSpPr>
+          <p:spPr>
+            <a:xfrm>
+              <a:off x="11777472" y="3346703"/>
+              <a:ext cx="45720" cy="649224"/>
+            </a:xfrm>
+            <a:prstGeom prst="rect">
+              <a:avLst/>
+            </a:prstGeom>
+            <a:solidFill>
+              <a:srgbClr val="FFFFFF">
+                <a:alpha val="72000"/>
+              </a:srgbClr>
+            </a:solidFill>
+            <a:ln>
+              <a:noFill/>
+            </a:ln>
+            <a:effectLst/>
+          </p:spPr>
+          <p:style>
+            <a:lnRef idx="1">
+              <a:schemeClr val="accent1"/>
+            </a:lnRef>
+            <a:fillRef idx="3">
+              <a:schemeClr val="accent1"/>
+            </a:fillRef>
+            <a:effectRef idx="2">
+              <a:schemeClr val="accent1"/>
+            </a:effectRef>
+            <a:fontRef idx="minor">
+              <a:schemeClr val="lt1"/>
+            </a:fontRef>
+          </p:style>
+          <p:txBody>
+            <a:bodyPr rtlCol="0" anchor="ctr"/>
+            <a:lstStyle/>
+            <a:p/>
+          </p:txBody>
+        </p:sp>
+        <p:sp>
+          <p:nvSpPr>
+            <p:cNvPr id="265" name="Shape 14"/>
+            <p:cNvSpPr/>
+            <p:nvPr/>
+          </p:nvSpPr>
+          <p:spPr>
+            <a:xfrm>
+              <a:off x="365760" y="3995928"/>
+              <a:ext cx="11457432" cy="2359152"/>
+            </a:xfrm>
+            <a:prstGeom prst="rect">
+              <a:avLst/>
+            </a:prstGeom>
+            <a:solidFill>
+              <a:srgbClr val="FFFFFF">
+                <a:alpha val="72000"/>
+              </a:srgbClr>
+            </a:solidFill>
+            <a:ln>
+              <a:noFill/>
+            </a:ln>
+            <a:effectLst/>
+          </p:spPr>
+          <p:style>
+            <a:lnRef idx="1">
+              <a:schemeClr val="accent1"/>
+            </a:lnRef>
+            <a:fillRef idx="3">
+              <a:schemeClr val="accent1"/>
+            </a:fillRef>
+            <a:effectRef idx="2">
+              <a:schemeClr val="accent1"/>
+            </a:effectRef>
+            <a:fontRef idx="minor">
+              <a:schemeClr val="lt1"/>
+            </a:fontRef>
+          </p:style>
+          <p:txBody>
+            <a:bodyPr rtlCol="0" anchor="ctr"/>
+            <a:lstStyle/>
+            <a:p/>
+          </p:txBody>
+        </p:sp>
+        <p:sp>
+          <p:nvSpPr>
+            <p:cNvPr id="266" name="Shape 15"/>
             <p:cNvSpPr/>
             <p:nvPr/>
           </p:nvSpPr>
@@ -13562,14 +13818,14 @@
         </p:sp>
         <p:sp>
           <p:nvSpPr>
-            <p:cNvPr id="262" name="Shape 11"/>
+            <p:cNvPr id="267" name="Shape 16"/>
             <p:cNvSpPr/>
             <p:nvPr/>
           </p:nvSpPr>
           <p:spPr>
             <a:xfrm>
               <a:off x="9564624" y="1426464"/>
-              <a:ext cx="2249424" cy="1490472"/>
+              <a:ext cx="2249423" cy="1170432"/>
             </a:xfrm>
             <a:prstGeom prst="roundRect">
               <a:avLst>
@@ -13606,14 +13862,102 @@
         </p:sp>
         <p:sp>
           <p:nvSpPr>
-            <p:cNvPr id="263" name="Shape 12"/>
+            <p:cNvPr id="268" name="Shape 17"/>
             <p:cNvSpPr/>
             <p:nvPr/>
           </p:nvSpPr>
           <p:spPr>
             <a:xfrm>
-              <a:off x="2743200" y="3108960"/>
-              <a:ext cx="4206240" cy="658368"/>
+              <a:off x="9564624" y="2889504"/>
+              <a:ext cx="2249423" cy="1124711"/>
+            </a:xfrm>
+            <a:prstGeom prst="roundRect">
+              <a:avLst>
+                <a:gd name="adj" fmla="val 8000"/>
+              </a:avLst>
+            </a:prstGeom>
+            <a:noFill/>
+            <a:ln w="38100">
+              <a:solidFill>
+                <a:srgbClr val="FA8B35"/>
+              </a:solidFill>
+            </a:ln>
+            <a:effectLst/>
+          </p:spPr>
+          <p:style>
+            <a:lnRef idx="1">
+              <a:schemeClr val="accent1"/>
+            </a:lnRef>
+            <a:fillRef idx="3">
+              <a:schemeClr val="accent1"/>
+            </a:fillRef>
+            <a:effectRef idx="2">
+              <a:schemeClr val="accent1"/>
+            </a:effectRef>
+            <a:fontRef idx="minor">
+              <a:schemeClr val="lt1"/>
+            </a:fontRef>
+          </p:style>
+          <p:txBody>
+            <a:bodyPr rtlCol="0" anchor="ctr"/>
+            <a:lstStyle/>
+            <a:p/>
+          </p:txBody>
+        </p:sp>
+        <p:sp>
+          <p:nvSpPr>
+            <p:cNvPr id="269" name="Shape 18"/>
+            <p:cNvSpPr/>
+            <p:nvPr/>
+          </p:nvSpPr>
+          <p:spPr>
+            <a:xfrm>
+              <a:off x="4581144" y="3063240"/>
+              <a:ext cx="1289304" cy="274320"/>
+            </a:xfrm>
+            <a:prstGeom prst="roundRect">
+              <a:avLst>
+                <a:gd name="adj" fmla="val 8000"/>
+              </a:avLst>
+            </a:prstGeom>
+            <a:noFill/>
+            <a:ln w="38100">
+              <a:solidFill>
+                <a:srgbClr val="FA8B35"/>
+              </a:solidFill>
+            </a:ln>
+            <a:effectLst/>
+          </p:spPr>
+          <p:style>
+            <a:lnRef idx="1">
+              <a:schemeClr val="accent1"/>
+            </a:lnRef>
+            <a:fillRef idx="3">
+              <a:schemeClr val="accent1"/>
+            </a:fillRef>
+            <a:effectRef idx="2">
+              <a:schemeClr val="accent1"/>
+            </a:effectRef>
+            <a:fontRef idx="minor">
+              <a:schemeClr val="lt1"/>
+            </a:fontRef>
+          </p:style>
+          <p:txBody>
+            <a:bodyPr rtlCol="0" anchor="ctr"/>
+            <a:lstStyle/>
+            <a:p/>
+          </p:txBody>
+        </p:sp>
+        <p:sp>
+          <p:nvSpPr>
+            <p:cNvPr id="270" name="Shape 19"/>
+            <p:cNvSpPr/>
+            <p:nvPr/>
+          </p:nvSpPr>
+          <p:spPr>
+            <a:xfrm>
+              <a:off x="2743200" y="3931920"/>
+              <a:ext cx="4434840" cy="658368"/>
             </a:xfrm>
             <a:prstGeom prst="roundRect">
               <a:avLst>
@@ -13652,14 +13996,14 @@
         </p:sp>
         <p:sp>
           <p:nvSpPr>
-            <p:cNvPr id="264" name="Text 13"/>
+            <p:cNvPr id="271" name="Text 20"/>
             <p:cNvSpPr txBox="1"/>
             <p:nvPr/>
           </p:nvSpPr>
           <p:spPr>
             <a:xfrm>
-              <a:off x="2871216" y="3172968"/>
-              <a:ext cx="3950207" cy="566928"/>
+              <a:off x="2871216" y="3995928"/>
+              <a:ext cx="4178807" cy="566928"/>
             </a:xfrm>
             <a:prstGeom prst="rect">
               <a:avLst/>
@@ -13684,7 +14028,7 @@
                   </a:solidFill>
                   <a:latin typeface="Trenda IG Text"/>
                 </a:rPr>
-                <a:t>2 / 8   </a:t>
+                <a:t>2 / 13   </a:t>
               </a:r>
               <a:r>
                 <a:rPr sz="800" b="1" i="0" spc="120">
@@ -13709,7 +14053,7 @@
                   </a:solidFill>
                   <a:latin typeface="Trenda IG Text"/>
                 </a:rPr>
-                <a:t>Before any code, agents ask the knowledge graph what exists, what it touches and who owns it. Read-only connectors, cited facts, a bounded slice, never an org dump.</a:t>
+                <a:t>The Requirements Agent checks what already exists before anything is built: data extensions, journeys and Data Cloud segments in Salesforce, the Jira history and the Confluence design. Read-only, cited, a bounded slice, never an org dump.</a:t>
               </a:r>
             </a:p>
           </p:txBody>
@@ -13717,28 +14061,28 @@
       </p:grpSp>
       <p:grpSp>
         <p:nvGrpSpPr>
-          <p:cNvPr id="265" name="Step 2 arrows"/>
+          <p:cNvPr id="272" name="Step 2 arrows"/>
           <p:cNvGrpSpPr/>
           <p:nvPr/>
         </p:nvGrpSpPr>
         <p:grpSpPr>
           <a:xfrm>
             <a:off x="5001768" y="2011680"/>
-            <a:ext cx="4599432" cy="841248"/>
+            <a:ext cx="4599432" cy="1088136"/>
             <a:chOff x="5001768" y="2011680"/>
-            <a:chExt cx="4599432" cy="841248"/>
+            <a:chExt cx="4599432" cy="1088136"/>
           </a:xfrm>
         </p:grpSpPr>
         <p:cxnSp>
           <p:nvCxnSpPr>
-            <p:cNvPr id="266" name="Arrow 1"/>
+            <p:cNvPr id="273" name="Arrow 1"/>
             <p:cNvCxnSpPr/>
             <p:nvPr/>
           </p:nvCxnSpPr>
           <p:spPr>
             <a:xfrm flipV="1">
               <a:off x="5001768" y="2423160"/>
-              <a:ext cx="0" cy="429768"/>
+              <a:ext cx="0" cy="676656"/>
             </a:xfrm>
             <a:prstGeom prst="line">
               <a:avLst/>
@@ -13767,7 +14111,7 @@
         </p:cxnSp>
         <p:cxnSp>
           <p:nvCxnSpPr>
-            <p:cNvPr id="267" name="Arrow 2"/>
+            <p:cNvPr id="274" name="Arrow 2"/>
             <p:cNvCxnSpPr/>
             <p:nvPr/>
           </p:nvCxnSpPr>
@@ -13804,7 +14148,7 @@
       </p:grpSp>
       <p:grpSp>
         <p:nvGrpSpPr>
-          <p:cNvPr id="268" name="Step 3 highlight"/>
+          <p:cNvPr id="275" name="Step 3 highlight"/>
           <p:cNvGrpSpPr/>
           <p:nvPr/>
         </p:nvGrpSpPr>
@@ -13818,7 +14162,7 @@
         </p:grpSpPr>
         <p:sp>
           <p:nvSpPr>
-            <p:cNvPr id="269" name="Shape 1"/>
+            <p:cNvPr id="276" name="Shape 1"/>
             <p:cNvSpPr/>
             <p:nvPr/>
           </p:nvSpPr>
@@ -13862,7 +14206,7 @@
         </p:sp>
         <p:sp>
           <p:nvSpPr>
-            <p:cNvPr id="270" name="Shape 2"/>
+            <p:cNvPr id="277" name="Shape 2"/>
             <p:cNvSpPr/>
             <p:nvPr/>
           </p:nvSpPr>
@@ -13906,7 +14250,7 @@
         </p:sp>
         <p:sp>
           <p:nvSpPr>
-            <p:cNvPr id="271" name="Shape 3"/>
+            <p:cNvPr id="278" name="Shape 3"/>
             <p:cNvSpPr/>
             <p:nvPr/>
           </p:nvSpPr>
@@ -13950,7 +14294,7 @@
         </p:sp>
         <p:sp>
           <p:nvSpPr>
-            <p:cNvPr id="272" name="Shape 4"/>
+            <p:cNvPr id="279" name="Shape 4"/>
             <p:cNvSpPr/>
             <p:nvPr/>
           </p:nvSpPr>
@@ -13994,7 +14338,7 @@
         </p:sp>
         <p:sp>
           <p:nvSpPr>
-            <p:cNvPr id="273" name="Shape 5"/>
+            <p:cNvPr id="280" name="Shape 5"/>
             <p:cNvSpPr/>
             <p:nvPr/>
           </p:nvSpPr>
@@ -14038,7 +14382,7 @@
         </p:sp>
         <p:sp>
           <p:nvSpPr>
-            <p:cNvPr id="274" name="Shape 6"/>
+            <p:cNvPr id="281" name="Shape 6"/>
             <p:cNvSpPr/>
             <p:nvPr/>
           </p:nvSpPr>
@@ -14082,7 +14426,7 @@
         </p:sp>
         <p:sp>
           <p:nvSpPr>
-            <p:cNvPr id="275" name="Shape 7"/>
+            <p:cNvPr id="282" name="Shape 7"/>
             <p:cNvSpPr/>
             <p:nvPr/>
           </p:nvSpPr>
@@ -14128,7 +14472,7 @@
         </p:sp>
         <p:sp>
           <p:nvSpPr>
-            <p:cNvPr id="276" name="Text 8"/>
+            <p:cNvPr id="283" name="Text 8"/>
             <p:cNvSpPr txBox="1"/>
             <p:nvPr/>
           </p:nvSpPr>
@@ -14160,7 +14504,7 @@
                   </a:solidFill>
                   <a:latin typeface="Trenda IG Text"/>
                 </a:rPr>
-                <a:t>3 / 8   </a:t>
+                <a:t>3 / 13   </a:t>
               </a:r>
               <a:r>
                 <a:rPr sz="800" b="1" i="0" spc="120">
@@ -14185,7 +14529,7 @@
                   </a:solidFill>
                   <a:latin typeface="Trenda IG Text"/>
                 </a:rPr>
-                <a:t>Cloud Workflows coordinates the story. One agent job per step: requirements, design, build, review, test, release. Checkpoints mean a failed run resumes where it stopped.</a:t>
+                <a:t>Cloud Workflows coordinates the campaign story. One agent job per step: requirements, design, build, review, test, release. Checkpoints mean a failed run resumes where it stopped.</a:t>
               </a:r>
             </a:p>
           </p:txBody>
@@ -14193,7 +14537,7 @@
       </p:grpSp>
       <p:grpSp>
         <p:nvGrpSpPr>
-          <p:cNvPr id="277" name="Step 3 arrows"/>
+          <p:cNvPr id="284" name="Step 3 arrows"/>
           <p:cNvGrpSpPr/>
           <p:nvPr/>
         </p:nvGrpSpPr>
@@ -14207,7 +14551,7 @@
         </p:grpSpPr>
         <p:cxnSp>
           <p:nvCxnSpPr>
-            <p:cNvPr id="278" name="Arrow 1"/>
+            <p:cNvPr id="285" name="Arrow 1"/>
             <p:cNvCxnSpPr/>
             <p:nvPr/>
           </p:nvCxnSpPr>
@@ -14244,7 +14588,7 @@
       </p:grpSp>
       <p:grpSp>
         <p:nvGrpSpPr>
-          <p:cNvPr id="279" name="Step 4 highlight"/>
+          <p:cNvPr id="286" name="Step 4 highlight"/>
           <p:cNvGrpSpPr/>
           <p:nvPr/>
         </p:nvGrpSpPr>
@@ -14258,7 +14602,7 @@
         </p:grpSpPr>
         <p:sp>
           <p:nvSpPr>
-            <p:cNvPr id="280" name="Shape 1"/>
+            <p:cNvPr id="287" name="Shape 1"/>
             <p:cNvSpPr/>
             <p:nvPr/>
           </p:nvSpPr>
@@ -14302,7 +14646,7 @@
         </p:sp>
         <p:sp>
           <p:nvSpPr>
-            <p:cNvPr id="281" name="Shape 2"/>
+            <p:cNvPr id="288" name="Shape 2"/>
             <p:cNvSpPr/>
             <p:nvPr/>
           </p:nvSpPr>
@@ -14346,7 +14690,7 @@
         </p:sp>
         <p:sp>
           <p:nvSpPr>
-            <p:cNvPr id="282" name="Shape 3"/>
+            <p:cNvPr id="289" name="Shape 3"/>
             <p:cNvSpPr/>
             <p:nvPr/>
           </p:nvSpPr>
@@ -14390,7 +14734,7 @@
         </p:sp>
         <p:sp>
           <p:nvSpPr>
-            <p:cNvPr id="283" name="Shape 4"/>
+            <p:cNvPr id="290" name="Shape 4"/>
             <p:cNvSpPr/>
             <p:nvPr/>
           </p:nvSpPr>
@@ -14434,7 +14778,7 @@
         </p:sp>
         <p:sp>
           <p:nvSpPr>
-            <p:cNvPr id="284" name="Shape 5"/>
+            <p:cNvPr id="291" name="Shape 5"/>
             <p:cNvSpPr/>
             <p:nvPr/>
           </p:nvSpPr>
@@ -14478,7 +14822,7 @@
         </p:sp>
         <p:sp>
           <p:nvSpPr>
-            <p:cNvPr id="285" name="Shape 6"/>
+            <p:cNvPr id="292" name="Shape 6"/>
             <p:cNvSpPr/>
             <p:nvPr/>
           </p:nvSpPr>
@@ -14522,7 +14866,7 @@
         </p:sp>
         <p:sp>
           <p:nvSpPr>
-            <p:cNvPr id="286" name="Shape 7"/>
+            <p:cNvPr id="293" name="Shape 7"/>
             <p:cNvSpPr/>
             <p:nvPr/>
           </p:nvSpPr>
@@ -14566,7 +14910,7 @@
         </p:sp>
         <p:sp>
           <p:nvSpPr>
-            <p:cNvPr id="287" name="Shape 8"/>
+            <p:cNvPr id="294" name="Shape 8"/>
             <p:cNvSpPr/>
             <p:nvPr/>
           </p:nvSpPr>
@@ -14610,7 +14954,7 @@
         </p:sp>
         <p:sp>
           <p:nvSpPr>
-            <p:cNvPr id="288" name="Shape 9"/>
+            <p:cNvPr id="295" name="Shape 9"/>
             <p:cNvSpPr/>
             <p:nvPr/>
           </p:nvSpPr>
@@ -14654,7 +14998,7 @@
         </p:sp>
         <p:sp>
           <p:nvSpPr>
-            <p:cNvPr id="289" name="Shape 10"/>
+            <p:cNvPr id="296" name="Shape 10"/>
             <p:cNvSpPr/>
             <p:nvPr/>
           </p:nvSpPr>
@@ -14698,7 +15042,7 @@
         </p:sp>
         <p:sp>
           <p:nvSpPr>
-            <p:cNvPr id="290" name="Shape 11"/>
+            <p:cNvPr id="297" name="Shape 11"/>
             <p:cNvSpPr/>
             <p:nvPr/>
           </p:nvSpPr>
@@ -14742,14 +15086,14 @@
         </p:sp>
         <p:sp>
           <p:nvSpPr>
-            <p:cNvPr id="291" name="Shape 12"/>
+            <p:cNvPr id="298" name="Shape 12"/>
             <p:cNvSpPr/>
             <p:nvPr/>
           </p:nvSpPr>
           <p:spPr>
             <a:xfrm>
               <a:off x="9564624" y="2889504"/>
-              <a:ext cx="2249424" cy="2039112"/>
+              <a:ext cx="2249423" cy="1124711"/>
             </a:xfrm>
             <a:prstGeom prst="roundRect">
               <a:avLst>
@@ -14786,7 +15130,51 @@
         </p:sp>
         <p:sp>
           <p:nvSpPr>
-            <p:cNvPr id="292" name="Shape 13"/>
+            <p:cNvPr id="299" name="Shape 13"/>
+            <p:cNvSpPr/>
+            <p:nvPr/>
+          </p:nvSpPr>
+          <p:spPr>
+            <a:xfrm>
+              <a:off x="9564624" y="4315968"/>
+              <a:ext cx="2249424" cy="603503"/>
+            </a:xfrm>
+            <a:prstGeom prst="roundRect">
+              <a:avLst>
+                <a:gd name="adj" fmla="val 8000"/>
+              </a:avLst>
+            </a:prstGeom>
+            <a:noFill/>
+            <a:ln w="38100">
+              <a:solidFill>
+                <a:srgbClr val="FA8B35"/>
+              </a:solidFill>
+            </a:ln>
+            <a:effectLst/>
+          </p:spPr>
+          <p:style>
+            <a:lnRef idx="1">
+              <a:schemeClr val="accent1"/>
+            </a:lnRef>
+            <a:fillRef idx="3">
+              <a:schemeClr val="accent1"/>
+            </a:fillRef>
+            <a:effectRef idx="2">
+              <a:schemeClr val="accent1"/>
+            </a:effectRef>
+            <a:fontRef idx="minor">
+              <a:schemeClr val="lt1"/>
+            </a:fontRef>
+          </p:style>
+          <p:txBody>
+            <a:bodyPr rtlCol="0" anchor="ctr"/>
+            <a:lstStyle/>
+            <a:p/>
+          </p:txBody>
+        </p:sp>
+        <p:sp>
+          <p:nvSpPr>
+            <p:cNvPr id="300" name="Shape 14"/>
             <p:cNvSpPr/>
             <p:nvPr/>
           </p:nvSpPr>
@@ -14832,7 +15220,7 @@
         </p:sp>
         <p:sp>
           <p:nvSpPr>
-            <p:cNvPr id="293" name="Text 14"/>
+            <p:cNvPr id="301" name="Text 15"/>
             <p:cNvSpPr txBox="1"/>
             <p:nvPr/>
           </p:nvSpPr>
@@ -14864,7 +15252,7 @@
                   </a:solidFill>
                   <a:latin typeface="Trenda IG Text"/>
                 </a:rPr>
-                <a:t>4 / 8   </a:t>
+                <a:t>4 / 13   </a:t>
               </a:r>
               <a:r>
                 <a:rPr sz="800" b="1" i="0" spc="120">
@@ -14889,7 +15277,7 @@
                   </a:solidFill>
                   <a:latin typeface="Trenda IG Text"/>
                 </a:rPr>
-                <a:t>Git, Salesforce and Copado are touched only through the MCP gateway, with the identity allowed for that step. The Change Guardian checks cross-pod ownership and impact.</a:t>
+                <a:t>Git, Salesforce, Marketing Cloud and Copado are touched only through the MCP gateway, with the identity allowed for that step. The Change Guardian checks which other pods use the same data extensions, short code and STOP keyword.</a:t>
               </a:r>
             </a:p>
           </p:txBody>
@@ -14897,7 +15285,7 @@
       </p:grpSp>
       <p:grpSp>
         <p:nvGrpSpPr>
-          <p:cNvPr id="294" name="Step 4 arrows"/>
+          <p:cNvPr id="302" name="Step 4 arrows"/>
           <p:cNvGrpSpPr/>
           <p:nvPr/>
         </p:nvGrpSpPr>
@@ -14911,7 +15299,7 @@
         </p:grpSpPr>
         <p:cxnSp>
           <p:nvCxnSpPr>
-            <p:cNvPr id="295" name="Arrow 1"/>
+            <p:cNvPr id="303" name="Arrow 1"/>
             <p:cNvCxnSpPr/>
             <p:nvPr/>
           </p:nvCxnSpPr>
@@ -14947,7 +15335,7 @@
         </p:cxnSp>
         <p:cxnSp>
           <p:nvCxnSpPr>
-            <p:cNvPr id="296" name="Arrow 2"/>
+            <p:cNvPr id="304" name="Arrow 2"/>
             <p:cNvCxnSpPr/>
             <p:nvPr/>
           </p:nvCxnSpPr>
@@ -14984,7 +15372,7 @@
       </p:grpSp>
       <p:grpSp>
         <p:nvGrpSpPr>
-          <p:cNvPr id="297" name="Step 5 highlight"/>
+          <p:cNvPr id="305" name="Step 5 highlight"/>
           <p:cNvGrpSpPr/>
           <p:nvPr/>
         </p:nvGrpSpPr>
@@ -14998,7 +15386,7 @@
         </p:grpSpPr>
         <p:sp>
           <p:nvSpPr>
-            <p:cNvPr id="298" name="Shape 1"/>
+            <p:cNvPr id="306" name="Shape 1"/>
             <p:cNvSpPr/>
             <p:nvPr/>
           </p:nvSpPr>
@@ -15042,7 +15430,7 @@
         </p:sp>
         <p:sp>
           <p:nvSpPr>
-            <p:cNvPr id="299" name="Shape 2"/>
+            <p:cNvPr id="307" name="Shape 2"/>
             <p:cNvSpPr/>
             <p:nvPr/>
           </p:nvSpPr>
@@ -15086,7 +15474,7 @@
         </p:sp>
         <p:sp>
           <p:nvSpPr>
-            <p:cNvPr id="300" name="Shape 3"/>
+            <p:cNvPr id="308" name="Shape 3"/>
             <p:cNvSpPr/>
             <p:nvPr/>
           </p:nvSpPr>
@@ -15130,7 +15518,7 @@
         </p:sp>
         <p:sp>
           <p:nvSpPr>
-            <p:cNvPr id="301" name="Shape 4"/>
+            <p:cNvPr id="309" name="Shape 4"/>
             <p:cNvSpPr/>
             <p:nvPr/>
           </p:nvSpPr>
@@ -15174,7 +15562,7 @@
         </p:sp>
         <p:sp>
           <p:nvSpPr>
-            <p:cNvPr id="302" name="Shape 5"/>
+            <p:cNvPr id="310" name="Shape 5"/>
             <p:cNvSpPr/>
             <p:nvPr/>
           </p:nvSpPr>
@@ -15218,7 +15606,7 @@
         </p:sp>
         <p:sp>
           <p:nvSpPr>
-            <p:cNvPr id="303" name="Shape 6"/>
+            <p:cNvPr id="311" name="Shape 6"/>
             <p:cNvSpPr/>
             <p:nvPr/>
           </p:nvSpPr>
@@ -15262,7 +15650,7 @@
         </p:sp>
         <p:sp>
           <p:nvSpPr>
-            <p:cNvPr id="304" name="Shape 7"/>
+            <p:cNvPr id="312" name="Shape 7"/>
             <p:cNvSpPr/>
             <p:nvPr/>
           </p:nvSpPr>
@@ -15308,7 +15696,7 @@
         </p:sp>
         <p:sp>
           <p:nvSpPr>
-            <p:cNvPr id="305" name="Text 8"/>
+            <p:cNvPr id="313" name="Text 8"/>
             <p:cNvSpPr txBox="1"/>
             <p:nvPr/>
           </p:nvSpPr>
@@ -15340,7 +15728,7 @@
                   </a:solidFill>
                   <a:latin typeface="Trenda IG Text"/>
                 </a:rPr>
-                <a:t>5 / 8   </a:t>
+                <a:t>5 / 13   </a:t>
               </a:r>
               <a:r>
                 <a:rPr sz="800" b="1" i="0" spc="120">
@@ -15365,7 +15753,7 @@
                   </a:solidFill>
                   <a:latin typeface="Trenda IG Text"/>
                 </a:rPr>
-                <a:t>Every output is scored before it moves on. A pass goes to the gate, where people see the evidence and the eval scores, and approve.</a:t>
+                <a:t>Every output is scored before it moves on: does the journey match the brief, is every field real, are consent and STOP checks in place. A pass goes to the gate with the evidence.</a:t>
               </a:r>
             </a:p>
           </p:txBody>
@@ -15373,7 +15761,7 @@
       </p:grpSp>
       <p:grpSp>
         <p:nvGrpSpPr>
-          <p:cNvPr id="306" name="Step 5 arrows"/>
+          <p:cNvPr id="314" name="Step 5 arrows"/>
           <p:cNvGrpSpPr/>
           <p:nvPr/>
         </p:nvGrpSpPr>
@@ -15387,7 +15775,7 @@
         </p:grpSpPr>
         <p:cxnSp>
           <p:nvCxnSpPr>
-            <p:cNvPr id="307" name="Arrow 1"/>
+            <p:cNvPr id="315" name="Arrow 1"/>
             <p:cNvCxnSpPr/>
             <p:nvPr/>
           </p:nvCxnSpPr>
@@ -15423,7 +15811,7 @@
         </p:cxnSp>
         <p:cxnSp>
           <p:nvCxnSpPr>
-            <p:cNvPr id="308" name="Arrow 2"/>
+            <p:cNvPr id="316" name="Arrow 2"/>
             <p:cNvCxnSpPr/>
             <p:nvPr/>
           </p:nvCxnSpPr>
@@ -15459,7 +15847,7 @@
         </p:cxnSp>
         <p:sp>
           <p:nvSpPr>
-            <p:cNvPr id="309" name="Shape 3"/>
+            <p:cNvPr id="317" name="Shape 3"/>
             <p:cNvSpPr/>
             <p:nvPr/>
           </p:nvSpPr>
@@ -15503,7 +15891,7 @@
         </p:sp>
         <p:sp>
           <p:nvSpPr>
-            <p:cNvPr id="310" name="Text 4"/>
+            <p:cNvPr id="318" name="Text 4"/>
             <p:cNvSpPr txBox="1"/>
             <p:nvPr/>
           </p:nvSpPr>
@@ -15539,7 +15927,7 @@
       </p:grpSp>
       <p:grpSp>
         <p:nvGrpSpPr>
-          <p:cNvPr id="311" name="Step 6 highlight"/>
+          <p:cNvPr id="319" name="Step 6 highlight"/>
           <p:cNvGrpSpPr/>
           <p:nvPr/>
         </p:nvGrpSpPr>
@@ -15553,7 +15941,7 @@
         </p:grpSpPr>
         <p:sp>
           <p:nvSpPr>
-            <p:cNvPr id="312" name="Shape 1"/>
+            <p:cNvPr id="320" name="Shape 1"/>
             <p:cNvSpPr/>
             <p:nvPr/>
           </p:nvSpPr>
@@ -15597,7 +15985,7 @@
         </p:sp>
         <p:sp>
           <p:nvSpPr>
-            <p:cNvPr id="313" name="Shape 2"/>
+            <p:cNvPr id="321" name="Shape 2"/>
             <p:cNvSpPr/>
             <p:nvPr/>
           </p:nvSpPr>
@@ -15641,7 +16029,7 @@
         </p:sp>
         <p:sp>
           <p:nvSpPr>
-            <p:cNvPr id="314" name="Shape 3"/>
+            <p:cNvPr id="322" name="Shape 3"/>
             <p:cNvSpPr/>
             <p:nvPr/>
           </p:nvSpPr>
@@ -15685,7 +16073,7 @@
         </p:sp>
         <p:sp>
           <p:nvSpPr>
-            <p:cNvPr id="315" name="Shape 4"/>
+            <p:cNvPr id="323" name="Shape 4"/>
             <p:cNvSpPr/>
             <p:nvPr/>
           </p:nvSpPr>
@@ -15729,7 +16117,7 @@
         </p:sp>
         <p:sp>
           <p:nvSpPr>
-            <p:cNvPr id="316" name="Shape 5"/>
+            <p:cNvPr id="324" name="Shape 5"/>
             <p:cNvSpPr/>
             <p:nvPr/>
           </p:nvSpPr>
@@ -15773,7 +16161,7 @@
         </p:sp>
         <p:sp>
           <p:nvSpPr>
-            <p:cNvPr id="317" name="Shape 6"/>
+            <p:cNvPr id="325" name="Shape 6"/>
             <p:cNvSpPr/>
             <p:nvPr/>
           </p:nvSpPr>
@@ -15817,7 +16205,7 @@
         </p:sp>
         <p:sp>
           <p:nvSpPr>
-            <p:cNvPr id="318" name="Shape 7"/>
+            <p:cNvPr id="326" name="Shape 7"/>
             <p:cNvSpPr/>
             <p:nvPr/>
           </p:nvSpPr>
@@ -15863,7 +16251,7 @@
         </p:sp>
         <p:sp>
           <p:nvSpPr>
-            <p:cNvPr id="319" name="Text 8"/>
+            <p:cNvPr id="327" name="Text 8"/>
             <p:cNvSpPr txBox="1"/>
             <p:nvPr/>
           </p:nvSpPr>
@@ -15895,7 +16283,7 @@
                   </a:solidFill>
                   <a:latin typeface="Trenda IG Text"/>
                 </a:rPr>
-                <a:t>6 / 8   </a:t>
+                <a:t>6 / 13   </a:t>
               </a:r>
               <a:r>
                 <a:rPr sz="800" b="1" i="0" spc="120">
@@ -15928,7 +16316,7 @@
       </p:grpSp>
       <p:grpSp>
         <p:nvGrpSpPr>
-          <p:cNvPr id="320" name="Step 6 arrows"/>
+          <p:cNvPr id="328" name="Step 6 arrows"/>
           <p:cNvGrpSpPr/>
           <p:nvPr/>
         </p:nvGrpSpPr>
@@ -15942,7 +16330,7 @@
         </p:grpSpPr>
         <p:cxnSp>
           <p:nvCxnSpPr>
-            <p:cNvPr id="321" name="Arrow 1"/>
+            <p:cNvPr id="329" name="Arrow 1"/>
             <p:cNvCxnSpPr/>
             <p:nvPr/>
           </p:nvCxnSpPr>
@@ -15977,7 +16365,7 @@
         </p:cxnSp>
         <p:cxnSp>
           <p:nvCxnSpPr>
-            <p:cNvPr id="322" name="Arrow 2"/>
+            <p:cNvPr id="330" name="Arrow 2"/>
             <p:cNvCxnSpPr/>
             <p:nvPr/>
           </p:nvCxnSpPr>
@@ -16012,7 +16400,7 @@
         </p:cxnSp>
         <p:cxnSp>
           <p:nvCxnSpPr>
-            <p:cNvPr id="323" name="Arrow 3"/>
+            <p:cNvPr id="331" name="Arrow 3"/>
             <p:cNvCxnSpPr/>
             <p:nvPr/>
           </p:nvCxnSpPr>
@@ -16048,7 +16436,7 @@
         </p:cxnSp>
         <p:cxnSp>
           <p:nvCxnSpPr>
-            <p:cNvPr id="324" name="Arrow 4"/>
+            <p:cNvPr id="332" name="Arrow 4"/>
             <p:cNvCxnSpPr/>
             <p:nvPr/>
           </p:nvCxnSpPr>
@@ -16084,7 +16472,7 @@
         </p:cxnSp>
         <p:sp>
           <p:nvSpPr>
-            <p:cNvPr id="325" name="Shape 5"/>
+            <p:cNvPr id="333" name="Shape 5"/>
             <p:cNvSpPr/>
             <p:nvPr/>
           </p:nvSpPr>
@@ -16128,7 +16516,7 @@
         </p:sp>
         <p:sp>
           <p:nvSpPr>
-            <p:cNvPr id="326" name="Text 6"/>
+            <p:cNvPr id="334" name="Text 6"/>
             <p:cNvSpPr txBox="1"/>
             <p:nvPr/>
           </p:nvSpPr>
@@ -16163,7 +16551,7 @@
         </p:sp>
         <p:sp>
           <p:nvSpPr>
-            <p:cNvPr id="327" name="Shape 7"/>
+            <p:cNvPr id="335" name="Shape 7"/>
             <p:cNvSpPr/>
             <p:nvPr/>
           </p:nvSpPr>
@@ -16207,7 +16595,7 @@
         </p:sp>
         <p:sp>
           <p:nvSpPr>
-            <p:cNvPr id="328" name="Text 8"/>
+            <p:cNvPr id="336" name="Text 8"/>
             <p:cNvSpPr txBox="1"/>
             <p:nvPr/>
           </p:nvSpPr>
@@ -16243,7 +16631,7 @@
       </p:grpSp>
       <p:grpSp>
         <p:nvGrpSpPr>
-          <p:cNvPr id="329" name="Step 7 highlight"/>
+          <p:cNvPr id="337" name="Step 7 highlight"/>
           <p:cNvGrpSpPr/>
           <p:nvPr/>
         </p:nvGrpSpPr>
@@ -16257,14 +16645,14 @@
         </p:grpSpPr>
         <p:sp>
           <p:nvSpPr>
-            <p:cNvPr id="330" name="Shape 1"/>
+            <p:cNvPr id="338" name="Shape 1"/>
             <p:cNvSpPr/>
             <p:nvPr/>
           </p:nvSpPr>
           <p:spPr>
             <a:xfrm>
               <a:off x="365760" y="1115568"/>
-              <a:ext cx="11457432" cy="3730752"/>
+              <a:ext cx="11457432" cy="347472"/>
             </a:xfrm>
             <a:prstGeom prst="rect">
               <a:avLst/>
@@ -16301,14 +16689,14 @@
         </p:sp>
         <p:sp>
           <p:nvSpPr>
-            <p:cNvPr id="331" name="Shape 2"/>
+            <p:cNvPr id="339" name="Shape 2"/>
             <p:cNvSpPr/>
             <p:nvPr/>
           </p:nvSpPr>
           <p:spPr>
             <a:xfrm>
-              <a:off x="365760" y="4846320"/>
-              <a:ext cx="9281160" cy="603504"/>
+              <a:off x="365760" y="1463040"/>
+              <a:ext cx="9235440" cy="548640"/>
             </a:xfrm>
             <a:prstGeom prst="rect">
               <a:avLst/>
@@ -16345,14 +16733,14 @@
         </p:sp>
         <p:sp>
           <p:nvSpPr>
-            <p:cNvPr id="332" name="Shape 3"/>
+            <p:cNvPr id="340" name="Shape 3"/>
             <p:cNvSpPr/>
             <p:nvPr/>
           </p:nvSpPr>
           <p:spPr>
             <a:xfrm>
-              <a:off x="11731752" y="4846320"/>
-              <a:ext cx="91439" cy="603504"/>
+              <a:off x="11777472" y="1463040"/>
+              <a:ext cx="45720" cy="548640"/>
             </a:xfrm>
             <a:prstGeom prst="rect">
               <a:avLst/>
@@ -16389,14 +16777,14 @@
         </p:sp>
         <p:sp>
           <p:nvSpPr>
-            <p:cNvPr id="333" name="Shape 4"/>
+            <p:cNvPr id="341" name="Shape 4"/>
             <p:cNvSpPr/>
             <p:nvPr/>
           </p:nvSpPr>
           <p:spPr>
             <a:xfrm>
-              <a:off x="365760" y="5449824"/>
-              <a:ext cx="11457432" cy="54863"/>
+              <a:off x="365760" y="2011680"/>
+              <a:ext cx="11457432" cy="1042416"/>
             </a:xfrm>
             <a:prstGeom prst="rect">
               <a:avLst/>
@@ -16433,14 +16821,14 @@
         </p:sp>
         <p:sp>
           <p:nvSpPr>
-            <p:cNvPr id="334" name="Shape 5"/>
+            <p:cNvPr id="342" name="Shape 5"/>
             <p:cNvSpPr/>
             <p:nvPr/>
           </p:nvSpPr>
           <p:spPr>
             <a:xfrm>
-              <a:off x="365760" y="5504688"/>
-              <a:ext cx="1005840" cy="475487"/>
+              <a:off x="365760" y="3054096"/>
+              <a:ext cx="4206240" cy="292608"/>
             </a:xfrm>
             <a:prstGeom prst="rect">
               <a:avLst/>
@@ -16477,14 +16865,14 @@
         </p:sp>
         <p:sp>
           <p:nvSpPr>
-            <p:cNvPr id="335" name="Shape 6"/>
+            <p:cNvPr id="343" name="Shape 6"/>
             <p:cNvSpPr/>
             <p:nvPr/>
           </p:nvSpPr>
           <p:spPr>
             <a:xfrm>
-              <a:off x="11777472" y="5504688"/>
-              <a:ext cx="45719" cy="475487"/>
+              <a:off x="5879592" y="3054096"/>
+              <a:ext cx="5943600" cy="292608"/>
             </a:xfrm>
             <a:prstGeom prst="rect">
               <a:avLst/>
@@ -16521,14 +16909,14 @@
         </p:sp>
         <p:sp>
           <p:nvSpPr>
-            <p:cNvPr id="336" name="Shape 7"/>
+            <p:cNvPr id="344" name="Shape 7"/>
             <p:cNvSpPr/>
             <p:nvPr/>
           </p:nvSpPr>
           <p:spPr>
             <a:xfrm>
-              <a:off x="365760" y="5980175"/>
-              <a:ext cx="11457432" cy="374904"/>
+              <a:off x="365760" y="3346704"/>
+              <a:ext cx="11457432" cy="539495"/>
             </a:xfrm>
             <a:prstGeom prst="rect">
               <a:avLst/>
@@ -16565,14 +16953,278 @@
         </p:sp>
         <p:sp>
           <p:nvSpPr>
-            <p:cNvPr id="337" name="Shape 8"/>
+            <p:cNvPr id="345" name="Shape 8"/>
             <p:cNvSpPr/>
             <p:nvPr/>
           </p:nvSpPr>
           <p:spPr>
             <a:xfrm>
-              <a:off x="2176272" y="5513832"/>
-              <a:ext cx="822959" cy="457200"/>
+              <a:off x="365760" y="3886200"/>
+              <a:ext cx="2423160" cy="566928"/>
+            </a:xfrm>
+            <a:prstGeom prst="rect">
+              <a:avLst/>
+            </a:prstGeom>
+            <a:solidFill>
+              <a:srgbClr val="FFFFFF">
+                <a:alpha val="72000"/>
+              </a:srgbClr>
+            </a:solidFill>
+            <a:ln>
+              <a:noFill/>
+            </a:ln>
+            <a:effectLst/>
+          </p:spPr>
+          <p:style>
+            <a:lnRef idx="1">
+              <a:schemeClr val="accent1"/>
+            </a:lnRef>
+            <a:fillRef idx="3">
+              <a:schemeClr val="accent1"/>
+            </a:fillRef>
+            <a:effectRef idx="2">
+              <a:schemeClr val="accent1"/>
+            </a:effectRef>
+            <a:fontRef idx="minor">
+              <a:schemeClr val="lt1"/>
+            </a:fontRef>
+          </p:style>
+          <p:txBody>
+            <a:bodyPr rtlCol="0" anchor="ctr"/>
+            <a:lstStyle/>
+            <a:p/>
+          </p:txBody>
+        </p:sp>
+        <p:sp>
+          <p:nvSpPr>
+            <p:cNvPr id="346" name="Shape 9"/>
+            <p:cNvSpPr/>
+            <p:nvPr/>
+          </p:nvSpPr>
+          <p:spPr>
+            <a:xfrm>
+              <a:off x="4453128" y="3886200"/>
+              <a:ext cx="7370063" cy="566928"/>
+            </a:xfrm>
+            <a:prstGeom prst="rect">
+              <a:avLst/>
+            </a:prstGeom>
+            <a:solidFill>
+              <a:srgbClr val="FFFFFF">
+                <a:alpha val="72000"/>
+              </a:srgbClr>
+            </a:solidFill>
+            <a:ln>
+              <a:noFill/>
+            </a:ln>
+            <a:effectLst/>
+          </p:spPr>
+          <p:style>
+            <a:lnRef idx="1">
+              <a:schemeClr val="accent1"/>
+            </a:lnRef>
+            <a:fillRef idx="3">
+              <a:schemeClr val="accent1"/>
+            </a:fillRef>
+            <a:effectRef idx="2">
+              <a:schemeClr val="accent1"/>
+            </a:effectRef>
+            <a:fontRef idx="minor">
+              <a:schemeClr val="lt1"/>
+            </a:fontRef>
+          </p:style>
+          <p:txBody>
+            <a:bodyPr rtlCol="0" anchor="ctr"/>
+            <a:lstStyle/>
+            <a:p/>
+          </p:txBody>
+        </p:sp>
+        <p:sp>
+          <p:nvSpPr>
+            <p:cNvPr id="347" name="Shape 10"/>
+            <p:cNvSpPr/>
+            <p:nvPr/>
+          </p:nvSpPr>
+          <p:spPr>
+            <a:xfrm>
+              <a:off x="365760" y="4453128"/>
+              <a:ext cx="11457432" cy="1060704"/>
+            </a:xfrm>
+            <a:prstGeom prst="rect">
+              <a:avLst/>
+            </a:prstGeom>
+            <a:solidFill>
+              <a:srgbClr val="FFFFFF">
+                <a:alpha val="72000"/>
+              </a:srgbClr>
+            </a:solidFill>
+            <a:ln>
+              <a:noFill/>
+            </a:ln>
+            <a:effectLst/>
+          </p:spPr>
+          <p:style>
+            <a:lnRef idx="1">
+              <a:schemeClr val="accent1"/>
+            </a:lnRef>
+            <a:fillRef idx="3">
+              <a:schemeClr val="accent1"/>
+            </a:fillRef>
+            <a:effectRef idx="2">
+              <a:schemeClr val="accent1"/>
+            </a:effectRef>
+            <a:fontRef idx="minor">
+              <a:schemeClr val="lt1"/>
+            </a:fontRef>
+          </p:style>
+          <p:txBody>
+            <a:bodyPr rtlCol="0" anchor="ctr"/>
+            <a:lstStyle/>
+            <a:p/>
+          </p:txBody>
+        </p:sp>
+        <p:sp>
+          <p:nvSpPr>
+            <p:cNvPr id="348" name="Shape 11"/>
+            <p:cNvSpPr/>
+            <p:nvPr/>
+          </p:nvSpPr>
+          <p:spPr>
+            <a:xfrm>
+              <a:off x="365760" y="5513832"/>
+              <a:ext cx="1024128" cy="457200"/>
+            </a:xfrm>
+            <a:prstGeom prst="rect">
+              <a:avLst/>
+            </a:prstGeom>
+            <a:solidFill>
+              <a:srgbClr val="FFFFFF">
+                <a:alpha val="72000"/>
+              </a:srgbClr>
+            </a:solidFill>
+            <a:ln>
+              <a:noFill/>
+            </a:ln>
+            <a:effectLst/>
+          </p:spPr>
+          <p:style>
+            <a:lnRef idx="1">
+              <a:schemeClr val="accent1"/>
+            </a:lnRef>
+            <a:fillRef idx="3">
+              <a:schemeClr val="accent1"/>
+            </a:fillRef>
+            <a:effectRef idx="2">
+              <a:schemeClr val="accent1"/>
+            </a:effectRef>
+            <a:fontRef idx="minor">
+              <a:schemeClr val="lt1"/>
+            </a:fontRef>
+          </p:style>
+          <p:txBody>
+            <a:bodyPr rtlCol="0" anchor="ctr"/>
+            <a:lstStyle/>
+            <a:p/>
+          </p:txBody>
+        </p:sp>
+        <p:sp>
+          <p:nvSpPr>
+            <p:cNvPr id="349" name="Shape 12"/>
+            <p:cNvSpPr/>
+            <p:nvPr/>
+          </p:nvSpPr>
+          <p:spPr>
+            <a:xfrm>
+              <a:off x="2990087" y="5513832"/>
+              <a:ext cx="8833104" cy="457200"/>
+            </a:xfrm>
+            <a:prstGeom prst="rect">
+              <a:avLst/>
+            </a:prstGeom>
+            <a:solidFill>
+              <a:srgbClr val="FFFFFF">
+                <a:alpha val="72000"/>
+              </a:srgbClr>
+            </a:solidFill>
+            <a:ln>
+              <a:noFill/>
+            </a:ln>
+            <a:effectLst/>
+          </p:spPr>
+          <p:style>
+            <a:lnRef idx="1">
+              <a:schemeClr val="accent1"/>
+            </a:lnRef>
+            <a:fillRef idx="3">
+              <a:schemeClr val="accent1"/>
+            </a:fillRef>
+            <a:effectRef idx="2">
+              <a:schemeClr val="accent1"/>
+            </a:effectRef>
+            <a:fontRef idx="minor">
+              <a:schemeClr val="lt1"/>
+            </a:fontRef>
+          </p:style>
+          <p:txBody>
+            <a:bodyPr rtlCol="0" anchor="ctr"/>
+            <a:lstStyle/>
+            <a:p/>
+          </p:txBody>
+        </p:sp>
+        <p:sp>
+          <p:nvSpPr>
+            <p:cNvPr id="350" name="Shape 13"/>
+            <p:cNvSpPr/>
+            <p:nvPr/>
+          </p:nvSpPr>
+          <p:spPr>
+            <a:xfrm>
+              <a:off x="365760" y="5971032"/>
+              <a:ext cx="11457432" cy="384047"/>
+            </a:xfrm>
+            <a:prstGeom prst="rect">
+              <a:avLst/>
+            </a:prstGeom>
+            <a:solidFill>
+              <a:srgbClr val="FFFFFF">
+                <a:alpha val="72000"/>
+              </a:srgbClr>
+            </a:solidFill>
+            <a:ln>
+              <a:noFill/>
+            </a:ln>
+            <a:effectLst/>
+          </p:spPr>
+          <p:style>
+            <a:lnRef idx="1">
+              <a:schemeClr val="accent1"/>
+            </a:lnRef>
+            <a:fillRef idx="3">
+              <a:schemeClr val="accent1"/>
+            </a:fillRef>
+            <a:effectRef idx="2">
+              <a:schemeClr val="accent1"/>
+            </a:effectRef>
+            <a:fontRef idx="minor">
+              <a:schemeClr val="lt1"/>
+            </a:fontRef>
+          </p:style>
+          <p:txBody>
+            <a:bodyPr rtlCol="0" anchor="ctr"/>
+            <a:lstStyle/>
+            <a:p/>
+          </p:txBody>
+        </p:sp>
+        <p:sp>
+          <p:nvSpPr>
+            <p:cNvPr id="351" name="Shape 14"/>
+            <p:cNvSpPr/>
+            <p:nvPr/>
+          </p:nvSpPr>
+          <p:spPr>
+            <a:xfrm>
+              <a:off x="4581144" y="3063240"/>
+              <a:ext cx="1289304" cy="274320"/>
             </a:xfrm>
             <a:prstGeom prst="roundRect">
               <a:avLst>
@@ -16609,14 +17261,14 @@
         </p:sp>
         <p:sp>
           <p:nvSpPr>
-            <p:cNvPr id="338" name="Shape 9"/>
+            <p:cNvPr id="352" name="Shape 15"/>
             <p:cNvSpPr/>
             <p:nvPr/>
           </p:nvSpPr>
           <p:spPr>
             <a:xfrm>
-              <a:off x="3767328" y="5513832"/>
-              <a:ext cx="822959" cy="457200"/>
+              <a:off x="9564624" y="1426464"/>
+              <a:ext cx="2249423" cy="621792"/>
             </a:xfrm>
             <a:prstGeom prst="roundRect">
               <a:avLst>
@@ -16653,14 +17305,14 @@
         </p:sp>
         <p:sp>
           <p:nvSpPr>
-            <p:cNvPr id="339" name="Shape 10"/>
+            <p:cNvPr id="353" name="Shape 16"/>
             <p:cNvSpPr/>
             <p:nvPr/>
           </p:nvSpPr>
           <p:spPr>
             <a:xfrm>
-              <a:off x="6153912" y="5513832"/>
-              <a:ext cx="822959" cy="457200"/>
+              <a:off x="1417320" y="5550408"/>
+              <a:ext cx="1545336" cy="420624"/>
             </a:xfrm>
             <a:prstGeom prst="roundRect">
               <a:avLst>
@@ -16697,14 +17349,14 @@
         </p:sp>
         <p:sp>
           <p:nvSpPr>
-            <p:cNvPr id="340" name="Shape 11"/>
+            <p:cNvPr id="354" name="Shape 17"/>
             <p:cNvSpPr/>
             <p:nvPr/>
           </p:nvSpPr>
           <p:spPr>
             <a:xfrm>
-              <a:off x="7744968" y="5513832"/>
-              <a:ext cx="822959" cy="457200"/>
+              <a:off x="2752344" y="3849624"/>
+              <a:ext cx="1737360" cy="640080"/>
             </a:xfrm>
             <a:prstGeom prst="roundRect">
               <a:avLst>
@@ -16741,146 +17393,14 @@
         </p:sp>
         <p:sp>
           <p:nvSpPr>
-            <p:cNvPr id="341" name="Shape 12"/>
+            <p:cNvPr id="355" name="Shape 18"/>
             <p:cNvSpPr/>
             <p:nvPr/>
           </p:nvSpPr>
           <p:spPr>
             <a:xfrm>
-              <a:off x="9336024" y="5513832"/>
-              <a:ext cx="822959" cy="457200"/>
-            </a:xfrm>
-            <a:prstGeom prst="roundRect">
-              <a:avLst>
-                <a:gd name="adj" fmla="val 8000"/>
-              </a:avLst>
-            </a:prstGeom>
-            <a:noFill/>
-            <a:ln w="38100">
-              <a:solidFill>
-                <a:srgbClr val="FA8B35"/>
-              </a:solidFill>
-            </a:ln>
-            <a:effectLst/>
-          </p:spPr>
-          <p:style>
-            <a:lnRef idx="1">
-              <a:schemeClr val="accent1"/>
-            </a:lnRef>
-            <a:fillRef idx="3">
-              <a:schemeClr val="accent1"/>
-            </a:fillRef>
-            <a:effectRef idx="2">
-              <a:schemeClr val="accent1"/>
-            </a:effectRef>
-            <a:fontRef idx="minor">
-              <a:schemeClr val="lt1"/>
-            </a:fontRef>
-          </p:style>
-          <p:txBody>
-            <a:bodyPr rtlCol="0" anchor="ctr"/>
-            <a:lstStyle/>
-            <a:p/>
-          </p:txBody>
-        </p:sp>
-        <p:sp>
-          <p:nvSpPr>
-            <p:cNvPr id="342" name="Shape 13"/>
-            <p:cNvSpPr/>
-            <p:nvPr/>
-          </p:nvSpPr>
-          <p:spPr>
-            <a:xfrm>
-              <a:off x="10131552" y="5513832"/>
-              <a:ext cx="822959" cy="457200"/>
-            </a:xfrm>
-            <a:prstGeom prst="roundRect">
-              <a:avLst>
-                <a:gd name="adj" fmla="val 8000"/>
-              </a:avLst>
-            </a:prstGeom>
-            <a:noFill/>
-            <a:ln w="38100">
-              <a:solidFill>
-                <a:srgbClr val="FA8B35"/>
-              </a:solidFill>
-            </a:ln>
-            <a:effectLst/>
-          </p:spPr>
-          <p:style>
-            <a:lnRef idx="1">
-              <a:schemeClr val="accent1"/>
-            </a:lnRef>
-            <a:fillRef idx="3">
-              <a:schemeClr val="accent1"/>
-            </a:fillRef>
-            <a:effectRef idx="2">
-              <a:schemeClr val="accent1"/>
-            </a:effectRef>
-            <a:fontRef idx="minor">
-              <a:schemeClr val="lt1"/>
-            </a:fontRef>
-          </p:style>
-          <p:txBody>
-            <a:bodyPr rtlCol="0" anchor="ctr"/>
-            <a:lstStyle/>
-            <a:p/>
-          </p:txBody>
-        </p:sp>
-        <p:sp>
-          <p:nvSpPr>
-            <p:cNvPr id="343" name="Shape 14"/>
-            <p:cNvSpPr/>
-            <p:nvPr/>
-          </p:nvSpPr>
-          <p:spPr>
-            <a:xfrm>
-              <a:off x="9656064" y="4864608"/>
-              <a:ext cx="2066544" cy="576072"/>
-            </a:xfrm>
-            <a:prstGeom prst="roundRect">
-              <a:avLst>
-                <a:gd name="adj" fmla="val 8000"/>
-              </a:avLst>
-            </a:prstGeom>
-            <a:noFill/>
-            <a:ln w="38100">
-              <a:solidFill>
-                <a:srgbClr val="FA8B35"/>
-              </a:solidFill>
-            </a:ln>
-            <a:effectLst/>
-          </p:spPr>
-          <p:style>
-            <a:lnRef idx="1">
-              <a:schemeClr val="accent1"/>
-            </a:lnRef>
-            <a:fillRef idx="3">
-              <a:schemeClr val="accent1"/>
-            </a:fillRef>
-            <a:effectRef idx="2">
-              <a:schemeClr val="accent1"/>
-            </a:effectRef>
-            <a:fontRef idx="minor">
-              <a:schemeClr val="lt1"/>
-            </a:fontRef>
-          </p:style>
-          <p:txBody>
-            <a:bodyPr rtlCol="0" anchor="ctr"/>
-            <a:lstStyle/>
-            <a:p/>
-          </p:txBody>
-        </p:sp>
-        <p:sp>
-          <p:nvSpPr>
-            <p:cNvPr id="344" name="Shape 15"/>
-            <p:cNvSpPr/>
-            <p:nvPr/>
-          </p:nvSpPr>
-          <p:spPr>
-            <a:xfrm>
-              <a:off x="2697480" y="4754880"/>
-              <a:ext cx="6309360" cy="658368"/>
+              <a:off x="2743200" y="1261872"/>
+              <a:ext cx="5669280" cy="658368"/>
             </a:xfrm>
             <a:prstGeom prst="roundRect">
               <a:avLst>
@@ -16919,14 +17439,14 @@
         </p:sp>
         <p:sp>
           <p:nvSpPr>
-            <p:cNvPr id="345" name="Text 16"/>
+            <p:cNvPr id="356" name="Text 19"/>
             <p:cNvSpPr txBox="1"/>
             <p:nvPr/>
           </p:nvSpPr>
           <p:spPr>
             <a:xfrm>
-              <a:off x="2825496" y="4818888"/>
-              <a:ext cx="6053328" cy="566928"/>
+              <a:off x="2871216" y="1325880"/>
+              <a:ext cx="5413248" cy="566928"/>
             </a:xfrm>
             <a:prstGeom prst="rect">
               <a:avLst/>
@@ -16951,7 +17471,7 @@
                   </a:solidFill>
                   <a:latin typeface="Trenda IG Text"/>
                 </a:rPr>
-                <a:t>7 / 8   </a:t>
+                <a:t>7 / 13   </a:t>
               </a:r>
               <a:r>
                 <a:rPr sz="800" b="1" i="0" spc="120">
@@ -16960,7 +17480,7 @@
                   </a:solidFill>
                   <a:latin typeface="Trenda IG Text"/>
                 </a:rPr>
-                <a:t>PEOPLE APPROVE, THE OWNING TEAM DEPLOYS</a:t>
+                <a:t>H1 · REQUIREMENTS APPROVED</a:t>
               </a:r>
             </a:p>
             <a:p>
@@ -16976,7 +17496,7 @@
                   </a:solidFill>
                   <a:latin typeface="Trenda IG Text"/>
                 </a:rPr>
-                <a:t>People approve requirements, architecture, review and UAT. CAB still controls the release, and the owning team, not an agent, deploys to production.</a:t>
+                <a:t>The Requirements Agent posts the brief to the Jira story as a comment: audience, consent rules, KPIs, open questions. The product owner approves at H1; only then does design start.</a:t>
               </a:r>
             </a:p>
           </p:txBody>
@@ -16984,7 +17504,6164 @@
       </p:grpSp>
       <p:grpSp>
         <p:nvGrpSpPr>
-          <p:cNvPr id="346" name="Step 7 arrows"/>
+          <p:cNvPr id="357" name="Step 7 arrows"/>
+          <p:cNvGrpSpPr/>
+          <p:nvPr/>
+        </p:nvGrpSpPr>
+        <p:grpSpPr>
+          <a:xfrm>
+            <a:off x="1856232" y="4453128"/>
+            <a:ext cx="1764792" cy="1700784"/>
+            <a:chOff x="1856232" y="4453128"/>
+            <a:chExt cx="1764792" cy="1700784"/>
+          </a:xfrm>
+        </p:grpSpPr>
+        <p:cxnSp>
+          <p:nvCxnSpPr>
+            <p:cNvPr id="358" name="Arrow 1"/>
+            <p:cNvCxnSpPr/>
+            <p:nvPr/>
+          </p:nvCxnSpPr>
+          <p:spPr>
+            <a:xfrm>
+              <a:off x="3621024" y="4453128"/>
+              <a:ext cx="0" cy="996696"/>
+            </a:xfrm>
+            <a:prstGeom prst="line">
+              <a:avLst/>
+            </a:prstGeom>
+            <a:ln w="38100">
+              <a:solidFill>
+                <a:srgbClr val="2E9E1F"/>
+              </a:solidFill>
+            </a:ln>
+          </p:spPr>
+          <p:style>
+            <a:lnRef idx="2">
+              <a:schemeClr val="accent1"/>
+            </a:lnRef>
+            <a:fillRef idx="0">
+              <a:schemeClr val="accent1"/>
+            </a:fillRef>
+            <a:effectRef idx="1">
+              <a:schemeClr val="accent1"/>
+            </a:effectRef>
+            <a:fontRef idx="minor">
+              <a:schemeClr val="tx1"/>
+            </a:fontRef>
+          </p:style>
+        </p:cxnSp>
+        <p:cxnSp>
+          <p:nvCxnSpPr>
+            <p:cNvPr id="359" name="Arrow 2"/>
+            <p:cNvCxnSpPr/>
+            <p:nvPr/>
+          </p:nvCxnSpPr>
+          <p:spPr>
+            <a:xfrm flipH="1">
+              <a:off x="2587752" y="5449824"/>
+              <a:ext cx="1033272" cy="0"/>
+            </a:xfrm>
+            <a:prstGeom prst="line">
+              <a:avLst/>
+            </a:prstGeom>
+            <a:ln w="38100">
+              <a:solidFill>
+                <a:srgbClr val="2E9E1F"/>
+              </a:solidFill>
+            </a:ln>
+          </p:spPr>
+          <p:style>
+            <a:lnRef idx="2">
+              <a:schemeClr val="accent1"/>
+            </a:lnRef>
+            <a:fillRef idx="0">
+              <a:schemeClr val="accent1"/>
+            </a:fillRef>
+            <a:effectRef idx="1">
+              <a:schemeClr val="accent1"/>
+            </a:effectRef>
+            <a:fontRef idx="minor">
+              <a:schemeClr val="tx1"/>
+            </a:fontRef>
+          </p:style>
+        </p:cxnSp>
+        <p:cxnSp>
+          <p:nvCxnSpPr>
+            <p:cNvPr id="360" name="Arrow 3"/>
+            <p:cNvCxnSpPr/>
+            <p:nvPr/>
+          </p:nvCxnSpPr>
+          <p:spPr>
+            <a:xfrm>
+              <a:off x="2587752" y="5449824"/>
+              <a:ext cx="0" cy="100584"/>
+            </a:xfrm>
+            <a:prstGeom prst="line">
+              <a:avLst/>
+            </a:prstGeom>
+            <a:ln w="38100">
+              <a:solidFill>
+                <a:srgbClr val="2E9E1F"/>
+              </a:solidFill>
+              <a:tailEnd type="triangle" w="med" len="med"/>
+            </a:ln>
+          </p:spPr>
+          <p:style>
+            <a:lnRef idx="2">
+              <a:schemeClr val="accent1"/>
+            </a:lnRef>
+            <a:fillRef idx="0">
+              <a:schemeClr val="accent1"/>
+            </a:fillRef>
+            <a:effectRef idx="1">
+              <a:schemeClr val="accent1"/>
+            </a:effectRef>
+            <a:fontRef idx="minor">
+              <a:schemeClr val="tx1"/>
+            </a:fontRef>
+          </p:style>
+        </p:cxnSp>
+        <p:sp>
+          <p:nvSpPr>
+            <p:cNvPr id="361" name="Shape 4"/>
+            <p:cNvSpPr/>
+            <p:nvPr/>
+          </p:nvSpPr>
+          <p:spPr>
+            <a:xfrm>
+              <a:off x="1856232" y="5971032"/>
+              <a:ext cx="1463040" cy="182880"/>
+            </a:xfrm>
+            <a:prstGeom prst="roundRect">
+              <a:avLst>
+                <a:gd name="adj" fmla="val 50000"/>
+              </a:avLst>
+            </a:prstGeom>
+            <a:solidFill>
+              <a:srgbClr val="2E9E1F"/>
+            </a:solidFill>
+            <a:ln>
+              <a:noFill/>
+            </a:ln>
+            <a:effectLst/>
+          </p:spPr>
+          <p:style>
+            <a:lnRef idx="1">
+              <a:schemeClr val="accent1"/>
+            </a:lnRef>
+            <a:fillRef idx="3">
+              <a:schemeClr val="accent1"/>
+            </a:fillRef>
+            <a:effectRef idx="2">
+              <a:schemeClr val="accent1"/>
+            </a:effectRef>
+            <a:fontRef idx="minor">
+              <a:schemeClr val="lt1"/>
+            </a:fontRef>
+          </p:style>
+          <p:txBody>
+            <a:bodyPr rtlCol="0" anchor="ctr"/>
+            <a:lstStyle/>
+            <a:p/>
+          </p:txBody>
+        </p:sp>
+        <p:sp>
+          <p:nvSpPr>
+            <p:cNvPr id="362" name="Text 5"/>
+            <p:cNvSpPr txBox="1"/>
+            <p:nvPr/>
+          </p:nvSpPr>
+          <p:spPr>
+            <a:xfrm>
+              <a:off x="1856232" y="5971032"/>
+              <a:ext cx="1463040" cy="182880"/>
+            </a:xfrm>
+            <a:prstGeom prst="rect">
+              <a:avLst/>
+            </a:prstGeom>
+            <a:noFill/>
+          </p:spPr>
+          <p:txBody>
+            <a:bodyPr wrap="square" lIns="0" rIns="0" tIns="0" bIns="0" anchor="ctr">
+              <a:spAutoFit/>
+            </a:bodyPr>
+            <a:lstStyle/>
+            <a:p>
+              <a:pPr algn="ctr"/>
+              <a:r>
+                <a:rPr sz="650" b="1" i="0" spc="60">
+                  <a:solidFill>
+                    <a:srgbClr val="FFFFFF"/>
+                  </a:solidFill>
+                  <a:latin typeface="Trenda IG Text"/>
+                </a:rPr>
+                <a:t>H1 APPROVED → 02 DESIGN</a:t>
+              </a:r>
+            </a:p>
+          </p:txBody>
+        </p:sp>
+      </p:grpSp>
+      <p:grpSp>
+        <p:nvGrpSpPr>
+          <p:cNvPr id="363" name="Step 8 highlight"/>
+          <p:cNvGrpSpPr/>
+          <p:nvPr/>
+        </p:nvGrpSpPr>
+        <p:grpSpPr>
+          <a:xfrm>
+            <a:off x="365760" y="1115568"/>
+            <a:ext cx="11457432" cy="5239511"/>
+            <a:chOff x="365760" y="1115568"/>
+            <a:chExt cx="11457432" cy="5239511"/>
+          </a:xfrm>
+        </p:grpSpPr>
+        <p:sp>
+          <p:nvSpPr>
+            <p:cNvPr id="364" name="Shape 1"/>
+            <p:cNvSpPr/>
+            <p:nvPr/>
+          </p:nvSpPr>
+          <p:spPr>
+            <a:xfrm>
+              <a:off x="365760" y="1115568"/>
+              <a:ext cx="11457432" cy="896112"/>
+            </a:xfrm>
+            <a:prstGeom prst="rect">
+              <a:avLst/>
+            </a:prstGeom>
+            <a:solidFill>
+              <a:srgbClr val="FFFFFF">
+                <a:alpha val="72000"/>
+              </a:srgbClr>
+            </a:solidFill>
+            <a:ln>
+              <a:noFill/>
+            </a:ln>
+            <a:effectLst/>
+          </p:spPr>
+          <p:style>
+            <a:lnRef idx="1">
+              <a:schemeClr val="accent1"/>
+            </a:lnRef>
+            <a:fillRef idx="3">
+              <a:schemeClr val="accent1"/>
+            </a:fillRef>
+            <a:effectRef idx="2">
+              <a:schemeClr val="accent1"/>
+            </a:effectRef>
+            <a:fontRef idx="minor">
+              <a:schemeClr val="lt1"/>
+            </a:fontRef>
+          </p:style>
+          <p:txBody>
+            <a:bodyPr rtlCol="0" anchor="ctr"/>
+            <a:lstStyle/>
+            <a:p/>
+          </p:txBody>
+        </p:sp>
+        <p:sp>
+          <p:nvSpPr>
+            <p:cNvPr id="365" name="Shape 2"/>
+            <p:cNvSpPr/>
+            <p:nvPr/>
+          </p:nvSpPr>
+          <p:spPr>
+            <a:xfrm>
+              <a:off x="365760" y="2011680"/>
+              <a:ext cx="9235440" cy="548640"/>
+            </a:xfrm>
+            <a:prstGeom prst="rect">
+              <a:avLst/>
+            </a:prstGeom>
+            <a:solidFill>
+              <a:srgbClr val="FFFFFF">
+                <a:alpha val="72000"/>
+              </a:srgbClr>
+            </a:solidFill>
+            <a:ln>
+              <a:noFill/>
+            </a:ln>
+            <a:effectLst/>
+          </p:spPr>
+          <p:style>
+            <a:lnRef idx="1">
+              <a:schemeClr val="accent1"/>
+            </a:lnRef>
+            <a:fillRef idx="3">
+              <a:schemeClr val="accent1"/>
+            </a:fillRef>
+            <a:effectRef idx="2">
+              <a:schemeClr val="accent1"/>
+            </a:effectRef>
+            <a:fontRef idx="minor">
+              <a:schemeClr val="lt1"/>
+            </a:fontRef>
+          </p:style>
+          <p:txBody>
+            <a:bodyPr rtlCol="0" anchor="ctr"/>
+            <a:lstStyle/>
+            <a:p/>
+          </p:txBody>
+        </p:sp>
+        <p:sp>
+          <p:nvSpPr>
+            <p:cNvPr id="366" name="Shape 3"/>
+            <p:cNvSpPr/>
+            <p:nvPr/>
+          </p:nvSpPr>
+          <p:spPr>
+            <a:xfrm>
+              <a:off x="11777472" y="2011680"/>
+              <a:ext cx="45720" cy="548640"/>
+            </a:xfrm>
+            <a:prstGeom prst="rect">
+              <a:avLst/>
+            </a:prstGeom>
+            <a:solidFill>
+              <a:srgbClr val="FFFFFF">
+                <a:alpha val="72000"/>
+              </a:srgbClr>
+            </a:solidFill>
+            <a:ln>
+              <a:noFill/>
+            </a:ln>
+            <a:effectLst/>
+          </p:spPr>
+          <p:style>
+            <a:lnRef idx="1">
+              <a:schemeClr val="accent1"/>
+            </a:lnRef>
+            <a:fillRef idx="3">
+              <a:schemeClr val="accent1"/>
+            </a:fillRef>
+            <a:effectRef idx="2">
+              <a:schemeClr val="accent1"/>
+            </a:effectRef>
+            <a:fontRef idx="minor">
+              <a:schemeClr val="lt1"/>
+            </a:fontRef>
+          </p:style>
+          <p:txBody>
+            <a:bodyPr rtlCol="0" anchor="ctr"/>
+            <a:lstStyle/>
+            <a:p/>
+          </p:txBody>
+        </p:sp>
+        <p:sp>
+          <p:nvSpPr>
+            <p:cNvPr id="367" name="Shape 4"/>
+            <p:cNvSpPr/>
+            <p:nvPr/>
+          </p:nvSpPr>
+          <p:spPr>
+            <a:xfrm>
+              <a:off x="365760" y="2560320"/>
+              <a:ext cx="11457432" cy="256031"/>
+            </a:xfrm>
+            <a:prstGeom prst="rect">
+              <a:avLst/>
+            </a:prstGeom>
+            <a:solidFill>
+              <a:srgbClr val="FFFFFF">
+                <a:alpha val="72000"/>
+              </a:srgbClr>
+            </a:solidFill>
+            <a:ln>
+              <a:noFill/>
+            </a:ln>
+            <a:effectLst/>
+          </p:spPr>
+          <p:style>
+            <a:lnRef idx="1">
+              <a:schemeClr val="accent1"/>
+            </a:lnRef>
+            <a:fillRef idx="3">
+              <a:schemeClr val="accent1"/>
+            </a:fillRef>
+            <a:effectRef idx="2">
+              <a:schemeClr val="accent1"/>
+            </a:effectRef>
+            <a:fontRef idx="minor">
+              <a:schemeClr val="lt1"/>
+            </a:fontRef>
+          </p:style>
+          <p:txBody>
+            <a:bodyPr rtlCol="0" anchor="ctr"/>
+            <a:lstStyle/>
+            <a:p/>
+          </p:txBody>
+        </p:sp>
+        <p:sp>
+          <p:nvSpPr>
+            <p:cNvPr id="368" name="Shape 5"/>
+            <p:cNvSpPr/>
+            <p:nvPr/>
+          </p:nvSpPr>
+          <p:spPr>
+            <a:xfrm>
+              <a:off x="365760" y="2816352"/>
+              <a:ext cx="6885431" cy="237744"/>
+            </a:xfrm>
+            <a:prstGeom prst="rect">
+              <a:avLst/>
+            </a:prstGeom>
+            <a:solidFill>
+              <a:srgbClr val="FFFFFF">
+                <a:alpha val="72000"/>
+              </a:srgbClr>
+            </a:solidFill>
+            <a:ln>
+              <a:noFill/>
+            </a:ln>
+            <a:effectLst/>
+          </p:spPr>
+          <p:style>
+            <a:lnRef idx="1">
+              <a:schemeClr val="accent1"/>
+            </a:lnRef>
+            <a:fillRef idx="3">
+              <a:schemeClr val="accent1"/>
+            </a:fillRef>
+            <a:effectRef idx="2">
+              <a:schemeClr val="accent1"/>
+            </a:effectRef>
+            <a:fontRef idx="minor">
+              <a:schemeClr val="lt1"/>
+            </a:fontRef>
+          </p:style>
+          <p:txBody>
+            <a:bodyPr rtlCol="0" anchor="ctr"/>
+            <a:lstStyle/>
+            <a:p/>
+          </p:txBody>
+        </p:sp>
+        <p:sp>
+          <p:nvSpPr>
+            <p:cNvPr id="369" name="Shape 6"/>
+            <p:cNvSpPr/>
+            <p:nvPr/>
+          </p:nvSpPr>
+          <p:spPr>
+            <a:xfrm>
+              <a:off x="9308592" y="2816352"/>
+              <a:ext cx="2514600" cy="237744"/>
+            </a:xfrm>
+            <a:prstGeom prst="rect">
+              <a:avLst/>
+            </a:prstGeom>
+            <a:solidFill>
+              <a:srgbClr val="FFFFFF">
+                <a:alpha val="72000"/>
+              </a:srgbClr>
+            </a:solidFill>
+            <a:ln>
+              <a:noFill/>
+            </a:ln>
+            <a:effectLst/>
+          </p:spPr>
+          <p:style>
+            <a:lnRef idx="1">
+              <a:schemeClr val="accent1"/>
+            </a:lnRef>
+            <a:fillRef idx="3">
+              <a:schemeClr val="accent1"/>
+            </a:fillRef>
+            <a:effectRef idx="2">
+              <a:schemeClr val="accent1"/>
+            </a:effectRef>
+            <a:fontRef idx="minor">
+              <a:schemeClr val="lt1"/>
+            </a:fontRef>
+          </p:style>
+          <p:txBody>
+            <a:bodyPr rtlCol="0" anchor="ctr"/>
+            <a:lstStyle/>
+            <a:p/>
+          </p:txBody>
+        </p:sp>
+        <p:sp>
+          <p:nvSpPr>
+            <p:cNvPr id="370" name="Shape 7"/>
+            <p:cNvSpPr/>
+            <p:nvPr/>
+          </p:nvSpPr>
+          <p:spPr>
+            <a:xfrm>
+              <a:off x="365760" y="3054096"/>
+              <a:ext cx="5495544" cy="292608"/>
+            </a:xfrm>
+            <a:prstGeom prst="rect">
+              <a:avLst/>
+            </a:prstGeom>
+            <a:solidFill>
+              <a:srgbClr val="FFFFFF">
+                <a:alpha val="72000"/>
+              </a:srgbClr>
+            </a:solidFill>
+            <a:ln>
+              <a:noFill/>
+            </a:ln>
+            <a:effectLst/>
+          </p:spPr>
+          <p:style>
+            <a:lnRef idx="1">
+              <a:schemeClr val="accent1"/>
+            </a:lnRef>
+            <a:fillRef idx="3">
+              <a:schemeClr val="accent1"/>
+            </a:fillRef>
+            <a:effectRef idx="2">
+              <a:schemeClr val="accent1"/>
+            </a:effectRef>
+            <a:fontRef idx="minor">
+              <a:schemeClr val="lt1"/>
+            </a:fontRef>
+          </p:style>
+          <p:txBody>
+            <a:bodyPr rtlCol="0" anchor="ctr"/>
+            <a:lstStyle/>
+            <a:p/>
+          </p:txBody>
+        </p:sp>
+        <p:sp>
+          <p:nvSpPr>
+            <p:cNvPr id="371" name="Shape 8"/>
+            <p:cNvSpPr/>
+            <p:nvPr/>
+          </p:nvSpPr>
+          <p:spPr>
+            <a:xfrm>
+              <a:off x="7168896" y="3054096"/>
+              <a:ext cx="82295" cy="292608"/>
+            </a:xfrm>
+            <a:prstGeom prst="rect">
+              <a:avLst/>
+            </a:prstGeom>
+            <a:solidFill>
+              <a:srgbClr val="FFFFFF">
+                <a:alpha val="72000"/>
+              </a:srgbClr>
+            </a:solidFill>
+            <a:ln>
+              <a:noFill/>
+            </a:ln>
+            <a:effectLst/>
+          </p:spPr>
+          <p:style>
+            <a:lnRef idx="1">
+              <a:schemeClr val="accent1"/>
+            </a:lnRef>
+            <a:fillRef idx="3">
+              <a:schemeClr val="accent1"/>
+            </a:fillRef>
+            <a:effectRef idx="2">
+              <a:schemeClr val="accent1"/>
+            </a:effectRef>
+            <a:fontRef idx="minor">
+              <a:schemeClr val="lt1"/>
+            </a:fontRef>
+          </p:style>
+          <p:txBody>
+            <a:bodyPr rtlCol="0" anchor="ctr"/>
+            <a:lstStyle/>
+            <a:p/>
+          </p:txBody>
+        </p:sp>
+        <p:sp>
+          <p:nvSpPr>
+            <p:cNvPr id="372" name="Shape 9"/>
+            <p:cNvSpPr/>
+            <p:nvPr/>
+          </p:nvSpPr>
+          <p:spPr>
+            <a:xfrm>
+              <a:off x="9308592" y="3054096"/>
+              <a:ext cx="2514600" cy="292608"/>
+            </a:xfrm>
+            <a:prstGeom prst="rect">
+              <a:avLst/>
+            </a:prstGeom>
+            <a:solidFill>
+              <a:srgbClr val="FFFFFF">
+                <a:alpha val="72000"/>
+              </a:srgbClr>
+            </a:solidFill>
+            <a:ln>
+              <a:noFill/>
+            </a:ln>
+            <a:effectLst/>
+          </p:spPr>
+          <p:style>
+            <a:lnRef idx="1">
+              <a:schemeClr val="accent1"/>
+            </a:lnRef>
+            <a:fillRef idx="3">
+              <a:schemeClr val="accent1"/>
+            </a:fillRef>
+            <a:effectRef idx="2">
+              <a:schemeClr val="accent1"/>
+            </a:effectRef>
+            <a:fontRef idx="minor">
+              <a:schemeClr val="lt1"/>
+            </a:fontRef>
+          </p:style>
+          <p:txBody>
+            <a:bodyPr rtlCol="0" anchor="ctr"/>
+            <a:lstStyle/>
+            <a:p/>
+          </p:txBody>
+        </p:sp>
+        <p:sp>
+          <p:nvSpPr>
+            <p:cNvPr id="373" name="Shape 10"/>
+            <p:cNvSpPr/>
+            <p:nvPr/>
+          </p:nvSpPr>
+          <p:spPr>
+            <a:xfrm>
+              <a:off x="365760" y="3346704"/>
+              <a:ext cx="6885431" cy="109727"/>
+            </a:xfrm>
+            <a:prstGeom prst="rect">
+              <a:avLst/>
+            </a:prstGeom>
+            <a:solidFill>
+              <a:srgbClr val="FFFFFF">
+                <a:alpha val="72000"/>
+              </a:srgbClr>
+            </a:solidFill>
+            <a:ln>
+              <a:noFill/>
+            </a:ln>
+            <a:effectLst/>
+          </p:spPr>
+          <p:style>
+            <a:lnRef idx="1">
+              <a:schemeClr val="accent1"/>
+            </a:lnRef>
+            <a:fillRef idx="3">
+              <a:schemeClr val="accent1"/>
+            </a:fillRef>
+            <a:effectRef idx="2">
+              <a:schemeClr val="accent1"/>
+            </a:effectRef>
+            <a:fontRef idx="minor">
+              <a:schemeClr val="lt1"/>
+            </a:fontRef>
+          </p:style>
+          <p:txBody>
+            <a:bodyPr rtlCol="0" anchor="ctr"/>
+            <a:lstStyle/>
+            <a:p/>
+          </p:txBody>
+        </p:sp>
+        <p:sp>
+          <p:nvSpPr>
+            <p:cNvPr id="374" name="Shape 11"/>
+            <p:cNvSpPr/>
+            <p:nvPr/>
+          </p:nvSpPr>
+          <p:spPr>
+            <a:xfrm>
+              <a:off x="9308592" y="3346704"/>
+              <a:ext cx="2514600" cy="109727"/>
+            </a:xfrm>
+            <a:prstGeom prst="rect">
+              <a:avLst/>
+            </a:prstGeom>
+            <a:solidFill>
+              <a:srgbClr val="FFFFFF">
+                <a:alpha val="72000"/>
+              </a:srgbClr>
+            </a:solidFill>
+            <a:ln>
+              <a:noFill/>
+            </a:ln>
+            <a:effectLst/>
+          </p:spPr>
+          <p:style>
+            <a:lnRef idx="1">
+              <a:schemeClr val="accent1"/>
+            </a:lnRef>
+            <a:fillRef idx="3">
+              <a:schemeClr val="accent1"/>
+            </a:fillRef>
+            <a:effectRef idx="2">
+              <a:schemeClr val="accent1"/>
+            </a:effectRef>
+            <a:fontRef idx="minor">
+              <a:schemeClr val="lt1"/>
+            </a:fontRef>
+          </p:style>
+          <p:txBody>
+            <a:bodyPr rtlCol="0" anchor="ctr"/>
+            <a:lstStyle/>
+            <a:p/>
+          </p:txBody>
+        </p:sp>
+        <p:sp>
+          <p:nvSpPr>
+            <p:cNvPr id="375" name="Shape 12"/>
+            <p:cNvSpPr/>
+            <p:nvPr/>
+          </p:nvSpPr>
+          <p:spPr>
+            <a:xfrm>
+              <a:off x="365760" y="3456432"/>
+              <a:ext cx="11457432" cy="429767"/>
+            </a:xfrm>
+            <a:prstGeom prst="rect">
+              <a:avLst/>
+            </a:prstGeom>
+            <a:solidFill>
+              <a:srgbClr val="FFFFFF">
+                <a:alpha val="72000"/>
+              </a:srgbClr>
+            </a:solidFill>
+            <a:ln>
+              <a:noFill/>
+            </a:ln>
+            <a:effectLst/>
+          </p:spPr>
+          <p:style>
+            <a:lnRef idx="1">
+              <a:schemeClr val="accent1"/>
+            </a:lnRef>
+            <a:fillRef idx="3">
+              <a:schemeClr val="accent1"/>
+            </a:fillRef>
+            <a:effectRef idx="2">
+              <a:schemeClr val="accent1"/>
+            </a:effectRef>
+            <a:fontRef idx="minor">
+              <a:schemeClr val="lt1"/>
+            </a:fontRef>
+          </p:style>
+          <p:txBody>
+            <a:bodyPr rtlCol="0" anchor="ctr"/>
+            <a:lstStyle/>
+            <a:p/>
+          </p:txBody>
+        </p:sp>
+        <p:sp>
+          <p:nvSpPr>
+            <p:cNvPr id="376" name="Shape 13"/>
+            <p:cNvSpPr/>
+            <p:nvPr/>
+          </p:nvSpPr>
+          <p:spPr>
+            <a:xfrm>
+              <a:off x="365760" y="3886200"/>
+              <a:ext cx="2423160" cy="566928"/>
+            </a:xfrm>
+            <a:prstGeom prst="rect">
+              <a:avLst/>
+            </a:prstGeom>
+            <a:solidFill>
+              <a:srgbClr val="FFFFFF">
+                <a:alpha val="72000"/>
+              </a:srgbClr>
+            </a:solidFill>
+            <a:ln>
+              <a:noFill/>
+            </a:ln>
+            <a:effectLst/>
+          </p:spPr>
+          <p:style>
+            <a:lnRef idx="1">
+              <a:schemeClr val="accent1"/>
+            </a:lnRef>
+            <a:fillRef idx="3">
+              <a:schemeClr val="accent1"/>
+            </a:fillRef>
+            <a:effectRef idx="2">
+              <a:schemeClr val="accent1"/>
+            </a:effectRef>
+            <a:fontRef idx="minor">
+              <a:schemeClr val="lt1"/>
+            </a:fontRef>
+          </p:style>
+          <p:txBody>
+            <a:bodyPr rtlCol="0" anchor="ctr"/>
+            <a:lstStyle/>
+            <a:p/>
+          </p:txBody>
+        </p:sp>
+        <p:sp>
+          <p:nvSpPr>
+            <p:cNvPr id="377" name="Shape 14"/>
+            <p:cNvSpPr/>
+            <p:nvPr/>
+          </p:nvSpPr>
+          <p:spPr>
+            <a:xfrm>
+              <a:off x="4453128" y="3886200"/>
+              <a:ext cx="7370063" cy="566928"/>
+            </a:xfrm>
+            <a:prstGeom prst="rect">
+              <a:avLst/>
+            </a:prstGeom>
+            <a:solidFill>
+              <a:srgbClr val="FFFFFF">
+                <a:alpha val="72000"/>
+              </a:srgbClr>
+            </a:solidFill>
+            <a:ln>
+              <a:noFill/>
+            </a:ln>
+            <a:effectLst/>
+          </p:spPr>
+          <p:style>
+            <a:lnRef idx="1">
+              <a:schemeClr val="accent1"/>
+            </a:lnRef>
+            <a:fillRef idx="3">
+              <a:schemeClr val="accent1"/>
+            </a:fillRef>
+            <a:effectRef idx="2">
+              <a:schemeClr val="accent1"/>
+            </a:effectRef>
+            <a:fontRef idx="minor">
+              <a:schemeClr val="lt1"/>
+            </a:fontRef>
+          </p:style>
+          <p:txBody>
+            <a:bodyPr rtlCol="0" anchor="ctr"/>
+            <a:lstStyle/>
+            <a:p/>
+          </p:txBody>
+        </p:sp>
+        <p:sp>
+          <p:nvSpPr>
+            <p:cNvPr id="378" name="Shape 15"/>
+            <p:cNvSpPr/>
+            <p:nvPr/>
+          </p:nvSpPr>
+          <p:spPr>
+            <a:xfrm>
+              <a:off x="365760" y="4453128"/>
+              <a:ext cx="11457432" cy="1060704"/>
+            </a:xfrm>
+            <a:prstGeom prst="rect">
+              <a:avLst/>
+            </a:prstGeom>
+            <a:solidFill>
+              <a:srgbClr val="FFFFFF">
+                <a:alpha val="72000"/>
+              </a:srgbClr>
+            </a:solidFill>
+            <a:ln>
+              <a:noFill/>
+            </a:ln>
+            <a:effectLst/>
+          </p:spPr>
+          <p:style>
+            <a:lnRef idx="1">
+              <a:schemeClr val="accent1"/>
+            </a:lnRef>
+            <a:fillRef idx="3">
+              <a:schemeClr val="accent1"/>
+            </a:fillRef>
+            <a:effectRef idx="2">
+              <a:schemeClr val="accent1"/>
+            </a:effectRef>
+            <a:fontRef idx="minor">
+              <a:schemeClr val="lt1"/>
+            </a:fontRef>
+          </p:style>
+          <p:txBody>
+            <a:bodyPr rtlCol="0" anchor="ctr"/>
+            <a:lstStyle/>
+            <a:p/>
+          </p:txBody>
+        </p:sp>
+        <p:sp>
+          <p:nvSpPr>
+            <p:cNvPr id="379" name="Shape 16"/>
+            <p:cNvSpPr/>
+            <p:nvPr/>
+          </p:nvSpPr>
+          <p:spPr>
+            <a:xfrm>
+              <a:off x="365760" y="5513832"/>
+              <a:ext cx="2615184" cy="457200"/>
+            </a:xfrm>
+            <a:prstGeom prst="rect">
+              <a:avLst/>
+            </a:prstGeom>
+            <a:solidFill>
+              <a:srgbClr val="FFFFFF">
+                <a:alpha val="72000"/>
+              </a:srgbClr>
+            </a:solidFill>
+            <a:ln>
+              <a:noFill/>
+            </a:ln>
+            <a:effectLst/>
+          </p:spPr>
+          <p:style>
+            <a:lnRef idx="1">
+              <a:schemeClr val="accent1"/>
+            </a:lnRef>
+            <a:fillRef idx="3">
+              <a:schemeClr val="accent1"/>
+            </a:fillRef>
+            <a:effectRef idx="2">
+              <a:schemeClr val="accent1"/>
+            </a:effectRef>
+            <a:fontRef idx="minor">
+              <a:schemeClr val="lt1"/>
+            </a:fontRef>
+          </p:style>
+          <p:txBody>
+            <a:bodyPr rtlCol="0" anchor="ctr"/>
+            <a:lstStyle/>
+            <a:p/>
+          </p:txBody>
+        </p:sp>
+        <p:sp>
+          <p:nvSpPr>
+            <p:cNvPr id="380" name="Shape 17"/>
+            <p:cNvSpPr/>
+            <p:nvPr/>
+          </p:nvSpPr>
+          <p:spPr>
+            <a:xfrm>
+              <a:off x="4581144" y="5513832"/>
+              <a:ext cx="7242047" cy="457200"/>
+            </a:xfrm>
+            <a:prstGeom prst="rect">
+              <a:avLst/>
+            </a:prstGeom>
+            <a:solidFill>
+              <a:srgbClr val="FFFFFF">
+                <a:alpha val="72000"/>
+              </a:srgbClr>
+            </a:solidFill>
+            <a:ln>
+              <a:noFill/>
+            </a:ln>
+            <a:effectLst/>
+          </p:spPr>
+          <p:style>
+            <a:lnRef idx="1">
+              <a:schemeClr val="accent1"/>
+            </a:lnRef>
+            <a:fillRef idx="3">
+              <a:schemeClr val="accent1"/>
+            </a:fillRef>
+            <a:effectRef idx="2">
+              <a:schemeClr val="accent1"/>
+            </a:effectRef>
+            <a:fontRef idx="minor">
+              <a:schemeClr val="lt1"/>
+            </a:fontRef>
+          </p:style>
+          <p:txBody>
+            <a:bodyPr rtlCol="0" anchor="ctr"/>
+            <a:lstStyle/>
+            <a:p/>
+          </p:txBody>
+        </p:sp>
+        <p:sp>
+          <p:nvSpPr>
+            <p:cNvPr id="381" name="Shape 18"/>
+            <p:cNvSpPr/>
+            <p:nvPr/>
+          </p:nvSpPr>
+          <p:spPr>
+            <a:xfrm>
+              <a:off x="365760" y="5971032"/>
+              <a:ext cx="11457432" cy="384047"/>
+            </a:xfrm>
+            <a:prstGeom prst="rect">
+              <a:avLst/>
+            </a:prstGeom>
+            <a:solidFill>
+              <a:srgbClr val="FFFFFF">
+                <a:alpha val="72000"/>
+              </a:srgbClr>
+            </a:solidFill>
+            <a:ln>
+              <a:noFill/>
+            </a:ln>
+            <a:effectLst/>
+          </p:spPr>
+          <p:style>
+            <a:lnRef idx="1">
+              <a:schemeClr val="accent1"/>
+            </a:lnRef>
+            <a:fillRef idx="3">
+              <a:schemeClr val="accent1"/>
+            </a:fillRef>
+            <a:effectRef idx="2">
+              <a:schemeClr val="accent1"/>
+            </a:effectRef>
+            <a:fontRef idx="minor">
+              <a:schemeClr val="lt1"/>
+            </a:fontRef>
+          </p:style>
+          <p:txBody>
+            <a:bodyPr rtlCol="0" anchor="ctr"/>
+            <a:lstStyle/>
+            <a:p/>
+          </p:txBody>
+        </p:sp>
+        <p:sp>
+          <p:nvSpPr>
+            <p:cNvPr id="382" name="Shape 19"/>
+            <p:cNvSpPr/>
+            <p:nvPr/>
+          </p:nvSpPr>
+          <p:spPr>
+            <a:xfrm>
+              <a:off x="5870448" y="3063240"/>
+              <a:ext cx="1289304" cy="274320"/>
+            </a:xfrm>
+            <a:prstGeom prst="roundRect">
+              <a:avLst>
+                <a:gd name="adj" fmla="val 8000"/>
+              </a:avLst>
+            </a:prstGeom>
+            <a:noFill/>
+            <a:ln w="38100">
+              <a:solidFill>
+                <a:srgbClr val="FA8B35"/>
+              </a:solidFill>
+            </a:ln>
+            <a:effectLst/>
+          </p:spPr>
+          <p:style>
+            <a:lnRef idx="1">
+              <a:schemeClr val="accent1"/>
+            </a:lnRef>
+            <a:fillRef idx="3">
+              <a:schemeClr val="accent1"/>
+            </a:fillRef>
+            <a:effectRef idx="2">
+              <a:schemeClr val="accent1"/>
+            </a:effectRef>
+            <a:fontRef idx="minor">
+              <a:schemeClr val="lt1"/>
+            </a:fontRef>
+          </p:style>
+          <p:txBody>
+            <a:bodyPr rtlCol="0" anchor="ctr"/>
+            <a:lstStyle/>
+            <a:p/>
+          </p:txBody>
+        </p:sp>
+        <p:sp>
+          <p:nvSpPr>
+            <p:cNvPr id="383" name="Shape 20"/>
+            <p:cNvSpPr/>
+            <p:nvPr/>
+          </p:nvSpPr>
+          <p:spPr>
+            <a:xfrm>
+              <a:off x="9564624" y="1975104"/>
+              <a:ext cx="2249423" cy="621792"/>
+            </a:xfrm>
+            <a:prstGeom prst="roundRect">
+              <a:avLst>
+                <a:gd name="adj" fmla="val 8000"/>
+              </a:avLst>
+            </a:prstGeom>
+            <a:noFill/>
+            <a:ln w="38100">
+              <a:solidFill>
+                <a:srgbClr val="FA8B35"/>
+              </a:solidFill>
+            </a:ln>
+            <a:effectLst/>
+          </p:spPr>
+          <p:style>
+            <a:lnRef idx="1">
+              <a:schemeClr val="accent1"/>
+            </a:lnRef>
+            <a:fillRef idx="3">
+              <a:schemeClr val="accent1"/>
+            </a:fillRef>
+            <a:effectRef idx="2">
+              <a:schemeClr val="accent1"/>
+            </a:effectRef>
+            <a:fontRef idx="minor">
+              <a:schemeClr val="lt1"/>
+            </a:fontRef>
+          </p:style>
+          <p:txBody>
+            <a:bodyPr rtlCol="0" anchor="ctr"/>
+            <a:lstStyle/>
+            <a:p/>
+          </p:txBody>
+        </p:sp>
+        <p:sp>
+          <p:nvSpPr>
+            <p:cNvPr id="384" name="Shape 21"/>
+            <p:cNvSpPr/>
+            <p:nvPr/>
+          </p:nvSpPr>
+          <p:spPr>
+            <a:xfrm>
+              <a:off x="3008376" y="5550408"/>
+              <a:ext cx="1545336" cy="420624"/>
+            </a:xfrm>
+            <a:prstGeom prst="roundRect">
+              <a:avLst>
+                <a:gd name="adj" fmla="val 8000"/>
+              </a:avLst>
+            </a:prstGeom>
+            <a:noFill/>
+            <a:ln w="38100">
+              <a:solidFill>
+                <a:srgbClr val="FA8B35"/>
+              </a:solidFill>
+            </a:ln>
+            <a:effectLst/>
+          </p:spPr>
+          <p:style>
+            <a:lnRef idx="1">
+              <a:schemeClr val="accent1"/>
+            </a:lnRef>
+            <a:fillRef idx="3">
+              <a:schemeClr val="accent1"/>
+            </a:fillRef>
+            <a:effectRef idx="2">
+              <a:schemeClr val="accent1"/>
+            </a:effectRef>
+            <a:fontRef idx="minor">
+              <a:schemeClr val="lt1"/>
+            </a:fontRef>
+          </p:style>
+          <p:txBody>
+            <a:bodyPr rtlCol="0" anchor="ctr"/>
+            <a:lstStyle/>
+            <a:p/>
+          </p:txBody>
+        </p:sp>
+        <p:sp>
+          <p:nvSpPr>
+            <p:cNvPr id="385" name="Shape 22"/>
+            <p:cNvSpPr/>
+            <p:nvPr/>
+          </p:nvSpPr>
+          <p:spPr>
+            <a:xfrm>
+              <a:off x="2752344" y="3849624"/>
+              <a:ext cx="1737360" cy="640080"/>
+            </a:xfrm>
+            <a:prstGeom prst="roundRect">
+              <a:avLst>
+                <a:gd name="adj" fmla="val 8000"/>
+              </a:avLst>
+            </a:prstGeom>
+            <a:noFill/>
+            <a:ln w="38100">
+              <a:solidFill>
+                <a:srgbClr val="FA8B35"/>
+              </a:solidFill>
+            </a:ln>
+            <a:effectLst/>
+          </p:spPr>
+          <p:style>
+            <a:lnRef idx="1">
+              <a:schemeClr val="accent1"/>
+            </a:lnRef>
+            <a:fillRef idx="3">
+              <a:schemeClr val="accent1"/>
+            </a:fillRef>
+            <a:effectRef idx="2">
+              <a:schemeClr val="accent1"/>
+            </a:effectRef>
+            <a:fontRef idx="minor">
+              <a:schemeClr val="lt1"/>
+            </a:fontRef>
+          </p:style>
+          <p:txBody>
+            <a:bodyPr rtlCol="0" anchor="ctr"/>
+            <a:lstStyle/>
+            <a:p/>
+          </p:txBody>
+        </p:sp>
+        <p:sp>
+          <p:nvSpPr>
+            <p:cNvPr id="386" name="Shape 23"/>
+            <p:cNvSpPr/>
+            <p:nvPr/>
+          </p:nvSpPr>
+          <p:spPr>
+            <a:xfrm>
+              <a:off x="7251192" y="2816352"/>
+              <a:ext cx="2057400" cy="640080"/>
+            </a:xfrm>
+            <a:prstGeom prst="roundRect">
+              <a:avLst>
+                <a:gd name="adj" fmla="val 8000"/>
+              </a:avLst>
+            </a:prstGeom>
+            <a:noFill/>
+            <a:ln w="38100">
+              <a:solidFill>
+                <a:srgbClr val="FA8B35"/>
+              </a:solidFill>
+            </a:ln>
+            <a:effectLst/>
+          </p:spPr>
+          <p:style>
+            <a:lnRef idx="1">
+              <a:schemeClr val="accent1"/>
+            </a:lnRef>
+            <a:fillRef idx="3">
+              <a:schemeClr val="accent1"/>
+            </a:fillRef>
+            <a:effectRef idx="2">
+              <a:schemeClr val="accent1"/>
+            </a:effectRef>
+            <a:fontRef idx="minor">
+              <a:schemeClr val="lt1"/>
+            </a:fontRef>
+          </p:style>
+          <p:txBody>
+            <a:bodyPr rtlCol="0" anchor="ctr"/>
+            <a:lstStyle/>
+            <a:p/>
+          </p:txBody>
+        </p:sp>
+        <p:sp>
+          <p:nvSpPr>
+            <p:cNvPr id="387" name="Shape 24"/>
+            <p:cNvSpPr/>
+            <p:nvPr/>
+          </p:nvSpPr>
+          <p:spPr>
+            <a:xfrm>
+              <a:off x="2743200" y="1261872"/>
+              <a:ext cx="5669280" cy="658368"/>
+            </a:xfrm>
+            <a:prstGeom prst="roundRect">
+              <a:avLst>
+                <a:gd name="adj" fmla="val 12000"/>
+              </a:avLst>
+            </a:prstGeom>
+            <a:solidFill>
+              <a:srgbClr val="000000"/>
+            </a:solidFill>
+            <a:ln w="12700">
+              <a:solidFill>
+                <a:srgbClr val="FA8B35"/>
+              </a:solidFill>
+            </a:ln>
+            <a:effectLst/>
+          </p:spPr>
+          <p:style>
+            <a:lnRef idx="1">
+              <a:schemeClr val="accent1"/>
+            </a:lnRef>
+            <a:fillRef idx="3">
+              <a:schemeClr val="accent1"/>
+            </a:fillRef>
+            <a:effectRef idx="2">
+              <a:schemeClr val="accent1"/>
+            </a:effectRef>
+            <a:fontRef idx="minor">
+              <a:schemeClr val="lt1"/>
+            </a:fontRef>
+          </p:style>
+          <p:txBody>
+            <a:bodyPr rtlCol="0" anchor="ctr"/>
+            <a:lstStyle/>
+            <a:p/>
+          </p:txBody>
+        </p:sp>
+        <p:sp>
+          <p:nvSpPr>
+            <p:cNvPr id="388" name="Text 25"/>
+            <p:cNvSpPr txBox="1"/>
+            <p:nvPr/>
+          </p:nvSpPr>
+          <p:spPr>
+            <a:xfrm>
+              <a:off x="2871216" y="1325880"/>
+              <a:ext cx="5413248" cy="566928"/>
+            </a:xfrm>
+            <a:prstGeom prst="rect">
+              <a:avLst/>
+            </a:prstGeom>
+            <a:noFill/>
+          </p:spPr>
+          <p:txBody>
+            <a:bodyPr wrap="square" lIns="0" rIns="0" tIns="0" bIns="0" anchor="t">
+              <a:spAutoFit/>
+            </a:bodyPr>
+            <a:lstStyle/>
+            <a:p>
+              <a:pPr>
+                <a:spcAft>
+                  <a:spcPts val="200"/>
+                </a:spcAft>
+              </a:pPr>
+              <a:r>
+                <a:rPr sz="800" b="1" i="0">
+                  <a:solidFill>
+                    <a:srgbClr val="FA8B35"/>
+                  </a:solidFill>
+                  <a:latin typeface="Trenda IG Text"/>
+                </a:rPr>
+                <a:t>8 / 13   </a:t>
+              </a:r>
+              <a:r>
+                <a:rPr sz="800" b="1" i="0" spc="120">
+                  <a:solidFill>
+                    <a:srgbClr val="FFFFFF"/>
+                  </a:solidFill>
+                  <a:latin typeface="Trenda IG Text"/>
+                </a:rPr>
+                <a:t>H2 · DESIGN APPROVED</a:t>
+              </a:r>
+            </a:p>
+            <a:p>
+              <a:pPr>
+                <a:spcAft>
+                  <a:spcPts val="200"/>
+                </a:spcAft>
+              </a:pPr>
+              <a:r>
+                <a:rPr sz="750" b="0" i="0">
+                  <a:solidFill>
+                    <a:srgbClr val="E6E6E6"/>
+                  </a:solidFill>
+                  <a:latin typeface="Trenda IG Text"/>
+                </a:rPr>
+                <a:t>The Architect Agent drafts the design in Confluence: reuse the existing data extensions and segment, a new journey. The Change Guardian names the pods affected. Architect and pod owners approve at H2.</a:t>
+              </a:r>
+            </a:p>
+          </p:txBody>
+        </p:sp>
+      </p:grpSp>
+      <p:grpSp>
+        <p:nvGrpSpPr>
+          <p:cNvPr id="389" name="Step 8 arrows"/>
+          <p:cNvGrpSpPr/>
+          <p:nvPr/>
+        </p:nvGrpSpPr>
+        <p:grpSpPr>
+          <a:xfrm>
+            <a:off x="3447288" y="4453128"/>
+            <a:ext cx="1463040" cy="1700784"/>
+            <a:chOff x="3447288" y="4453128"/>
+            <a:chExt cx="1463040" cy="1700784"/>
+          </a:xfrm>
+        </p:grpSpPr>
+        <p:cxnSp>
+          <p:nvCxnSpPr>
+            <p:cNvPr id="390" name="Arrow 1"/>
+            <p:cNvCxnSpPr/>
+            <p:nvPr/>
+          </p:nvCxnSpPr>
+          <p:spPr>
+            <a:xfrm>
+              <a:off x="3621024" y="4453128"/>
+              <a:ext cx="0" cy="996696"/>
+            </a:xfrm>
+            <a:prstGeom prst="line">
+              <a:avLst/>
+            </a:prstGeom>
+            <a:ln w="38100">
+              <a:solidFill>
+                <a:srgbClr val="2E9E1F"/>
+              </a:solidFill>
+            </a:ln>
+          </p:spPr>
+          <p:style>
+            <a:lnRef idx="2">
+              <a:schemeClr val="accent1"/>
+            </a:lnRef>
+            <a:fillRef idx="0">
+              <a:schemeClr val="accent1"/>
+            </a:fillRef>
+            <a:effectRef idx="1">
+              <a:schemeClr val="accent1"/>
+            </a:effectRef>
+            <a:fontRef idx="minor">
+              <a:schemeClr val="tx1"/>
+            </a:fontRef>
+          </p:style>
+        </p:cxnSp>
+        <p:cxnSp>
+          <p:nvCxnSpPr>
+            <p:cNvPr id="391" name="Arrow 2"/>
+            <p:cNvCxnSpPr/>
+            <p:nvPr/>
+          </p:nvCxnSpPr>
+          <p:spPr>
+            <a:xfrm>
+              <a:off x="3621024" y="5449824"/>
+              <a:ext cx="557784" cy="0"/>
+            </a:xfrm>
+            <a:prstGeom prst="line">
+              <a:avLst/>
+            </a:prstGeom>
+            <a:ln w="38100">
+              <a:solidFill>
+                <a:srgbClr val="2E9E1F"/>
+              </a:solidFill>
+            </a:ln>
+          </p:spPr>
+          <p:style>
+            <a:lnRef idx="2">
+              <a:schemeClr val="accent1"/>
+            </a:lnRef>
+            <a:fillRef idx="0">
+              <a:schemeClr val="accent1"/>
+            </a:fillRef>
+            <a:effectRef idx="1">
+              <a:schemeClr val="accent1"/>
+            </a:effectRef>
+            <a:fontRef idx="minor">
+              <a:schemeClr val="tx1"/>
+            </a:fontRef>
+          </p:style>
+        </p:cxnSp>
+        <p:cxnSp>
+          <p:nvCxnSpPr>
+            <p:cNvPr id="392" name="Arrow 3"/>
+            <p:cNvCxnSpPr/>
+            <p:nvPr/>
+          </p:nvCxnSpPr>
+          <p:spPr>
+            <a:xfrm>
+              <a:off x="4178808" y="5449824"/>
+              <a:ext cx="0" cy="100584"/>
+            </a:xfrm>
+            <a:prstGeom prst="line">
+              <a:avLst/>
+            </a:prstGeom>
+            <a:ln w="38100">
+              <a:solidFill>
+                <a:srgbClr val="2E9E1F"/>
+              </a:solidFill>
+              <a:tailEnd type="triangle" w="med" len="med"/>
+            </a:ln>
+          </p:spPr>
+          <p:style>
+            <a:lnRef idx="2">
+              <a:schemeClr val="accent1"/>
+            </a:lnRef>
+            <a:fillRef idx="0">
+              <a:schemeClr val="accent1"/>
+            </a:fillRef>
+            <a:effectRef idx="1">
+              <a:schemeClr val="accent1"/>
+            </a:effectRef>
+            <a:fontRef idx="minor">
+              <a:schemeClr val="tx1"/>
+            </a:fontRef>
+          </p:style>
+        </p:cxnSp>
+        <p:sp>
+          <p:nvSpPr>
+            <p:cNvPr id="393" name="Shape 4"/>
+            <p:cNvSpPr/>
+            <p:nvPr/>
+          </p:nvSpPr>
+          <p:spPr>
+            <a:xfrm>
+              <a:off x="3447288" y="5971032"/>
+              <a:ext cx="1463040" cy="182880"/>
+            </a:xfrm>
+            <a:prstGeom prst="roundRect">
+              <a:avLst>
+                <a:gd name="adj" fmla="val 50000"/>
+              </a:avLst>
+            </a:prstGeom>
+            <a:solidFill>
+              <a:srgbClr val="2E9E1F"/>
+            </a:solidFill>
+            <a:ln>
+              <a:noFill/>
+            </a:ln>
+            <a:effectLst/>
+          </p:spPr>
+          <p:style>
+            <a:lnRef idx="1">
+              <a:schemeClr val="accent1"/>
+            </a:lnRef>
+            <a:fillRef idx="3">
+              <a:schemeClr val="accent1"/>
+            </a:fillRef>
+            <a:effectRef idx="2">
+              <a:schemeClr val="accent1"/>
+            </a:effectRef>
+            <a:fontRef idx="minor">
+              <a:schemeClr val="lt1"/>
+            </a:fontRef>
+          </p:style>
+          <p:txBody>
+            <a:bodyPr rtlCol="0" anchor="ctr"/>
+            <a:lstStyle/>
+            <a:p/>
+          </p:txBody>
+        </p:sp>
+        <p:sp>
+          <p:nvSpPr>
+            <p:cNvPr id="394" name="Text 5"/>
+            <p:cNvSpPr txBox="1"/>
+            <p:nvPr/>
+          </p:nvSpPr>
+          <p:spPr>
+            <a:xfrm>
+              <a:off x="3447288" y="5971032"/>
+              <a:ext cx="1463040" cy="182880"/>
+            </a:xfrm>
+            <a:prstGeom prst="rect">
+              <a:avLst/>
+            </a:prstGeom>
+            <a:noFill/>
+          </p:spPr>
+          <p:txBody>
+            <a:bodyPr wrap="square" lIns="0" rIns="0" tIns="0" bIns="0" anchor="ctr">
+              <a:spAutoFit/>
+            </a:bodyPr>
+            <a:lstStyle/>
+            <a:p>
+              <a:pPr algn="ctr"/>
+              <a:r>
+                <a:rPr sz="650" b="1" i="0" spc="60">
+                  <a:solidFill>
+                    <a:srgbClr val="FFFFFF"/>
+                  </a:solidFill>
+                  <a:latin typeface="Trenda IG Text"/>
+                </a:rPr>
+                <a:t>H2 APPROVED → 03 BUILD</a:t>
+              </a:r>
+            </a:p>
+          </p:txBody>
+        </p:sp>
+      </p:grpSp>
+      <p:grpSp>
+        <p:nvGrpSpPr>
+          <p:cNvPr id="395" name="Step 9 highlight"/>
+          <p:cNvGrpSpPr/>
+          <p:nvPr/>
+        </p:nvGrpSpPr>
+        <p:grpSpPr>
+          <a:xfrm>
+            <a:off x="365760" y="1115568"/>
+            <a:ext cx="11457432" cy="5239511"/>
+            <a:chOff x="365760" y="1115568"/>
+            <a:chExt cx="11457432" cy="5239511"/>
+          </a:xfrm>
+        </p:grpSpPr>
+        <p:sp>
+          <p:nvSpPr>
+            <p:cNvPr id="396" name="Shape 1"/>
+            <p:cNvSpPr/>
+            <p:nvPr/>
+          </p:nvSpPr>
+          <p:spPr>
+            <a:xfrm>
+              <a:off x="365760" y="1115568"/>
+              <a:ext cx="11457432" cy="1810512"/>
+            </a:xfrm>
+            <a:prstGeom prst="rect">
+              <a:avLst/>
+            </a:prstGeom>
+            <a:solidFill>
+              <a:srgbClr val="FFFFFF">
+                <a:alpha val="72000"/>
+              </a:srgbClr>
+            </a:solidFill>
+            <a:ln>
+              <a:noFill/>
+            </a:ln>
+            <a:effectLst/>
+          </p:spPr>
+          <p:style>
+            <a:lnRef idx="1">
+              <a:schemeClr val="accent1"/>
+            </a:lnRef>
+            <a:fillRef idx="3">
+              <a:schemeClr val="accent1"/>
+            </a:fillRef>
+            <a:effectRef idx="2">
+              <a:schemeClr val="accent1"/>
+            </a:effectRef>
+            <a:fontRef idx="minor">
+              <a:schemeClr val="lt1"/>
+            </a:fontRef>
+          </p:style>
+          <p:txBody>
+            <a:bodyPr rtlCol="0" anchor="ctr"/>
+            <a:lstStyle/>
+            <a:p/>
+          </p:txBody>
+        </p:sp>
+        <p:sp>
+          <p:nvSpPr>
+            <p:cNvPr id="397" name="Shape 2"/>
+            <p:cNvSpPr/>
+            <p:nvPr/>
+          </p:nvSpPr>
+          <p:spPr>
+            <a:xfrm>
+              <a:off x="365760" y="2926080"/>
+              <a:ext cx="9235440" cy="361188"/>
+            </a:xfrm>
+            <a:prstGeom prst="rect">
+              <a:avLst/>
+            </a:prstGeom>
+            <a:solidFill>
+              <a:srgbClr val="FFFFFF">
+                <a:alpha val="72000"/>
+              </a:srgbClr>
+            </a:solidFill>
+            <a:ln>
+              <a:noFill/>
+            </a:ln>
+            <a:effectLst/>
+          </p:spPr>
+          <p:style>
+            <a:lnRef idx="1">
+              <a:schemeClr val="accent1"/>
+            </a:lnRef>
+            <a:fillRef idx="3">
+              <a:schemeClr val="accent1"/>
+            </a:fillRef>
+            <a:effectRef idx="2">
+              <a:schemeClr val="accent1"/>
+            </a:effectRef>
+            <a:fontRef idx="minor">
+              <a:schemeClr val="lt1"/>
+            </a:fontRef>
+          </p:style>
+          <p:txBody>
+            <a:bodyPr rtlCol="0" anchor="ctr"/>
+            <a:lstStyle/>
+            <a:p/>
+          </p:txBody>
+        </p:sp>
+        <p:sp>
+          <p:nvSpPr>
+            <p:cNvPr id="398" name="Shape 3"/>
+            <p:cNvSpPr/>
+            <p:nvPr/>
+          </p:nvSpPr>
+          <p:spPr>
+            <a:xfrm>
+              <a:off x="11777472" y="2926080"/>
+              <a:ext cx="45720" cy="361188"/>
+            </a:xfrm>
+            <a:prstGeom prst="rect">
+              <a:avLst/>
+            </a:prstGeom>
+            <a:solidFill>
+              <a:srgbClr val="FFFFFF">
+                <a:alpha val="72000"/>
+              </a:srgbClr>
+            </a:solidFill>
+            <a:ln>
+              <a:noFill/>
+            </a:ln>
+            <a:effectLst/>
+          </p:spPr>
+          <p:style>
+            <a:lnRef idx="1">
+              <a:schemeClr val="accent1"/>
+            </a:lnRef>
+            <a:fillRef idx="3">
+              <a:schemeClr val="accent1"/>
+            </a:fillRef>
+            <a:effectRef idx="2">
+              <a:schemeClr val="accent1"/>
+            </a:effectRef>
+            <a:fontRef idx="minor">
+              <a:schemeClr val="lt1"/>
+            </a:fontRef>
+          </p:style>
+          <p:txBody>
+            <a:bodyPr rtlCol="0" anchor="ctr"/>
+            <a:lstStyle/>
+            <a:p/>
+          </p:txBody>
+        </p:sp>
+        <p:sp>
+          <p:nvSpPr>
+            <p:cNvPr id="399" name="Shape 4"/>
+            <p:cNvSpPr/>
+            <p:nvPr/>
+          </p:nvSpPr>
+          <p:spPr>
+            <a:xfrm>
+              <a:off x="365760" y="3287268"/>
+              <a:ext cx="4206240" cy="525779"/>
+            </a:xfrm>
+            <a:prstGeom prst="rect">
+              <a:avLst/>
+            </a:prstGeom>
+            <a:solidFill>
+              <a:srgbClr val="FFFFFF">
+                <a:alpha val="72000"/>
+              </a:srgbClr>
+            </a:solidFill>
+            <a:ln>
+              <a:noFill/>
+            </a:ln>
+            <a:effectLst/>
+          </p:spPr>
+          <p:style>
+            <a:lnRef idx="1">
+              <a:schemeClr val="accent1"/>
+            </a:lnRef>
+            <a:fillRef idx="3">
+              <a:schemeClr val="accent1"/>
+            </a:fillRef>
+            <a:effectRef idx="2">
+              <a:schemeClr val="accent1"/>
+            </a:effectRef>
+            <a:fontRef idx="minor">
+              <a:schemeClr val="lt1"/>
+            </a:fontRef>
+          </p:style>
+          <p:txBody>
+            <a:bodyPr rtlCol="0" anchor="ctr"/>
+            <a:lstStyle/>
+            <a:p/>
+          </p:txBody>
+        </p:sp>
+        <p:sp>
+          <p:nvSpPr>
+            <p:cNvPr id="400" name="Shape 5"/>
+            <p:cNvSpPr/>
+            <p:nvPr/>
+          </p:nvSpPr>
+          <p:spPr>
+            <a:xfrm>
+              <a:off x="7168896" y="3287268"/>
+              <a:ext cx="2432304" cy="525779"/>
+            </a:xfrm>
+            <a:prstGeom prst="rect">
+              <a:avLst/>
+            </a:prstGeom>
+            <a:solidFill>
+              <a:srgbClr val="FFFFFF">
+                <a:alpha val="72000"/>
+              </a:srgbClr>
+            </a:solidFill>
+            <a:ln>
+              <a:noFill/>
+            </a:ln>
+            <a:effectLst/>
+          </p:spPr>
+          <p:style>
+            <a:lnRef idx="1">
+              <a:schemeClr val="accent1"/>
+            </a:lnRef>
+            <a:fillRef idx="3">
+              <a:schemeClr val="accent1"/>
+            </a:fillRef>
+            <a:effectRef idx="2">
+              <a:schemeClr val="accent1"/>
+            </a:effectRef>
+            <a:fontRef idx="minor">
+              <a:schemeClr val="lt1"/>
+            </a:fontRef>
+          </p:style>
+          <p:txBody>
+            <a:bodyPr rtlCol="0" anchor="ctr"/>
+            <a:lstStyle/>
+            <a:p/>
+          </p:txBody>
+        </p:sp>
+        <p:sp>
+          <p:nvSpPr>
+            <p:cNvPr id="401" name="Shape 6"/>
+            <p:cNvSpPr/>
+            <p:nvPr/>
+          </p:nvSpPr>
+          <p:spPr>
+            <a:xfrm>
+              <a:off x="11777472" y="3287268"/>
+              <a:ext cx="45720" cy="525779"/>
+            </a:xfrm>
+            <a:prstGeom prst="rect">
+              <a:avLst/>
+            </a:prstGeom>
+            <a:solidFill>
+              <a:srgbClr val="FFFFFF">
+                <a:alpha val="72000"/>
+              </a:srgbClr>
+            </a:solidFill>
+            <a:ln>
+              <a:noFill/>
+            </a:ln>
+            <a:effectLst/>
+          </p:spPr>
+          <p:style>
+            <a:lnRef idx="1">
+              <a:schemeClr val="accent1"/>
+            </a:lnRef>
+            <a:fillRef idx="3">
+              <a:schemeClr val="accent1"/>
+            </a:fillRef>
+            <a:effectRef idx="2">
+              <a:schemeClr val="accent1"/>
+            </a:effectRef>
+            <a:fontRef idx="minor">
+              <a:schemeClr val="lt1"/>
+            </a:fontRef>
+          </p:style>
+          <p:txBody>
+            <a:bodyPr rtlCol="0" anchor="ctr"/>
+            <a:lstStyle/>
+            <a:p/>
+          </p:txBody>
+        </p:sp>
+        <p:sp>
+          <p:nvSpPr>
+            <p:cNvPr id="402" name="Shape 7"/>
+            <p:cNvSpPr/>
+            <p:nvPr/>
+          </p:nvSpPr>
+          <p:spPr>
+            <a:xfrm>
+              <a:off x="365760" y="3813048"/>
+              <a:ext cx="9235440" cy="36576"/>
+            </a:xfrm>
+            <a:prstGeom prst="rect">
+              <a:avLst/>
+            </a:prstGeom>
+            <a:solidFill>
+              <a:srgbClr val="FFFFFF">
+                <a:alpha val="72000"/>
+              </a:srgbClr>
+            </a:solidFill>
+            <a:ln>
+              <a:noFill/>
+            </a:ln>
+            <a:effectLst/>
+          </p:spPr>
+          <p:style>
+            <a:lnRef idx="1">
+              <a:schemeClr val="accent1"/>
+            </a:lnRef>
+            <a:fillRef idx="3">
+              <a:schemeClr val="accent1"/>
+            </a:fillRef>
+            <a:effectRef idx="2">
+              <a:schemeClr val="accent1"/>
+            </a:effectRef>
+            <a:fontRef idx="minor">
+              <a:schemeClr val="lt1"/>
+            </a:fontRef>
+          </p:style>
+          <p:txBody>
+            <a:bodyPr rtlCol="0" anchor="ctr"/>
+            <a:lstStyle/>
+            <a:p/>
+          </p:txBody>
+        </p:sp>
+        <p:sp>
+          <p:nvSpPr>
+            <p:cNvPr id="403" name="Shape 8"/>
+            <p:cNvSpPr/>
+            <p:nvPr/>
+          </p:nvSpPr>
+          <p:spPr>
+            <a:xfrm>
+              <a:off x="11777472" y="3813048"/>
+              <a:ext cx="45720" cy="36576"/>
+            </a:xfrm>
+            <a:prstGeom prst="rect">
+              <a:avLst/>
+            </a:prstGeom>
+            <a:solidFill>
+              <a:srgbClr val="FFFFFF">
+                <a:alpha val="72000"/>
+              </a:srgbClr>
+            </a:solidFill>
+            <a:ln>
+              <a:noFill/>
+            </a:ln>
+            <a:effectLst/>
+          </p:spPr>
+          <p:style>
+            <a:lnRef idx="1">
+              <a:schemeClr val="accent1"/>
+            </a:lnRef>
+            <a:fillRef idx="3">
+              <a:schemeClr val="accent1"/>
+            </a:fillRef>
+            <a:effectRef idx="2">
+              <a:schemeClr val="accent1"/>
+            </a:effectRef>
+            <a:fontRef idx="minor">
+              <a:schemeClr val="lt1"/>
+            </a:fontRef>
+          </p:style>
+          <p:txBody>
+            <a:bodyPr rtlCol="0" anchor="ctr"/>
+            <a:lstStyle/>
+            <a:p/>
+          </p:txBody>
+        </p:sp>
+        <p:sp>
+          <p:nvSpPr>
+            <p:cNvPr id="404" name="Shape 9"/>
+            <p:cNvSpPr/>
+            <p:nvPr/>
+          </p:nvSpPr>
+          <p:spPr>
+            <a:xfrm>
+              <a:off x="365760" y="3849624"/>
+              <a:ext cx="4142231" cy="36576"/>
+            </a:xfrm>
+            <a:prstGeom prst="rect">
+              <a:avLst/>
+            </a:prstGeom>
+            <a:solidFill>
+              <a:srgbClr val="FFFFFF">
+                <a:alpha val="72000"/>
+              </a:srgbClr>
+            </a:solidFill>
+            <a:ln>
+              <a:noFill/>
+            </a:ln>
+            <a:effectLst/>
+          </p:spPr>
+          <p:style>
+            <a:lnRef idx="1">
+              <a:schemeClr val="accent1"/>
+            </a:lnRef>
+            <a:fillRef idx="3">
+              <a:schemeClr val="accent1"/>
+            </a:fillRef>
+            <a:effectRef idx="2">
+              <a:schemeClr val="accent1"/>
+            </a:effectRef>
+            <a:fontRef idx="minor">
+              <a:schemeClr val="lt1"/>
+            </a:fontRef>
+          </p:style>
+          <p:txBody>
+            <a:bodyPr rtlCol="0" anchor="ctr"/>
+            <a:lstStyle/>
+            <a:p/>
+          </p:txBody>
+        </p:sp>
+        <p:sp>
+          <p:nvSpPr>
+            <p:cNvPr id="405" name="Shape 10"/>
+            <p:cNvSpPr/>
+            <p:nvPr/>
+          </p:nvSpPr>
+          <p:spPr>
+            <a:xfrm>
+              <a:off x="7232904" y="3849624"/>
+              <a:ext cx="2368296" cy="36576"/>
+            </a:xfrm>
+            <a:prstGeom prst="rect">
+              <a:avLst/>
+            </a:prstGeom>
+            <a:solidFill>
+              <a:srgbClr val="FFFFFF">
+                <a:alpha val="72000"/>
+              </a:srgbClr>
+            </a:solidFill>
+            <a:ln>
+              <a:noFill/>
+            </a:ln>
+            <a:effectLst/>
+          </p:spPr>
+          <p:style>
+            <a:lnRef idx="1">
+              <a:schemeClr val="accent1"/>
+            </a:lnRef>
+            <a:fillRef idx="3">
+              <a:schemeClr val="accent1"/>
+            </a:fillRef>
+            <a:effectRef idx="2">
+              <a:schemeClr val="accent1"/>
+            </a:effectRef>
+            <a:fontRef idx="minor">
+              <a:schemeClr val="lt1"/>
+            </a:fontRef>
+          </p:style>
+          <p:txBody>
+            <a:bodyPr rtlCol="0" anchor="ctr"/>
+            <a:lstStyle/>
+            <a:p/>
+          </p:txBody>
+        </p:sp>
+        <p:sp>
+          <p:nvSpPr>
+            <p:cNvPr id="406" name="Shape 11"/>
+            <p:cNvSpPr/>
+            <p:nvPr/>
+          </p:nvSpPr>
+          <p:spPr>
+            <a:xfrm>
+              <a:off x="11777472" y="3849624"/>
+              <a:ext cx="45720" cy="36576"/>
+            </a:xfrm>
+            <a:prstGeom prst="rect">
+              <a:avLst/>
+            </a:prstGeom>
+            <a:solidFill>
+              <a:srgbClr val="FFFFFF">
+                <a:alpha val="72000"/>
+              </a:srgbClr>
+            </a:solidFill>
+            <a:ln>
+              <a:noFill/>
+            </a:ln>
+            <a:effectLst/>
+          </p:spPr>
+          <p:style>
+            <a:lnRef idx="1">
+              <a:schemeClr val="accent1"/>
+            </a:lnRef>
+            <a:fillRef idx="3">
+              <a:schemeClr val="accent1"/>
+            </a:fillRef>
+            <a:effectRef idx="2">
+              <a:schemeClr val="accent1"/>
+            </a:effectRef>
+            <a:fontRef idx="minor">
+              <a:schemeClr val="lt1"/>
+            </a:fontRef>
+          </p:style>
+          <p:txBody>
+            <a:bodyPr rtlCol="0" anchor="ctr"/>
+            <a:lstStyle/>
+            <a:p/>
+          </p:txBody>
+        </p:sp>
+        <p:sp>
+          <p:nvSpPr>
+            <p:cNvPr id="407" name="Shape 12"/>
+            <p:cNvSpPr/>
+            <p:nvPr/>
+          </p:nvSpPr>
+          <p:spPr>
+            <a:xfrm>
+              <a:off x="365760" y="3886200"/>
+              <a:ext cx="2423160" cy="91439"/>
+            </a:xfrm>
+            <a:prstGeom prst="rect">
+              <a:avLst/>
+            </a:prstGeom>
+            <a:solidFill>
+              <a:srgbClr val="FFFFFF">
+                <a:alpha val="72000"/>
+              </a:srgbClr>
+            </a:solidFill>
+            <a:ln>
+              <a:noFill/>
+            </a:ln>
+            <a:effectLst/>
+          </p:spPr>
+          <p:style>
+            <a:lnRef idx="1">
+              <a:schemeClr val="accent1"/>
+            </a:lnRef>
+            <a:fillRef idx="3">
+              <a:schemeClr val="accent1"/>
+            </a:fillRef>
+            <a:effectRef idx="2">
+              <a:schemeClr val="accent1"/>
+            </a:effectRef>
+            <a:fontRef idx="minor">
+              <a:schemeClr val="lt1"/>
+            </a:fontRef>
+          </p:style>
+          <p:txBody>
+            <a:bodyPr rtlCol="0" anchor="ctr"/>
+            <a:lstStyle/>
+            <a:p/>
+          </p:txBody>
+        </p:sp>
+        <p:sp>
+          <p:nvSpPr>
+            <p:cNvPr id="408" name="Shape 13"/>
+            <p:cNvSpPr/>
+            <p:nvPr/>
+          </p:nvSpPr>
+          <p:spPr>
+            <a:xfrm>
+              <a:off x="4453128" y="3886200"/>
+              <a:ext cx="54863" cy="91439"/>
+            </a:xfrm>
+            <a:prstGeom prst="rect">
+              <a:avLst/>
+            </a:prstGeom>
+            <a:solidFill>
+              <a:srgbClr val="FFFFFF">
+                <a:alpha val="72000"/>
+              </a:srgbClr>
+            </a:solidFill>
+            <a:ln>
+              <a:noFill/>
+            </a:ln>
+            <a:effectLst/>
+          </p:spPr>
+          <p:style>
+            <a:lnRef idx="1">
+              <a:schemeClr val="accent1"/>
+            </a:lnRef>
+            <a:fillRef idx="3">
+              <a:schemeClr val="accent1"/>
+            </a:fillRef>
+            <a:effectRef idx="2">
+              <a:schemeClr val="accent1"/>
+            </a:effectRef>
+            <a:fontRef idx="minor">
+              <a:schemeClr val="lt1"/>
+            </a:fontRef>
+          </p:style>
+          <p:txBody>
+            <a:bodyPr rtlCol="0" anchor="ctr"/>
+            <a:lstStyle/>
+            <a:p/>
+          </p:txBody>
+        </p:sp>
+        <p:sp>
+          <p:nvSpPr>
+            <p:cNvPr id="409" name="Shape 14"/>
+            <p:cNvSpPr/>
+            <p:nvPr/>
+          </p:nvSpPr>
+          <p:spPr>
+            <a:xfrm>
+              <a:off x="7232904" y="3886200"/>
+              <a:ext cx="2368296" cy="91439"/>
+            </a:xfrm>
+            <a:prstGeom prst="rect">
+              <a:avLst/>
+            </a:prstGeom>
+            <a:solidFill>
+              <a:srgbClr val="FFFFFF">
+                <a:alpha val="72000"/>
+              </a:srgbClr>
+            </a:solidFill>
+            <a:ln>
+              <a:noFill/>
+            </a:ln>
+            <a:effectLst/>
+          </p:spPr>
+          <p:style>
+            <a:lnRef idx="1">
+              <a:schemeClr val="accent1"/>
+            </a:lnRef>
+            <a:fillRef idx="3">
+              <a:schemeClr val="accent1"/>
+            </a:fillRef>
+            <a:effectRef idx="2">
+              <a:schemeClr val="accent1"/>
+            </a:effectRef>
+            <a:fontRef idx="minor">
+              <a:schemeClr val="lt1"/>
+            </a:fontRef>
+          </p:style>
+          <p:txBody>
+            <a:bodyPr rtlCol="0" anchor="ctr"/>
+            <a:lstStyle/>
+            <a:p/>
+          </p:txBody>
+        </p:sp>
+        <p:sp>
+          <p:nvSpPr>
+            <p:cNvPr id="410" name="Shape 15"/>
+            <p:cNvSpPr/>
+            <p:nvPr/>
+          </p:nvSpPr>
+          <p:spPr>
+            <a:xfrm>
+              <a:off x="11777472" y="3886200"/>
+              <a:ext cx="45720" cy="91439"/>
+            </a:xfrm>
+            <a:prstGeom prst="rect">
+              <a:avLst/>
+            </a:prstGeom>
+            <a:solidFill>
+              <a:srgbClr val="FFFFFF">
+                <a:alpha val="72000"/>
+              </a:srgbClr>
+            </a:solidFill>
+            <a:ln>
+              <a:noFill/>
+            </a:ln>
+            <a:effectLst/>
+          </p:spPr>
+          <p:style>
+            <a:lnRef idx="1">
+              <a:schemeClr val="accent1"/>
+            </a:lnRef>
+            <a:fillRef idx="3">
+              <a:schemeClr val="accent1"/>
+            </a:fillRef>
+            <a:effectRef idx="2">
+              <a:schemeClr val="accent1"/>
+            </a:effectRef>
+            <a:fontRef idx="minor">
+              <a:schemeClr val="lt1"/>
+            </a:fontRef>
+          </p:style>
+          <p:txBody>
+            <a:bodyPr rtlCol="0" anchor="ctr"/>
+            <a:lstStyle/>
+            <a:p/>
+          </p:txBody>
+        </p:sp>
+        <p:sp>
+          <p:nvSpPr>
+            <p:cNvPr id="411" name="Shape 16"/>
+            <p:cNvSpPr/>
+            <p:nvPr/>
+          </p:nvSpPr>
+          <p:spPr>
+            <a:xfrm>
+              <a:off x="365760" y="3977639"/>
+              <a:ext cx="2423160" cy="475488"/>
+            </a:xfrm>
+            <a:prstGeom prst="rect">
+              <a:avLst/>
+            </a:prstGeom>
+            <a:solidFill>
+              <a:srgbClr val="FFFFFF">
+                <a:alpha val="72000"/>
+              </a:srgbClr>
+            </a:solidFill>
+            <a:ln>
+              <a:noFill/>
+            </a:ln>
+            <a:effectLst/>
+          </p:spPr>
+          <p:style>
+            <a:lnRef idx="1">
+              <a:schemeClr val="accent1"/>
+            </a:lnRef>
+            <a:fillRef idx="3">
+              <a:schemeClr val="accent1"/>
+            </a:fillRef>
+            <a:effectRef idx="2">
+              <a:schemeClr val="accent1"/>
+            </a:effectRef>
+            <a:fontRef idx="minor">
+              <a:schemeClr val="lt1"/>
+            </a:fontRef>
+          </p:style>
+          <p:txBody>
+            <a:bodyPr rtlCol="0" anchor="ctr"/>
+            <a:lstStyle/>
+            <a:p/>
+          </p:txBody>
+        </p:sp>
+        <p:sp>
+          <p:nvSpPr>
+            <p:cNvPr id="412" name="Shape 17"/>
+            <p:cNvSpPr/>
+            <p:nvPr/>
+          </p:nvSpPr>
+          <p:spPr>
+            <a:xfrm>
+              <a:off x="4453128" y="3977639"/>
+              <a:ext cx="54863" cy="475488"/>
+            </a:xfrm>
+            <a:prstGeom prst="rect">
+              <a:avLst/>
+            </a:prstGeom>
+            <a:solidFill>
+              <a:srgbClr val="FFFFFF">
+                <a:alpha val="72000"/>
+              </a:srgbClr>
+            </a:solidFill>
+            <a:ln>
+              <a:noFill/>
+            </a:ln>
+            <a:effectLst/>
+          </p:spPr>
+          <p:style>
+            <a:lnRef idx="1">
+              <a:schemeClr val="accent1"/>
+            </a:lnRef>
+            <a:fillRef idx="3">
+              <a:schemeClr val="accent1"/>
+            </a:fillRef>
+            <a:effectRef idx="2">
+              <a:schemeClr val="accent1"/>
+            </a:effectRef>
+            <a:fontRef idx="minor">
+              <a:schemeClr val="lt1"/>
+            </a:fontRef>
+          </p:style>
+          <p:txBody>
+            <a:bodyPr rtlCol="0" anchor="ctr"/>
+            <a:lstStyle/>
+            <a:p/>
+          </p:txBody>
+        </p:sp>
+        <p:sp>
+          <p:nvSpPr>
+            <p:cNvPr id="413" name="Shape 18"/>
+            <p:cNvSpPr/>
+            <p:nvPr/>
+          </p:nvSpPr>
+          <p:spPr>
+            <a:xfrm>
+              <a:off x="7232904" y="3977639"/>
+              <a:ext cx="4590288" cy="475488"/>
+            </a:xfrm>
+            <a:prstGeom prst="rect">
+              <a:avLst/>
+            </a:prstGeom>
+            <a:solidFill>
+              <a:srgbClr val="FFFFFF">
+                <a:alpha val="72000"/>
+              </a:srgbClr>
+            </a:solidFill>
+            <a:ln>
+              <a:noFill/>
+            </a:ln>
+            <a:effectLst/>
+          </p:spPr>
+          <p:style>
+            <a:lnRef idx="1">
+              <a:schemeClr val="accent1"/>
+            </a:lnRef>
+            <a:fillRef idx="3">
+              <a:schemeClr val="accent1"/>
+            </a:fillRef>
+            <a:effectRef idx="2">
+              <a:schemeClr val="accent1"/>
+            </a:effectRef>
+            <a:fontRef idx="minor">
+              <a:schemeClr val="lt1"/>
+            </a:fontRef>
+          </p:style>
+          <p:txBody>
+            <a:bodyPr rtlCol="0" anchor="ctr"/>
+            <a:lstStyle/>
+            <a:p/>
+          </p:txBody>
+        </p:sp>
+        <p:sp>
+          <p:nvSpPr>
+            <p:cNvPr id="414" name="Shape 19"/>
+            <p:cNvSpPr/>
+            <p:nvPr/>
+          </p:nvSpPr>
+          <p:spPr>
+            <a:xfrm>
+              <a:off x="365760" y="4453128"/>
+              <a:ext cx="4142231" cy="36576"/>
+            </a:xfrm>
+            <a:prstGeom prst="rect">
+              <a:avLst/>
+            </a:prstGeom>
+            <a:solidFill>
+              <a:srgbClr val="FFFFFF">
+                <a:alpha val="72000"/>
+              </a:srgbClr>
+            </a:solidFill>
+            <a:ln>
+              <a:noFill/>
+            </a:ln>
+            <a:effectLst/>
+          </p:spPr>
+          <p:style>
+            <a:lnRef idx="1">
+              <a:schemeClr val="accent1"/>
+            </a:lnRef>
+            <a:fillRef idx="3">
+              <a:schemeClr val="accent1"/>
+            </a:fillRef>
+            <a:effectRef idx="2">
+              <a:schemeClr val="accent1"/>
+            </a:effectRef>
+            <a:fontRef idx="minor">
+              <a:schemeClr val="lt1"/>
+            </a:fontRef>
+          </p:style>
+          <p:txBody>
+            <a:bodyPr rtlCol="0" anchor="ctr"/>
+            <a:lstStyle/>
+            <a:p/>
+          </p:txBody>
+        </p:sp>
+        <p:sp>
+          <p:nvSpPr>
+            <p:cNvPr id="415" name="Shape 20"/>
+            <p:cNvSpPr/>
+            <p:nvPr/>
+          </p:nvSpPr>
+          <p:spPr>
+            <a:xfrm>
+              <a:off x="7232904" y="4453128"/>
+              <a:ext cx="4590288" cy="36576"/>
+            </a:xfrm>
+            <a:prstGeom prst="rect">
+              <a:avLst/>
+            </a:prstGeom>
+            <a:solidFill>
+              <a:srgbClr val="FFFFFF">
+                <a:alpha val="72000"/>
+              </a:srgbClr>
+            </a:solidFill>
+            <a:ln>
+              <a:noFill/>
+            </a:ln>
+            <a:effectLst/>
+          </p:spPr>
+          <p:style>
+            <a:lnRef idx="1">
+              <a:schemeClr val="accent1"/>
+            </a:lnRef>
+            <a:fillRef idx="3">
+              <a:schemeClr val="accent1"/>
+            </a:fillRef>
+            <a:effectRef idx="2">
+              <a:schemeClr val="accent1"/>
+            </a:effectRef>
+            <a:fontRef idx="minor">
+              <a:schemeClr val="lt1"/>
+            </a:fontRef>
+          </p:style>
+          <p:txBody>
+            <a:bodyPr rtlCol="0" anchor="ctr"/>
+            <a:lstStyle/>
+            <a:p/>
+          </p:txBody>
+        </p:sp>
+        <p:sp>
+          <p:nvSpPr>
+            <p:cNvPr id="416" name="Shape 21"/>
+            <p:cNvSpPr/>
+            <p:nvPr/>
+          </p:nvSpPr>
+          <p:spPr>
+            <a:xfrm>
+              <a:off x="365760" y="4489704"/>
+              <a:ext cx="11457432" cy="1024128"/>
+            </a:xfrm>
+            <a:prstGeom prst="rect">
+              <a:avLst/>
+            </a:prstGeom>
+            <a:solidFill>
+              <a:srgbClr val="FFFFFF">
+                <a:alpha val="72000"/>
+              </a:srgbClr>
+            </a:solidFill>
+            <a:ln>
+              <a:noFill/>
+            </a:ln>
+            <a:effectLst/>
+          </p:spPr>
+          <p:style>
+            <a:lnRef idx="1">
+              <a:schemeClr val="accent1"/>
+            </a:lnRef>
+            <a:fillRef idx="3">
+              <a:schemeClr val="accent1"/>
+            </a:fillRef>
+            <a:effectRef idx="2">
+              <a:schemeClr val="accent1"/>
+            </a:effectRef>
+            <a:fontRef idx="minor">
+              <a:schemeClr val="lt1"/>
+            </a:fontRef>
+          </p:style>
+          <p:txBody>
+            <a:bodyPr rtlCol="0" anchor="ctr"/>
+            <a:lstStyle/>
+            <a:p/>
+          </p:txBody>
+        </p:sp>
+        <p:sp>
+          <p:nvSpPr>
+            <p:cNvPr id="417" name="Shape 22"/>
+            <p:cNvSpPr/>
+            <p:nvPr/>
+          </p:nvSpPr>
+          <p:spPr>
+            <a:xfrm>
+              <a:off x="365760" y="5513832"/>
+              <a:ext cx="4206240" cy="457200"/>
+            </a:xfrm>
+            <a:prstGeom prst="rect">
+              <a:avLst/>
+            </a:prstGeom>
+            <a:solidFill>
+              <a:srgbClr val="FFFFFF">
+                <a:alpha val="72000"/>
+              </a:srgbClr>
+            </a:solidFill>
+            <a:ln>
+              <a:noFill/>
+            </a:ln>
+            <a:effectLst/>
+          </p:spPr>
+          <p:style>
+            <a:lnRef idx="1">
+              <a:schemeClr val="accent1"/>
+            </a:lnRef>
+            <a:fillRef idx="3">
+              <a:schemeClr val="accent1"/>
+            </a:fillRef>
+            <a:effectRef idx="2">
+              <a:schemeClr val="accent1"/>
+            </a:effectRef>
+            <a:fontRef idx="minor">
+              <a:schemeClr val="lt1"/>
+            </a:fontRef>
+          </p:style>
+          <p:txBody>
+            <a:bodyPr rtlCol="0" anchor="ctr"/>
+            <a:lstStyle/>
+            <a:p/>
+          </p:txBody>
+        </p:sp>
+        <p:sp>
+          <p:nvSpPr>
+            <p:cNvPr id="418" name="Shape 23"/>
+            <p:cNvSpPr/>
+            <p:nvPr/>
+          </p:nvSpPr>
+          <p:spPr>
+            <a:xfrm>
+              <a:off x="6967727" y="5513832"/>
+              <a:ext cx="4855464" cy="457200"/>
+            </a:xfrm>
+            <a:prstGeom prst="rect">
+              <a:avLst/>
+            </a:prstGeom>
+            <a:solidFill>
+              <a:srgbClr val="FFFFFF">
+                <a:alpha val="72000"/>
+              </a:srgbClr>
+            </a:solidFill>
+            <a:ln>
+              <a:noFill/>
+            </a:ln>
+            <a:effectLst/>
+          </p:spPr>
+          <p:style>
+            <a:lnRef idx="1">
+              <a:schemeClr val="accent1"/>
+            </a:lnRef>
+            <a:fillRef idx="3">
+              <a:schemeClr val="accent1"/>
+            </a:fillRef>
+            <a:effectRef idx="2">
+              <a:schemeClr val="accent1"/>
+            </a:effectRef>
+            <a:fontRef idx="minor">
+              <a:schemeClr val="lt1"/>
+            </a:fontRef>
+          </p:style>
+          <p:txBody>
+            <a:bodyPr rtlCol="0" anchor="ctr"/>
+            <a:lstStyle/>
+            <a:p/>
+          </p:txBody>
+        </p:sp>
+        <p:sp>
+          <p:nvSpPr>
+            <p:cNvPr id="419" name="Shape 24"/>
+            <p:cNvSpPr/>
+            <p:nvPr/>
+          </p:nvSpPr>
+          <p:spPr>
+            <a:xfrm>
+              <a:off x="365760" y="5971032"/>
+              <a:ext cx="11457432" cy="384047"/>
+            </a:xfrm>
+            <a:prstGeom prst="rect">
+              <a:avLst/>
+            </a:prstGeom>
+            <a:solidFill>
+              <a:srgbClr val="FFFFFF">
+                <a:alpha val="72000"/>
+              </a:srgbClr>
+            </a:solidFill>
+            <a:ln>
+              <a:noFill/>
+            </a:ln>
+            <a:effectLst/>
+          </p:spPr>
+          <p:style>
+            <a:lnRef idx="1">
+              <a:schemeClr val="accent1"/>
+            </a:lnRef>
+            <a:fillRef idx="3">
+              <a:schemeClr val="accent1"/>
+            </a:fillRef>
+            <a:effectRef idx="2">
+              <a:schemeClr val="accent1"/>
+            </a:effectRef>
+            <a:fontRef idx="minor">
+              <a:schemeClr val="lt1"/>
+            </a:fontRef>
+          </p:style>
+          <p:txBody>
+            <a:bodyPr rtlCol="0" anchor="ctr"/>
+            <a:lstStyle/>
+            <a:p/>
+          </p:txBody>
+        </p:sp>
+        <p:sp>
+          <p:nvSpPr>
+            <p:cNvPr id="420" name="Shape 25"/>
+            <p:cNvSpPr/>
+            <p:nvPr/>
+          </p:nvSpPr>
+          <p:spPr>
+            <a:xfrm>
+              <a:off x="4581144" y="3296412"/>
+              <a:ext cx="1289304" cy="274320"/>
+            </a:xfrm>
+            <a:prstGeom prst="roundRect">
+              <a:avLst>
+                <a:gd name="adj" fmla="val 8000"/>
+              </a:avLst>
+            </a:prstGeom>
+            <a:noFill/>
+            <a:ln w="38100">
+              <a:solidFill>
+                <a:srgbClr val="FA8B35"/>
+              </a:solidFill>
+            </a:ln>
+            <a:effectLst/>
+          </p:spPr>
+          <p:style>
+            <a:lnRef idx="1">
+              <a:schemeClr val="accent1"/>
+            </a:lnRef>
+            <a:fillRef idx="3">
+              <a:schemeClr val="accent1"/>
+            </a:fillRef>
+            <a:effectRef idx="2">
+              <a:schemeClr val="accent1"/>
+            </a:effectRef>
+            <a:fontRef idx="minor">
+              <a:schemeClr val="lt1"/>
+            </a:fontRef>
+          </p:style>
+          <p:txBody>
+            <a:bodyPr rtlCol="0" anchor="ctr"/>
+            <a:lstStyle/>
+            <a:p/>
+          </p:txBody>
+        </p:sp>
+        <p:sp>
+          <p:nvSpPr>
+            <p:cNvPr id="421" name="Shape 26"/>
+            <p:cNvSpPr/>
+            <p:nvPr/>
+          </p:nvSpPr>
+          <p:spPr>
+            <a:xfrm>
+              <a:off x="5870448" y="3296412"/>
+              <a:ext cx="1289304" cy="274320"/>
+            </a:xfrm>
+            <a:prstGeom prst="roundRect">
+              <a:avLst>
+                <a:gd name="adj" fmla="val 8000"/>
+              </a:avLst>
+            </a:prstGeom>
+            <a:noFill/>
+            <a:ln w="38100">
+              <a:solidFill>
+                <a:srgbClr val="FA8B35"/>
+              </a:solidFill>
+            </a:ln>
+            <a:effectLst/>
+          </p:spPr>
+          <p:style>
+            <a:lnRef idx="1">
+              <a:schemeClr val="accent1"/>
+            </a:lnRef>
+            <a:fillRef idx="3">
+              <a:schemeClr val="accent1"/>
+            </a:fillRef>
+            <a:effectRef idx="2">
+              <a:schemeClr val="accent1"/>
+            </a:effectRef>
+            <a:fontRef idx="minor">
+              <a:schemeClr val="lt1"/>
+            </a:fontRef>
+          </p:style>
+          <p:txBody>
+            <a:bodyPr rtlCol="0" anchor="ctr"/>
+            <a:lstStyle/>
+            <a:p/>
+          </p:txBody>
+        </p:sp>
+        <p:sp>
+          <p:nvSpPr>
+            <p:cNvPr id="422" name="Shape 27"/>
+            <p:cNvSpPr/>
+            <p:nvPr/>
+          </p:nvSpPr>
+          <p:spPr>
+            <a:xfrm>
+              <a:off x="4581144" y="3529584"/>
+              <a:ext cx="1289304" cy="274320"/>
+            </a:xfrm>
+            <a:prstGeom prst="roundRect">
+              <a:avLst>
+                <a:gd name="adj" fmla="val 8000"/>
+              </a:avLst>
+            </a:prstGeom>
+            <a:noFill/>
+            <a:ln w="38100">
+              <a:solidFill>
+                <a:srgbClr val="FA8B35"/>
+              </a:solidFill>
+            </a:ln>
+            <a:effectLst/>
+          </p:spPr>
+          <p:style>
+            <a:lnRef idx="1">
+              <a:schemeClr val="accent1"/>
+            </a:lnRef>
+            <a:fillRef idx="3">
+              <a:schemeClr val="accent1"/>
+            </a:fillRef>
+            <a:effectRef idx="2">
+              <a:schemeClr val="accent1"/>
+            </a:effectRef>
+            <a:fontRef idx="minor">
+              <a:schemeClr val="lt1"/>
+            </a:fontRef>
+          </p:style>
+          <p:txBody>
+            <a:bodyPr rtlCol="0" anchor="ctr"/>
+            <a:lstStyle/>
+            <a:p/>
+          </p:txBody>
+        </p:sp>
+        <p:sp>
+          <p:nvSpPr>
+            <p:cNvPr id="423" name="Shape 28"/>
+            <p:cNvSpPr/>
+            <p:nvPr/>
+          </p:nvSpPr>
+          <p:spPr>
+            <a:xfrm>
+              <a:off x="9564624" y="2889504"/>
+              <a:ext cx="2249423" cy="1124711"/>
+            </a:xfrm>
+            <a:prstGeom prst="roundRect">
+              <a:avLst>
+                <a:gd name="adj" fmla="val 8000"/>
+              </a:avLst>
+            </a:prstGeom>
+            <a:noFill/>
+            <a:ln w="38100">
+              <a:solidFill>
+                <a:srgbClr val="FA8B35"/>
+              </a:solidFill>
+            </a:ln>
+            <a:effectLst/>
+          </p:spPr>
+          <p:style>
+            <a:lnRef idx="1">
+              <a:schemeClr val="accent1"/>
+            </a:lnRef>
+            <a:fillRef idx="3">
+              <a:schemeClr val="accent1"/>
+            </a:fillRef>
+            <a:effectRef idx="2">
+              <a:schemeClr val="accent1"/>
+            </a:effectRef>
+            <a:fontRef idx="minor">
+              <a:schemeClr val="lt1"/>
+            </a:fontRef>
+          </p:style>
+          <p:txBody>
+            <a:bodyPr rtlCol="0" anchor="ctr"/>
+            <a:lstStyle/>
+            <a:p/>
+          </p:txBody>
+        </p:sp>
+        <p:sp>
+          <p:nvSpPr>
+            <p:cNvPr id="424" name="Shape 29"/>
+            <p:cNvSpPr/>
+            <p:nvPr/>
+          </p:nvSpPr>
+          <p:spPr>
+            <a:xfrm>
+              <a:off x="4599432" y="5550408"/>
+              <a:ext cx="2340863" cy="420624"/>
+            </a:xfrm>
+            <a:prstGeom prst="roundRect">
+              <a:avLst>
+                <a:gd name="adj" fmla="val 8000"/>
+              </a:avLst>
+            </a:prstGeom>
+            <a:noFill/>
+            <a:ln w="38100">
+              <a:solidFill>
+                <a:srgbClr val="FA8B35"/>
+              </a:solidFill>
+            </a:ln>
+            <a:effectLst/>
+          </p:spPr>
+          <p:style>
+            <a:lnRef idx="1">
+              <a:schemeClr val="accent1"/>
+            </a:lnRef>
+            <a:fillRef idx="3">
+              <a:schemeClr val="accent1"/>
+            </a:fillRef>
+            <a:effectRef idx="2">
+              <a:schemeClr val="accent1"/>
+            </a:effectRef>
+            <a:fontRef idx="minor">
+              <a:schemeClr val="lt1"/>
+            </a:fontRef>
+          </p:style>
+          <p:txBody>
+            <a:bodyPr rtlCol="0" anchor="ctr"/>
+            <a:lstStyle/>
+            <a:p/>
+          </p:txBody>
+        </p:sp>
+        <p:sp>
+          <p:nvSpPr>
+            <p:cNvPr id="425" name="Shape 30"/>
+            <p:cNvSpPr/>
+            <p:nvPr/>
+          </p:nvSpPr>
+          <p:spPr>
+            <a:xfrm>
+              <a:off x="2752344" y="3849624"/>
+              <a:ext cx="1737360" cy="640080"/>
+            </a:xfrm>
+            <a:prstGeom prst="roundRect">
+              <a:avLst>
+                <a:gd name="adj" fmla="val 8000"/>
+              </a:avLst>
+            </a:prstGeom>
+            <a:noFill/>
+            <a:ln w="38100">
+              <a:solidFill>
+                <a:srgbClr val="FA8B35"/>
+              </a:solidFill>
+            </a:ln>
+            <a:effectLst/>
+          </p:spPr>
+          <p:style>
+            <a:lnRef idx="1">
+              <a:schemeClr val="accent1"/>
+            </a:lnRef>
+            <a:fillRef idx="3">
+              <a:schemeClr val="accent1"/>
+            </a:fillRef>
+            <a:effectRef idx="2">
+              <a:schemeClr val="accent1"/>
+            </a:effectRef>
+            <a:fontRef idx="minor">
+              <a:schemeClr val="lt1"/>
+            </a:fontRef>
+          </p:style>
+          <p:txBody>
+            <a:bodyPr rtlCol="0" anchor="ctr"/>
+            <a:lstStyle/>
+            <a:p/>
+          </p:txBody>
+        </p:sp>
+        <p:sp>
+          <p:nvSpPr>
+            <p:cNvPr id="426" name="Shape 31"/>
+            <p:cNvSpPr/>
+            <p:nvPr/>
+          </p:nvSpPr>
+          <p:spPr>
+            <a:xfrm>
+              <a:off x="4507992" y="3849624"/>
+              <a:ext cx="2724912" cy="640080"/>
+            </a:xfrm>
+            <a:prstGeom prst="roundRect">
+              <a:avLst>
+                <a:gd name="adj" fmla="val 8000"/>
+              </a:avLst>
+            </a:prstGeom>
+            <a:noFill/>
+            <a:ln w="38100">
+              <a:solidFill>
+                <a:srgbClr val="FA8B35"/>
+              </a:solidFill>
+            </a:ln>
+            <a:effectLst/>
+          </p:spPr>
+          <p:style>
+            <a:lnRef idx="1">
+              <a:schemeClr val="accent1"/>
+            </a:lnRef>
+            <a:fillRef idx="3">
+              <a:schemeClr val="accent1"/>
+            </a:fillRef>
+            <a:effectRef idx="2">
+              <a:schemeClr val="accent1"/>
+            </a:effectRef>
+            <a:fontRef idx="minor">
+              <a:schemeClr val="lt1"/>
+            </a:fontRef>
+          </p:style>
+          <p:txBody>
+            <a:bodyPr rtlCol="0" anchor="ctr"/>
+            <a:lstStyle/>
+            <a:p/>
+          </p:txBody>
+        </p:sp>
+        <p:sp>
+          <p:nvSpPr>
+            <p:cNvPr id="427" name="Shape 32"/>
+            <p:cNvSpPr/>
+            <p:nvPr/>
+          </p:nvSpPr>
+          <p:spPr>
+            <a:xfrm>
+              <a:off x="2743200" y="1261872"/>
+              <a:ext cx="5669280" cy="658368"/>
+            </a:xfrm>
+            <a:prstGeom prst="roundRect">
+              <a:avLst>
+                <a:gd name="adj" fmla="val 12000"/>
+              </a:avLst>
+            </a:prstGeom>
+            <a:solidFill>
+              <a:srgbClr val="000000"/>
+            </a:solidFill>
+            <a:ln w="12700">
+              <a:solidFill>
+                <a:srgbClr val="FA8B35"/>
+              </a:solidFill>
+            </a:ln>
+            <a:effectLst/>
+          </p:spPr>
+          <p:style>
+            <a:lnRef idx="1">
+              <a:schemeClr val="accent1"/>
+            </a:lnRef>
+            <a:fillRef idx="3">
+              <a:schemeClr val="accent1"/>
+            </a:fillRef>
+            <a:effectRef idx="2">
+              <a:schemeClr val="accent1"/>
+            </a:effectRef>
+            <a:fontRef idx="minor">
+              <a:schemeClr val="lt1"/>
+            </a:fontRef>
+          </p:style>
+          <p:txBody>
+            <a:bodyPr rtlCol="0" anchor="ctr"/>
+            <a:lstStyle/>
+            <a:p/>
+          </p:txBody>
+        </p:sp>
+        <p:sp>
+          <p:nvSpPr>
+            <p:cNvPr id="428" name="Text 33"/>
+            <p:cNvSpPr txBox="1"/>
+            <p:nvPr/>
+          </p:nvSpPr>
+          <p:spPr>
+            <a:xfrm>
+              <a:off x="2871216" y="1325880"/>
+              <a:ext cx="5413248" cy="566928"/>
+            </a:xfrm>
+            <a:prstGeom prst="rect">
+              <a:avLst/>
+            </a:prstGeom>
+            <a:noFill/>
+          </p:spPr>
+          <p:txBody>
+            <a:bodyPr wrap="square" lIns="0" rIns="0" tIns="0" bIns="0" anchor="t">
+              <a:spAutoFit/>
+            </a:bodyPr>
+            <a:lstStyle/>
+            <a:p>
+              <a:pPr>
+                <a:spcAft>
+                  <a:spcPts val="200"/>
+                </a:spcAft>
+              </a:pPr>
+              <a:r>
+                <a:rPr sz="800" b="1" i="0">
+                  <a:solidFill>
+                    <a:srgbClr val="FA8B35"/>
+                  </a:solidFill>
+                  <a:latin typeface="Trenda IG Text"/>
+                </a:rPr>
+                <a:t>9 / 13   </a:t>
+              </a:r>
+              <a:r>
+                <a:rPr sz="800" b="1" i="0" spc="120">
+                  <a:solidFill>
+                    <a:srgbClr val="FFFFFF"/>
+                  </a:solidFill>
+                  <a:latin typeface="Trenda IG Text"/>
+                </a:rPr>
+                <a:t>H3 · CODE AND TESTS APPROVED</a:t>
+              </a:r>
+            </a:p>
+            <a:p>
+              <a:pPr>
+                <a:spcAft>
+                  <a:spcPts val="200"/>
+                </a:spcAft>
+              </a:pPr>
+              <a:r>
+                <a:rPr sz="750" b="0" i="0">
+                  <a:solidFill>
+                    <a:srgbClr val="E6E6E6"/>
+                  </a:solidFill>
+                  <a:latin typeface="Trenda IG Text"/>
+                </a:rPr>
+                <a:t>The Developer Agent builds in the Marketing Cloud dev business unit: data extensions, SQL, AMPscript, the journey as a draft. Review and Test Agents check it, evals score it. Tech lead and security approve at H3.</a:t>
+              </a:r>
+            </a:p>
+          </p:txBody>
+        </p:sp>
+      </p:grpSp>
+      <p:grpSp>
+        <p:nvGrpSpPr>
+          <p:cNvPr id="429" name="Step 9 arrows"/>
+          <p:cNvGrpSpPr/>
+          <p:nvPr/>
+        </p:nvGrpSpPr>
+        <p:grpSpPr>
+          <a:xfrm>
+            <a:off x="3621024" y="4453128"/>
+            <a:ext cx="3675888" cy="1700784"/>
+            <a:chOff x="3621024" y="4453128"/>
+            <a:chExt cx="3675888" cy="1700784"/>
+          </a:xfrm>
+        </p:grpSpPr>
+        <p:cxnSp>
+          <p:nvCxnSpPr>
+            <p:cNvPr id="430" name="Arrow 1"/>
+            <p:cNvCxnSpPr/>
+            <p:nvPr/>
+          </p:nvCxnSpPr>
+          <p:spPr>
+            <a:xfrm>
+              <a:off x="3621024" y="4453128"/>
+              <a:ext cx="0" cy="996696"/>
+            </a:xfrm>
+            <a:prstGeom prst="line">
+              <a:avLst/>
+            </a:prstGeom>
+            <a:ln w="38100">
+              <a:solidFill>
+                <a:srgbClr val="2E9E1F"/>
+              </a:solidFill>
+            </a:ln>
+          </p:spPr>
+          <p:style>
+            <a:lnRef idx="2">
+              <a:schemeClr val="accent1"/>
+            </a:lnRef>
+            <a:fillRef idx="0">
+              <a:schemeClr val="accent1"/>
+            </a:fillRef>
+            <a:effectRef idx="1">
+              <a:schemeClr val="accent1"/>
+            </a:effectRef>
+            <a:fontRef idx="minor">
+              <a:schemeClr val="tx1"/>
+            </a:fontRef>
+          </p:style>
+        </p:cxnSp>
+        <p:cxnSp>
+          <p:nvCxnSpPr>
+            <p:cNvPr id="431" name="Arrow 2"/>
+            <p:cNvCxnSpPr/>
+            <p:nvPr/>
+          </p:nvCxnSpPr>
+          <p:spPr>
+            <a:xfrm>
+              <a:off x="3621024" y="5449824"/>
+              <a:ext cx="2944368" cy="0"/>
+            </a:xfrm>
+            <a:prstGeom prst="line">
+              <a:avLst/>
+            </a:prstGeom>
+            <a:ln w="38100">
+              <a:solidFill>
+                <a:srgbClr val="2E9E1F"/>
+              </a:solidFill>
+            </a:ln>
+          </p:spPr>
+          <p:style>
+            <a:lnRef idx="2">
+              <a:schemeClr val="accent1"/>
+            </a:lnRef>
+            <a:fillRef idx="0">
+              <a:schemeClr val="accent1"/>
+            </a:fillRef>
+            <a:effectRef idx="1">
+              <a:schemeClr val="accent1"/>
+            </a:effectRef>
+            <a:fontRef idx="minor">
+              <a:schemeClr val="tx1"/>
+            </a:fontRef>
+          </p:style>
+        </p:cxnSp>
+        <p:cxnSp>
+          <p:nvCxnSpPr>
+            <p:cNvPr id="432" name="Arrow 3"/>
+            <p:cNvCxnSpPr/>
+            <p:nvPr/>
+          </p:nvCxnSpPr>
+          <p:spPr>
+            <a:xfrm>
+              <a:off x="6565392" y="5449824"/>
+              <a:ext cx="0" cy="100584"/>
+            </a:xfrm>
+            <a:prstGeom prst="line">
+              <a:avLst/>
+            </a:prstGeom>
+            <a:ln w="38100">
+              <a:solidFill>
+                <a:srgbClr val="2E9E1F"/>
+              </a:solidFill>
+              <a:tailEnd type="triangle" w="med" len="med"/>
+            </a:ln>
+          </p:spPr>
+          <p:style>
+            <a:lnRef idx="2">
+              <a:schemeClr val="accent1"/>
+            </a:lnRef>
+            <a:fillRef idx="0">
+              <a:schemeClr val="accent1"/>
+            </a:fillRef>
+            <a:effectRef idx="1">
+              <a:schemeClr val="accent1"/>
+            </a:effectRef>
+            <a:fontRef idx="minor">
+              <a:schemeClr val="tx1"/>
+            </a:fontRef>
+          </p:style>
+        </p:cxnSp>
+        <p:sp>
+          <p:nvSpPr>
+            <p:cNvPr id="433" name="Shape 4"/>
+            <p:cNvSpPr/>
+            <p:nvPr/>
+          </p:nvSpPr>
+          <p:spPr>
+            <a:xfrm>
+              <a:off x="5833872" y="5971032"/>
+              <a:ext cx="1463040" cy="182880"/>
+            </a:xfrm>
+            <a:prstGeom prst="roundRect">
+              <a:avLst>
+                <a:gd name="adj" fmla="val 50000"/>
+              </a:avLst>
+            </a:prstGeom>
+            <a:solidFill>
+              <a:srgbClr val="2E9E1F"/>
+            </a:solidFill>
+            <a:ln>
+              <a:noFill/>
+            </a:ln>
+            <a:effectLst/>
+          </p:spPr>
+          <p:style>
+            <a:lnRef idx="1">
+              <a:schemeClr val="accent1"/>
+            </a:lnRef>
+            <a:fillRef idx="3">
+              <a:schemeClr val="accent1"/>
+            </a:fillRef>
+            <a:effectRef idx="2">
+              <a:schemeClr val="accent1"/>
+            </a:effectRef>
+            <a:fontRef idx="minor">
+              <a:schemeClr val="lt1"/>
+            </a:fontRef>
+          </p:style>
+          <p:txBody>
+            <a:bodyPr rtlCol="0" anchor="ctr"/>
+            <a:lstStyle/>
+            <a:p/>
+          </p:txBody>
+        </p:sp>
+        <p:sp>
+          <p:nvSpPr>
+            <p:cNvPr id="434" name="Text 5"/>
+            <p:cNvSpPr txBox="1"/>
+            <p:nvPr/>
+          </p:nvSpPr>
+          <p:spPr>
+            <a:xfrm>
+              <a:off x="5833872" y="5971032"/>
+              <a:ext cx="1463040" cy="182880"/>
+            </a:xfrm>
+            <a:prstGeom prst="rect">
+              <a:avLst/>
+            </a:prstGeom>
+            <a:noFill/>
+          </p:spPr>
+          <p:txBody>
+            <a:bodyPr wrap="square" lIns="0" rIns="0" tIns="0" bIns="0" anchor="ctr">
+              <a:spAutoFit/>
+            </a:bodyPr>
+            <a:lstStyle/>
+            <a:p>
+              <a:pPr algn="ctr"/>
+              <a:r>
+                <a:rPr sz="650" b="1" i="0" spc="60">
+                  <a:solidFill>
+                    <a:srgbClr val="FFFFFF"/>
+                  </a:solidFill>
+                  <a:latin typeface="Trenda IG Text"/>
+                </a:rPr>
+                <a:t>H3 APPROVED → 05 PROMOTE</a:t>
+              </a:r>
+            </a:p>
+          </p:txBody>
+        </p:sp>
+      </p:grpSp>
+      <p:grpSp>
+        <p:nvGrpSpPr>
+          <p:cNvPr id="435" name="Step 10 highlight"/>
+          <p:cNvGrpSpPr/>
+          <p:nvPr/>
+        </p:nvGrpSpPr>
+        <p:grpSpPr>
+          <a:xfrm>
+            <a:off x="365760" y="1115568"/>
+            <a:ext cx="11457432" cy="5239511"/>
+            <a:chOff x="365760" y="1115568"/>
+            <a:chExt cx="11457432" cy="5239511"/>
+          </a:xfrm>
+        </p:grpSpPr>
+        <p:sp>
+          <p:nvSpPr>
+            <p:cNvPr id="436" name="Shape 1"/>
+            <p:cNvSpPr/>
+            <p:nvPr/>
+          </p:nvSpPr>
+          <p:spPr>
+            <a:xfrm>
+              <a:off x="365760" y="1115568"/>
+              <a:ext cx="11457432" cy="2404872"/>
+            </a:xfrm>
+            <a:prstGeom prst="rect">
+              <a:avLst/>
+            </a:prstGeom>
+            <a:solidFill>
+              <a:srgbClr val="FFFFFF">
+                <a:alpha val="72000"/>
+              </a:srgbClr>
+            </a:solidFill>
+            <a:ln>
+              <a:noFill/>
+            </a:ln>
+            <a:effectLst/>
+          </p:spPr>
+          <p:style>
+            <a:lnRef idx="1">
+              <a:schemeClr val="accent1"/>
+            </a:lnRef>
+            <a:fillRef idx="3">
+              <a:schemeClr val="accent1"/>
+            </a:fillRef>
+            <a:effectRef idx="2">
+              <a:schemeClr val="accent1"/>
+            </a:effectRef>
+            <a:fontRef idx="minor">
+              <a:schemeClr val="lt1"/>
+            </a:fontRef>
+          </p:style>
+          <p:txBody>
+            <a:bodyPr rtlCol="0" anchor="ctr"/>
+            <a:lstStyle/>
+            <a:p/>
+          </p:txBody>
+        </p:sp>
+        <p:sp>
+          <p:nvSpPr>
+            <p:cNvPr id="437" name="Shape 2"/>
+            <p:cNvSpPr/>
+            <p:nvPr/>
+          </p:nvSpPr>
+          <p:spPr>
+            <a:xfrm>
+              <a:off x="365760" y="3520440"/>
+              <a:ext cx="5495544" cy="292607"/>
+            </a:xfrm>
+            <a:prstGeom prst="rect">
+              <a:avLst/>
+            </a:prstGeom>
+            <a:solidFill>
+              <a:srgbClr val="FFFFFF">
+                <a:alpha val="72000"/>
+              </a:srgbClr>
+            </a:solidFill>
+            <a:ln>
+              <a:noFill/>
+            </a:ln>
+            <a:effectLst/>
+          </p:spPr>
+          <p:style>
+            <a:lnRef idx="1">
+              <a:schemeClr val="accent1"/>
+            </a:lnRef>
+            <a:fillRef idx="3">
+              <a:schemeClr val="accent1"/>
+            </a:fillRef>
+            <a:effectRef idx="2">
+              <a:schemeClr val="accent1"/>
+            </a:effectRef>
+            <a:fontRef idx="minor">
+              <a:schemeClr val="lt1"/>
+            </a:fontRef>
+          </p:style>
+          <p:txBody>
+            <a:bodyPr rtlCol="0" anchor="ctr"/>
+            <a:lstStyle/>
+            <a:p/>
+          </p:txBody>
+        </p:sp>
+        <p:sp>
+          <p:nvSpPr>
+            <p:cNvPr id="438" name="Shape 3"/>
+            <p:cNvSpPr/>
+            <p:nvPr/>
+          </p:nvSpPr>
+          <p:spPr>
+            <a:xfrm>
+              <a:off x="7168896" y="3520440"/>
+              <a:ext cx="4654296" cy="292607"/>
+            </a:xfrm>
+            <a:prstGeom prst="rect">
+              <a:avLst/>
+            </a:prstGeom>
+            <a:solidFill>
+              <a:srgbClr val="FFFFFF">
+                <a:alpha val="72000"/>
+              </a:srgbClr>
+            </a:solidFill>
+            <a:ln>
+              <a:noFill/>
+            </a:ln>
+            <a:effectLst/>
+          </p:spPr>
+          <p:style>
+            <a:lnRef idx="1">
+              <a:schemeClr val="accent1"/>
+            </a:lnRef>
+            <a:fillRef idx="3">
+              <a:schemeClr val="accent1"/>
+            </a:fillRef>
+            <a:effectRef idx="2">
+              <a:schemeClr val="accent1"/>
+            </a:effectRef>
+            <a:fontRef idx="minor">
+              <a:schemeClr val="lt1"/>
+            </a:fontRef>
+          </p:style>
+          <p:txBody>
+            <a:bodyPr rtlCol="0" anchor="ctr"/>
+            <a:lstStyle/>
+            <a:p/>
+          </p:txBody>
+        </p:sp>
+        <p:sp>
+          <p:nvSpPr>
+            <p:cNvPr id="439" name="Shape 4"/>
+            <p:cNvSpPr/>
+            <p:nvPr/>
+          </p:nvSpPr>
+          <p:spPr>
+            <a:xfrm>
+              <a:off x="365760" y="3813048"/>
+              <a:ext cx="11457432" cy="73152"/>
+            </a:xfrm>
+            <a:prstGeom prst="rect">
+              <a:avLst/>
+            </a:prstGeom>
+            <a:solidFill>
+              <a:srgbClr val="FFFFFF">
+                <a:alpha val="72000"/>
+              </a:srgbClr>
+            </a:solidFill>
+            <a:ln>
+              <a:noFill/>
+            </a:ln>
+            <a:effectLst/>
+          </p:spPr>
+          <p:style>
+            <a:lnRef idx="1">
+              <a:schemeClr val="accent1"/>
+            </a:lnRef>
+            <a:fillRef idx="3">
+              <a:schemeClr val="accent1"/>
+            </a:fillRef>
+            <a:effectRef idx="2">
+              <a:schemeClr val="accent1"/>
+            </a:effectRef>
+            <a:fontRef idx="minor">
+              <a:schemeClr val="lt1"/>
+            </a:fontRef>
+          </p:style>
+          <p:txBody>
+            <a:bodyPr rtlCol="0" anchor="ctr"/>
+            <a:lstStyle/>
+            <a:p/>
+          </p:txBody>
+        </p:sp>
+        <p:sp>
+          <p:nvSpPr>
+            <p:cNvPr id="440" name="Shape 5"/>
+            <p:cNvSpPr/>
+            <p:nvPr/>
+          </p:nvSpPr>
+          <p:spPr>
+            <a:xfrm>
+              <a:off x="365760" y="3886200"/>
+              <a:ext cx="2423160" cy="91439"/>
+            </a:xfrm>
+            <a:prstGeom prst="rect">
+              <a:avLst/>
+            </a:prstGeom>
+            <a:solidFill>
+              <a:srgbClr val="FFFFFF">
+                <a:alpha val="72000"/>
+              </a:srgbClr>
+            </a:solidFill>
+            <a:ln>
+              <a:noFill/>
+            </a:ln>
+            <a:effectLst/>
+          </p:spPr>
+          <p:style>
+            <a:lnRef idx="1">
+              <a:schemeClr val="accent1"/>
+            </a:lnRef>
+            <a:fillRef idx="3">
+              <a:schemeClr val="accent1"/>
+            </a:fillRef>
+            <a:effectRef idx="2">
+              <a:schemeClr val="accent1"/>
+            </a:effectRef>
+            <a:fontRef idx="minor">
+              <a:schemeClr val="lt1"/>
+            </a:fontRef>
+          </p:style>
+          <p:txBody>
+            <a:bodyPr rtlCol="0" anchor="ctr"/>
+            <a:lstStyle/>
+            <a:p/>
+          </p:txBody>
+        </p:sp>
+        <p:sp>
+          <p:nvSpPr>
+            <p:cNvPr id="441" name="Shape 6"/>
+            <p:cNvSpPr/>
+            <p:nvPr/>
+          </p:nvSpPr>
+          <p:spPr>
+            <a:xfrm>
+              <a:off x="4453128" y="3886200"/>
+              <a:ext cx="7370063" cy="91439"/>
+            </a:xfrm>
+            <a:prstGeom prst="rect">
+              <a:avLst/>
+            </a:prstGeom>
+            <a:solidFill>
+              <a:srgbClr val="FFFFFF">
+                <a:alpha val="72000"/>
+              </a:srgbClr>
+            </a:solidFill>
+            <a:ln>
+              <a:noFill/>
+            </a:ln>
+            <a:effectLst/>
+          </p:spPr>
+          <p:style>
+            <a:lnRef idx="1">
+              <a:schemeClr val="accent1"/>
+            </a:lnRef>
+            <a:fillRef idx="3">
+              <a:schemeClr val="accent1"/>
+            </a:fillRef>
+            <a:effectRef idx="2">
+              <a:schemeClr val="accent1"/>
+            </a:effectRef>
+            <a:fontRef idx="minor">
+              <a:schemeClr val="lt1"/>
+            </a:fontRef>
+          </p:style>
+          <p:txBody>
+            <a:bodyPr rtlCol="0" anchor="ctr"/>
+            <a:lstStyle/>
+            <a:p/>
+          </p:txBody>
+        </p:sp>
+        <p:sp>
+          <p:nvSpPr>
+            <p:cNvPr id="442" name="Shape 7"/>
+            <p:cNvSpPr/>
+            <p:nvPr/>
+          </p:nvSpPr>
+          <p:spPr>
+            <a:xfrm>
+              <a:off x="365760" y="3977639"/>
+              <a:ext cx="2423160" cy="475488"/>
+            </a:xfrm>
+            <a:prstGeom prst="rect">
+              <a:avLst/>
+            </a:prstGeom>
+            <a:solidFill>
+              <a:srgbClr val="FFFFFF">
+                <a:alpha val="72000"/>
+              </a:srgbClr>
+            </a:solidFill>
+            <a:ln>
+              <a:noFill/>
+            </a:ln>
+            <a:effectLst/>
+          </p:spPr>
+          <p:style>
+            <a:lnRef idx="1">
+              <a:schemeClr val="accent1"/>
+            </a:lnRef>
+            <a:fillRef idx="3">
+              <a:schemeClr val="accent1"/>
+            </a:fillRef>
+            <a:effectRef idx="2">
+              <a:schemeClr val="accent1"/>
+            </a:effectRef>
+            <a:fontRef idx="minor">
+              <a:schemeClr val="lt1"/>
+            </a:fontRef>
+          </p:style>
+          <p:txBody>
+            <a:bodyPr rtlCol="0" anchor="ctr"/>
+            <a:lstStyle/>
+            <a:p/>
+          </p:txBody>
+        </p:sp>
+        <p:sp>
+          <p:nvSpPr>
+            <p:cNvPr id="443" name="Shape 8"/>
+            <p:cNvSpPr/>
+            <p:nvPr/>
+          </p:nvSpPr>
+          <p:spPr>
+            <a:xfrm>
+              <a:off x="4453128" y="3977639"/>
+              <a:ext cx="5148072" cy="475488"/>
+            </a:xfrm>
+            <a:prstGeom prst="rect">
+              <a:avLst/>
+            </a:prstGeom>
+            <a:solidFill>
+              <a:srgbClr val="FFFFFF">
+                <a:alpha val="72000"/>
+              </a:srgbClr>
+            </a:solidFill>
+            <a:ln>
+              <a:noFill/>
+            </a:ln>
+            <a:effectLst/>
+          </p:spPr>
+          <p:style>
+            <a:lnRef idx="1">
+              <a:schemeClr val="accent1"/>
+            </a:lnRef>
+            <a:fillRef idx="3">
+              <a:schemeClr val="accent1"/>
+            </a:fillRef>
+            <a:effectRef idx="2">
+              <a:schemeClr val="accent1"/>
+            </a:effectRef>
+            <a:fontRef idx="minor">
+              <a:schemeClr val="lt1"/>
+            </a:fontRef>
+          </p:style>
+          <p:txBody>
+            <a:bodyPr rtlCol="0" anchor="ctr"/>
+            <a:lstStyle/>
+            <a:p/>
+          </p:txBody>
+        </p:sp>
+        <p:sp>
+          <p:nvSpPr>
+            <p:cNvPr id="444" name="Shape 9"/>
+            <p:cNvSpPr/>
+            <p:nvPr/>
+          </p:nvSpPr>
+          <p:spPr>
+            <a:xfrm>
+              <a:off x="11777472" y="3977639"/>
+              <a:ext cx="45720" cy="475488"/>
+            </a:xfrm>
+            <a:prstGeom prst="rect">
+              <a:avLst/>
+            </a:prstGeom>
+            <a:solidFill>
+              <a:srgbClr val="FFFFFF">
+                <a:alpha val="72000"/>
+              </a:srgbClr>
+            </a:solidFill>
+            <a:ln>
+              <a:noFill/>
+            </a:ln>
+            <a:effectLst/>
+          </p:spPr>
+          <p:style>
+            <a:lnRef idx="1">
+              <a:schemeClr val="accent1"/>
+            </a:lnRef>
+            <a:fillRef idx="3">
+              <a:schemeClr val="accent1"/>
+            </a:fillRef>
+            <a:effectRef idx="2">
+              <a:schemeClr val="accent1"/>
+            </a:effectRef>
+            <a:fontRef idx="minor">
+              <a:schemeClr val="lt1"/>
+            </a:fontRef>
+          </p:style>
+          <p:txBody>
+            <a:bodyPr rtlCol="0" anchor="ctr"/>
+            <a:lstStyle/>
+            <a:p/>
+          </p:txBody>
+        </p:sp>
+        <p:sp>
+          <p:nvSpPr>
+            <p:cNvPr id="445" name="Shape 10"/>
+            <p:cNvSpPr/>
+            <p:nvPr/>
+          </p:nvSpPr>
+          <p:spPr>
+            <a:xfrm>
+              <a:off x="365760" y="4453128"/>
+              <a:ext cx="9235440" cy="429767"/>
+            </a:xfrm>
+            <a:prstGeom prst="rect">
+              <a:avLst/>
+            </a:prstGeom>
+            <a:solidFill>
+              <a:srgbClr val="FFFFFF">
+                <a:alpha val="72000"/>
+              </a:srgbClr>
+            </a:solidFill>
+            <a:ln>
+              <a:noFill/>
+            </a:ln>
+            <a:effectLst/>
+          </p:spPr>
+          <p:style>
+            <a:lnRef idx="1">
+              <a:schemeClr val="accent1"/>
+            </a:lnRef>
+            <a:fillRef idx="3">
+              <a:schemeClr val="accent1"/>
+            </a:fillRef>
+            <a:effectRef idx="2">
+              <a:schemeClr val="accent1"/>
+            </a:effectRef>
+            <a:fontRef idx="minor">
+              <a:schemeClr val="lt1"/>
+            </a:fontRef>
+          </p:style>
+          <p:txBody>
+            <a:bodyPr rtlCol="0" anchor="ctr"/>
+            <a:lstStyle/>
+            <a:p/>
+          </p:txBody>
+        </p:sp>
+        <p:sp>
+          <p:nvSpPr>
+            <p:cNvPr id="446" name="Shape 11"/>
+            <p:cNvSpPr/>
+            <p:nvPr/>
+          </p:nvSpPr>
+          <p:spPr>
+            <a:xfrm>
+              <a:off x="11777472" y="4453128"/>
+              <a:ext cx="45720" cy="429767"/>
+            </a:xfrm>
+            <a:prstGeom prst="rect">
+              <a:avLst/>
+            </a:prstGeom>
+            <a:solidFill>
+              <a:srgbClr val="FFFFFF">
+                <a:alpha val="72000"/>
+              </a:srgbClr>
+            </a:solidFill>
+            <a:ln>
+              <a:noFill/>
+            </a:ln>
+            <a:effectLst/>
+          </p:spPr>
+          <p:style>
+            <a:lnRef idx="1">
+              <a:schemeClr val="accent1"/>
+            </a:lnRef>
+            <a:fillRef idx="3">
+              <a:schemeClr val="accent1"/>
+            </a:fillRef>
+            <a:effectRef idx="2">
+              <a:schemeClr val="accent1"/>
+            </a:effectRef>
+            <a:fontRef idx="minor">
+              <a:schemeClr val="lt1"/>
+            </a:fontRef>
+          </p:style>
+          <p:txBody>
+            <a:bodyPr rtlCol="0" anchor="ctr"/>
+            <a:lstStyle/>
+            <a:p/>
+          </p:txBody>
+        </p:sp>
+        <p:sp>
+          <p:nvSpPr>
+            <p:cNvPr id="447" name="Shape 12"/>
+            <p:cNvSpPr/>
+            <p:nvPr/>
+          </p:nvSpPr>
+          <p:spPr>
+            <a:xfrm>
+              <a:off x="365760" y="4882896"/>
+              <a:ext cx="11457432" cy="630936"/>
+            </a:xfrm>
+            <a:prstGeom prst="rect">
+              <a:avLst/>
+            </a:prstGeom>
+            <a:solidFill>
+              <a:srgbClr val="FFFFFF">
+                <a:alpha val="72000"/>
+              </a:srgbClr>
+            </a:solidFill>
+            <a:ln>
+              <a:noFill/>
+            </a:ln>
+            <a:effectLst/>
+          </p:spPr>
+          <p:style>
+            <a:lnRef idx="1">
+              <a:schemeClr val="accent1"/>
+            </a:lnRef>
+            <a:fillRef idx="3">
+              <a:schemeClr val="accent1"/>
+            </a:fillRef>
+            <a:effectRef idx="2">
+              <a:schemeClr val="accent1"/>
+            </a:effectRef>
+            <a:fontRef idx="minor">
+              <a:schemeClr val="lt1"/>
+            </a:fontRef>
+          </p:style>
+          <p:txBody>
+            <a:bodyPr rtlCol="0" anchor="ctr"/>
+            <a:lstStyle/>
+            <a:p/>
+          </p:txBody>
+        </p:sp>
+        <p:sp>
+          <p:nvSpPr>
+            <p:cNvPr id="448" name="Shape 13"/>
+            <p:cNvSpPr/>
+            <p:nvPr/>
+          </p:nvSpPr>
+          <p:spPr>
+            <a:xfrm>
+              <a:off x="365760" y="5513832"/>
+              <a:ext cx="6592823" cy="457200"/>
+            </a:xfrm>
+            <a:prstGeom prst="rect">
+              <a:avLst/>
+            </a:prstGeom>
+            <a:solidFill>
+              <a:srgbClr val="FFFFFF">
+                <a:alpha val="72000"/>
+              </a:srgbClr>
+            </a:solidFill>
+            <a:ln>
+              <a:noFill/>
+            </a:ln>
+            <a:effectLst/>
+          </p:spPr>
+          <p:style>
+            <a:lnRef idx="1">
+              <a:schemeClr val="accent1"/>
+            </a:lnRef>
+            <a:fillRef idx="3">
+              <a:schemeClr val="accent1"/>
+            </a:fillRef>
+            <a:effectRef idx="2">
+              <a:schemeClr val="accent1"/>
+            </a:effectRef>
+            <a:fontRef idx="minor">
+              <a:schemeClr val="lt1"/>
+            </a:fontRef>
+          </p:style>
+          <p:txBody>
+            <a:bodyPr rtlCol="0" anchor="ctr"/>
+            <a:lstStyle/>
+            <a:p/>
+          </p:txBody>
+        </p:sp>
+        <p:sp>
+          <p:nvSpPr>
+            <p:cNvPr id="449" name="Shape 14"/>
+            <p:cNvSpPr/>
+            <p:nvPr/>
+          </p:nvSpPr>
+          <p:spPr>
+            <a:xfrm>
+              <a:off x="8558784" y="5513832"/>
+              <a:ext cx="3264408" cy="457200"/>
+            </a:xfrm>
+            <a:prstGeom prst="rect">
+              <a:avLst/>
+            </a:prstGeom>
+            <a:solidFill>
+              <a:srgbClr val="FFFFFF">
+                <a:alpha val="72000"/>
+              </a:srgbClr>
+            </a:solidFill>
+            <a:ln>
+              <a:noFill/>
+            </a:ln>
+            <a:effectLst/>
+          </p:spPr>
+          <p:style>
+            <a:lnRef idx="1">
+              <a:schemeClr val="accent1"/>
+            </a:lnRef>
+            <a:fillRef idx="3">
+              <a:schemeClr val="accent1"/>
+            </a:fillRef>
+            <a:effectRef idx="2">
+              <a:schemeClr val="accent1"/>
+            </a:effectRef>
+            <a:fontRef idx="minor">
+              <a:schemeClr val="lt1"/>
+            </a:fontRef>
+          </p:style>
+          <p:txBody>
+            <a:bodyPr rtlCol="0" anchor="ctr"/>
+            <a:lstStyle/>
+            <a:p/>
+          </p:txBody>
+        </p:sp>
+        <p:sp>
+          <p:nvSpPr>
+            <p:cNvPr id="450" name="Shape 15"/>
+            <p:cNvSpPr/>
+            <p:nvPr/>
+          </p:nvSpPr>
+          <p:spPr>
+            <a:xfrm>
+              <a:off x="365760" y="5971032"/>
+              <a:ext cx="11457432" cy="384047"/>
+            </a:xfrm>
+            <a:prstGeom prst="rect">
+              <a:avLst/>
+            </a:prstGeom>
+            <a:solidFill>
+              <a:srgbClr val="FFFFFF">
+                <a:alpha val="72000"/>
+              </a:srgbClr>
+            </a:solidFill>
+            <a:ln>
+              <a:noFill/>
+            </a:ln>
+            <a:effectLst/>
+          </p:spPr>
+          <p:style>
+            <a:lnRef idx="1">
+              <a:schemeClr val="accent1"/>
+            </a:lnRef>
+            <a:fillRef idx="3">
+              <a:schemeClr val="accent1"/>
+            </a:fillRef>
+            <a:effectRef idx="2">
+              <a:schemeClr val="accent1"/>
+            </a:effectRef>
+            <a:fontRef idx="minor">
+              <a:schemeClr val="lt1"/>
+            </a:fontRef>
+          </p:style>
+          <p:txBody>
+            <a:bodyPr rtlCol="0" anchor="ctr"/>
+            <a:lstStyle/>
+            <a:p/>
+          </p:txBody>
+        </p:sp>
+        <p:sp>
+          <p:nvSpPr>
+            <p:cNvPr id="451" name="Shape 16"/>
+            <p:cNvSpPr/>
+            <p:nvPr/>
+          </p:nvSpPr>
+          <p:spPr>
+            <a:xfrm>
+              <a:off x="5870448" y="3529584"/>
+              <a:ext cx="1289304" cy="274320"/>
+            </a:xfrm>
+            <a:prstGeom prst="roundRect">
+              <a:avLst>
+                <a:gd name="adj" fmla="val 8000"/>
+              </a:avLst>
+            </a:prstGeom>
+            <a:noFill/>
+            <a:ln w="38100">
+              <a:solidFill>
+                <a:srgbClr val="FA8B35"/>
+              </a:solidFill>
+            </a:ln>
+            <a:effectLst/>
+          </p:spPr>
+          <p:style>
+            <a:lnRef idx="1">
+              <a:schemeClr val="accent1"/>
+            </a:lnRef>
+            <a:fillRef idx="3">
+              <a:schemeClr val="accent1"/>
+            </a:fillRef>
+            <a:effectRef idx="2">
+              <a:schemeClr val="accent1"/>
+            </a:effectRef>
+            <a:fontRef idx="minor">
+              <a:schemeClr val="lt1"/>
+            </a:fontRef>
+          </p:style>
+          <p:txBody>
+            <a:bodyPr rtlCol="0" anchor="ctr"/>
+            <a:lstStyle/>
+            <a:p/>
+          </p:txBody>
+        </p:sp>
+        <p:sp>
+          <p:nvSpPr>
+            <p:cNvPr id="452" name="Shape 17"/>
+            <p:cNvSpPr/>
+            <p:nvPr/>
+          </p:nvSpPr>
+          <p:spPr>
+            <a:xfrm>
+              <a:off x="9564624" y="3941063"/>
+              <a:ext cx="2249423" cy="978408"/>
+            </a:xfrm>
+            <a:prstGeom prst="roundRect">
+              <a:avLst>
+                <a:gd name="adj" fmla="val 8000"/>
+              </a:avLst>
+            </a:prstGeom>
+            <a:noFill/>
+            <a:ln w="38100">
+              <a:solidFill>
+                <a:srgbClr val="FA8B35"/>
+              </a:solidFill>
+            </a:ln>
+            <a:effectLst/>
+          </p:spPr>
+          <p:style>
+            <a:lnRef idx="1">
+              <a:schemeClr val="accent1"/>
+            </a:lnRef>
+            <a:fillRef idx="3">
+              <a:schemeClr val="accent1"/>
+            </a:fillRef>
+            <a:effectRef idx="2">
+              <a:schemeClr val="accent1"/>
+            </a:effectRef>
+            <a:fontRef idx="minor">
+              <a:schemeClr val="lt1"/>
+            </a:fontRef>
+          </p:style>
+          <p:txBody>
+            <a:bodyPr rtlCol="0" anchor="ctr"/>
+            <a:lstStyle/>
+            <a:p/>
+          </p:txBody>
+        </p:sp>
+        <p:sp>
+          <p:nvSpPr>
+            <p:cNvPr id="453" name="Shape 18"/>
+            <p:cNvSpPr/>
+            <p:nvPr/>
+          </p:nvSpPr>
+          <p:spPr>
+            <a:xfrm>
+              <a:off x="6986016" y="5550408"/>
+              <a:ext cx="1545336" cy="420624"/>
+            </a:xfrm>
+            <a:prstGeom prst="roundRect">
+              <a:avLst>
+                <a:gd name="adj" fmla="val 8000"/>
+              </a:avLst>
+            </a:prstGeom>
+            <a:noFill/>
+            <a:ln w="38100">
+              <a:solidFill>
+                <a:srgbClr val="FA8B35"/>
+              </a:solidFill>
+            </a:ln>
+            <a:effectLst/>
+          </p:spPr>
+          <p:style>
+            <a:lnRef idx="1">
+              <a:schemeClr val="accent1"/>
+            </a:lnRef>
+            <a:fillRef idx="3">
+              <a:schemeClr val="accent1"/>
+            </a:fillRef>
+            <a:effectRef idx="2">
+              <a:schemeClr val="accent1"/>
+            </a:effectRef>
+            <a:fontRef idx="minor">
+              <a:schemeClr val="lt1"/>
+            </a:fontRef>
+          </p:style>
+          <p:txBody>
+            <a:bodyPr rtlCol="0" anchor="ctr"/>
+            <a:lstStyle/>
+            <a:p/>
+          </p:txBody>
+        </p:sp>
+        <p:sp>
+          <p:nvSpPr>
+            <p:cNvPr id="454" name="Shape 19"/>
+            <p:cNvSpPr/>
+            <p:nvPr/>
+          </p:nvSpPr>
+          <p:spPr>
+            <a:xfrm>
+              <a:off x="2752344" y="3849624"/>
+              <a:ext cx="1737360" cy="640080"/>
+            </a:xfrm>
+            <a:prstGeom prst="roundRect">
+              <a:avLst>
+                <a:gd name="adj" fmla="val 8000"/>
+              </a:avLst>
+            </a:prstGeom>
+            <a:noFill/>
+            <a:ln w="38100">
+              <a:solidFill>
+                <a:srgbClr val="FA8B35"/>
+              </a:solidFill>
+            </a:ln>
+            <a:effectLst/>
+          </p:spPr>
+          <p:style>
+            <a:lnRef idx="1">
+              <a:schemeClr val="accent1"/>
+            </a:lnRef>
+            <a:fillRef idx="3">
+              <a:schemeClr val="accent1"/>
+            </a:fillRef>
+            <a:effectRef idx="2">
+              <a:schemeClr val="accent1"/>
+            </a:effectRef>
+            <a:fontRef idx="minor">
+              <a:schemeClr val="lt1"/>
+            </a:fontRef>
+          </p:style>
+          <p:txBody>
+            <a:bodyPr rtlCol="0" anchor="ctr"/>
+            <a:lstStyle/>
+            <a:p/>
+          </p:txBody>
+        </p:sp>
+        <p:sp>
+          <p:nvSpPr>
+            <p:cNvPr id="455" name="Shape 20"/>
+            <p:cNvSpPr/>
+            <p:nvPr/>
+          </p:nvSpPr>
+          <p:spPr>
+            <a:xfrm>
+              <a:off x="2743200" y="1261872"/>
+              <a:ext cx="5669280" cy="658368"/>
+            </a:xfrm>
+            <a:prstGeom prst="roundRect">
+              <a:avLst>
+                <a:gd name="adj" fmla="val 12000"/>
+              </a:avLst>
+            </a:prstGeom>
+            <a:solidFill>
+              <a:srgbClr val="000000"/>
+            </a:solidFill>
+            <a:ln w="12700">
+              <a:solidFill>
+                <a:srgbClr val="FA8B35"/>
+              </a:solidFill>
+            </a:ln>
+            <a:effectLst/>
+          </p:spPr>
+          <p:style>
+            <a:lnRef idx="1">
+              <a:schemeClr val="accent1"/>
+            </a:lnRef>
+            <a:fillRef idx="3">
+              <a:schemeClr val="accent1"/>
+            </a:fillRef>
+            <a:effectRef idx="2">
+              <a:schemeClr val="accent1"/>
+            </a:effectRef>
+            <a:fontRef idx="minor">
+              <a:schemeClr val="lt1"/>
+            </a:fontRef>
+          </p:style>
+          <p:txBody>
+            <a:bodyPr rtlCol="0" anchor="ctr"/>
+            <a:lstStyle/>
+            <a:p/>
+          </p:txBody>
+        </p:sp>
+        <p:sp>
+          <p:nvSpPr>
+            <p:cNvPr id="456" name="Text 21"/>
+            <p:cNvSpPr txBox="1"/>
+            <p:nvPr/>
+          </p:nvSpPr>
+          <p:spPr>
+            <a:xfrm>
+              <a:off x="2871216" y="1325880"/>
+              <a:ext cx="5413248" cy="566928"/>
+            </a:xfrm>
+            <a:prstGeom prst="rect">
+              <a:avLst/>
+            </a:prstGeom>
+            <a:noFill/>
+          </p:spPr>
+          <p:txBody>
+            <a:bodyPr wrap="square" lIns="0" rIns="0" tIns="0" bIns="0" anchor="t">
+              <a:spAutoFit/>
+            </a:bodyPr>
+            <a:lstStyle/>
+            <a:p>
+              <a:pPr>
+                <a:spcAft>
+                  <a:spcPts val="200"/>
+                </a:spcAft>
+              </a:pPr>
+              <a:r>
+                <a:rPr sz="800" b="1" i="0">
+                  <a:solidFill>
+                    <a:srgbClr val="FA8B35"/>
+                  </a:solidFill>
+                  <a:latin typeface="Trenda IG Text"/>
+                </a:rPr>
+                <a:t>10 / 13   </a:t>
+              </a:r>
+              <a:r>
+                <a:rPr sz="800" b="1" i="0" spc="120">
+                  <a:solidFill>
+                    <a:srgbClr val="FFFFFF"/>
+                  </a:solidFill>
+                  <a:latin typeface="Trenda IG Text"/>
+                </a:rPr>
+                <a:t>H4 · BUSINESS UAT SIGNED (STEP 06)</a:t>
+              </a:r>
+            </a:p>
+            <a:p>
+              <a:pPr>
+                <a:spcAft>
+                  <a:spcPts val="200"/>
+                </a:spcAft>
+              </a:pPr>
+              <a:r>
+                <a:rPr sz="750" b="0" i="0">
+                  <a:solidFill>
+                    <a:srgbClr val="E6E6E6"/>
+                  </a:solidFill>
+                  <a:latin typeface="Trenda IG Text"/>
+                </a:rPr>
+                <a:t>The Release Agent promotes the campaign through Copado to SIT and UAT. Marketing and clinical owners test every message variant and sign off UAT at H4.</a:t>
+              </a:r>
+            </a:p>
+          </p:txBody>
+        </p:sp>
+      </p:grpSp>
+      <p:grpSp>
+        <p:nvGrpSpPr>
+          <p:cNvPr id="457" name="Step 10 arrows"/>
+          <p:cNvGrpSpPr/>
+          <p:nvPr/>
+        </p:nvGrpSpPr>
+        <p:grpSpPr>
+          <a:xfrm>
+            <a:off x="3621024" y="4453128"/>
+            <a:ext cx="5266943" cy="1700784"/>
+            <a:chOff x="3621024" y="4453128"/>
+            <a:chExt cx="5266943" cy="1700784"/>
+          </a:xfrm>
+        </p:grpSpPr>
+        <p:cxnSp>
+          <p:nvCxnSpPr>
+            <p:cNvPr id="458" name="Arrow 1"/>
+            <p:cNvCxnSpPr/>
+            <p:nvPr/>
+          </p:nvCxnSpPr>
+          <p:spPr>
+            <a:xfrm>
+              <a:off x="3621024" y="4453128"/>
+              <a:ext cx="0" cy="996696"/>
+            </a:xfrm>
+            <a:prstGeom prst="line">
+              <a:avLst/>
+            </a:prstGeom>
+            <a:ln w="38100">
+              <a:solidFill>
+                <a:srgbClr val="2E9E1F"/>
+              </a:solidFill>
+            </a:ln>
+          </p:spPr>
+          <p:style>
+            <a:lnRef idx="2">
+              <a:schemeClr val="accent1"/>
+            </a:lnRef>
+            <a:fillRef idx="0">
+              <a:schemeClr val="accent1"/>
+            </a:fillRef>
+            <a:effectRef idx="1">
+              <a:schemeClr val="accent1"/>
+            </a:effectRef>
+            <a:fontRef idx="minor">
+              <a:schemeClr val="tx1"/>
+            </a:fontRef>
+          </p:style>
+        </p:cxnSp>
+        <p:cxnSp>
+          <p:nvCxnSpPr>
+            <p:cNvPr id="459" name="Arrow 2"/>
+            <p:cNvCxnSpPr/>
+            <p:nvPr/>
+          </p:nvCxnSpPr>
+          <p:spPr>
+            <a:xfrm>
+              <a:off x="3621024" y="5449824"/>
+              <a:ext cx="4535424" cy="0"/>
+            </a:xfrm>
+            <a:prstGeom prst="line">
+              <a:avLst/>
+            </a:prstGeom>
+            <a:ln w="38100">
+              <a:solidFill>
+                <a:srgbClr val="2E9E1F"/>
+              </a:solidFill>
+            </a:ln>
+          </p:spPr>
+          <p:style>
+            <a:lnRef idx="2">
+              <a:schemeClr val="accent1"/>
+            </a:lnRef>
+            <a:fillRef idx="0">
+              <a:schemeClr val="accent1"/>
+            </a:fillRef>
+            <a:effectRef idx="1">
+              <a:schemeClr val="accent1"/>
+            </a:effectRef>
+            <a:fontRef idx="minor">
+              <a:schemeClr val="tx1"/>
+            </a:fontRef>
+          </p:style>
+        </p:cxnSp>
+        <p:cxnSp>
+          <p:nvCxnSpPr>
+            <p:cNvPr id="460" name="Arrow 3"/>
+            <p:cNvCxnSpPr/>
+            <p:nvPr/>
+          </p:nvCxnSpPr>
+          <p:spPr>
+            <a:xfrm>
+              <a:off x="8156448" y="5449824"/>
+              <a:ext cx="0" cy="100584"/>
+            </a:xfrm>
+            <a:prstGeom prst="line">
+              <a:avLst/>
+            </a:prstGeom>
+            <a:ln w="38100">
+              <a:solidFill>
+                <a:srgbClr val="2E9E1F"/>
+              </a:solidFill>
+              <a:tailEnd type="triangle" w="med" len="med"/>
+            </a:ln>
+          </p:spPr>
+          <p:style>
+            <a:lnRef idx="2">
+              <a:schemeClr val="accent1"/>
+            </a:lnRef>
+            <a:fillRef idx="0">
+              <a:schemeClr val="accent1"/>
+            </a:fillRef>
+            <a:effectRef idx="1">
+              <a:schemeClr val="accent1"/>
+            </a:effectRef>
+            <a:fontRef idx="minor">
+              <a:schemeClr val="tx1"/>
+            </a:fontRef>
+          </p:style>
+        </p:cxnSp>
+        <p:sp>
+          <p:nvSpPr>
+            <p:cNvPr id="461" name="Shape 4"/>
+            <p:cNvSpPr/>
+            <p:nvPr/>
+          </p:nvSpPr>
+          <p:spPr>
+            <a:xfrm>
+              <a:off x="7424927" y="5971032"/>
+              <a:ext cx="1463040" cy="182880"/>
+            </a:xfrm>
+            <a:prstGeom prst="roundRect">
+              <a:avLst>
+                <a:gd name="adj" fmla="val 50000"/>
+              </a:avLst>
+            </a:prstGeom>
+            <a:solidFill>
+              <a:srgbClr val="2E9E1F"/>
+            </a:solidFill>
+            <a:ln>
+              <a:noFill/>
+            </a:ln>
+            <a:effectLst/>
+          </p:spPr>
+          <p:style>
+            <a:lnRef idx="1">
+              <a:schemeClr val="accent1"/>
+            </a:lnRef>
+            <a:fillRef idx="3">
+              <a:schemeClr val="accent1"/>
+            </a:fillRef>
+            <a:effectRef idx="2">
+              <a:schemeClr val="accent1"/>
+            </a:effectRef>
+            <a:fontRef idx="minor">
+              <a:schemeClr val="lt1"/>
+            </a:fontRef>
+          </p:style>
+          <p:txBody>
+            <a:bodyPr rtlCol="0" anchor="ctr"/>
+            <a:lstStyle/>
+            <a:p/>
+          </p:txBody>
+        </p:sp>
+        <p:sp>
+          <p:nvSpPr>
+            <p:cNvPr id="462" name="Text 5"/>
+            <p:cNvSpPr txBox="1"/>
+            <p:nvPr/>
+          </p:nvSpPr>
+          <p:spPr>
+            <a:xfrm>
+              <a:off x="7424927" y="5971032"/>
+              <a:ext cx="1463040" cy="182880"/>
+            </a:xfrm>
+            <a:prstGeom prst="rect">
+              <a:avLst/>
+            </a:prstGeom>
+            <a:noFill/>
+          </p:spPr>
+          <p:txBody>
+            <a:bodyPr wrap="square" lIns="0" rIns="0" tIns="0" bIns="0" anchor="ctr">
+              <a:spAutoFit/>
+            </a:bodyPr>
+            <a:lstStyle/>
+            <a:p>
+              <a:pPr algn="ctr"/>
+              <a:r>
+                <a:rPr sz="650" b="1" i="0" spc="60">
+                  <a:solidFill>
+                    <a:srgbClr val="FFFFFF"/>
+                  </a:solidFill>
+                  <a:latin typeface="Trenda IG Text"/>
+                </a:rPr>
+                <a:t>H4 SIGNED → 07 PREPARE</a:t>
+              </a:r>
+            </a:p>
+          </p:txBody>
+        </p:sp>
+      </p:grpSp>
+      <p:grpSp>
+        <p:nvGrpSpPr>
+          <p:cNvPr id="463" name="Step 11 highlight"/>
+          <p:cNvGrpSpPr/>
+          <p:nvPr/>
+        </p:nvGrpSpPr>
+        <p:grpSpPr>
+          <a:xfrm>
+            <a:off x="365760" y="1115568"/>
+            <a:ext cx="11457432" cy="5239511"/>
+            <a:chOff x="365760" y="1115568"/>
+            <a:chExt cx="11457432" cy="5239511"/>
+          </a:xfrm>
+        </p:grpSpPr>
+        <p:sp>
+          <p:nvSpPr>
+            <p:cNvPr id="464" name="Shape 1"/>
+            <p:cNvSpPr/>
+            <p:nvPr/>
+          </p:nvSpPr>
+          <p:spPr>
+            <a:xfrm>
+              <a:off x="365760" y="1115568"/>
+              <a:ext cx="11457432" cy="2404872"/>
+            </a:xfrm>
+            <a:prstGeom prst="rect">
+              <a:avLst/>
+            </a:prstGeom>
+            <a:solidFill>
+              <a:srgbClr val="FFFFFF">
+                <a:alpha val="72000"/>
+              </a:srgbClr>
+            </a:solidFill>
+            <a:ln>
+              <a:noFill/>
+            </a:ln>
+            <a:effectLst/>
+          </p:spPr>
+          <p:style>
+            <a:lnRef idx="1">
+              <a:schemeClr val="accent1"/>
+            </a:lnRef>
+            <a:fillRef idx="3">
+              <a:schemeClr val="accent1"/>
+            </a:fillRef>
+            <a:effectRef idx="2">
+              <a:schemeClr val="accent1"/>
+            </a:effectRef>
+            <a:fontRef idx="minor">
+              <a:schemeClr val="lt1"/>
+            </a:fontRef>
+          </p:style>
+          <p:txBody>
+            <a:bodyPr rtlCol="0" anchor="ctr"/>
+            <a:lstStyle/>
+            <a:p/>
+          </p:txBody>
+        </p:sp>
+        <p:sp>
+          <p:nvSpPr>
+            <p:cNvPr id="465" name="Shape 2"/>
+            <p:cNvSpPr/>
+            <p:nvPr/>
+          </p:nvSpPr>
+          <p:spPr>
+            <a:xfrm>
+              <a:off x="365760" y="3520440"/>
+              <a:ext cx="5495544" cy="292607"/>
+            </a:xfrm>
+            <a:prstGeom prst="rect">
+              <a:avLst/>
+            </a:prstGeom>
+            <a:solidFill>
+              <a:srgbClr val="FFFFFF">
+                <a:alpha val="72000"/>
+              </a:srgbClr>
+            </a:solidFill>
+            <a:ln>
+              <a:noFill/>
+            </a:ln>
+            <a:effectLst/>
+          </p:spPr>
+          <p:style>
+            <a:lnRef idx="1">
+              <a:schemeClr val="accent1"/>
+            </a:lnRef>
+            <a:fillRef idx="3">
+              <a:schemeClr val="accent1"/>
+            </a:fillRef>
+            <a:effectRef idx="2">
+              <a:schemeClr val="accent1"/>
+            </a:effectRef>
+            <a:fontRef idx="minor">
+              <a:schemeClr val="lt1"/>
+            </a:fontRef>
+          </p:style>
+          <p:txBody>
+            <a:bodyPr rtlCol="0" anchor="ctr"/>
+            <a:lstStyle/>
+            <a:p/>
+          </p:txBody>
+        </p:sp>
+        <p:sp>
+          <p:nvSpPr>
+            <p:cNvPr id="466" name="Shape 3"/>
+            <p:cNvSpPr/>
+            <p:nvPr/>
+          </p:nvSpPr>
+          <p:spPr>
+            <a:xfrm>
+              <a:off x="7168896" y="3520440"/>
+              <a:ext cx="4654296" cy="292607"/>
+            </a:xfrm>
+            <a:prstGeom prst="rect">
+              <a:avLst/>
+            </a:prstGeom>
+            <a:solidFill>
+              <a:srgbClr val="FFFFFF">
+                <a:alpha val="72000"/>
+              </a:srgbClr>
+            </a:solidFill>
+            <a:ln>
+              <a:noFill/>
+            </a:ln>
+            <a:effectLst/>
+          </p:spPr>
+          <p:style>
+            <a:lnRef idx="1">
+              <a:schemeClr val="accent1"/>
+            </a:lnRef>
+            <a:fillRef idx="3">
+              <a:schemeClr val="accent1"/>
+            </a:fillRef>
+            <a:effectRef idx="2">
+              <a:schemeClr val="accent1"/>
+            </a:effectRef>
+            <a:fontRef idx="minor">
+              <a:schemeClr val="lt1"/>
+            </a:fontRef>
+          </p:style>
+          <p:txBody>
+            <a:bodyPr rtlCol="0" anchor="ctr"/>
+            <a:lstStyle/>
+            <a:p/>
+          </p:txBody>
+        </p:sp>
+        <p:sp>
+          <p:nvSpPr>
+            <p:cNvPr id="467" name="Shape 4"/>
+            <p:cNvSpPr/>
+            <p:nvPr/>
+          </p:nvSpPr>
+          <p:spPr>
+            <a:xfrm>
+              <a:off x="365760" y="3813048"/>
+              <a:ext cx="11457432" cy="73152"/>
+            </a:xfrm>
+            <a:prstGeom prst="rect">
+              <a:avLst/>
+            </a:prstGeom>
+            <a:solidFill>
+              <a:srgbClr val="FFFFFF">
+                <a:alpha val="72000"/>
+              </a:srgbClr>
+            </a:solidFill>
+            <a:ln>
+              <a:noFill/>
+            </a:ln>
+            <a:effectLst/>
+          </p:spPr>
+          <p:style>
+            <a:lnRef idx="1">
+              <a:schemeClr val="accent1"/>
+            </a:lnRef>
+            <a:fillRef idx="3">
+              <a:schemeClr val="accent1"/>
+            </a:fillRef>
+            <a:effectRef idx="2">
+              <a:schemeClr val="accent1"/>
+            </a:effectRef>
+            <a:fontRef idx="minor">
+              <a:schemeClr val="lt1"/>
+            </a:fontRef>
+          </p:style>
+          <p:txBody>
+            <a:bodyPr rtlCol="0" anchor="ctr"/>
+            <a:lstStyle/>
+            <a:p/>
+          </p:txBody>
+        </p:sp>
+        <p:sp>
+          <p:nvSpPr>
+            <p:cNvPr id="468" name="Shape 5"/>
+            <p:cNvSpPr/>
+            <p:nvPr/>
+          </p:nvSpPr>
+          <p:spPr>
+            <a:xfrm>
+              <a:off x="365760" y="3886200"/>
+              <a:ext cx="2423160" cy="566928"/>
+            </a:xfrm>
+            <a:prstGeom prst="rect">
+              <a:avLst/>
+            </a:prstGeom>
+            <a:solidFill>
+              <a:srgbClr val="FFFFFF">
+                <a:alpha val="72000"/>
+              </a:srgbClr>
+            </a:solidFill>
+            <a:ln>
+              <a:noFill/>
+            </a:ln>
+            <a:effectLst/>
+          </p:spPr>
+          <p:style>
+            <a:lnRef idx="1">
+              <a:schemeClr val="accent1"/>
+            </a:lnRef>
+            <a:fillRef idx="3">
+              <a:schemeClr val="accent1"/>
+            </a:fillRef>
+            <a:effectRef idx="2">
+              <a:schemeClr val="accent1"/>
+            </a:effectRef>
+            <a:fontRef idx="minor">
+              <a:schemeClr val="lt1"/>
+            </a:fontRef>
+          </p:style>
+          <p:txBody>
+            <a:bodyPr rtlCol="0" anchor="ctr"/>
+            <a:lstStyle/>
+            <a:p/>
+          </p:txBody>
+        </p:sp>
+        <p:sp>
+          <p:nvSpPr>
+            <p:cNvPr id="469" name="Shape 6"/>
+            <p:cNvSpPr/>
+            <p:nvPr/>
+          </p:nvSpPr>
+          <p:spPr>
+            <a:xfrm>
+              <a:off x="4453128" y="3886200"/>
+              <a:ext cx="7370063" cy="566928"/>
+            </a:xfrm>
+            <a:prstGeom prst="rect">
+              <a:avLst/>
+            </a:prstGeom>
+            <a:solidFill>
+              <a:srgbClr val="FFFFFF">
+                <a:alpha val="72000"/>
+              </a:srgbClr>
+            </a:solidFill>
+            <a:ln>
+              <a:noFill/>
+            </a:ln>
+            <a:effectLst/>
+          </p:spPr>
+          <p:style>
+            <a:lnRef idx="1">
+              <a:schemeClr val="accent1"/>
+            </a:lnRef>
+            <a:fillRef idx="3">
+              <a:schemeClr val="accent1"/>
+            </a:fillRef>
+            <a:effectRef idx="2">
+              <a:schemeClr val="accent1"/>
+            </a:effectRef>
+            <a:fontRef idx="minor">
+              <a:schemeClr val="lt1"/>
+            </a:fontRef>
+          </p:style>
+          <p:txBody>
+            <a:bodyPr rtlCol="0" anchor="ctr"/>
+            <a:lstStyle/>
+            <a:p/>
+          </p:txBody>
+        </p:sp>
+        <p:sp>
+          <p:nvSpPr>
+            <p:cNvPr id="470" name="Shape 7"/>
+            <p:cNvSpPr/>
+            <p:nvPr/>
+          </p:nvSpPr>
+          <p:spPr>
+            <a:xfrm>
+              <a:off x="365760" y="4453128"/>
+              <a:ext cx="11457432" cy="137159"/>
+            </a:xfrm>
+            <a:prstGeom prst="rect">
+              <a:avLst/>
+            </a:prstGeom>
+            <a:solidFill>
+              <a:srgbClr val="FFFFFF">
+                <a:alpha val="72000"/>
+              </a:srgbClr>
+            </a:solidFill>
+            <a:ln>
+              <a:noFill/>
+            </a:ln>
+            <a:effectLst/>
+          </p:spPr>
+          <p:style>
+            <a:lnRef idx="1">
+              <a:schemeClr val="accent1"/>
+            </a:lnRef>
+            <a:fillRef idx="3">
+              <a:schemeClr val="accent1"/>
+            </a:fillRef>
+            <a:effectRef idx="2">
+              <a:schemeClr val="accent1"/>
+            </a:effectRef>
+            <a:fontRef idx="minor">
+              <a:schemeClr val="lt1"/>
+            </a:fontRef>
+          </p:style>
+          <p:txBody>
+            <a:bodyPr rtlCol="0" anchor="ctr"/>
+            <a:lstStyle/>
+            <a:p/>
+          </p:txBody>
+        </p:sp>
+        <p:sp>
+          <p:nvSpPr>
+            <p:cNvPr id="471" name="Shape 8"/>
+            <p:cNvSpPr/>
+            <p:nvPr/>
+          </p:nvSpPr>
+          <p:spPr>
+            <a:xfrm>
+              <a:off x="365760" y="4590288"/>
+              <a:ext cx="4663440" cy="822960"/>
+            </a:xfrm>
+            <a:prstGeom prst="rect">
+              <a:avLst/>
+            </a:prstGeom>
+            <a:solidFill>
+              <a:srgbClr val="FFFFFF">
+                <a:alpha val="72000"/>
+              </a:srgbClr>
+            </a:solidFill>
+            <a:ln>
+              <a:noFill/>
+            </a:ln>
+            <a:effectLst/>
+          </p:spPr>
+          <p:style>
+            <a:lnRef idx="1">
+              <a:schemeClr val="accent1"/>
+            </a:lnRef>
+            <a:fillRef idx="3">
+              <a:schemeClr val="accent1"/>
+            </a:fillRef>
+            <a:effectRef idx="2">
+              <a:schemeClr val="accent1"/>
+            </a:effectRef>
+            <a:fontRef idx="minor">
+              <a:schemeClr val="lt1"/>
+            </a:fontRef>
+          </p:style>
+          <p:txBody>
+            <a:bodyPr rtlCol="0" anchor="ctr"/>
+            <a:lstStyle/>
+            <a:p/>
+          </p:txBody>
+        </p:sp>
+        <p:sp>
+          <p:nvSpPr>
+            <p:cNvPr id="472" name="Shape 9"/>
+            <p:cNvSpPr/>
+            <p:nvPr/>
+          </p:nvSpPr>
+          <p:spPr>
+            <a:xfrm>
+              <a:off x="6583680" y="4590288"/>
+              <a:ext cx="5239512" cy="822960"/>
+            </a:xfrm>
+            <a:prstGeom prst="rect">
+              <a:avLst/>
+            </a:prstGeom>
+            <a:solidFill>
+              <a:srgbClr val="FFFFFF">
+                <a:alpha val="72000"/>
+              </a:srgbClr>
+            </a:solidFill>
+            <a:ln>
+              <a:noFill/>
+            </a:ln>
+            <a:effectLst/>
+          </p:spPr>
+          <p:style>
+            <a:lnRef idx="1">
+              <a:schemeClr val="accent1"/>
+            </a:lnRef>
+            <a:fillRef idx="3">
+              <a:schemeClr val="accent1"/>
+            </a:fillRef>
+            <a:effectRef idx="2">
+              <a:schemeClr val="accent1"/>
+            </a:effectRef>
+            <a:fontRef idx="minor">
+              <a:schemeClr val="lt1"/>
+            </a:fontRef>
+          </p:style>
+          <p:txBody>
+            <a:bodyPr rtlCol="0" anchor="ctr"/>
+            <a:lstStyle/>
+            <a:p/>
+          </p:txBody>
+        </p:sp>
+        <p:sp>
+          <p:nvSpPr>
+            <p:cNvPr id="473" name="Shape 10"/>
+            <p:cNvSpPr/>
+            <p:nvPr/>
+          </p:nvSpPr>
+          <p:spPr>
+            <a:xfrm>
+              <a:off x="365760" y="5413248"/>
+              <a:ext cx="11457432" cy="100584"/>
+            </a:xfrm>
+            <a:prstGeom prst="rect">
+              <a:avLst/>
+            </a:prstGeom>
+            <a:solidFill>
+              <a:srgbClr val="FFFFFF">
+                <a:alpha val="72000"/>
+              </a:srgbClr>
+            </a:solidFill>
+            <a:ln>
+              <a:noFill/>
+            </a:ln>
+            <a:effectLst/>
+          </p:spPr>
+          <p:style>
+            <a:lnRef idx="1">
+              <a:schemeClr val="accent1"/>
+            </a:lnRef>
+            <a:fillRef idx="3">
+              <a:schemeClr val="accent1"/>
+            </a:fillRef>
+            <a:effectRef idx="2">
+              <a:schemeClr val="accent1"/>
+            </a:effectRef>
+            <a:fontRef idx="minor">
+              <a:schemeClr val="lt1"/>
+            </a:fontRef>
+          </p:style>
+          <p:txBody>
+            <a:bodyPr rtlCol="0" anchor="ctr"/>
+            <a:lstStyle/>
+            <a:p/>
+          </p:txBody>
+        </p:sp>
+        <p:sp>
+          <p:nvSpPr>
+            <p:cNvPr id="474" name="Shape 11"/>
+            <p:cNvSpPr/>
+            <p:nvPr/>
+          </p:nvSpPr>
+          <p:spPr>
+            <a:xfrm>
+              <a:off x="365760" y="5513832"/>
+              <a:ext cx="8183880" cy="457200"/>
+            </a:xfrm>
+            <a:prstGeom prst="rect">
+              <a:avLst/>
+            </a:prstGeom>
+            <a:solidFill>
+              <a:srgbClr val="FFFFFF">
+                <a:alpha val="72000"/>
+              </a:srgbClr>
+            </a:solidFill>
+            <a:ln>
+              <a:noFill/>
+            </a:ln>
+            <a:effectLst/>
+          </p:spPr>
+          <p:style>
+            <a:lnRef idx="1">
+              <a:schemeClr val="accent1"/>
+            </a:lnRef>
+            <a:fillRef idx="3">
+              <a:schemeClr val="accent1"/>
+            </a:fillRef>
+            <a:effectRef idx="2">
+              <a:schemeClr val="accent1"/>
+            </a:effectRef>
+            <a:fontRef idx="minor">
+              <a:schemeClr val="lt1"/>
+            </a:fontRef>
+          </p:style>
+          <p:txBody>
+            <a:bodyPr rtlCol="0" anchor="ctr"/>
+            <a:lstStyle/>
+            <a:p/>
+          </p:txBody>
+        </p:sp>
+        <p:sp>
+          <p:nvSpPr>
+            <p:cNvPr id="475" name="Shape 12"/>
+            <p:cNvSpPr/>
+            <p:nvPr/>
+          </p:nvSpPr>
+          <p:spPr>
+            <a:xfrm>
+              <a:off x="10149840" y="5513832"/>
+              <a:ext cx="1673351" cy="457200"/>
+            </a:xfrm>
+            <a:prstGeom prst="rect">
+              <a:avLst/>
+            </a:prstGeom>
+            <a:solidFill>
+              <a:srgbClr val="FFFFFF">
+                <a:alpha val="72000"/>
+              </a:srgbClr>
+            </a:solidFill>
+            <a:ln>
+              <a:noFill/>
+            </a:ln>
+            <a:effectLst/>
+          </p:spPr>
+          <p:style>
+            <a:lnRef idx="1">
+              <a:schemeClr val="accent1"/>
+            </a:lnRef>
+            <a:fillRef idx="3">
+              <a:schemeClr val="accent1"/>
+            </a:fillRef>
+            <a:effectRef idx="2">
+              <a:schemeClr val="accent1"/>
+            </a:effectRef>
+            <a:fontRef idx="minor">
+              <a:schemeClr val="lt1"/>
+            </a:fontRef>
+          </p:style>
+          <p:txBody>
+            <a:bodyPr rtlCol="0" anchor="ctr"/>
+            <a:lstStyle/>
+            <a:p/>
+          </p:txBody>
+        </p:sp>
+        <p:sp>
+          <p:nvSpPr>
+            <p:cNvPr id="476" name="Shape 13"/>
+            <p:cNvSpPr/>
+            <p:nvPr/>
+          </p:nvSpPr>
+          <p:spPr>
+            <a:xfrm>
+              <a:off x="365760" y="5971032"/>
+              <a:ext cx="11457432" cy="384047"/>
+            </a:xfrm>
+            <a:prstGeom prst="rect">
+              <a:avLst/>
+            </a:prstGeom>
+            <a:solidFill>
+              <a:srgbClr val="FFFFFF">
+                <a:alpha val="72000"/>
+              </a:srgbClr>
+            </a:solidFill>
+            <a:ln>
+              <a:noFill/>
+            </a:ln>
+            <a:effectLst/>
+          </p:spPr>
+          <p:style>
+            <a:lnRef idx="1">
+              <a:schemeClr val="accent1"/>
+            </a:lnRef>
+            <a:fillRef idx="3">
+              <a:schemeClr val="accent1"/>
+            </a:fillRef>
+            <a:effectRef idx="2">
+              <a:schemeClr val="accent1"/>
+            </a:effectRef>
+            <a:fontRef idx="minor">
+              <a:schemeClr val="lt1"/>
+            </a:fontRef>
+          </p:style>
+          <p:txBody>
+            <a:bodyPr rtlCol="0" anchor="ctr"/>
+            <a:lstStyle/>
+            <a:p/>
+          </p:txBody>
+        </p:sp>
+        <p:sp>
+          <p:nvSpPr>
+            <p:cNvPr id="477" name="Shape 14"/>
+            <p:cNvSpPr/>
+            <p:nvPr/>
+          </p:nvSpPr>
+          <p:spPr>
+            <a:xfrm>
+              <a:off x="5870448" y="3529584"/>
+              <a:ext cx="1289304" cy="274320"/>
+            </a:xfrm>
+            <a:prstGeom prst="roundRect">
+              <a:avLst>
+                <a:gd name="adj" fmla="val 8000"/>
+              </a:avLst>
+            </a:prstGeom>
+            <a:noFill/>
+            <a:ln w="38100">
+              <a:solidFill>
+                <a:srgbClr val="FA8B35"/>
+              </a:solidFill>
+            </a:ln>
+            <a:effectLst/>
+          </p:spPr>
+          <p:style>
+            <a:lnRef idx="1">
+              <a:schemeClr val="accent1"/>
+            </a:lnRef>
+            <a:fillRef idx="3">
+              <a:schemeClr val="accent1"/>
+            </a:fillRef>
+            <a:effectRef idx="2">
+              <a:schemeClr val="accent1"/>
+            </a:effectRef>
+            <a:fontRef idx="minor">
+              <a:schemeClr val="lt1"/>
+            </a:fontRef>
+          </p:style>
+          <p:txBody>
+            <a:bodyPr rtlCol="0" anchor="ctr"/>
+            <a:lstStyle/>
+            <a:p/>
+          </p:txBody>
+        </p:sp>
+        <p:sp>
+          <p:nvSpPr>
+            <p:cNvPr id="478" name="Shape 15"/>
+            <p:cNvSpPr/>
+            <p:nvPr/>
+          </p:nvSpPr>
+          <p:spPr>
+            <a:xfrm>
+              <a:off x="8577072" y="5550408"/>
+              <a:ext cx="1545335" cy="420624"/>
+            </a:xfrm>
+            <a:prstGeom prst="roundRect">
+              <a:avLst>
+                <a:gd name="adj" fmla="val 8000"/>
+              </a:avLst>
+            </a:prstGeom>
+            <a:noFill/>
+            <a:ln w="38100">
+              <a:solidFill>
+                <a:srgbClr val="FA8B35"/>
+              </a:solidFill>
+            </a:ln>
+            <a:effectLst/>
+          </p:spPr>
+          <p:style>
+            <a:lnRef idx="1">
+              <a:schemeClr val="accent1"/>
+            </a:lnRef>
+            <a:fillRef idx="3">
+              <a:schemeClr val="accent1"/>
+            </a:fillRef>
+            <a:effectRef idx="2">
+              <a:schemeClr val="accent1"/>
+            </a:effectRef>
+            <a:fontRef idx="minor">
+              <a:schemeClr val="lt1"/>
+            </a:fontRef>
+          </p:style>
+          <p:txBody>
+            <a:bodyPr rtlCol="0" anchor="ctr"/>
+            <a:lstStyle/>
+            <a:p/>
+          </p:txBody>
+        </p:sp>
+        <p:sp>
+          <p:nvSpPr>
+            <p:cNvPr id="479" name="Shape 16"/>
+            <p:cNvSpPr/>
+            <p:nvPr/>
+          </p:nvSpPr>
+          <p:spPr>
+            <a:xfrm>
+              <a:off x="2752344" y="3849624"/>
+              <a:ext cx="1737360" cy="640080"/>
+            </a:xfrm>
+            <a:prstGeom prst="roundRect">
+              <a:avLst>
+                <a:gd name="adj" fmla="val 8000"/>
+              </a:avLst>
+            </a:prstGeom>
+            <a:noFill/>
+            <a:ln w="38100">
+              <a:solidFill>
+                <a:srgbClr val="FA8B35"/>
+              </a:solidFill>
+            </a:ln>
+            <a:effectLst/>
+          </p:spPr>
+          <p:style>
+            <a:lnRef idx="1">
+              <a:schemeClr val="accent1"/>
+            </a:lnRef>
+            <a:fillRef idx="3">
+              <a:schemeClr val="accent1"/>
+            </a:fillRef>
+            <a:effectRef idx="2">
+              <a:schemeClr val="accent1"/>
+            </a:effectRef>
+            <a:fontRef idx="minor">
+              <a:schemeClr val="lt1"/>
+            </a:fontRef>
+          </p:style>
+          <p:txBody>
+            <a:bodyPr rtlCol="0" anchor="ctr"/>
+            <a:lstStyle/>
+            <a:p/>
+          </p:txBody>
+        </p:sp>
+        <p:sp>
+          <p:nvSpPr>
+            <p:cNvPr id="480" name="Shape 17"/>
+            <p:cNvSpPr/>
+            <p:nvPr/>
+          </p:nvSpPr>
+          <p:spPr>
+            <a:xfrm>
+              <a:off x="5038344" y="4599432"/>
+              <a:ext cx="1536192" cy="804672"/>
+            </a:xfrm>
+            <a:prstGeom prst="roundRect">
+              <a:avLst>
+                <a:gd name="adj" fmla="val 8000"/>
+              </a:avLst>
+            </a:prstGeom>
+            <a:noFill/>
+            <a:ln w="38100">
+              <a:solidFill>
+                <a:srgbClr val="FA8B35"/>
+              </a:solidFill>
+            </a:ln>
+            <a:effectLst/>
+          </p:spPr>
+          <p:style>
+            <a:lnRef idx="1">
+              <a:schemeClr val="accent1"/>
+            </a:lnRef>
+            <a:fillRef idx="3">
+              <a:schemeClr val="accent1"/>
+            </a:fillRef>
+            <a:effectRef idx="2">
+              <a:schemeClr val="accent1"/>
+            </a:effectRef>
+            <a:fontRef idx="minor">
+              <a:schemeClr val="lt1"/>
+            </a:fontRef>
+          </p:style>
+          <p:txBody>
+            <a:bodyPr rtlCol="0" anchor="ctr"/>
+            <a:lstStyle/>
+            <a:p/>
+          </p:txBody>
+        </p:sp>
+        <p:sp>
+          <p:nvSpPr>
+            <p:cNvPr id="481" name="Shape 18"/>
+            <p:cNvSpPr/>
+            <p:nvPr/>
+          </p:nvSpPr>
+          <p:spPr>
+            <a:xfrm>
+              <a:off x="2743200" y="1261872"/>
+              <a:ext cx="5669280" cy="658368"/>
+            </a:xfrm>
+            <a:prstGeom prst="roundRect">
+              <a:avLst>
+                <a:gd name="adj" fmla="val 12000"/>
+              </a:avLst>
+            </a:prstGeom>
+            <a:solidFill>
+              <a:srgbClr val="000000"/>
+            </a:solidFill>
+            <a:ln w="12700">
+              <a:solidFill>
+                <a:srgbClr val="FA8B35"/>
+              </a:solidFill>
+            </a:ln>
+            <a:effectLst/>
+          </p:spPr>
+          <p:style>
+            <a:lnRef idx="1">
+              <a:schemeClr val="accent1"/>
+            </a:lnRef>
+            <a:fillRef idx="3">
+              <a:schemeClr val="accent1"/>
+            </a:fillRef>
+            <a:effectRef idx="2">
+              <a:schemeClr val="accent1"/>
+            </a:effectRef>
+            <a:fontRef idx="minor">
+              <a:schemeClr val="lt1"/>
+            </a:fontRef>
+          </p:style>
+          <p:txBody>
+            <a:bodyPr rtlCol="0" anchor="ctr"/>
+            <a:lstStyle/>
+            <a:p/>
+          </p:txBody>
+        </p:sp>
+        <p:sp>
+          <p:nvSpPr>
+            <p:cNvPr id="482" name="Text 19"/>
+            <p:cNvSpPr txBox="1"/>
+            <p:nvPr/>
+          </p:nvSpPr>
+          <p:spPr>
+            <a:xfrm>
+              <a:off x="2871216" y="1325880"/>
+              <a:ext cx="5413248" cy="566928"/>
+            </a:xfrm>
+            <a:prstGeom prst="rect">
+              <a:avLst/>
+            </a:prstGeom>
+            <a:noFill/>
+          </p:spPr>
+          <p:txBody>
+            <a:bodyPr wrap="square" lIns="0" rIns="0" tIns="0" bIns="0" anchor="t">
+              <a:spAutoFit/>
+            </a:bodyPr>
+            <a:lstStyle/>
+            <a:p>
+              <a:pPr>
+                <a:spcAft>
+                  <a:spcPts val="200"/>
+                </a:spcAft>
+              </a:pPr>
+              <a:r>
+                <a:rPr sz="800" b="1" i="0">
+                  <a:solidFill>
+                    <a:srgbClr val="FA8B35"/>
+                  </a:solidFill>
+                  <a:latin typeface="Trenda IG Text"/>
+                </a:rPr>
+                <a:t>11 / 13   </a:t>
+              </a:r>
+              <a:r>
+                <a:rPr sz="800" b="1" i="0" spc="120">
+                  <a:solidFill>
+                    <a:srgbClr val="FFFFFF"/>
+                  </a:solidFill>
+                  <a:latin typeface="Trenda IG Text"/>
+                </a:rPr>
+                <a:t>CAB · RELEASE APPROVED</a:t>
+              </a:r>
+            </a:p>
+            <a:p>
+              <a:pPr>
+                <a:spcAft>
+                  <a:spcPts val="200"/>
+                </a:spcAft>
+              </a:pPr>
+              <a:r>
+                <a:rPr sz="750" b="0" i="0">
+                  <a:solidFill>
+                    <a:srgbClr val="E6E6E6"/>
+                  </a:solidFill>
+                  <a:latin typeface="Trenda IG Text"/>
+                </a:rPr>
+                <a:t>The Release Agent builds the CAB pack from the change passport: evidence, test results, rollback plan. CAB approves the release, exactly as today.</a:t>
+              </a:r>
+            </a:p>
+          </p:txBody>
+        </p:sp>
+      </p:grpSp>
+      <p:grpSp>
+        <p:nvGrpSpPr>
+          <p:cNvPr id="483" name="Step 11 arrows"/>
+          <p:cNvGrpSpPr/>
+          <p:nvPr/>
+        </p:nvGrpSpPr>
+        <p:grpSpPr>
+          <a:xfrm>
+            <a:off x="3621024" y="4453128"/>
+            <a:ext cx="6858000" cy="1700784"/>
+            <a:chOff x="3621024" y="4453128"/>
+            <a:chExt cx="6858000" cy="1700784"/>
+          </a:xfrm>
+        </p:grpSpPr>
+        <p:cxnSp>
+          <p:nvCxnSpPr>
+            <p:cNvPr id="484" name="Arrow 1"/>
+            <p:cNvCxnSpPr/>
+            <p:nvPr/>
+          </p:nvCxnSpPr>
+          <p:spPr>
+            <a:xfrm>
+              <a:off x="3621024" y="4453128"/>
+              <a:ext cx="0" cy="996696"/>
+            </a:xfrm>
+            <a:prstGeom prst="line">
+              <a:avLst/>
+            </a:prstGeom>
+            <a:ln w="38100">
+              <a:solidFill>
+                <a:srgbClr val="2E9E1F"/>
+              </a:solidFill>
+            </a:ln>
+          </p:spPr>
+          <p:style>
+            <a:lnRef idx="2">
+              <a:schemeClr val="accent1"/>
+            </a:lnRef>
+            <a:fillRef idx="0">
+              <a:schemeClr val="accent1"/>
+            </a:fillRef>
+            <a:effectRef idx="1">
+              <a:schemeClr val="accent1"/>
+            </a:effectRef>
+            <a:fontRef idx="minor">
+              <a:schemeClr val="tx1"/>
+            </a:fontRef>
+          </p:style>
+        </p:cxnSp>
+        <p:cxnSp>
+          <p:nvCxnSpPr>
+            <p:cNvPr id="485" name="Arrow 2"/>
+            <p:cNvCxnSpPr/>
+            <p:nvPr/>
+          </p:nvCxnSpPr>
+          <p:spPr>
+            <a:xfrm>
+              <a:off x="3621024" y="5449824"/>
+              <a:ext cx="6126480" cy="0"/>
+            </a:xfrm>
+            <a:prstGeom prst="line">
+              <a:avLst/>
+            </a:prstGeom>
+            <a:ln w="38100">
+              <a:solidFill>
+                <a:srgbClr val="2E9E1F"/>
+              </a:solidFill>
+            </a:ln>
+          </p:spPr>
+          <p:style>
+            <a:lnRef idx="2">
+              <a:schemeClr val="accent1"/>
+            </a:lnRef>
+            <a:fillRef idx="0">
+              <a:schemeClr val="accent1"/>
+            </a:fillRef>
+            <a:effectRef idx="1">
+              <a:schemeClr val="accent1"/>
+            </a:effectRef>
+            <a:fontRef idx="minor">
+              <a:schemeClr val="tx1"/>
+            </a:fontRef>
+          </p:style>
+        </p:cxnSp>
+        <p:cxnSp>
+          <p:nvCxnSpPr>
+            <p:cNvPr id="486" name="Arrow 3"/>
+            <p:cNvCxnSpPr/>
+            <p:nvPr/>
+          </p:nvCxnSpPr>
+          <p:spPr>
+            <a:xfrm>
+              <a:off x="9747504" y="5449824"/>
+              <a:ext cx="0" cy="100584"/>
+            </a:xfrm>
+            <a:prstGeom prst="line">
+              <a:avLst/>
+            </a:prstGeom>
+            <a:ln w="38100">
+              <a:solidFill>
+                <a:srgbClr val="2E9E1F"/>
+              </a:solidFill>
+              <a:tailEnd type="triangle" w="med" len="med"/>
+            </a:ln>
+          </p:spPr>
+          <p:style>
+            <a:lnRef idx="2">
+              <a:schemeClr val="accent1"/>
+            </a:lnRef>
+            <a:fillRef idx="0">
+              <a:schemeClr val="accent1"/>
+            </a:fillRef>
+            <a:effectRef idx="1">
+              <a:schemeClr val="accent1"/>
+            </a:effectRef>
+            <a:fontRef idx="minor">
+              <a:schemeClr val="tx1"/>
+            </a:fontRef>
+          </p:style>
+        </p:cxnSp>
+        <p:sp>
+          <p:nvSpPr>
+            <p:cNvPr id="487" name="Shape 4"/>
+            <p:cNvSpPr/>
+            <p:nvPr/>
+          </p:nvSpPr>
+          <p:spPr>
+            <a:xfrm>
+              <a:off x="9015984" y="5971032"/>
+              <a:ext cx="1463040" cy="182880"/>
+            </a:xfrm>
+            <a:prstGeom prst="roundRect">
+              <a:avLst>
+                <a:gd name="adj" fmla="val 50000"/>
+              </a:avLst>
+            </a:prstGeom>
+            <a:solidFill>
+              <a:srgbClr val="2E9E1F"/>
+            </a:solidFill>
+            <a:ln>
+              <a:noFill/>
+            </a:ln>
+            <a:effectLst/>
+          </p:spPr>
+          <p:style>
+            <a:lnRef idx="1">
+              <a:schemeClr val="accent1"/>
+            </a:lnRef>
+            <a:fillRef idx="3">
+              <a:schemeClr val="accent1"/>
+            </a:fillRef>
+            <a:effectRef idx="2">
+              <a:schemeClr val="accent1"/>
+            </a:effectRef>
+            <a:fontRef idx="minor">
+              <a:schemeClr val="lt1"/>
+            </a:fontRef>
+          </p:style>
+          <p:txBody>
+            <a:bodyPr rtlCol="0" anchor="ctr"/>
+            <a:lstStyle/>
+            <a:p/>
+          </p:txBody>
+        </p:sp>
+        <p:sp>
+          <p:nvSpPr>
+            <p:cNvPr id="488" name="Text 5"/>
+            <p:cNvSpPr txBox="1"/>
+            <p:nvPr/>
+          </p:nvSpPr>
+          <p:spPr>
+            <a:xfrm>
+              <a:off x="9015984" y="5971032"/>
+              <a:ext cx="1463040" cy="182880"/>
+            </a:xfrm>
+            <a:prstGeom prst="rect">
+              <a:avLst/>
+            </a:prstGeom>
+            <a:noFill/>
+          </p:spPr>
+          <p:txBody>
+            <a:bodyPr wrap="square" lIns="0" rIns="0" tIns="0" bIns="0" anchor="ctr">
+              <a:spAutoFit/>
+            </a:bodyPr>
+            <a:lstStyle/>
+            <a:p>
+              <a:pPr algn="ctr"/>
+              <a:r>
+                <a:rPr sz="650" b="1" i="0" spc="60">
+                  <a:solidFill>
+                    <a:srgbClr val="FFFFFF"/>
+                  </a:solidFill>
+                  <a:latin typeface="Trenda IG Text"/>
+                </a:rPr>
+                <a:t>CAB APPROVED → 08 DEPLOY</a:t>
+              </a:r>
+            </a:p>
+          </p:txBody>
+        </p:sp>
+      </p:grpSp>
+      <p:grpSp>
+        <p:nvGrpSpPr>
+          <p:cNvPr id="489" name="Step 12 highlight"/>
+          <p:cNvGrpSpPr/>
+          <p:nvPr/>
+        </p:nvGrpSpPr>
+        <p:grpSpPr>
+          <a:xfrm>
+            <a:off x="365760" y="1115568"/>
+            <a:ext cx="11457432" cy="5239511"/>
+            <a:chOff x="365760" y="1115568"/>
+            <a:chExt cx="11457432" cy="5239511"/>
+          </a:xfrm>
+        </p:grpSpPr>
+        <p:sp>
+          <p:nvSpPr>
+            <p:cNvPr id="490" name="Shape 1"/>
+            <p:cNvSpPr/>
+            <p:nvPr/>
+          </p:nvSpPr>
+          <p:spPr>
+            <a:xfrm>
+              <a:off x="365760" y="1115568"/>
+              <a:ext cx="11457432" cy="347472"/>
+            </a:xfrm>
+            <a:prstGeom prst="rect">
+              <a:avLst/>
+            </a:prstGeom>
+            <a:solidFill>
+              <a:srgbClr val="FFFFFF">
+                <a:alpha val="72000"/>
+              </a:srgbClr>
+            </a:solidFill>
+            <a:ln>
+              <a:noFill/>
+            </a:ln>
+            <a:effectLst/>
+          </p:spPr>
+          <p:style>
+            <a:lnRef idx="1">
+              <a:schemeClr val="accent1"/>
+            </a:lnRef>
+            <a:fillRef idx="3">
+              <a:schemeClr val="accent1"/>
+            </a:fillRef>
+            <a:effectRef idx="2">
+              <a:schemeClr val="accent1"/>
+            </a:effectRef>
+            <a:fontRef idx="minor">
+              <a:schemeClr val="lt1"/>
+            </a:fontRef>
+          </p:style>
+          <p:txBody>
+            <a:bodyPr rtlCol="0" anchor="ctr"/>
+            <a:lstStyle/>
+            <a:p/>
+          </p:txBody>
+        </p:sp>
+        <p:sp>
+          <p:nvSpPr>
+            <p:cNvPr id="491" name="Shape 2"/>
+            <p:cNvSpPr/>
+            <p:nvPr/>
+          </p:nvSpPr>
+          <p:spPr>
+            <a:xfrm>
+              <a:off x="365760" y="1463040"/>
+              <a:ext cx="9235440" cy="548640"/>
+            </a:xfrm>
+            <a:prstGeom prst="rect">
+              <a:avLst/>
+            </a:prstGeom>
+            <a:solidFill>
+              <a:srgbClr val="FFFFFF">
+                <a:alpha val="72000"/>
+              </a:srgbClr>
+            </a:solidFill>
+            <a:ln>
+              <a:noFill/>
+            </a:ln>
+            <a:effectLst/>
+          </p:spPr>
+          <p:style>
+            <a:lnRef idx="1">
+              <a:schemeClr val="accent1"/>
+            </a:lnRef>
+            <a:fillRef idx="3">
+              <a:schemeClr val="accent1"/>
+            </a:fillRef>
+            <a:effectRef idx="2">
+              <a:schemeClr val="accent1"/>
+            </a:effectRef>
+            <a:fontRef idx="minor">
+              <a:schemeClr val="lt1"/>
+            </a:fontRef>
+          </p:style>
+          <p:txBody>
+            <a:bodyPr rtlCol="0" anchor="ctr"/>
+            <a:lstStyle/>
+            <a:p/>
+          </p:txBody>
+        </p:sp>
+        <p:sp>
+          <p:nvSpPr>
+            <p:cNvPr id="492" name="Shape 3"/>
+            <p:cNvSpPr/>
+            <p:nvPr/>
+          </p:nvSpPr>
+          <p:spPr>
+            <a:xfrm>
+              <a:off x="11777472" y="1463040"/>
+              <a:ext cx="45720" cy="548640"/>
+            </a:xfrm>
+            <a:prstGeom prst="rect">
+              <a:avLst/>
+            </a:prstGeom>
+            <a:solidFill>
+              <a:srgbClr val="FFFFFF">
+                <a:alpha val="72000"/>
+              </a:srgbClr>
+            </a:solidFill>
+            <a:ln>
+              <a:noFill/>
+            </a:ln>
+            <a:effectLst/>
+          </p:spPr>
+          <p:style>
+            <a:lnRef idx="1">
+              <a:schemeClr val="accent1"/>
+            </a:lnRef>
+            <a:fillRef idx="3">
+              <a:schemeClr val="accent1"/>
+            </a:fillRef>
+            <a:effectRef idx="2">
+              <a:schemeClr val="accent1"/>
+            </a:effectRef>
+            <a:fontRef idx="minor">
+              <a:schemeClr val="lt1"/>
+            </a:fontRef>
+          </p:style>
+          <p:txBody>
+            <a:bodyPr rtlCol="0" anchor="ctr"/>
+            <a:lstStyle/>
+            <a:p/>
+          </p:txBody>
+        </p:sp>
+        <p:sp>
+          <p:nvSpPr>
+            <p:cNvPr id="493" name="Shape 4"/>
+            <p:cNvSpPr/>
+            <p:nvPr/>
+          </p:nvSpPr>
+          <p:spPr>
+            <a:xfrm>
+              <a:off x="365760" y="2011680"/>
+              <a:ext cx="11457432" cy="2834639"/>
+            </a:xfrm>
+            <a:prstGeom prst="rect">
+              <a:avLst/>
+            </a:prstGeom>
+            <a:solidFill>
+              <a:srgbClr val="FFFFFF">
+                <a:alpha val="72000"/>
+              </a:srgbClr>
+            </a:solidFill>
+            <a:ln>
+              <a:noFill/>
+            </a:ln>
+            <a:effectLst/>
+          </p:spPr>
+          <p:style>
+            <a:lnRef idx="1">
+              <a:schemeClr val="accent1"/>
+            </a:lnRef>
+            <a:fillRef idx="3">
+              <a:schemeClr val="accent1"/>
+            </a:fillRef>
+            <a:effectRef idx="2">
+              <a:schemeClr val="accent1"/>
+            </a:effectRef>
+            <a:fontRef idx="minor">
+              <a:schemeClr val="lt1"/>
+            </a:fontRef>
+          </p:style>
+          <p:txBody>
+            <a:bodyPr rtlCol="0" anchor="ctr"/>
+            <a:lstStyle/>
+            <a:p/>
+          </p:txBody>
+        </p:sp>
+        <p:sp>
+          <p:nvSpPr>
+            <p:cNvPr id="494" name="Shape 5"/>
+            <p:cNvSpPr/>
+            <p:nvPr/>
+          </p:nvSpPr>
+          <p:spPr>
+            <a:xfrm>
+              <a:off x="365760" y="4846320"/>
+              <a:ext cx="9281160" cy="603504"/>
+            </a:xfrm>
+            <a:prstGeom prst="rect">
+              <a:avLst/>
+            </a:prstGeom>
+            <a:solidFill>
+              <a:srgbClr val="FFFFFF">
+                <a:alpha val="72000"/>
+              </a:srgbClr>
+            </a:solidFill>
+            <a:ln>
+              <a:noFill/>
+            </a:ln>
+            <a:effectLst/>
+          </p:spPr>
+          <p:style>
+            <a:lnRef idx="1">
+              <a:schemeClr val="accent1"/>
+            </a:lnRef>
+            <a:fillRef idx="3">
+              <a:schemeClr val="accent1"/>
+            </a:fillRef>
+            <a:effectRef idx="2">
+              <a:schemeClr val="accent1"/>
+            </a:effectRef>
+            <a:fontRef idx="minor">
+              <a:schemeClr val="lt1"/>
+            </a:fontRef>
+          </p:style>
+          <p:txBody>
+            <a:bodyPr rtlCol="0" anchor="ctr"/>
+            <a:lstStyle/>
+            <a:p/>
+          </p:txBody>
+        </p:sp>
+        <p:sp>
+          <p:nvSpPr>
+            <p:cNvPr id="495" name="Shape 6"/>
+            <p:cNvSpPr/>
+            <p:nvPr/>
+          </p:nvSpPr>
+          <p:spPr>
+            <a:xfrm>
+              <a:off x="11731752" y="4846320"/>
+              <a:ext cx="91439" cy="603504"/>
+            </a:xfrm>
+            <a:prstGeom prst="rect">
+              <a:avLst/>
+            </a:prstGeom>
+            <a:solidFill>
+              <a:srgbClr val="FFFFFF">
+                <a:alpha val="72000"/>
+              </a:srgbClr>
+            </a:solidFill>
+            <a:ln>
+              <a:noFill/>
+            </a:ln>
+            <a:effectLst/>
+          </p:spPr>
+          <p:style>
+            <a:lnRef idx="1">
+              <a:schemeClr val="accent1"/>
+            </a:lnRef>
+            <a:fillRef idx="3">
+              <a:schemeClr val="accent1"/>
+            </a:fillRef>
+            <a:effectRef idx="2">
+              <a:schemeClr val="accent1"/>
+            </a:effectRef>
+            <a:fontRef idx="minor">
+              <a:schemeClr val="lt1"/>
+            </a:fontRef>
+          </p:style>
+          <p:txBody>
+            <a:bodyPr rtlCol="0" anchor="ctr"/>
+            <a:lstStyle/>
+            <a:p/>
+          </p:txBody>
+        </p:sp>
+        <p:sp>
+          <p:nvSpPr>
+            <p:cNvPr id="496" name="Shape 7"/>
+            <p:cNvSpPr/>
+            <p:nvPr/>
+          </p:nvSpPr>
+          <p:spPr>
+            <a:xfrm>
+              <a:off x="365760" y="5449824"/>
+              <a:ext cx="11457432" cy="64008"/>
+            </a:xfrm>
+            <a:prstGeom prst="rect">
+              <a:avLst/>
+            </a:prstGeom>
+            <a:solidFill>
+              <a:srgbClr val="FFFFFF">
+                <a:alpha val="72000"/>
+              </a:srgbClr>
+            </a:solidFill>
+            <a:ln>
+              <a:noFill/>
+            </a:ln>
+            <a:effectLst/>
+          </p:spPr>
+          <p:style>
+            <a:lnRef idx="1">
+              <a:schemeClr val="accent1"/>
+            </a:lnRef>
+            <a:fillRef idx="3">
+              <a:schemeClr val="accent1"/>
+            </a:fillRef>
+            <a:effectRef idx="2">
+              <a:schemeClr val="accent1"/>
+            </a:effectRef>
+            <a:fontRef idx="minor">
+              <a:schemeClr val="lt1"/>
+            </a:fontRef>
+          </p:style>
+          <p:txBody>
+            <a:bodyPr rtlCol="0" anchor="ctr"/>
+            <a:lstStyle/>
+            <a:p/>
+          </p:txBody>
+        </p:sp>
+        <p:sp>
+          <p:nvSpPr>
+            <p:cNvPr id="497" name="Shape 8"/>
+            <p:cNvSpPr/>
+            <p:nvPr/>
+          </p:nvSpPr>
+          <p:spPr>
+            <a:xfrm>
+              <a:off x="365760" y="5513832"/>
+              <a:ext cx="9774936" cy="457200"/>
+            </a:xfrm>
+            <a:prstGeom prst="rect">
+              <a:avLst/>
+            </a:prstGeom>
+            <a:solidFill>
+              <a:srgbClr val="FFFFFF">
+                <a:alpha val="72000"/>
+              </a:srgbClr>
+            </a:solidFill>
+            <a:ln>
+              <a:noFill/>
+            </a:ln>
+            <a:effectLst/>
+          </p:spPr>
+          <p:style>
+            <a:lnRef idx="1">
+              <a:schemeClr val="accent1"/>
+            </a:lnRef>
+            <a:fillRef idx="3">
+              <a:schemeClr val="accent1"/>
+            </a:fillRef>
+            <a:effectRef idx="2">
+              <a:schemeClr val="accent1"/>
+            </a:effectRef>
+            <a:fontRef idx="minor">
+              <a:schemeClr val="lt1"/>
+            </a:fontRef>
+          </p:style>
+          <p:txBody>
+            <a:bodyPr rtlCol="0" anchor="ctr"/>
+            <a:lstStyle/>
+            <a:p/>
+          </p:txBody>
+        </p:sp>
+        <p:sp>
+          <p:nvSpPr>
+            <p:cNvPr id="498" name="Shape 9"/>
+            <p:cNvSpPr/>
+            <p:nvPr/>
+          </p:nvSpPr>
+          <p:spPr>
+            <a:xfrm>
+              <a:off x="11740896" y="5513832"/>
+              <a:ext cx="82295" cy="457200"/>
+            </a:xfrm>
+            <a:prstGeom prst="rect">
+              <a:avLst/>
+            </a:prstGeom>
+            <a:solidFill>
+              <a:srgbClr val="FFFFFF">
+                <a:alpha val="72000"/>
+              </a:srgbClr>
+            </a:solidFill>
+            <a:ln>
+              <a:noFill/>
+            </a:ln>
+            <a:effectLst/>
+          </p:spPr>
+          <p:style>
+            <a:lnRef idx="1">
+              <a:schemeClr val="accent1"/>
+            </a:lnRef>
+            <a:fillRef idx="3">
+              <a:schemeClr val="accent1"/>
+            </a:fillRef>
+            <a:effectRef idx="2">
+              <a:schemeClr val="accent1"/>
+            </a:effectRef>
+            <a:fontRef idx="minor">
+              <a:schemeClr val="lt1"/>
+            </a:fontRef>
+          </p:style>
+          <p:txBody>
+            <a:bodyPr rtlCol="0" anchor="ctr"/>
+            <a:lstStyle/>
+            <a:p/>
+          </p:txBody>
+        </p:sp>
+        <p:sp>
+          <p:nvSpPr>
+            <p:cNvPr id="499" name="Shape 10"/>
+            <p:cNvSpPr/>
+            <p:nvPr/>
+          </p:nvSpPr>
+          <p:spPr>
+            <a:xfrm>
+              <a:off x="365760" y="5971032"/>
+              <a:ext cx="11457432" cy="384047"/>
+            </a:xfrm>
+            <a:prstGeom prst="rect">
+              <a:avLst/>
+            </a:prstGeom>
+            <a:solidFill>
+              <a:srgbClr val="FFFFFF">
+                <a:alpha val="72000"/>
+              </a:srgbClr>
+            </a:solidFill>
+            <a:ln>
+              <a:noFill/>
+            </a:ln>
+            <a:effectLst/>
+          </p:spPr>
+          <p:style>
+            <a:lnRef idx="1">
+              <a:schemeClr val="accent1"/>
+            </a:lnRef>
+            <a:fillRef idx="3">
+              <a:schemeClr val="accent1"/>
+            </a:fillRef>
+            <a:effectRef idx="2">
+              <a:schemeClr val="accent1"/>
+            </a:effectRef>
+            <a:fontRef idx="minor">
+              <a:schemeClr val="lt1"/>
+            </a:fontRef>
+          </p:style>
+          <p:txBody>
+            <a:bodyPr rtlCol="0" anchor="ctr"/>
+            <a:lstStyle/>
+            <a:p/>
+          </p:txBody>
+        </p:sp>
+        <p:sp>
+          <p:nvSpPr>
+            <p:cNvPr id="500" name="Shape 11"/>
+            <p:cNvSpPr/>
+            <p:nvPr/>
+          </p:nvSpPr>
+          <p:spPr>
+            <a:xfrm>
+              <a:off x="10131552" y="5513832"/>
+              <a:ext cx="1618488" cy="457200"/>
+            </a:xfrm>
+            <a:prstGeom prst="roundRect">
+              <a:avLst>
+                <a:gd name="adj" fmla="val 8000"/>
+              </a:avLst>
+            </a:prstGeom>
+            <a:noFill/>
+            <a:ln w="38100">
+              <a:solidFill>
+                <a:srgbClr val="FA8B35"/>
+              </a:solidFill>
+            </a:ln>
+            <a:effectLst/>
+          </p:spPr>
+          <p:style>
+            <a:lnRef idx="1">
+              <a:schemeClr val="accent1"/>
+            </a:lnRef>
+            <a:fillRef idx="3">
+              <a:schemeClr val="accent1"/>
+            </a:fillRef>
+            <a:effectRef idx="2">
+              <a:schemeClr val="accent1"/>
+            </a:effectRef>
+            <a:fontRef idx="minor">
+              <a:schemeClr val="lt1"/>
+            </a:fontRef>
+          </p:style>
+          <p:txBody>
+            <a:bodyPr rtlCol="0" anchor="ctr"/>
+            <a:lstStyle/>
+            <a:p/>
+          </p:txBody>
+        </p:sp>
+        <p:sp>
+          <p:nvSpPr>
+            <p:cNvPr id="501" name="Shape 12"/>
+            <p:cNvSpPr/>
+            <p:nvPr/>
+          </p:nvSpPr>
+          <p:spPr>
+            <a:xfrm>
+              <a:off x="9656064" y="4864608"/>
+              <a:ext cx="2066544" cy="576072"/>
+            </a:xfrm>
+            <a:prstGeom prst="roundRect">
+              <a:avLst>
+                <a:gd name="adj" fmla="val 8000"/>
+              </a:avLst>
+            </a:prstGeom>
+            <a:noFill/>
+            <a:ln w="38100">
+              <a:solidFill>
+                <a:srgbClr val="FA8B35"/>
+              </a:solidFill>
+            </a:ln>
+            <a:effectLst/>
+          </p:spPr>
+          <p:style>
+            <a:lnRef idx="1">
+              <a:schemeClr val="accent1"/>
+            </a:lnRef>
+            <a:fillRef idx="3">
+              <a:schemeClr val="accent1"/>
+            </a:fillRef>
+            <a:effectRef idx="2">
+              <a:schemeClr val="accent1"/>
+            </a:effectRef>
+            <a:fontRef idx="minor">
+              <a:schemeClr val="lt1"/>
+            </a:fontRef>
+          </p:style>
+          <p:txBody>
+            <a:bodyPr rtlCol="0" anchor="ctr"/>
+            <a:lstStyle/>
+            <a:p/>
+          </p:txBody>
+        </p:sp>
+        <p:sp>
+          <p:nvSpPr>
+            <p:cNvPr id="502" name="Shape 13"/>
+            <p:cNvSpPr/>
+            <p:nvPr/>
+          </p:nvSpPr>
+          <p:spPr>
+            <a:xfrm>
+              <a:off x="9564624" y="1426464"/>
+              <a:ext cx="2249424" cy="621792"/>
+            </a:xfrm>
+            <a:prstGeom prst="roundRect">
+              <a:avLst>
+                <a:gd name="adj" fmla="val 8000"/>
+              </a:avLst>
+            </a:prstGeom>
+            <a:noFill/>
+            <a:ln w="38100">
+              <a:solidFill>
+                <a:srgbClr val="FA8B35"/>
+              </a:solidFill>
+            </a:ln>
+            <a:effectLst/>
+          </p:spPr>
+          <p:style>
+            <a:lnRef idx="1">
+              <a:schemeClr val="accent1"/>
+            </a:lnRef>
+            <a:fillRef idx="3">
+              <a:schemeClr val="accent1"/>
+            </a:fillRef>
+            <a:effectRef idx="2">
+              <a:schemeClr val="accent1"/>
+            </a:effectRef>
+            <a:fontRef idx="minor">
+              <a:schemeClr val="lt1"/>
+            </a:fontRef>
+          </p:style>
+          <p:txBody>
+            <a:bodyPr rtlCol="0" anchor="ctr"/>
+            <a:lstStyle/>
+            <a:p/>
+          </p:txBody>
+        </p:sp>
+        <p:sp>
+          <p:nvSpPr>
+            <p:cNvPr id="503" name="Shape 14"/>
+            <p:cNvSpPr/>
+            <p:nvPr/>
+          </p:nvSpPr>
+          <p:spPr>
+            <a:xfrm>
+              <a:off x="2743200" y="1261872"/>
+              <a:ext cx="5669280" cy="658368"/>
+            </a:xfrm>
+            <a:prstGeom prst="roundRect">
+              <a:avLst>
+                <a:gd name="adj" fmla="val 12000"/>
+              </a:avLst>
+            </a:prstGeom>
+            <a:solidFill>
+              <a:srgbClr val="000000"/>
+            </a:solidFill>
+            <a:ln w="12700">
+              <a:solidFill>
+                <a:srgbClr val="FA8B35"/>
+              </a:solidFill>
+            </a:ln>
+            <a:effectLst/>
+          </p:spPr>
+          <p:style>
+            <a:lnRef idx="1">
+              <a:schemeClr val="accent1"/>
+            </a:lnRef>
+            <a:fillRef idx="3">
+              <a:schemeClr val="accent1"/>
+            </a:fillRef>
+            <a:effectRef idx="2">
+              <a:schemeClr val="accent1"/>
+            </a:effectRef>
+            <a:fontRef idx="minor">
+              <a:schemeClr val="lt1"/>
+            </a:fontRef>
+          </p:style>
+          <p:txBody>
+            <a:bodyPr rtlCol="0" anchor="ctr"/>
+            <a:lstStyle/>
+            <a:p/>
+          </p:txBody>
+        </p:sp>
+        <p:sp>
+          <p:nvSpPr>
+            <p:cNvPr id="504" name="Text 15"/>
+            <p:cNvSpPr txBox="1"/>
+            <p:nvPr/>
+          </p:nvSpPr>
+          <p:spPr>
+            <a:xfrm>
+              <a:off x="2871216" y="1325880"/>
+              <a:ext cx="5413248" cy="566928"/>
+            </a:xfrm>
+            <a:prstGeom prst="rect">
+              <a:avLst/>
+            </a:prstGeom>
+            <a:noFill/>
+          </p:spPr>
+          <p:txBody>
+            <a:bodyPr wrap="square" lIns="0" rIns="0" tIns="0" bIns="0" anchor="t">
+              <a:spAutoFit/>
+            </a:bodyPr>
+            <a:lstStyle/>
+            <a:p>
+              <a:pPr>
+                <a:spcAft>
+                  <a:spcPts val="200"/>
+                </a:spcAft>
+              </a:pPr>
+              <a:r>
+                <a:rPr sz="800" b="1" i="0">
+                  <a:solidFill>
+                    <a:srgbClr val="FA8B35"/>
+                  </a:solidFill>
+                  <a:latin typeface="Trenda IG Text"/>
+                </a:rPr>
+                <a:t>12 / 13   </a:t>
+              </a:r>
+              <a:r>
+                <a:rPr sz="800" b="1" i="0" spc="120">
+                  <a:solidFill>
+                    <a:srgbClr val="FFFFFF"/>
+                  </a:solidFill>
+                  <a:latin typeface="Trenda IG Text"/>
+                </a:rPr>
+                <a:t>PRODUCTION: THE OWNING TEAM DEPLOYS</a:t>
+              </a:r>
+            </a:p>
+            <a:p>
+              <a:pPr>
+                <a:spcAft>
+                  <a:spcPts val="200"/>
+                </a:spcAft>
+              </a:pPr>
+              <a:r>
+                <a:rPr sz="750" b="0" i="0">
+                  <a:solidFill>
+                    <a:srgbClr val="E6E6E6"/>
+                  </a:solidFill>
+                  <a:latin typeface="Trenda IG Text"/>
+                </a:rPr>
+                <a:t>The owning team activates the journey in production through its own pipeline. No agent holds a production credential. Step 09 closes the Jira story and resyncs the knowledge graph.</a:t>
+              </a:r>
+            </a:p>
+          </p:txBody>
+        </p:sp>
+      </p:grpSp>
+      <p:grpSp>
+        <p:nvGrpSpPr>
+          <p:cNvPr id="505" name="Step 12 arrows"/>
           <p:cNvGrpSpPr/>
           <p:nvPr/>
         </p:nvGrpSpPr>
@@ -16998,7 +23675,7 @@
         </p:grpSpPr>
         <p:cxnSp>
           <p:nvCxnSpPr>
-            <p:cNvPr id="347" name="Arrow 1"/>
+            <p:cNvPr id="506" name="Arrow 1"/>
             <p:cNvCxnSpPr/>
             <p:nvPr/>
           </p:nvCxnSpPr>
@@ -17035,7 +23712,7 @@
       </p:grpSp>
       <p:grpSp>
         <p:nvGrpSpPr>
-          <p:cNvPr id="348" name="Step 8 highlight"/>
+          <p:cNvPr id="507" name="Step 13 highlight"/>
           <p:cNvGrpSpPr/>
           <p:nvPr/>
         </p:nvGrpSpPr>
@@ -17049,7 +23726,7 @@
         </p:grpSpPr>
         <p:sp>
           <p:nvSpPr>
-            <p:cNvPr id="349" name="Shape 1"/>
+            <p:cNvPr id="508" name="Shape 1"/>
             <p:cNvSpPr/>
             <p:nvPr/>
           </p:nvSpPr>
@@ -17093,7 +23770,7 @@
         </p:sp>
         <p:sp>
           <p:nvSpPr>
-            <p:cNvPr id="350" name="Shape 2"/>
+            <p:cNvPr id="509" name="Shape 2"/>
             <p:cNvSpPr/>
             <p:nvPr/>
           </p:nvSpPr>
@@ -17137,7 +23814,7 @@
         </p:sp>
         <p:sp>
           <p:nvSpPr>
-            <p:cNvPr id="351" name="Shape 3"/>
+            <p:cNvPr id="510" name="Shape 3"/>
             <p:cNvSpPr/>
             <p:nvPr/>
           </p:nvSpPr>
@@ -17181,7 +23858,7 @@
         </p:sp>
         <p:sp>
           <p:nvSpPr>
-            <p:cNvPr id="352" name="Shape 4"/>
+            <p:cNvPr id="511" name="Shape 4"/>
             <p:cNvSpPr/>
             <p:nvPr/>
           </p:nvSpPr>
@@ -17225,7 +23902,7 @@
         </p:sp>
         <p:sp>
           <p:nvSpPr>
-            <p:cNvPr id="353" name="Shape 5"/>
+            <p:cNvPr id="512" name="Shape 5"/>
             <p:cNvSpPr/>
             <p:nvPr/>
           </p:nvSpPr>
@@ -17269,7 +23946,7 @@
         </p:sp>
         <p:sp>
           <p:nvSpPr>
-            <p:cNvPr id="354" name="Shape 6"/>
+            <p:cNvPr id="513" name="Shape 6"/>
             <p:cNvSpPr/>
             <p:nvPr/>
           </p:nvSpPr>
@@ -17313,7 +23990,7 @@
         </p:sp>
         <p:sp>
           <p:nvSpPr>
-            <p:cNvPr id="355" name="Shape 7"/>
+            <p:cNvPr id="514" name="Shape 7"/>
             <p:cNvSpPr/>
             <p:nvPr/>
           </p:nvSpPr>
@@ -17359,7 +24036,7 @@
         </p:sp>
         <p:sp>
           <p:nvSpPr>
-            <p:cNvPr id="356" name="Text 8"/>
+            <p:cNvPr id="515" name="Text 8"/>
             <p:cNvSpPr txBox="1"/>
             <p:nvPr/>
           </p:nvSpPr>
@@ -17391,7 +24068,7 @@
                   </a:solidFill>
                   <a:latin typeface="Trenda IG Text"/>
                 </a:rPr>
-                <a:t>8 / 8   </a:t>
+                <a:t>13 / 13   </a:t>
               </a:r>
               <a:r>
                 <a:rPr sz="800" b="1" i="0" spc="120">
@@ -17416,7 +24093,7 @@
                   </a:solidFill>
                   <a:latin typeface="Trenda IG Text"/>
                 </a:rPr>
-                <a:t>Every step lands in the change passport, and cycle time, defects, rework and cost per change are reported per pod. Not just automation: a controlled, auditable delivery process.</a:t>
+                <a:t>Every step and every approval lands in the change passport; cycle time, defects, rework and cost per change are reported per pod. Not just automation: a controlled, auditable delivery process.</a:t>
               </a:r>
             </a:p>
           </p:txBody>
@@ -17672,7 +24349,7 @@
                                           </p:stCondLst>
                                         </p:cTn>
                                         <p:tgtEl>
-                                          <p:spTgt spid="265"/>
+                                          <p:spTgt spid="272"/>
                                         </p:tgtEl>
                                         <p:attrNameLst>
                                           <p:attrName>style.visibility</p:attrName>
@@ -17686,7 +24363,7 @@
                                       <p:cBhvr>
                                         <p:cTn id="26" dur="600"/>
                                         <p:tgtEl>
-                                          <p:spTgt spid="265"/>
+                                          <p:spTgt spid="272"/>
                                         </p:tgtEl>
                                       </p:cBhvr>
                                     </p:animEffect>
@@ -17756,7 +24433,7 @@
                                       <p:cBhvr>
                                         <p:cTn id="33" dur="250"/>
                                         <p:tgtEl>
-                                          <p:spTgt spid="265"/>
+                                          <p:spTgt spid="272"/>
                                         </p:tgtEl>
                                       </p:cBhvr>
                                     </p:animEffect>
@@ -17768,7 +24445,7 @@
                                           </p:stCondLst>
                                         </p:cTn>
                                         <p:tgtEl>
-                                          <p:spTgt spid="265"/>
+                                          <p:spTgt spid="272"/>
                                         </p:tgtEl>
                                         <p:attrNameLst>
                                           <p:attrName>style.visibility</p:attrName>
@@ -17795,7 +24472,7 @@
                                           </p:stCondLst>
                                         </p:cTn>
                                         <p:tgtEl>
-                                          <p:spTgt spid="268"/>
+                                          <p:spTgt spid="275"/>
                                         </p:tgtEl>
                                         <p:attrNameLst>
                                           <p:attrName>style.visibility</p:attrName>
@@ -17809,7 +24486,7 @@
                                       <p:cBhvr>
                                         <p:cTn id="37" dur="350"/>
                                         <p:tgtEl>
-                                          <p:spTgt spid="268"/>
+                                          <p:spTgt spid="275"/>
                                         </p:tgtEl>
                                       </p:cBhvr>
                                     </p:animEffect>
@@ -17839,7 +24516,7 @@
                                           </p:stCondLst>
                                         </p:cTn>
                                         <p:tgtEl>
-                                          <p:spTgt spid="277"/>
+                                          <p:spTgt spid="284"/>
                                         </p:tgtEl>
                                         <p:attrNameLst>
                                           <p:attrName>style.visibility</p:attrName>
@@ -17853,7 +24530,7 @@
                                       <p:cBhvr>
                                         <p:cTn id="41" dur="600"/>
                                         <p:tgtEl>
-                                          <p:spTgt spid="277"/>
+                                          <p:spTgt spid="284"/>
                                         </p:tgtEl>
                                       </p:cBhvr>
                                     </p:animEffect>
@@ -17888,7 +24565,7 @@
                                       <p:cBhvr>
                                         <p:cTn id="45" dur="250"/>
                                         <p:tgtEl>
-                                          <p:spTgt spid="268"/>
+                                          <p:spTgt spid="275"/>
                                         </p:tgtEl>
                                       </p:cBhvr>
                                     </p:animEffect>
@@ -17900,7 +24577,7 @@
                                           </p:stCondLst>
                                         </p:cTn>
                                         <p:tgtEl>
-                                          <p:spTgt spid="268"/>
+                                          <p:spTgt spid="275"/>
                                         </p:tgtEl>
                                         <p:attrNameLst>
                                           <p:attrName>style.visibility</p:attrName>
@@ -17923,7 +24600,7 @@
                                       <p:cBhvr>
                                         <p:cTn id="48" dur="250"/>
                                         <p:tgtEl>
-                                          <p:spTgt spid="277"/>
+                                          <p:spTgt spid="284"/>
                                         </p:tgtEl>
                                       </p:cBhvr>
                                     </p:animEffect>
@@ -17935,7 +24612,7 @@
                                           </p:stCondLst>
                                         </p:cTn>
                                         <p:tgtEl>
-                                          <p:spTgt spid="277"/>
+                                          <p:spTgt spid="284"/>
                                         </p:tgtEl>
                                         <p:attrNameLst>
                                           <p:attrName>style.visibility</p:attrName>
@@ -17962,7 +24639,7 @@
                                           </p:stCondLst>
                                         </p:cTn>
                                         <p:tgtEl>
-                                          <p:spTgt spid="279"/>
+                                          <p:spTgt spid="286"/>
                                         </p:tgtEl>
                                         <p:attrNameLst>
                                           <p:attrName>style.visibility</p:attrName>
@@ -17976,7 +24653,7 @@
                                       <p:cBhvr>
                                         <p:cTn id="52" dur="350"/>
                                         <p:tgtEl>
-                                          <p:spTgt spid="279"/>
+                                          <p:spTgt spid="286"/>
                                         </p:tgtEl>
                                       </p:cBhvr>
                                     </p:animEffect>
@@ -18006,7 +24683,7 @@
                                           </p:stCondLst>
                                         </p:cTn>
                                         <p:tgtEl>
-                                          <p:spTgt spid="294"/>
+                                          <p:spTgt spid="302"/>
                                         </p:tgtEl>
                                         <p:attrNameLst>
                                           <p:attrName>style.visibility</p:attrName>
@@ -18020,7 +24697,7 @@
                                       <p:cBhvr>
                                         <p:cTn id="56" dur="600"/>
                                         <p:tgtEl>
-                                          <p:spTgt spid="294"/>
+                                          <p:spTgt spid="302"/>
                                         </p:tgtEl>
                                       </p:cBhvr>
                                     </p:animEffect>
@@ -18055,7 +24732,7 @@
                                       <p:cBhvr>
                                         <p:cTn id="60" dur="250"/>
                                         <p:tgtEl>
-                                          <p:spTgt spid="279"/>
+                                          <p:spTgt spid="286"/>
                                         </p:tgtEl>
                                       </p:cBhvr>
                                     </p:animEffect>
@@ -18067,7 +24744,7 @@
                                           </p:stCondLst>
                                         </p:cTn>
                                         <p:tgtEl>
-                                          <p:spTgt spid="279"/>
+                                          <p:spTgt spid="286"/>
                                         </p:tgtEl>
                                         <p:attrNameLst>
                                           <p:attrName>style.visibility</p:attrName>
@@ -18090,7 +24767,7 @@
                                       <p:cBhvr>
                                         <p:cTn id="63" dur="250"/>
                                         <p:tgtEl>
-                                          <p:spTgt spid="294"/>
+                                          <p:spTgt spid="302"/>
                                         </p:tgtEl>
                                       </p:cBhvr>
                                     </p:animEffect>
@@ -18102,7 +24779,7 @@
                                           </p:stCondLst>
                                         </p:cTn>
                                         <p:tgtEl>
-                                          <p:spTgt spid="294"/>
+                                          <p:spTgt spid="302"/>
                                         </p:tgtEl>
                                         <p:attrNameLst>
                                           <p:attrName>style.visibility</p:attrName>
@@ -18129,7 +24806,7 @@
                                           </p:stCondLst>
                                         </p:cTn>
                                         <p:tgtEl>
-                                          <p:spTgt spid="297"/>
+                                          <p:spTgt spid="305"/>
                                         </p:tgtEl>
                                         <p:attrNameLst>
                                           <p:attrName>style.visibility</p:attrName>
@@ -18143,7 +24820,7 @@
                                       <p:cBhvr>
                                         <p:cTn id="67" dur="350"/>
                                         <p:tgtEl>
-                                          <p:spTgt spid="297"/>
+                                          <p:spTgt spid="305"/>
                                         </p:tgtEl>
                                       </p:cBhvr>
                                     </p:animEffect>
@@ -18173,7 +24850,7 @@
                                           </p:stCondLst>
                                         </p:cTn>
                                         <p:tgtEl>
-                                          <p:spTgt spid="306"/>
+                                          <p:spTgt spid="314"/>
                                         </p:tgtEl>
                                         <p:attrNameLst>
                                           <p:attrName>style.visibility</p:attrName>
@@ -18187,7 +24864,7 @@
                                       <p:cBhvr>
                                         <p:cTn id="71" dur="600"/>
                                         <p:tgtEl>
-                                          <p:spTgt spid="306"/>
+                                          <p:spTgt spid="314"/>
                                         </p:tgtEl>
                                       </p:cBhvr>
                                     </p:animEffect>
@@ -18222,7 +24899,7 @@
                                       <p:cBhvr>
                                         <p:cTn id="75" dur="250"/>
                                         <p:tgtEl>
-                                          <p:spTgt spid="297"/>
+                                          <p:spTgt spid="305"/>
                                         </p:tgtEl>
                                       </p:cBhvr>
                                     </p:animEffect>
@@ -18234,7 +24911,7 @@
                                           </p:stCondLst>
                                         </p:cTn>
                                         <p:tgtEl>
-                                          <p:spTgt spid="297"/>
+                                          <p:spTgt spid="305"/>
                                         </p:tgtEl>
                                         <p:attrNameLst>
                                           <p:attrName>style.visibility</p:attrName>
@@ -18257,7 +24934,7 @@
                                       <p:cBhvr>
                                         <p:cTn id="78" dur="250"/>
                                         <p:tgtEl>
-                                          <p:spTgt spid="306"/>
+                                          <p:spTgt spid="314"/>
                                         </p:tgtEl>
                                       </p:cBhvr>
                                     </p:animEffect>
@@ -18269,7 +24946,7 @@
                                           </p:stCondLst>
                                         </p:cTn>
                                         <p:tgtEl>
-                                          <p:spTgt spid="306"/>
+                                          <p:spTgt spid="314"/>
                                         </p:tgtEl>
                                         <p:attrNameLst>
                                           <p:attrName>style.visibility</p:attrName>
@@ -18296,7 +24973,7 @@
                                           </p:stCondLst>
                                         </p:cTn>
                                         <p:tgtEl>
-                                          <p:spTgt spid="311"/>
+                                          <p:spTgt spid="319"/>
                                         </p:tgtEl>
                                         <p:attrNameLst>
                                           <p:attrName>style.visibility</p:attrName>
@@ -18310,7 +24987,7 @@
                                       <p:cBhvr>
                                         <p:cTn id="82" dur="350"/>
                                         <p:tgtEl>
-                                          <p:spTgt spid="311"/>
+                                          <p:spTgt spid="319"/>
                                         </p:tgtEl>
                                       </p:cBhvr>
                                     </p:animEffect>
@@ -18340,7 +25017,7 @@
                                           </p:stCondLst>
                                         </p:cTn>
                                         <p:tgtEl>
-                                          <p:spTgt spid="320"/>
+                                          <p:spTgt spid="328"/>
                                         </p:tgtEl>
                                         <p:attrNameLst>
                                           <p:attrName>style.visibility</p:attrName>
@@ -18354,7 +25031,7 @@
                                       <p:cBhvr>
                                         <p:cTn id="86" dur="600"/>
                                         <p:tgtEl>
-                                          <p:spTgt spid="320"/>
+                                          <p:spTgt spid="328"/>
                                         </p:tgtEl>
                                       </p:cBhvr>
                                     </p:animEffect>
@@ -18389,7 +25066,7 @@
                                       <p:cBhvr>
                                         <p:cTn id="90" dur="250"/>
                                         <p:tgtEl>
-                                          <p:spTgt spid="311"/>
+                                          <p:spTgt spid="319"/>
                                         </p:tgtEl>
                                       </p:cBhvr>
                                     </p:animEffect>
@@ -18401,7 +25078,7 @@
                                           </p:stCondLst>
                                         </p:cTn>
                                         <p:tgtEl>
-                                          <p:spTgt spid="311"/>
+                                          <p:spTgt spid="319"/>
                                         </p:tgtEl>
                                         <p:attrNameLst>
                                           <p:attrName>style.visibility</p:attrName>
@@ -18424,7 +25101,7 @@
                                       <p:cBhvr>
                                         <p:cTn id="93" dur="250"/>
                                         <p:tgtEl>
-                                          <p:spTgt spid="320"/>
+                                          <p:spTgt spid="328"/>
                                         </p:tgtEl>
                                       </p:cBhvr>
                                     </p:animEffect>
@@ -18436,7 +25113,7 @@
                                           </p:stCondLst>
                                         </p:cTn>
                                         <p:tgtEl>
-                                          <p:spTgt spid="320"/>
+                                          <p:spTgt spid="328"/>
                                         </p:tgtEl>
                                         <p:attrNameLst>
                                           <p:attrName>style.visibility</p:attrName>
@@ -18463,7 +25140,7 @@
                                           </p:stCondLst>
                                         </p:cTn>
                                         <p:tgtEl>
-                                          <p:spTgt spid="329"/>
+                                          <p:spTgt spid="337"/>
                                         </p:tgtEl>
                                         <p:attrNameLst>
                                           <p:attrName>style.visibility</p:attrName>
@@ -18477,7 +25154,7 @@
                                       <p:cBhvr>
                                         <p:cTn id="97" dur="350"/>
                                         <p:tgtEl>
-                                          <p:spTgt spid="329"/>
+                                          <p:spTgt spid="337"/>
                                         </p:tgtEl>
                                       </p:cBhvr>
                                     </p:animEffect>
@@ -18507,7 +25184,7 @@
                                           </p:stCondLst>
                                         </p:cTn>
                                         <p:tgtEl>
-                                          <p:spTgt spid="346"/>
+                                          <p:spTgt spid="357"/>
                                         </p:tgtEl>
                                         <p:attrNameLst>
                                           <p:attrName>style.visibility</p:attrName>
@@ -18521,7 +25198,7 @@
                                       <p:cBhvr>
                                         <p:cTn id="101" dur="600"/>
                                         <p:tgtEl>
-                                          <p:spTgt spid="346"/>
+                                          <p:spTgt spid="357"/>
                                         </p:tgtEl>
                                       </p:cBhvr>
                                     </p:animEffect>
@@ -18556,7 +25233,7 @@
                                       <p:cBhvr>
                                         <p:cTn id="105" dur="250"/>
                                         <p:tgtEl>
-                                          <p:spTgt spid="329"/>
+                                          <p:spTgt spid="337"/>
                                         </p:tgtEl>
                                       </p:cBhvr>
                                     </p:animEffect>
@@ -18568,7 +25245,7 @@
                                           </p:stCondLst>
                                         </p:cTn>
                                         <p:tgtEl>
-                                          <p:spTgt spid="329"/>
+                                          <p:spTgt spid="337"/>
                                         </p:tgtEl>
                                         <p:attrNameLst>
                                           <p:attrName>style.visibility</p:attrName>
@@ -18591,7 +25268,7 @@
                                       <p:cBhvr>
                                         <p:cTn id="108" dur="250"/>
                                         <p:tgtEl>
-                                          <p:spTgt spid="346"/>
+                                          <p:spTgt spid="357"/>
                                         </p:tgtEl>
                                       </p:cBhvr>
                                     </p:animEffect>
@@ -18603,7 +25280,7 @@
                                           </p:stCondLst>
                                         </p:cTn>
                                         <p:tgtEl>
-                                          <p:spTgt spid="346"/>
+                                          <p:spTgt spid="357"/>
                                         </p:tgtEl>
                                         <p:attrNameLst>
                                           <p:attrName>style.visibility</p:attrName>
@@ -18630,7 +25307,7 @@
                                           </p:stCondLst>
                                         </p:cTn>
                                         <p:tgtEl>
-                                          <p:spTgt spid="348"/>
+                                          <p:spTgt spid="363"/>
                                         </p:tgtEl>
                                         <p:attrNameLst>
                                           <p:attrName>style.visibility</p:attrName>
@@ -18644,7 +25321,51 @@
                                       <p:cBhvr>
                                         <p:cTn id="112" dur="350"/>
                                         <p:tgtEl>
-                                          <p:spTgt spid="348"/>
+                                          <p:spTgt spid="363"/>
+                                        </p:tgtEl>
+                                      </p:cBhvr>
+                                    </p:animEffect>
+                                  </p:childTnLst>
+                                </p:cTn>
+                              </p:par>
+                            </p:childTnLst>
+                          </p:cTn>
+                        </p:par>
+                        <p:par>
+                          <p:cTn id="113" fill="hold">
+                            <p:stCondLst>
+                              <p:cond delay="400"/>
+                            </p:stCondLst>
+                            <p:childTnLst>
+                              <p:par>
+                                <p:cTn id="114" presetID="22" presetClass="entr" presetSubtype="8" fill="hold" grpId="0" nodeType="afterEffect">
+                                  <p:stCondLst>
+                                    <p:cond delay="0"/>
+                                  </p:stCondLst>
+                                  <p:childTnLst>
+                                    <p:set>
+                                      <p:cBhvr>
+                                        <p:cTn id="115" dur="1" fill="hold">
+                                          <p:stCondLst>
+                                            <p:cond delay="0"/>
+                                          </p:stCondLst>
+                                        </p:cTn>
+                                        <p:tgtEl>
+                                          <p:spTgt spid="389"/>
+                                        </p:tgtEl>
+                                        <p:attrNameLst>
+                                          <p:attrName>style.visibility</p:attrName>
+                                        </p:attrNameLst>
+                                      </p:cBhvr>
+                                      <p:to>
+                                        <p:strVal val="visible"/>
+                                      </p:to>
+                                    </p:set>
+                                    <p:animEffect transition="in" filter="wipe(left)">
+                                      <p:cBhvr>
+                                        <p:cTn id="116" dur="600"/>
+                                        <p:tgtEl>
+                                          <p:spTgt spid="389"/>
                                         </p:tgtEl>
                                       </p:cBhvr>
                                     </p:animEffect>
@@ -18658,40 +25379,831 @@
                     </p:cTn>
                   </p:par>
                   <p:par>
-                    <p:cTn id="113" fill="hold">
+                    <p:cTn id="117" fill="hold">
                       <p:stCondLst>
                         <p:cond delay="indefinite"/>
                       </p:stCondLst>
                       <p:childTnLst>
                         <p:par>
-                          <p:cTn id="114" fill="hold">
+                          <p:cTn id="118" fill="hold">
                             <p:stCondLst>
                               <p:cond delay="0"/>
                             </p:stCondLst>
                             <p:childTnLst>
                               <p:par>
-                                <p:cTn id="115" presetID="10" presetClass="exit" presetSubtype="0" fill="hold" grpId="0" nodeType="clickEffect">
+                                <p:cTn id="119" presetID="10" presetClass="exit" presetSubtype="0" fill="hold" grpId="0" nodeType="clickEffect">
                                   <p:stCondLst>
                                     <p:cond delay="0"/>
                                   </p:stCondLst>
                                   <p:childTnLst>
                                     <p:animEffect transition="out" filter="fade">
                                       <p:cBhvr>
-                                        <p:cTn id="116" dur="250"/>
+                                        <p:cTn id="120" dur="250"/>
                                         <p:tgtEl>
-                                          <p:spTgt spid="348"/>
+                                          <p:spTgt spid="363"/>
                                         </p:tgtEl>
                                       </p:cBhvr>
                                     </p:animEffect>
                                     <p:set>
                                       <p:cBhvr>
-                                        <p:cTn id="117" dur="1" fill="hold">
+                                        <p:cTn id="121" dur="1" fill="hold">
                                           <p:stCondLst>
                                             <p:cond delay="249"/>
                                           </p:stCondLst>
                                         </p:cTn>
                                         <p:tgtEl>
-                                          <p:spTgt spid="348"/>
+                                          <p:spTgt spid="363"/>
+                                        </p:tgtEl>
+                                        <p:attrNameLst>
+                                          <p:attrName>style.visibility</p:attrName>
+                                        </p:attrNameLst>
+                                      </p:cBhvr>
+                                      <p:to>
+                                        <p:strVal val="hidden"/>
+                                      </p:to>
+                                    </p:set>
+                                  </p:childTnLst>
+                                </p:cTn>
+                              </p:par>
+                              <p:par>
+                                <p:cTn id="122" presetID="10" presetClass="exit" presetSubtype="0" fill="hold" grpId="0" nodeType="withEffect">
+                                  <p:stCondLst>
+                                    <p:cond delay="0"/>
+                                  </p:stCondLst>
+                                  <p:childTnLst>
+                                    <p:animEffect transition="out" filter="fade">
+                                      <p:cBhvr>
+                                        <p:cTn id="123" dur="250"/>
+                                        <p:tgtEl>
+                                          <p:spTgt spid="389"/>
+                                        </p:tgtEl>
+                                      </p:cBhvr>
+                                    </p:animEffect>
+                                    <p:set>
+                                      <p:cBhvr>
+                                        <p:cTn id="124" dur="1" fill="hold">
+                                          <p:stCondLst>
+                                            <p:cond delay="249"/>
+                                          </p:stCondLst>
+                                        </p:cTn>
+                                        <p:tgtEl>
+                                          <p:spTgt spid="389"/>
+                                        </p:tgtEl>
+                                        <p:attrNameLst>
+                                          <p:attrName>style.visibility</p:attrName>
+                                        </p:attrNameLst>
+                                      </p:cBhvr>
+                                      <p:to>
+                                        <p:strVal val="hidden"/>
+                                      </p:to>
+                                    </p:set>
+                                  </p:childTnLst>
+                                </p:cTn>
+                              </p:par>
+                              <p:par>
+                                <p:cTn id="125" presetID="10" presetClass="entr" presetSubtype="0" fill="hold" grpId="0" nodeType="withEffect">
+                                  <p:stCondLst>
+                                    <p:cond delay="0"/>
+                                  </p:stCondLst>
+                                  <p:childTnLst>
+                                    <p:set>
+                                      <p:cBhvr>
+                                        <p:cTn id="126" dur="1" fill="hold">
+                                          <p:stCondLst>
+                                            <p:cond delay="0"/>
+                                          </p:stCondLst>
+                                        </p:cTn>
+                                        <p:tgtEl>
+                                          <p:spTgt spid="395"/>
+                                        </p:tgtEl>
+                                        <p:attrNameLst>
+                                          <p:attrName>style.visibility</p:attrName>
+                                        </p:attrNameLst>
+                                      </p:cBhvr>
+                                      <p:to>
+                                        <p:strVal val="visible"/>
+                                      </p:to>
+                                    </p:set>
+                                    <p:animEffect transition="in" filter="fade">
+                                      <p:cBhvr>
+                                        <p:cTn id="127" dur="350"/>
+                                        <p:tgtEl>
+                                          <p:spTgt spid="395"/>
+                                        </p:tgtEl>
+                                      </p:cBhvr>
+                                    </p:animEffect>
+                                  </p:childTnLst>
+                                </p:cTn>
+                              </p:par>
+                            </p:childTnLst>
+                          </p:cTn>
+                        </p:par>
+                        <p:par>
+                          <p:cTn id="128" fill="hold">
+                            <p:stCondLst>
+                              <p:cond delay="400"/>
+                            </p:stCondLst>
+                            <p:childTnLst>
+                              <p:par>
+                                <p:cTn id="129" presetID="22" presetClass="entr" presetSubtype="8" fill="hold" grpId="0" nodeType="afterEffect">
+                                  <p:stCondLst>
+                                    <p:cond delay="0"/>
+                                  </p:stCondLst>
+                                  <p:childTnLst>
+                                    <p:set>
+                                      <p:cBhvr>
+                                        <p:cTn id="130" dur="1" fill="hold">
+                                          <p:stCondLst>
+                                            <p:cond delay="0"/>
+                                          </p:stCondLst>
+                                        </p:cTn>
+                                        <p:tgtEl>
+                                          <p:spTgt spid="429"/>
+                                        </p:tgtEl>
+                                        <p:attrNameLst>
+                                          <p:attrName>style.visibility</p:attrName>
+                                        </p:attrNameLst>
+                                      </p:cBhvr>
+                                      <p:to>
+                                        <p:strVal val="visible"/>
+                                      </p:to>
+                                    </p:set>
+                                    <p:animEffect transition="in" filter="wipe(left)">
+                                      <p:cBhvr>
+                                        <p:cTn id="131" dur="600"/>
+                                        <p:tgtEl>
+                                          <p:spTgt spid="429"/>
+                                        </p:tgtEl>
+                                      </p:cBhvr>
+                                    </p:animEffect>
+                                  </p:childTnLst>
+                                </p:cTn>
+                              </p:par>
+                            </p:childTnLst>
+                          </p:cTn>
+                        </p:par>
+                      </p:childTnLst>
+                    </p:cTn>
+                  </p:par>
+                  <p:par>
+                    <p:cTn id="132" fill="hold">
+                      <p:stCondLst>
+                        <p:cond delay="indefinite"/>
+                      </p:stCondLst>
+                      <p:childTnLst>
+                        <p:par>
+                          <p:cTn id="133" fill="hold">
+                            <p:stCondLst>
+                              <p:cond delay="0"/>
+                            </p:stCondLst>
+                            <p:childTnLst>
+                              <p:par>
+                                <p:cTn id="134" presetID="10" presetClass="exit" presetSubtype="0" fill="hold" grpId="0" nodeType="clickEffect">
+                                  <p:stCondLst>
+                                    <p:cond delay="0"/>
+                                  </p:stCondLst>
+                                  <p:childTnLst>
+                                    <p:animEffect transition="out" filter="fade">
+                                      <p:cBhvr>
+                                        <p:cTn id="135" dur="250"/>
+                                        <p:tgtEl>
+                                          <p:spTgt spid="395"/>
+                                        </p:tgtEl>
+                                      </p:cBhvr>
+                                    </p:animEffect>
+                                    <p:set>
+                                      <p:cBhvr>
+                                        <p:cTn id="136" dur="1" fill="hold">
+                                          <p:stCondLst>
+                                            <p:cond delay="249"/>
+                                          </p:stCondLst>
+                                        </p:cTn>
+                                        <p:tgtEl>
+                                          <p:spTgt spid="395"/>
+                                        </p:tgtEl>
+                                        <p:attrNameLst>
+                                          <p:attrName>style.visibility</p:attrName>
+                                        </p:attrNameLst>
+                                      </p:cBhvr>
+                                      <p:to>
+                                        <p:strVal val="hidden"/>
+                                      </p:to>
+                                    </p:set>
+                                  </p:childTnLst>
+                                </p:cTn>
+                              </p:par>
+                              <p:par>
+                                <p:cTn id="137" presetID="10" presetClass="exit" presetSubtype="0" fill="hold" grpId="0" nodeType="withEffect">
+                                  <p:stCondLst>
+                                    <p:cond delay="0"/>
+                                  </p:stCondLst>
+                                  <p:childTnLst>
+                                    <p:animEffect transition="out" filter="fade">
+                                      <p:cBhvr>
+                                        <p:cTn id="138" dur="250"/>
+                                        <p:tgtEl>
+                                          <p:spTgt spid="429"/>
+                                        </p:tgtEl>
+                                      </p:cBhvr>
+                                    </p:animEffect>
+                                    <p:set>
+                                      <p:cBhvr>
+                                        <p:cTn id="139" dur="1" fill="hold">
+                                          <p:stCondLst>
+                                            <p:cond delay="249"/>
+                                          </p:stCondLst>
+                                        </p:cTn>
+                                        <p:tgtEl>
+                                          <p:spTgt spid="429"/>
+                                        </p:tgtEl>
+                                        <p:attrNameLst>
+                                          <p:attrName>style.visibility</p:attrName>
+                                        </p:attrNameLst>
+                                      </p:cBhvr>
+                                      <p:to>
+                                        <p:strVal val="hidden"/>
+                                      </p:to>
+                                    </p:set>
+                                  </p:childTnLst>
+                                </p:cTn>
+                              </p:par>
+                              <p:par>
+                                <p:cTn id="140" presetID="10" presetClass="entr" presetSubtype="0" fill="hold" grpId="0" nodeType="withEffect">
+                                  <p:stCondLst>
+                                    <p:cond delay="0"/>
+                                  </p:stCondLst>
+                                  <p:childTnLst>
+                                    <p:set>
+                                      <p:cBhvr>
+                                        <p:cTn id="141" dur="1" fill="hold">
+                                          <p:stCondLst>
+                                            <p:cond delay="0"/>
+                                          </p:stCondLst>
+                                        </p:cTn>
+                                        <p:tgtEl>
+                                          <p:spTgt spid="435"/>
+                                        </p:tgtEl>
+                                        <p:attrNameLst>
+                                          <p:attrName>style.visibility</p:attrName>
+                                        </p:attrNameLst>
+                                      </p:cBhvr>
+                                      <p:to>
+                                        <p:strVal val="visible"/>
+                                      </p:to>
+                                    </p:set>
+                                    <p:animEffect transition="in" filter="fade">
+                                      <p:cBhvr>
+                                        <p:cTn id="142" dur="350"/>
+                                        <p:tgtEl>
+                                          <p:spTgt spid="435"/>
+                                        </p:tgtEl>
+                                      </p:cBhvr>
+                                    </p:animEffect>
+                                  </p:childTnLst>
+                                </p:cTn>
+                              </p:par>
+                            </p:childTnLst>
+                          </p:cTn>
+                        </p:par>
+                        <p:par>
+                          <p:cTn id="143" fill="hold">
+                            <p:stCondLst>
+                              <p:cond delay="400"/>
+                            </p:stCondLst>
+                            <p:childTnLst>
+                              <p:par>
+                                <p:cTn id="144" presetID="22" presetClass="entr" presetSubtype="8" fill="hold" grpId="0" nodeType="afterEffect">
+                                  <p:stCondLst>
+                                    <p:cond delay="0"/>
+                                  </p:stCondLst>
+                                  <p:childTnLst>
+                                    <p:set>
+                                      <p:cBhvr>
+                                        <p:cTn id="145" dur="1" fill="hold">
+                                          <p:stCondLst>
+                                            <p:cond delay="0"/>
+                                          </p:stCondLst>
+                                        </p:cTn>
+                                        <p:tgtEl>
+                                          <p:spTgt spid="457"/>
+                                        </p:tgtEl>
+                                        <p:attrNameLst>
+                                          <p:attrName>style.visibility</p:attrName>
+                                        </p:attrNameLst>
+                                      </p:cBhvr>
+                                      <p:to>
+                                        <p:strVal val="visible"/>
+                                      </p:to>
+                                    </p:set>
+                                    <p:animEffect transition="in" filter="wipe(left)">
+                                      <p:cBhvr>
+                                        <p:cTn id="146" dur="600"/>
+                                        <p:tgtEl>
+                                          <p:spTgt spid="457"/>
+                                        </p:tgtEl>
+                                      </p:cBhvr>
+                                    </p:animEffect>
+                                  </p:childTnLst>
+                                </p:cTn>
+                              </p:par>
+                            </p:childTnLst>
+                          </p:cTn>
+                        </p:par>
+                      </p:childTnLst>
+                    </p:cTn>
+                  </p:par>
+                  <p:par>
+                    <p:cTn id="147" fill="hold">
+                      <p:stCondLst>
+                        <p:cond delay="indefinite"/>
+                      </p:stCondLst>
+                      <p:childTnLst>
+                        <p:par>
+                          <p:cTn id="148" fill="hold">
+                            <p:stCondLst>
+                              <p:cond delay="0"/>
+                            </p:stCondLst>
+                            <p:childTnLst>
+                              <p:par>
+                                <p:cTn id="149" presetID="10" presetClass="exit" presetSubtype="0" fill="hold" grpId="0" nodeType="clickEffect">
+                                  <p:stCondLst>
+                                    <p:cond delay="0"/>
+                                  </p:stCondLst>
+                                  <p:childTnLst>
+                                    <p:animEffect transition="out" filter="fade">
+                                      <p:cBhvr>
+                                        <p:cTn id="150" dur="250"/>
+                                        <p:tgtEl>
+                                          <p:spTgt spid="435"/>
+                                        </p:tgtEl>
+                                      </p:cBhvr>
+                                    </p:animEffect>
+                                    <p:set>
+                                      <p:cBhvr>
+                                        <p:cTn id="151" dur="1" fill="hold">
+                                          <p:stCondLst>
+                                            <p:cond delay="249"/>
+                                          </p:stCondLst>
+                                        </p:cTn>
+                                        <p:tgtEl>
+                                          <p:spTgt spid="435"/>
+                                        </p:tgtEl>
+                                        <p:attrNameLst>
+                                          <p:attrName>style.visibility</p:attrName>
+                                        </p:attrNameLst>
+                                      </p:cBhvr>
+                                      <p:to>
+                                        <p:strVal val="hidden"/>
+                                      </p:to>
+                                    </p:set>
+                                  </p:childTnLst>
+                                </p:cTn>
+                              </p:par>
+                              <p:par>
+                                <p:cTn id="152" presetID="10" presetClass="exit" presetSubtype="0" fill="hold" grpId="0" nodeType="withEffect">
+                                  <p:stCondLst>
+                                    <p:cond delay="0"/>
+                                  </p:stCondLst>
+                                  <p:childTnLst>
+                                    <p:animEffect transition="out" filter="fade">
+                                      <p:cBhvr>
+                                        <p:cTn id="153" dur="250"/>
+                                        <p:tgtEl>
+                                          <p:spTgt spid="457"/>
+                                        </p:tgtEl>
+                                      </p:cBhvr>
+                                    </p:animEffect>
+                                    <p:set>
+                                      <p:cBhvr>
+                                        <p:cTn id="154" dur="1" fill="hold">
+                                          <p:stCondLst>
+                                            <p:cond delay="249"/>
+                                          </p:stCondLst>
+                                        </p:cTn>
+                                        <p:tgtEl>
+                                          <p:spTgt spid="457"/>
+                                        </p:tgtEl>
+                                        <p:attrNameLst>
+                                          <p:attrName>style.visibility</p:attrName>
+                                        </p:attrNameLst>
+                                      </p:cBhvr>
+                                      <p:to>
+                                        <p:strVal val="hidden"/>
+                                      </p:to>
+                                    </p:set>
+                                  </p:childTnLst>
+                                </p:cTn>
+                              </p:par>
+                              <p:par>
+                                <p:cTn id="155" presetID="10" presetClass="entr" presetSubtype="0" fill="hold" grpId="0" nodeType="withEffect">
+                                  <p:stCondLst>
+                                    <p:cond delay="0"/>
+                                  </p:stCondLst>
+                                  <p:childTnLst>
+                                    <p:set>
+                                      <p:cBhvr>
+                                        <p:cTn id="156" dur="1" fill="hold">
+                                          <p:stCondLst>
+                                            <p:cond delay="0"/>
+                                          </p:stCondLst>
+                                        </p:cTn>
+                                        <p:tgtEl>
+                                          <p:spTgt spid="463"/>
+                                        </p:tgtEl>
+                                        <p:attrNameLst>
+                                          <p:attrName>style.visibility</p:attrName>
+                                        </p:attrNameLst>
+                                      </p:cBhvr>
+                                      <p:to>
+                                        <p:strVal val="visible"/>
+                                      </p:to>
+                                    </p:set>
+                                    <p:animEffect transition="in" filter="fade">
+                                      <p:cBhvr>
+                                        <p:cTn id="157" dur="350"/>
+                                        <p:tgtEl>
+                                          <p:spTgt spid="463"/>
+                                        </p:tgtEl>
+                                      </p:cBhvr>
+                                    </p:animEffect>
+                                  </p:childTnLst>
+                                </p:cTn>
+                              </p:par>
+                            </p:childTnLst>
+                          </p:cTn>
+                        </p:par>
+                        <p:par>
+                          <p:cTn id="158" fill="hold">
+                            <p:stCondLst>
+                              <p:cond delay="400"/>
+                            </p:stCondLst>
+                            <p:childTnLst>
+                              <p:par>
+                                <p:cTn id="159" presetID="22" presetClass="entr" presetSubtype="8" fill="hold" grpId="0" nodeType="afterEffect">
+                                  <p:stCondLst>
+                                    <p:cond delay="0"/>
+                                  </p:stCondLst>
+                                  <p:childTnLst>
+                                    <p:set>
+                                      <p:cBhvr>
+                                        <p:cTn id="160" dur="1" fill="hold">
+                                          <p:stCondLst>
+                                            <p:cond delay="0"/>
+                                          </p:stCondLst>
+                                        </p:cTn>
+                                        <p:tgtEl>
+                                          <p:spTgt spid="483"/>
+                                        </p:tgtEl>
+                                        <p:attrNameLst>
+                                          <p:attrName>style.visibility</p:attrName>
+                                        </p:attrNameLst>
+                                      </p:cBhvr>
+                                      <p:to>
+                                        <p:strVal val="visible"/>
+                                      </p:to>
+                                    </p:set>
+                                    <p:animEffect transition="in" filter="wipe(left)">
+                                      <p:cBhvr>
+                                        <p:cTn id="161" dur="600"/>
+                                        <p:tgtEl>
+                                          <p:spTgt spid="483"/>
+                                        </p:tgtEl>
+                                      </p:cBhvr>
+                                    </p:animEffect>
+                                  </p:childTnLst>
+                                </p:cTn>
+                              </p:par>
+                            </p:childTnLst>
+                          </p:cTn>
+                        </p:par>
+                      </p:childTnLst>
+                    </p:cTn>
+                  </p:par>
+                  <p:par>
+                    <p:cTn id="162" fill="hold">
+                      <p:stCondLst>
+                        <p:cond delay="indefinite"/>
+                      </p:stCondLst>
+                      <p:childTnLst>
+                        <p:par>
+                          <p:cTn id="163" fill="hold">
+                            <p:stCondLst>
+                              <p:cond delay="0"/>
+                            </p:stCondLst>
+                            <p:childTnLst>
+                              <p:par>
+                                <p:cTn id="164" presetID="10" presetClass="exit" presetSubtype="0" fill="hold" grpId="0" nodeType="clickEffect">
+                                  <p:stCondLst>
+                                    <p:cond delay="0"/>
+                                  </p:stCondLst>
+                                  <p:childTnLst>
+                                    <p:animEffect transition="out" filter="fade">
+                                      <p:cBhvr>
+                                        <p:cTn id="165" dur="250"/>
+                                        <p:tgtEl>
+                                          <p:spTgt spid="463"/>
+                                        </p:tgtEl>
+                                      </p:cBhvr>
+                                    </p:animEffect>
+                                    <p:set>
+                                      <p:cBhvr>
+                                        <p:cTn id="166" dur="1" fill="hold">
+                                          <p:stCondLst>
+                                            <p:cond delay="249"/>
+                                          </p:stCondLst>
+                                        </p:cTn>
+                                        <p:tgtEl>
+                                          <p:spTgt spid="463"/>
+                                        </p:tgtEl>
+                                        <p:attrNameLst>
+                                          <p:attrName>style.visibility</p:attrName>
+                                        </p:attrNameLst>
+                                      </p:cBhvr>
+                                      <p:to>
+                                        <p:strVal val="hidden"/>
+                                      </p:to>
+                                    </p:set>
+                                  </p:childTnLst>
+                                </p:cTn>
+                              </p:par>
+                              <p:par>
+                                <p:cTn id="167" presetID="10" presetClass="exit" presetSubtype="0" fill="hold" grpId="0" nodeType="withEffect">
+                                  <p:stCondLst>
+                                    <p:cond delay="0"/>
+                                  </p:stCondLst>
+                                  <p:childTnLst>
+                                    <p:animEffect transition="out" filter="fade">
+                                      <p:cBhvr>
+                                        <p:cTn id="168" dur="250"/>
+                                        <p:tgtEl>
+                                          <p:spTgt spid="483"/>
+                                        </p:tgtEl>
+                                      </p:cBhvr>
+                                    </p:animEffect>
+                                    <p:set>
+                                      <p:cBhvr>
+                                        <p:cTn id="169" dur="1" fill="hold">
+                                          <p:stCondLst>
+                                            <p:cond delay="249"/>
+                                          </p:stCondLst>
+                                        </p:cTn>
+                                        <p:tgtEl>
+                                          <p:spTgt spid="483"/>
+                                        </p:tgtEl>
+                                        <p:attrNameLst>
+                                          <p:attrName>style.visibility</p:attrName>
+                                        </p:attrNameLst>
+                                      </p:cBhvr>
+                                      <p:to>
+                                        <p:strVal val="hidden"/>
+                                      </p:to>
+                                    </p:set>
+                                  </p:childTnLst>
+                                </p:cTn>
+                              </p:par>
+                              <p:par>
+                                <p:cTn id="170" presetID="10" presetClass="entr" presetSubtype="0" fill="hold" grpId="0" nodeType="withEffect">
+                                  <p:stCondLst>
+                                    <p:cond delay="0"/>
+                                  </p:stCondLst>
+                                  <p:childTnLst>
+                                    <p:set>
+                                      <p:cBhvr>
+                                        <p:cTn id="171" dur="1" fill="hold">
+                                          <p:stCondLst>
+                                            <p:cond delay="0"/>
+                                          </p:stCondLst>
+                                        </p:cTn>
+                                        <p:tgtEl>
+                                          <p:spTgt spid="489"/>
+                                        </p:tgtEl>
+                                        <p:attrNameLst>
+                                          <p:attrName>style.visibility</p:attrName>
+                                        </p:attrNameLst>
+                                      </p:cBhvr>
+                                      <p:to>
+                                        <p:strVal val="visible"/>
+                                      </p:to>
+                                    </p:set>
+                                    <p:animEffect transition="in" filter="fade">
+                                      <p:cBhvr>
+                                        <p:cTn id="172" dur="350"/>
+                                        <p:tgtEl>
+                                          <p:spTgt spid="489"/>
+                                        </p:tgtEl>
+                                      </p:cBhvr>
+                                    </p:animEffect>
+                                  </p:childTnLst>
+                                </p:cTn>
+                              </p:par>
+                            </p:childTnLst>
+                          </p:cTn>
+                        </p:par>
+                        <p:par>
+                          <p:cTn id="173" fill="hold">
+                            <p:stCondLst>
+                              <p:cond delay="400"/>
+                            </p:stCondLst>
+                            <p:childTnLst>
+                              <p:par>
+                                <p:cTn id="174" presetID="22" presetClass="entr" presetSubtype="8" fill="hold" grpId="0" nodeType="afterEffect">
+                                  <p:stCondLst>
+                                    <p:cond delay="0"/>
+                                  </p:stCondLst>
+                                  <p:childTnLst>
+                                    <p:set>
+                                      <p:cBhvr>
+                                        <p:cTn id="175" dur="1" fill="hold">
+                                          <p:stCondLst>
+                                            <p:cond delay="0"/>
+                                          </p:stCondLst>
+                                        </p:cTn>
+                                        <p:tgtEl>
+                                          <p:spTgt spid="505"/>
+                                        </p:tgtEl>
+                                        <p:attrNameLst>
+                                          <p:attrName>style.visibility</p:attrName>
+                                        </p:attrNameLst>
+                                      </p:cBhvr>
+                                      <p:to>
+                                        <p:strVal val="visible"/>
+                                      </p:to>
+                                    </p:set>
+                                    <p:animEffect transition="in" filter="wipe(left)">
+                                      <p:cBhvr>
+                                        <p:cTn id="176" dur="600"/>
+                                        <p:tgtEl>
+                                          <p:spTgt spid="505"/>
+                                        </p:tgtEl>
+                                      </p:cBhvr>
+                                    </p:animEffect>
+                                  </p:childTnLst>
+                                </p:cTn>
+                              </p:par>
+                            </p:childTnLst>
+                          </p:cTn>
+                        </p:par>
+                      </p:childTnLst>
+                    </p:cTn>
+                  </p:par>
+                  <p:par>
+                    <p:cTn id="177" fill="hold">
+                      <p:stCondLst>
+                        <p:cond delay="indefinite"/>
+                      </p:stCondLst>
+                      <p:childTnLst>
+                        <p:par>
+                          <p:cTn id="178" fill="hold">
+                            <p:stCondLst>
+                              <p:cond delay="0"/>
+                            </p:stCondLst>
+                            <p:childTnLst>
+                              <p:par>
+                                <p:cTn id="179" presetID="10" presetClass="exit" presetSubtype="0" fill="hold" grpId="0" nodeType="clickEffect">
+                                  <p:stCondLst>
+                                    <p:cond delay="0"/>
+                                  </p:stCondLst>
+                                  <p:childTnLst>
+                                    <p:animEffect transition="out" filter="fade">
+                                      <p:cBhvr>
+                                        <p:cTn id="180" dur="250"/>
+                                        <p:tgtEl>
+                                          <p:spTgt spid="489"/>
+                                        </p:tgtEl>
+                                      </p:cBhvr>
+                                    </p:animEffect>
+                                    <p:set>
+                                      <p:cBhvr>
+                                        <p:cTn id="181" dur="1" fill="hold">
+                                          <p:stCondLst>
+                                            <p:cond delay="249"/>
+                                          </p:stCondLst>
+                                        </p:cTn>
+                                        <p:tgtEl>
+                                          <p:spTgt spid="489"/>
+                                        </p:tgtEl>
+                                        <p:attrNameLst>
+                                          <p:attrName>style.visibility</p:attrName>
+                                        </p:attrNameLst>
+                                      </p:cBhvr>
+                                      <p:to>
+                                        <p:strVal val="hidden"/>
+                                      </p:to>
+                                    </p:set>
+                                  </p:childTnLst>
+                                </p:cTn>
+                              </p:par>
+                              <p:par>
+                                <p:cTn id="182" presetID="10" presetClass="exit" presetSubtype="0" fill="hold" grpId="0" nodeType="withEffect">
+                                  <p:stCondLst>
+                                    <p:cond delay="0"/>
+                                  </p:stCondLst>
+                                  <p:childTnLst>
+                                    <p:animEffect transition="out" filter="fade">
+                                      <p:cBhvr>
+                                        <p:cTn id="183" dur="250"/>
+                                        <p:tgtEl>
+                                          <p:spTgt spid="505"/>
+                                        </p:tgtEl>
+                                      </p:cBhvr>
+                                    </p:animEffect>
+                                    <p:set>
+                                      <p:cBhvr>
+                                        <p:cTn id="184" dur="1" fill="hold">
+                                          <p:stCondLst>
+                                            <p:cond delay="249"/>
+                                          </p:stCondLst>
+                                        </p:cTn>
+                                        <p:tgtEl>
+                                          <p:spTgt spid="505"/>
+                                        </p:tgtEl>
+                                        <p:attrNameLst>
+                                          <p:attrName>style.visibility</p:attrName>
+                                        </p:attrNameLst>
+                                      </p:cBhvr>
+                                      <p:to>
+                                        <p:strVal val="hidden"/>
+                                      </p:to>
+                                    </p:set>
+                                  </p:childTnLst>
+                                </p:cTn>
+                              </p:par>
+                              <p:par>
+                                <p:cTn id="185" presetID="10" presetClass="entr" presetSubtype="0" fill="hold" grpId="0" nodeType="withEffect">
+                                  <p:stCondLst>
+                                    <p:cond delay="0"/>
+                                  </p:stCondLst>
+                                  <p:childTnLst>
+                                    <p:set>
+                                      <p:cBhvr>
+                                        <p:cTn id="186" dur="1" fill="hold">
+                                          <p:stCondLst>
+                                            <p:cond delay="0"/>
+                                          </p:stCondLst>
+                                        </p:cTn>
+                                        <p:tgtEl>
+                                          <p:spTgt spid="507"/>
+                                        </p:tgtEl>
+                                        <p:attrNameLst>
+                                          <p:attrName>style.visibility</p:attrName>
+                                        </p:attrNameLst>
+                                      </p:cBhvr>
+                                      <p:to>
+                                        <p:strVal val="visible"/>
+                                      </p:to>
+                                    </p:set>
+                                    <p:animEffect transition="in" filter="fade">
+                                      <p:cBhvr>
+                                        <p:cTn id="187" dur="350"/>
+                                        <p:tgtEl>
+                                          <p:spTgt spid="507"/>
+                                        </p:tgtEl>
+                                      </p:cBhvr>
+                                    </p:animEffect>
+                                  </p:childTnLst>
+                                </p:cTn>
+                              </p:par>
+                            </p:childTnLst>
+                          </p:cTn>
+                        </p:par>
+                      </p:childTnLst>
+                    </p:cTn>
+                  </p:par>
+                  <p:par>
+                    <p:cTn id="188" fill="hold">
+                      <p:stCondLst>
+                        <p:cond delay="indefinite"/>
+                      </p:stCondLst>
+                      <p:childTnLst>
+                        <p:par>
+                          <p:cTn id="189" fill="hold">
+                            <p:stCondLst>
+                              <p:cond delay="0"/>
+                            </p:stCondLst>
+                            <p:childTnLst>
+                              <p:par>
+                                <p:cTn id="190" presetID="10" presetClass="exit" presetSubtype="0" fill="hold" grpId="0" nodeType="clickEffect">
+                                  <p:stCondLst>
+                                    <p:cond delay="0"/>
+                                  </p:stCondLst>
+                                  <p:childTnLst>
+                                    <p:animEffect transition="out" filter="fade">
+                                      <p:cBhvr>
+                                        <p:cTn id="191" dur="250"/>
+                                        <p:tgtEl>
+                                          <p:spTgt spid="507"/>
+                                        </p:tgtEl>
+                                      </p:cBhvr>
+                                    </p:animEffect>
+                                    <p:set>
+                                      <p:cBhvr>
+                                        <p:cTn id="192" dur="1" fill="hold">
+                                          <p:stCondLst>
+                                            <p:cond delay="249"/>
+                                          </p:stCondLst>
+                                        </p:cTn>
+                                        <p:tgtEl>
+                                          <p:spTgt spid="507"/>
                                         </p:tgtEl>
                                         <p:attrNameLst>
                                           <p:attrName>style.visibility</p:attrName>

--- a/poc/deck/assets/review/Slide 4 interactive - test.pptx
+++ b/poc/deck/assets/review/Slide 4 interactive - test.pptx
@@ -1495,7 +1495,7 @@
           <a:p/>
           <a:p>
             <a:r>
-              <a:t>[CLICK 10  H4, step 06] The Release Agent promotes through Copado to SIT and UAT. Marketing and clinical owners test every message variant and sign off UAT.</a:t>
+              <a:t>[CLICK 10  06 UAT, then H4] The Release Agent promotes through Copado to SIT and UAT (step 05). In step 06, marketing and clinical owners test every message variant; they sign off at H4.</a:t>
             </a:r>
           </a:p>
           <a:p/>
@@ -10303,7 +10303,7 @@
         <p:spPr>
           <a:xfrm>
             <a:off x="1417320" y="5550408"/>
-            <a:ext cx="749808" cy="384048"/>
+            <a:ext cx="694944" cy="384048"/>
           </a:xfrm>
           <a:prstGeom prst="roundRect">
             <a:avLst>
@@ -10349,7 +10349,7 @@
         <p:spPr>
           <a:xfrm>
             <a:off x="1444752" y="5550408"/>
-            <a:ext cx="694944" cy="384048"/>
+            <a:ext cx="640080" cy="384048"/>
           </a:xfrm>
           <a:prstGeom prst="rect">
             <a:avLst/>
@@ -10395,7 +10395,7 @@
         </p:nvSpPr>
         <p:spPr>
           <a:xfrm>
-            <a:off x="1581912" y="5980176"/>
+            <a:off x="1554480" y="5980176"/>
             <a:ext cx="420624" cy="146304"/>
           </a:xfrm>
           <a:prstGeom prst="roundRect">
@@ -10441,7 +10441,7 @@
         </p:nvSpPr>
         <p:spPr>
           <a:xfrm>
-            <a:off x="1581912" y="5980176"/>
+            <a:off x="1554480" y="5980176"/>
             <a:ext cx="420624" cy="146304"/>
           </a:xfrm>
           <a:prstGeom prst="rect">
@@ -10476,7 +10476,7 @@
         </p:nvCxnSpPr>
         <p:spPr>
           <a:xfrm>
-            <a:off x="2167128" y="5742432"/>
+            <a:off x="2112264" y="5742432"/>
             <a:ext cx="45720" cy="0"/>
           </a:xfrm>
           <a:prstGeom prst="line">
@@ -10512,8 +10512,8 @@
         </p:nvSpPr>
         <p:spPr>
           <a:xfrm>
-            <a:off x="2212848" y="5550408"/>
-            <a:ext cx="749808" cy="384048"/>
+            <a:off x="2157984" y="5550408"/>
+            <a:ext cx="694944" cy="384048"/>
           </a:xfrm>
           <a:prstGeom prst="roundRect">
             <a:avLst>
@@ -10558,8 +10558,8 @@
         </p:nvSpPr>
         <p:spPr>
           <a:xfrm>
-            <a:off x="2240279" y="5550408"/>
-            <a:ext cx="694944" cy="384048"/>
+            <a:off x="2185416" y="5550408"/>
+            <a:ext cx="640080" cy="384048"/>
           </a:xfrm>
           <a:prstGeom prst="rect">
             <a:avLst/>
@@ -10605,8 +10605,8 @@
         </p:nvCxnSpPr>
         <p:spPr>
           <a:xfrm>
-            <a:off x="2962656" y="5742432"/>
-            <a:ext cx="45719" cy="0"/>
+            <a:off x="2852928" y="5742432"/>
+            <a:ext cx="45720" cy="0"/>
           </a:xfrm>
           <a:prstGeom prst="line">
             <a:avLst/>
@@ -10641,8 +10641,8 @@
         </p:nvSpPr>
         <p:spPr>
           <a:xfrm>
-            <a:off x="3008376" y="5550408"/>
-            <a:ext cx="749808" cy="384048"/>
+            <a:off x="2898648" y="5550408"/>
+            <a:ext cx="694944" cy="384048"/>
           </a:xfrm>
           <a:prstGeom prst="roundRect">
             <a:avLst>
@@ -10687,8 +10687,8 @@
         </p:nvSpPr>
         <p:spPr>
           <a:xfrm>
-            <a:off x="3035808" y="5550408"/>
-            <a:ext cx="694944" cy="384048"/>
+            <a:off x="2926079" y="5550408"/>
+            <a:ext cx="640080" cy="384048"/>
           </a:xfrm>
           <a:prstGeom prst="rect">
             <a:avLst/>
@@ -10734,7 +10734,7 @@
         </p:nvSpPr>
         <p:spPr>
           <a:xfrm>
-            <a:off x="3172968" y="5980176"/>
+            <a:off x="3035808" y="5980176"/>
             <a:ext cx="420624" cy="146304"/>
           </a:xfrm>
           <a:prstGeom prst="roundRect">
@@ -10780,7 +10780,7 @@
         </p:nvSpPr>
         <p:spPr>
           <a:xfrm>
-            <a:off x="3172968" y="5980176"/>
+            <a:off x="3035808" y="5980176"/>
             <a:ext cx="420624" cy="146304"/>
           </a:xfrm>
           <a:prstGeom prst="rect">
@@ -10815,7 +10815,7 @@
         </p:nvCxnSpPr>
         <p:spPr>
           <a:xfrm>
-            <a:off x="3758184" y="5742432"/>
+            <a:off x="3593591" y="5742432"/>
             <a:ext cx="45720" cy="0"/>
           </a:xfrm>
           <a:prstGeom prst="line">
@@ -10851,8 +10851,8 @@
         </p:nvSpPr>
         <p:spPr>
           <a:xfrm>
-            <a:off x="3803904" y="5550408"/>
-            <a:ext cx="749808" cy="384048"/>
+            <a:off x="3639312" y="5550408"/>
+            <a:ext cx="694944" cy="384048"/>
           </a:xfrm>
           <a:prstGeom prst="roundRect">
             <a:avLst>
@@ -10897,8 +10897,8 @@
         </p:nvSpPr>
         <p:spPr>
           <a:xfrm>
-            <a:off x="3831336" y="5550408"/>
-            <a:ext cx="694944" cy="384048"/>
+            <a:off x="3666744" y="5550408"/>
+            <a:ext cx="640080" cy="384048"/>
           </a:xfrm>
           <a:prstGeom prst="rect">
             <a:avLst/>
@@ -10944,7 +10944,7 @@
         </p:nvCxnSpPr>
         <p:spPr>
           <a:xfrm>
-            <a:off x="4553712" y="5742432"/>
+            <a:off x="4334256" y="5742432"/>
             <a:ext cx="45720" cy="0"/>
           </a:xfrm>
           <a:prstGeom prst="line">
@@ -10980,8 +10980,8 @@
         </p:nvSpPr>
         <p:spPr>
           <a:xfrm>
-            <a:off x="4599432" y="5550408"/>
-            <a:ext cx="749808" cy="384048"/>
+            <a:off x="4379976" y="5550408"/>
+            <a:ext cx="694944" cy="384048"/>
           </a:xfrm>
           <a:prstGeom prst="roundRect">
             <a:avLst>
@@ -11026,8 +11026,8 @@
         </p:nvSpPr>
         <p:spPr>
           <a:xfrm>
-            <a:off x="4626864" y="5550408"/>
-            <a:ext cx="694944" cy="384048"/>
+            <a:off x="4407408" y="5550408"/>
+            <a:ext cx="640080" cy="384048"/>
           </a:xfrm>
           <a:prstGeom prst="rect">
             <a:avLst/>
@@ -11073,7 +11073,7 @@
         </p:nvSpPr>
         <p:spPr>
           <a:xfrm>
-            <a:off x="4764024" y="5980176"/>
+            <a:off x="4517136" y="5980176"/>
             <a:ext cx="420624" cy="146304"/>
           </a:xfrm>
           <a:prstGeom prst="roundRect">
@@ -11119,7 +11119,7 @@
         </p:nvSpPr>
         <p:spPr>
           <a:xfrm>
-            <a:off x="4764024" y="5980176"/>
+            <a:off x="4517136" y="5980176"/>
             <a:ext cx="420624" cy="146304"/>
           </a:xfrm>
           <a:prstGeom prst="rect">
@@ -11154,7 +11154,7 @@
         </p:nvCxnSpPr>
         <p:spPr>
           <a:xfrm>
-            <a:off x="5349240" y="5742432"/>
+            <a:off x="5074920" y="5742432"/>
             <a:ext cx="45720" cy="0"/>
           </a:xfrm>
           <a:prstGeom prst="line">
@@ -11190,8 +11190,8 @@
         </p:nvSpPr>
         <p:spPr>
           <a:xfrm>
-            <a:off x="5394959" y="5550408"/>
-            <a:ext cx="749808" cy="384048"/>
+            <a:off x="5120640" y="5550408"/>
+            <a:ext cx="694944" cy="384048"/>
           </a:xfrm>
           <a:prstGeom prst="roundRect">
             <a:avLst>
@@ -11236,8 +11236,8 @@
         </p:nvSpPr>
         <p:spPr>
           <a:xfrm>
-            <a:off x="5422392" y="5550408"/>
-            <a:ext cx="694944" cy="384048"/>
+            <a:off x="5148072" y="5550408"/>
+            <a:ext cx="640080" cy="384048"/>
           </a:xfrm>
           <a:prstGeom prst="rect">
             <a:avLst/>
@@ -11283,7 +11283,7 @@
         </p:nvSpPr>
         <p:spPr>
           <a:xfrm>
-            <a:off x="5559551" y="5980176"/>
+            <a:off x="5257800" y="5980176"/>
             <a:ext cx="420624" cy="146304"/>
           </a:xfrm>
           <a:prstGeom prst="roundRect">
@@ -11329,7 +11329,7 @@
         </p:nvSpPr>
         <p:spPr>
           <a:xfrm>
-            <a:off x="5559551" y="5980176"/>
+            <a:off x="5257800" y="5980176"/>
             <a:ext cx="420624" cy="146304"/>
           </a:xfrm>
           <a:prstGeom prst="rect">
@@ -11364,7 +11364,7 @@
         </p:nvCxnSpPr>
         <p:spPr>
           <a:xfrm>
-            <a:off x="6144768" y="5742432"/>
+            <a:off x="5815584" y="5742432"/>
             <a:ext cx="45720" cy="0"/>
           </a:xfrm>
           <a:prstGeom prst="line">
@@ -11400,8 +11400,8 @@
         </p:nvSpPr>
         <p:spPr>
           <a:xfrm>
-            <a:off x="6190488" y="5550408"/>
-            <a:ext cx="749808" cy="384048"/>
+            <a:off x="5861304" y="5550408"/>
+            <a:ext cx="694944" cy="384048"/>
           </a:xfrm>
           <a:prstGeom prst="roundRect">
             <a:avLst>
@@ -11446,8 +11446,8 @@
         </p:nvSpPr>
         <p:spPr>
           <a:xfrm>
-            <a:off x="6217920" y="5550408"/>
-            <a:ext cx="694944" cy="384048"/>
+            <a:off x="5888736" y="5550408"/>
+            <a:ext cx="640080" cy="384048"/>
           </a:xfrm>
           <a:prstGeom prst="rect">
             <a:avLst/>
@@ -11493,7 +11493,7 @@
         </p:nvCxnSpPr>
         <p:spPr>
           <a:xfrm>
-            <a:off x="6940296" y="5742432"/>
+            <a:off x="6556248" y="5742432"/>
             <a:ext cx="45720" cy="0"/>
           </a:xfrm>
           <a:prstGeom prst="line">
@@ -11529,8 +11529,8 @@
         </p:nvSpPr>
         <p:spPr>
           <a:xfrm>
-            <a:off x="6986016" y="5550408"/>
-            <a:ext cx="749808" cy="384048"/>
+            <a:off x="6601968" y="5550408"/>
+            <a:ext cx="694944" cy="384048"/>
           </a:xfrm>
           <a:prstGeom prst="roundRect">
             <a:avLst>
@@ -11575,8 +11575,8 @@
         </p:nvSpPr>
         <p:spPr>
           <a:xfrm>
-            <a:off x="7013448" y="5550408"/>
-            <a:ext cx="694944" cy="384048"/>
+            <a:off x="6629400" y="5550408"/>
+            <a:ext cx="640080" cy="384048"/>
           </a:xfrm>
           <a:prstGeom prst="rect">
             <a:avLst/>
@@ -11622,7 +11622,7 @@
         </p:nvSpPr>
         <p:spPr>
           <a:xfrm>
-            <a:off x="7150607" y="5980176"/>
+            <a:off x="6739128" y="5980176"/>
             <a:ext cx="420624" cy="146304"/>
           </a:xfrm>
           <a:prstGeom prst="roundRect">
@@ -11668,7 +11668,7 @@
         </p:nvSpPr>
         <p:spPr>
           <a:xfrm>
-            <a:off x="7150607" y="5980176"/>
+            <a:off x="6739128" y="5980176"/>
             <a:ext cx="420624" cy="146304"/>
           </a:xfrm>
           <a:prstGeom prst="rect">
@@ -11703,8 +11703,8 @@
         </p:nvCxnSpPr>
         <p:spPr>
           <a:xfrm>
-            <a:off x="7735823" y="5742432"/>
-            <a:ext cx="45721" cy="0"/>
+            <a:off x="7296912" y="5742432"/>
+            <a:ext cx="45719" cy="0"/>
           </a:xfrm>
           <a:prstGeom prst="line">
             <a:avLst/>
@@ -11739,8 +11739,8 @@
         </p:nvSpPr>
         <p:spPr>
           <a:xfrm>
-            <a:off x="7781544" y="5550408"/>
-            <a:ext cx="749808" cy="384048"/>
+            <a:off x="7342632" y="5550408"/>
+            <a:ext cx="694944" cy="384048"/>
           </a:xfrm>
           <a:prstGeom prst="roundRect">
             <a:avLst>
@@ -11748,11 +11748,11 @@
             </a:avLst>
           </a:prstGeom>
           <a:solidFill>
-            <a:srgbClr val="FFD700"/>
+            <a:srgbClr val="FFFFFF"/>
           </a:solidFill>
           <a:ln w="9525">
             <a:solidFill>
-              <a:srgbClr val="FFD700"/>
+              <a:srgbClr val="0097AD"/>
             </a:solidFill>
           </a:ln>
           <a:effectLst/>
@@ -11785,8 +11785,8 @@
         </p:nvSpPr>
         <p:spPr>
           <a:xfrm>
-            <a:off x="7808975" y="5550408"/>
-            <a:ext cx="694944" cy="384048"/>
+            <a:off x="7370064" y="5550408"/>
+            <a:ext cx="640080" cy="384048"/>
           </a:xfrm>
           <a:prstGeom prst="rect">
             <a:avLst/>
@@ -11807,7 +11807,7 @@
                 </a:solidFill>
                 <a:latin typeface="Trenda IG Text"/>
               </a:rPr>
-              <a:t>06 UAT · H4</a:t>
+              <a:t>06 UAT</a:t>
             </a:r>
           </a:p>
           <a:p>
@@ -11819,7 +11819,7 @@
                 </a:solidFill>
                 <a:latin typeface="Trenda IG Text"/>
               </a:rPr>
-              <a:t>business sign-off</a:t>
+              <a:t>business testers</a:t>
             </a:r>
           </a:p>
         </p:txBody>
@@ -11832,7 +11832,7 @@
         </p:nvCxnSpPr>
         <p:spPr>
           <a:xfrm>
-            <a:off x="8531352" y="5742432"/>
+            <a:off x="8037576" y="5742432"/>
             <a:ext cx="45720" cy="0"/>
           </a:xfrm>
           <a:prstGeom prst="line">
@@ -11868,8 +11868,8 @@
         </p:nvSpPr>
         <p:spPr>
           <a:xfrm>
-            <a:off x="8577072" y="5550408"/>
-            <a:ext cx="749808" cy="384048"/>
+            <a:off x="8083296" y="5550408"/>
+            <a:ext cx="694944" cy="384048"/>
           </a:xfrm>
           <a:prstGeom prst="roundRect">
             <a:avLst>
@@ -11877,11 +11877,11 @@
             </a:avLst>
           </a:prstGeom>
           <a:solidFill>
-            <a:srgbClr val="FFFFFF"/>
+            <a:srgbClr val="FFD700"/>
           </a:solidFill>
           <a:ln w="9525">
             <a:solidFill>
-              <a:srgbClr val="0097AD"/>
+              <a:srgbClr val="FFD700"/>
             </a:solidFill>
           </a:ln>
           <a:effectLst/>
@@ -11914,8 +11914,137 @@
         </p:nvSpPr>
         <p:spPr>
           <a:xfrm>
-            <a:off x="8604504" y="5550408"/>
+            <a:off x="8110728" y="5550408"/>
+            <a:ext cx="640080" cy="384048"/>
+          </a:xfrm>
+          <a:prstGeom prst="rect">
+            <a:avLst/>
+          </a:prstGeom>
+          <a:noFill/>
+        </p:spPr>
+        <p:txBody>
+          <a:bodyPr wrap="square" lIns="0" rIns="0" tIns="0" bIns="0" anchor="ctr">
+            <a:spAutoFit/>
+          </a:bodyPr>
+          <a:lstStyle/>
+          <a:p>
+            <a:pPr algn="ctr"/>
+            <a:r>
+              <a:rPr sz="650" b="1" i="0">
+                <a:solidFill>
+                  <a:srgbClr val="000000"/>
+                </a:solidFill>
+                <a:latin typeface="Trenda IG Text"/>
+              </a:rPr>
+              <a:t>H4</a:t>
+            </a:r>
+          </a:p>
+          <a:p>
+            <a:pPr algn="ctr"/>
+            <a:r>
+              <a:rPr sz="530" b="0" i="0">
+                <a:solidFill>
+                  <a:srgbClr val="2B2B2B"/>
+                </a:solidFill>
+                <a:latin typeface="Trenda IG Text"/>
+              </a:rPr>
+              <a:t>business sign-off</a:t>
+            </a:r>
+          </a:p>
+        </p:txBody>
+      </p:sp>
+      <p:cxnSp>
+        <p:nvCxnSpPr>
+          <p:cNvPr id="222" name="Arrow 211"/>
+          <p:cNvCxnSpPr/>
+          <p:nvPr/>
+        </p:nvCxnSpPr>
+        <p:spPr>
+          <a:xfrm>
+            <a:off x="8778240" y="5742432"/>
+            <a:ext cx="45720" cy="0"/>
+          </a:xfrm>
+          <a:prstGeom prst="line">
+            <a:avLst/>
+          </a:prstGeom>
+          <a:ln w="9525">
+            <a:solidFill>
+              <a:srgbClr val="595959"/>
+            </a:solidFill>
+            <a:tailEnd type="triangle" w="med" len="med"/>
+          </a:ln>
+        </p:spPr>
+        <p:style>
+          <a:lnRef idx="2">
+            <a:schemeClr val="accent1"/>
+          </a:lnRef>
+          <a:fillRef idx="0">
+            <a:schemeClr val="accent1"/>
+          </a:fillRef>
+          <a:effectRef idx="1">
+            <a:schemeClr val="accent1"/>
+          </a:effectRef>
+          <a:fontRef idx="minor">
+            <a:schemeClr val="tx1"/>
+          </a:fontRef>
+        </p:style>
+      </p:cxnSp>
+      <p:sp>
+        <p:nvSpPr>
+          <p:cNvPr id="223" name="Shape 212"/>
+          <p:cNvSpPr/>
+          <p:nvPr/>
+        </p:nvSpPr>
+        <p:spPr>
+          <a:xfrm>
+            <a:off x="8823960" y="5550408"/>
             <a:ext cx="694944" cy="384048"/>
+          </a:xfrm>
+          <a:prstGeom prst="roundRect">
+            <a:avLst>
+              <a:gd name="adj" fmla="val 25000"/>
+            </a:avLst>
+          </a:prstGeom>
+          <a:solidFill>
+            <a:srgbClr val="FFFFFF"/>
+          </a:solidFill>
+          <a:ln w="9525">
+            <a:solidFill>
+              <a:srgbClr val="0097AD"/>
+            </a:solidFill>
+          </a:ln>
+          <a:effectLst/>
+        </p:spPr>
+        <p:style>
+          <a:lnRef idx="1">
+            <a:schemeClr val="accent1"/>
+          </a:lnRef>
+          <a:fillRef idx="3">
+            <a:schemeClr val="accent1"/>
+          </a:fillRef>
+          <a:effectRef idx="2">
+            <a:schemeClr val="accent1"/>
+          </a:effectRef>
+          <a:fontRef idx="minor">
+            <a:schemeClr val="lt1"/>
+          </a:fontRef>
+        </p:style>
+        <p:txBody>
+          <a:bodyPr rtlCol="0" anchor="ctr"/>
+          <a:lstStyle/>
+          <a:p/>
+        </p:txBody>
+      </p:sp>
+      <p:sp>
+        <p:nvSpPr>
+          <p:cNvPr id="224" name="Text 213"/>
+          <p:cNvSpPr txBox="1"/>
+          <p:nvPr/>
+        </p:nvSpPr>
+        <p:spPr>
+          <a:xfrm>
+            <a:off x="8851392" y="5550408"/>
+            <a:ext cx="640080" cy="384048"/>
           </a:xfrm>
           <a:prstGeom prst="rect">
             <a:avLst/>
@@ -11955,13 +12084,13 @@
       </p:sp>
       <p:sp>
         <p:nvSpPr>
-          <p:cNvPr id="222" name="Shape 211"/>
+          <p:cNvPr id="225" name="Shape 214"/>
           <p:cNvSpPr/>
           <p:nvPr/>
         </p:nvSpPr>
         <p:spPr>
           <a:xfrm>
-            <a:off x="8741664" y="5980176"/>
+            <a:off x="8961120" y="5980176"/>
             <a:ext cx="420624" cy="146304"/>
           </a:xfrm>
           <a:prstGeom prst="roundRect">
@@ -12001,13 +12130,13 @@
       </p:sp>
       <p:sp>
         <p:nvSpPr>
-          <p:cNvPr id="223" name="Text 212"/>
+          <p:cNvPr id="226" name="Text 215"/>
           <p:cNvSpPr txBox="1"/>
           <p:nvPr/>
         </p:nvSpPr>
         <p:spPr>
           <a:xfrm>
-            <a:off x="8741664" y="5980176"/>
+            <a:off x="8961120" y="5980176"/>
             <a:ext cx="420624" cy="146304"/>
           </a:xfrm>
           <a:prstGeom prst="rect">
@@ -12036,13 +12165,13 @@
       </p:sp>
       <p:cxnSp>
         <p:nvCxnSpPr>
-          <p:cNvPr id="224" name="Arrow 213"/>
+          <p:cNvPr id="227" name="Arrow 216"/>
           <p:cNvCxnSpPr/>
           <p:nvPr/>
         </p:nvCxnSpPr>
         <p:spPr>
           <a:xfrm>
-            <a:off x="9326880" y="5742432"/>
+            <a:off x="9518904" y="5742432"/>
             <a:ext cx="45720" cy="0"/>
           </a:xfrm>
           <a:prstGeom prst="line">
@@ -12072,14 +12201,14 @@
       </p:cxnSp>
       <p:sp>
         <p:nvSpPr>
-          <p:cNvPr id="225" name="Shape 214"/>
+          <p:cNvPr id="228" name="Shape 217"/>
           <p:cNvSpPr/>
           <p:nvPr/>
         </p:nvSpPr>
         <p:spPr>
           <a:xfrm>
-            <a:off x="9372600" y="5550408"/>
-            <a:ext cx="749808" cy="384048"/>
+            <a:off x="9564624" y="5550408"/>
+            <a:ext cx="694944" cy="384048"/>
           </a:xfrm>
           <a:prstGeom prst="roundRect">
             <a:avLst>
@@ -12118,14 +12247,14 @@
       </p:sp>
       <p:sp>
         <p:nvSpPr>
-          <p:cNvPr id="226" name="Text 215"/>
+          <p:cNvPr id="229" name="Text 218"/>
           <p:cNvSpPr txBox="1"/>
           <p:nvPr/>
         </p:nvSpPr>
         <p:spPr>
           <a:xfrm>
-            <a:off x="9400032" y="5550408"/>
-            <a:ext cx="694944" cy="384048"/>
+            <a:off x="9592056" y="5550408"/>
+            <a:ext cx="640080" cy="384048"/>
           </a:xfrm>
           <a:prstGeom prst="rect">
             <a:avLst/>
@@ -12165,13 +12294,13 @@
       </p:sp>
       <p:cxnSp>
         <p:nvCxnSpPr>
-          <p:cNvPr id="227" name="Arrow 216"/>
+          <p:cNvPr id="230" name="Arrow 219"/>
           <p:cNvCxnSpPr/>
           <p:nvPr/>
         </p:nvCxnSpPr>
         <p:spPr>
           <a:xfrm>
-            <a:off x="10122408" y="5742432"/>
+            <a:off x="10259568" y="5742432"/>
             <a:ext cx="45720" cy="0"/>
           </a:xfrm>
           <a:prstGeom prst="line">
@@ -12201,14 +12330,14 @@
       </p:cxnSp>
       <p:sp>
         <p:nvSpPr>
-          <p:cNvPr id="228" name="Shape 217"/>
+          <p:cNvPr id="231" name="Shape 220"/>
           <p:cNvSpPr/>
           <p:nvPr/>
         </p:nvSpPr>
         <p:spPr>
           <a:xfrm>
-            <a:off x="10168128" y="5550408"/>
-            <a:ext cx="749808" cy="384048"/>
+            <a:off x="10305288" y="5550408"/>
+            <a:ext cx="694944" cy="384048"/>
           </a:xfrm>
           <a:prstGeom prst="roundRect">
             <a:avLst>
@@ -12248,14 +12377,14 @@
       </p:sp>
       <p:sp>
         <p:nvSpPr>
-          <p:cNvPr id="229" name="Text 218"/>
+          <p:cNvPr id="232" name="Text 221"/>
           <p:cNvSpPr txBox="1"/>
           <p:nvPr/>
         </p:nvSpPr>
         <p:spPr>
           <a:xfrm>
-            <a:off x="10195560" y="5550408"/>
-            <a:ext cx="694944" cy="384048"/>
+            <a:off x="10332720" y="5550408"/>
+            <a:ext cx="640080" cy="384048"/>
           </a:xfrm>
           <a:prstGeom prst="rect">
             <a:avLst/>
@@ -12295,13 +12424,13 @@
       </p:sp>
       <p:cxnSp>
         <p:nvCxnSpPr>
-          <p:cNvPr id="230" name="Arrow 219"/>
+          <p:cNvPr id="233" name="Arrow 222"/>
           <p:cNvCxnSpPr/>
           <p:nvPr/>
         </p:nvCxnSpPr>
         <p:spPr>
           <a:xfrm>
-            <a:off x="10917936" y="5742432"/>
+            <a:off x="11000232" y="5742432"/>
             <a:ext cx="45720" cy="0"/>
           </a:xfrm>
           <a:prstGeom prst="line">
@@ -12331,14 +12460,14 @@
       </p:cxnSp>
       <p:sp>
         <p:nvSpPr>
-          <p:cNvPr id="231" name="Shape 220"/>
+          <p:cNvPr id="234" name="Shape 223"/>
           <p:cNvSpPr/>
           <p:nvPr/>
         </p:nvSpPr>
         <p:spPr>
           <a:xfrm>
-            <a:off x="10963656" y="5550408"/>
-            <a:ext cx="749808" cy="384048"/>
+            <a:off x="11045952" y="5550408"/>
+            <a:ext cx="694944" cy="384048"/>
           </a:xfrm>
           <a:prstGeom prst="roundRect">
             <a:avLst>
@@ -12377,14 +12506,14 @@
       </p:sp>
       <p:sp>
         <p:nvSpPr>
-          <p:cNvPr id="232" name="Text 221"/>
+          <p:cNvPr id="235" name="Text 224"/>
           <p:cNvSpPr txBox="1"/>
           <p:nvPr/>
         </p:nvSpPr>
         <p:spPr>
           <a:xfrm>
-            <a:off x="10991088" y="5550408"/>
-            <a:ext cx="694944" cy="384048"/>
+            <a:off x="11073384" y="5550408"/>
+            <a:ext cx="640080" cy="384048"/>
           </a:xfrm>
           <a:prstGeom prst="rect">
             <a:avLst/>
@@ -12424,7 +12553,7 @@
       </p:sp>
       <p:sp>
         <p:nvSpPr>
-          <p:cNvPr id="233" name="Text 222"/>
+          <p:cNvPr id="236" name="Text 225"/>
           <p:cNvSpPr txBox="1"/>
           <p:nvPr/>
         </p:nvSpPr>
@@ -12458,7 +12587,7 @@
       </p:sp>
       <p:sp>
         <p:nvSpPr>
-          <p:cNvPr id="234" name="Text 223"/>
+          <p:cNvPr id="237" name="Text 226"/>
           <p:cNvSpPr txBox="1"/>
           <p:nvPr/>
         </p:nvSpPr>
@@ -12492,7 +12621,7 @@
       </p:sp>
       <p:grpSp>
         <p:nvGrpSpPr>
-          <p:cNvPr id="235" name="Step 1 highlight"/>
+          <p:cNvPr id="238" name="Step 1 highlight"/>
           <p:cNvGrpSpPr/>
           <p:nvPr/>
         </p:nvGrpSpPr>
@@ -12506,7 +12635,7 @@
         </p:grpSpPr>
         <p:sp>
           <p:nvSpPr>
-            <p:cNvPr id="236" name="Shape 1"/>
+            <p:cNvPr id="239" name="Shape 1"/>
             <p:cNvSpPr/>
             <p:nvPr/>
           </p:nvSpPr>
@@ -12550,7 +12679,7 @@
         </p:sp>
         <p:sp>
           <p:nvSpPr>
-            <p:cNvPr id="237" name="Shape 2"/>
+            <p:cNvPr id="240" name="Shape 2"/>
             <p:cNvSpPr/>
             <p:nvPr/>
           </p:nvSpPr>
@@ -12594,7 +12723,7 @@
         </p:sp>
         <p:sp>
           <p:nvSpPr>
-            <p:cNvPr id="238" name="Shape 3"/>
+            <p:cNvPr id="241" name="Shape 3"/>
             <p:cNvSpPr/>
             <p:nvPr/>
           </p:nvSpPr>
@@ -12638,7 +12767,7 @@
         </p:sp>
         <p:sp>
           <p:nvSpPr>
-            <p:cNvPr id="239" name="Shape 4"/>
+            <p:cNvPr id="242" name="Shape 4"/>
             <p:cNvSpPr/>
             <p:nvPr/>
           </p:nvSpPr>
@@ -12682,7 +12811,7 @@
         </p:sp>
         <p:sp>
           <p:nvSpPr>
-            <p:cNvPr id="240" name="Shape 5"/>
+            <p:cNvPr id="243" name="Shape 5"/>
             <p:cNvSpPr/>
             <p:nvPr/>
           </p:nvSpPr>
@@ -12726,7 +12855,7 @@
         </p:sp>
         <p:sp>
           <p:nvSpPr>
-            <p:cNvPr id="241" name="Shape 6"/>
+            <p:cNvPr id="244" name="Shape 6"/>
             <p:cNvSpPr/>
             <p:nvPr/>
           </p:nvSpPr>
@@ -12770,7 +12899,7 @@
         </p:sp>
         <p:sp>
           <p:nvSpPr>
-            <p:cNvPr id="242" name="Shape 7"/>
+            <p:cNvPr id="245" name="Shape 7"/>
             <p:cNvSpPr/>
             <p:nvPr/>
           </p:nvSpPr>
@@ -12814,7 +12943,7 @@
         </p:sp>
         <p:sp>
           <p:nvSpPr>
-            <p:cNvPr id="243" name="Shape 8"/>
+            <p:cNvPr id="246" name="Shape 8"/>
             <p:cNvSpPr/>
             <p:nvPr/>
           </p:nvSpPr>
@@ -12858,7 +12987,7 @@
         </p:sp>
         <p:sp>
           <p:nvSpPr>
-            <p:cNvPr id="244" name="Shape 9"/>
+            <p:cNvPr id="247" name="Shape 9"/>
             <p:cNvSpPr/>
             <p:nvPr/>
           </p:nvSpPr>
@@ -12902,7 +13031,7 @@
         </p:sp>
         <p:sp>
           <p:nvSpPr>
-            <p:cNvPr id="245" name="Shape 10"/>
+            <p:cNvPr id="248" name="Shape 10"/>
             <p:cNvSpPr/>
             <p:nvPr/>
           </p:nvSpPr>
@@ -12946,7 +13075,7 @@
         </p:sp>
         <p:sp>
           <p:nvSpPr>
-            <p:cNvPr id="246" name="Shape 11"/>
+            <p:cNvPr id="249" name="Shape 11"/>
             <p:cNvSpPr/>
             <p:nvPr/>
           </p:nvSpPr>
@@ -12992,7 +13121,7 @@
         </p:sp>
         <p:sp>
           <p:nvSpPr>
-            <p:cNvPr id="247" name="Text 12"/>
+            <p:cNvPr id="250" name="Text 12"/>
             <p:cNvSpPr txBox="1"/>
             <p:nvPr/>
           </p:nvSpPr>
@@ -13057,7 +13186,7 @@
       </p:grpSp>
       <p:grpSp>
         <p:nvGrpSpPr>
-          <p:cNvPr id="248" name="Step 1 arrows"/>
+          <p:cNvPr id="251" name="Step 1 arrows"/>
           <p:cNvGrpSpPr/>
           <p:nvPr/>
         </p:nvGrpSpPr>
@@ -13071,7 +13200,7 @@
         </p:grpSpPr>
         <p:cxnSp>
           <p:nvCxnSpPr>
-            <p:cNvPr id="249" name="Arrow 1"/>
+            <p:cNvPr id="252" name="Arrow 1"/>
             <p:cNvCxnSpPr/>
             <p:nvPr/>
           </p:nvCxnSpPr>
@@ -13107,7 +13236,7 @@
         </p:cxnSp>
         <p:cxnSp>
           <p:nvCxnSpPr>
-            <p:cNvPr id="250" name="Arrow 2"/>
+            <p:cNvPr id="253" name="Arrow 2"/>
             <p:cNvCxnSpPr/>
             <p:nvPr/>
           </p:nvCxnSpPr>
@@ -13144,7 +13273,7 @@
       </p:grpSp>
       <p:grpSp>
         <p:nvGrpSpPr>
-          <p:cNvPr id="251" name="Step 2 highlight"/>
+          <p:cNvPr id="254" name="Step 2 highlight"/>
           <p:cNvGrpSpPr/>
           <p:nvPr/>
         </p:nvGrpSpPr>
@@ -13158,7 +13287,7 @@
         </p:grpSpPr>
         <p:sp>
           <p:nvSpPr>
-            <p:cNvPr id="252" name="Shape 1"/>
+            <p:cNvPr id="255" name="Shape 1"/>
             <p:cNvSpPr/>
             <p:nvPr/>
           </p:nvSpPr>
@@ -13202,7 +13331,7 @@
         </p:sp>
         <p:sp>
           <p:nvSpPr>
-            <p:cNvPr id="253" name="Shape 2"/>
+            <p:cNvPr id="256" name="Shape 2"/>
             <p:cNvSpPr/>
             <p:nvPr/>
           </p:nvSpPr>
@@ -13246,7 +13375,7 @@
         </p:sp>
         <p:sp>
           <p:nvSpPr>
-            <p:cNvPr id="254" name="Shape 3"/>
+            <p:cNvPr id="257" name="Shape 3"/>
             <p:cNvSpPr/>
             <p:nvPr/>
           </p:nvSpPr>
@@ -13290,7 +13419,7 @@
         </p:sp>
         <p:sp>
           <p:nvSpPr>
-            <p:cNvPr id="255" name="Shape 4"/>
+            <p:cNvPr id="258" name="Shape 4"/>
             <p:cNvSpPr/>
             <p:nvPr/>
           </p:nvSpPr>
@@ -13334,7 +13463,7 @@
         </p:sp>
         <p:sp>
           <p:nvSpPr>
-            <p:cNvPr id="256" name="Shape 5"/>
+            <p:cNvPr id="259" name="Shape 5"/>
             <p:cNvSpPr/>
             <p:nvPr/>
           </p:nvSpPr>
@@ -13378,7 +13507,7 @@
         </p:sp>
         <p:sp>
           <p:nvSpPr>
-            <p:cNvPr id="257" name="Shape 6"/>
+            <p:cNvPr id="260" name="Shape 6"/>
             <p:cNvSpPr/>
             <p:nvPr/>
           </p:nvSpPr>
@@ -13422,7 +13551,7 @@
         </p:sp>
         <p:sp>
           <p:nvSpPr>
-            <p:cNvPr id="258" name="Shape 7"/>
+            <p:cNvPr id="261" name="Shape 7"/>
             <p:cNvSpPr/>
             <p:nvPr/>
           </p:nvSpPr>
@@ -13466,7 +13595,7 @@
         </p:sp>
         <p:sp>
           <p:nvSpPr>
-            <p:cNvPr id="259" name="Shape 8"/>
+            <p:cNvPr id="262" name="Shape 8"/>
             <p:cNvSpPr/>
             <p:nvPr/>
           </p:nvSpPr>
@@ -13510,7 +13639,7 @@
         </p:sp>
         <p:sp>
           <p:nvSpPr>
-            <p:cNvPr id="260" name="Shape 9"/>
+            <p:cNvPr id="263" name="Shape 9"/>
             <p:cNvSpPr/>
             <p:nvPr/>
           </p:nvSpPr>
@@ -13554,7 +13683,7 @@
         </p:sp>
         <p:sp>
           <p:nvSpPr>
-            <p:cNvPr id="261" name="Shape 10"/>
+            <p:cNvPr id="264" name="Shape 10"/>
             <p:cNvSpPr/>
             <p:nvPr/>
           </p:nvSpPr>
@@ -13598,7 +13727,7 @@
         </p:sp>
         <p:sp>
           <p:nvSpPr>
-            <p:cNvPr id="262" name="Shape 11"/>
+            <p:cNvPr id="265" name="Shape 11"/>
             <p:cNvSpPr/>
             <p:nvPr/>
           </p:nvSpPr>
@@ -13642,7 +13771,7 @@
         </p:sp>
         <p:sp>
           <p:nvSpPr>
-            <p:cNvPr id="263" name="Shape 12"/>
+            <p:cNvPr id="266" name="Shape 12"/>
             <p:cNvSpPr/>
             <p:nvPr/>
           </p:nvSpPr>
@@ -13686,7 +13815,7 @@
         </p:sp>
         <p:sp>
           <p:nvSpPr>
-            <p:cNvPr id="264" name="Shape 13"/>
+            <p:cNvPr id="267" name="Shape 13"/>
             <p:cNvSpPr/>
             <p:nvPr/>
           </p:nvSpPr>
@@ -13730,7 +13859,7 @@
         </p:sp>
         <p:sp>
           <p:nvSpPr>
-            <p:cNvPr id="265" name="Shape 14"/>
+            <p:cNvPr id="268" name="Shape 14"/>
             <p:cNvSpPr/>
             <p:nvPr/>
           </p:nvSpPr>
@@ -13774,7 +13903,7 @@
         </p:sp>
         <p:sp>
           <p:nvSpPr>
-            <p:cNvPr id="266" name="Shape 15"/>
+            <p:cNvPr id="269" name="Shape 15"/>
             <p:cNvSpPr/>
             <p:nvPr/>
           </p:nvSpPr>
@@ -13818,7 +13947,7 @@
         </p:sp>
         <p:sp>
           <p:nvSpPr>
-            <p:cNvPr id="267" name="Shape 16"/>
+            <p:cNvPr id="270" name="Shape 16"/>
             <p:cNvSpPr/>
             <p:nvPr/>
           </p:nvSpPr>
@@ -13862,7 +13991,7 @@
         </p:sp>
         <p:sp>
           <p:nvSpPr>
-            <p:cNvPr id="268" name="Shape 17"/>
+            <p:cNvPr id="271" name="Shape 17"/>
             <p:cNvSpPr/>
             <p:nvPr/>
           </p:nvSpPr>
@@ -13906,7 +14035,7 @@
         </p:sp>
         <p:sp>
           <p:nvSpPr>
-            <p:cNvPr id="269" name="Shape 18"/>
+            <p:cNvPr id="272" name="Shape 18"/>
             <p:cNvSpPr/>
             <p:nvPr/>
           </p:nvSpPr>
@@ -13950,7 +14079,7 @@
         </p:sp>
         <p:sp>
           <p:nvSpPr>
-            <p:cNvPr id="270" name="Shape 19"/>
+            <p:cNvPr id="273" name="Shape 19"/>
             <p:cNvSpPr/>
             <p:nvPr/>
           </p:nvSpPr>
@@ -13996,7 +14125,7 @@
         </p:sp>
         <p:sp>
           <p:nvSpPr>
-            <p:cNvPr id="271" name="Text 20"/>
+            <p:cNvPr id="274" name="Text 20"/>
             <p:cNvSpPr txBox="1"/>
             <p:nvPr/>
           </p:nvSpPr>
@@ -14061,7 +14190,7 @@
       </p:grpSp>
       <p:grpSp>
         <p:nvGrpSpPr>
-          <p:cNvPr id="272" name="Step 2 arrows"/>
+          <p:cNvPr id="275" name="Step 2 arrows"/>
           <p:cNvGrpSpPr/>
           <p:nvPr/>
         </p:nvGrpSpPr>
@@ -14075,7 +14204,7 @@
         </p:grpSpPr>
         <p:cxnSp>
           <p:nvCxnSpPr>
-            <p:cNvPr id="273" name="Arrow 1"/>
+            <p:cNvPr id="276" name="Arrow 1"/>
             <p:cNvCxnSpPr/>
             <p:nvPr/>
           </p:nvCxnSpPr>
@@ -14111,7 +14240,7 @@
         </p:cxnSp>
         <p:cxnSp>
           <p:nvCxnSpPr>
-            <p:cNvPr id="274" name="Arrow 2"/>
+            <p:cNvPr id="277" name="Arrow 2"/>
             <p:cNvCxnSpPr/>
             <p:nvPr/>
           </p:nvCxnSpPr>
@@ -14148,7 +14277,7 @@
       </p:grpSp>
       <p:grpSp>
         <p:nvGrpSpPr>
-          <p:cNvPr id="275" name="Step 3 highlight"/>
+          <p:cNvPr id="278" name="Step 3 highlight"/>
           <p:cNvGrpSpPr/>
           <p:nvPr/>
         </p:nvGrpSpPr>
@@ -14162,7 +14291,7 @@
         </p:grpSpPr>
         <p:sp>
           <p:nvSpPr>
-            <p:cNvPr id="276" name="Shape 1"/>
+            <p:cNvPr id="279" name="Shape 1"/>
             <p:cNvSpPr/>
             <p:nvPr/>
           </p:nvSpPr>
@@ -14206,7 +14335,7 @@
         </p:sp>
         <p:sp>
           <p:nvSpPr>
-            <p:cNvPr id="277" name="Shape 2"/>
+            <p:cNvPr id="280" name="Shape 2"/>
             <p:cNvSpPr/>
             <p:nvPr/>
           </p:nvSpPr>
@@ -14250,7 +14379,7 @@
         </p:sp>
         <p:sp>
           <p:nvSpPr>
-            <p:cNvPr id="278" name="Shape 3"/>
+            <p:cNvPr id="281" name="Shape 3"/>
             <p:cNvSpPr/>
             <p:nvPr/>
           </p:nvSpPr>
@@ -14294,7 +14423,7 @@
         </p:sp>
         <p:sp>
           <p:nvSpPr>
-            <p:cNvPr id="279" name="Shape 4"/>
+            <p:cNvPr id="282" name="Shape 4"/>
             <p:cNvSpPr/>
             <p:nvPr/>
           </p:nvSpPr>
@@ -14338,7 +14467,7 @@
         </p:sp>
         <p:sp>
           <p:nvSpPr>
-            <p:cNvPr id="280" name="Shape 5"/>
+            <p:cNvPr id="283" name="Shape 5"/>
             <p:cNvSpPr/>
             <p:nvPr/>
           </p:nvSpPr>
@@ -14382,7 +14511,7 @@
         </p:sp>
         <p:sp>
           <p:nvSpPr>
-            <p:cNvPr id="281" name="Shape 6"/>
+            <p:cNvPr id="284" name="Shape 6"/>
             <p:cNvSpPr/>
             <p:nvPr/>
           </p:nvSpPr>
@@ -14426,7 +14555,7 @@
         </p:sp>
         <p:sp>
           <p:nvSpPr>
-            <p:cNvPr id="282" name="Shape 7"/>
+            <p:cNvPr id="285" name="Shape 7"/>
             <p:cNvSpPr/>
             <p:nvPr/>
           </p:nvSpPr>
@@ -14472,7 +14601,7 @@
         </p:sp>
         <p:sp>
           <p:nvSpPr>
-            <p:cNvPr id="283" name="Text 8"/>
+            <p:cNvPr id="286" name="Text 8"/>
             <p:cNvSpPr txBox="1"/>
             <p:nvPr/>
           </p:nvSpPr>
@@ -14537,7 +14666,7 @@
       </p:grpSp>
       <p:grpSp>
         <p:nvGrpSpPr>
-          <p:cNvPr id="284" name="Step 3 arrows"/>
+          <p:cNvPr id="287" name="Step 3 arrows"/>
           <p:cNvGrpSpPr/>
           <p:nvPr/>
         </p:nvGrpSpPr>
@@ -14551,7 +14680,7 @@
         </p:grpSpPr>
         <p:cxnSp>
           <p:nvCxnSpPr>
-            <p:cNvPr id="285" name="Arrow 1"/>
+            <p:cNvPr id="288" name="Arrow 1"/>
             <p:cNvCxnSpPr/>
             <p:nvPr/>
           </p:nvCxnSpPr>
@@ -14588,7 +14717,7 @@
       </p:grpSp>
       <p:grpSp>
         <p:nvGrpSpPr>
-          <p:cNvPr id="286" name="Step 4 highlight"/>
+          <p:cNvPr id="289" name="Step 4 highlight"/>
           <p:cNvGrpSpPr/>
           <p:nvPr/>
         </p:nvGrpSpPr>
@@ -14602,7 +14731,7 @@
         </p:grpSpPr>
         <p:sp>
           <p:nvSpPr>
-            <p:cNvPr id="287" name="Shape 1"/>
+            <p:cNvPr id="290" name="Shape 1"/>
             <p:cNvSpPr/>
             <p:nvPr/>
           </p:nvSpPr>
@@ -14646,7 +14775,7 @@
         </p:sp>
         <p:sp>
           <p:nvSpPr>
-            <p:cNvPr id="288" name="Shape 2"/>
+            <p:cNvPr id="291" name="Shape 2"/>
             <p:cNvSpPr/>
             <p:nvPr/>
           </p:nvSpPr>
@@ -14690,7 +14819,7 @@
         </p:sp>
         <p:sp>
           <p:nvSpPr>
-            <p:cNvPr id="289" name="Shape 3"/>
+            <p:cNvPr id="292" name="Shape 3"/>
             <p:cNvSpPr/>
             <p:nvPr/>
           </p:nvSpPr>
@@ -14734,7 +14863,7 @@
         </p:sp>
         <p:sp>
           <p:nvSpPr>
-            <p:cNvPr id="290" name="Shape 4"/>
+            <p:cNvPr id="293" name="Shape 4"/>
             <p:cNvSpPr/>
             <p:nvPr/>
           </p:nvSpPr>
@@ -14778,7 +14907,7 @@
         </p:sp>
         <p:sp>
           <p:nvSpPr>
-            <p:cNvPr id="291" name="Shape 5"/>
+            <p:cNvPr id="294" name="Shape 5"/>
             <p:cNvSpPr/>
             <p:nvPr/>
           </p:nvSpPr>
@@ -14822,7 +14951,7 @@
         </p:sp>
         <p:sp>
           <p:nvSpPr>
-            <p:cNvPr id="292" name="Shape 6"/>
+            <p:cNvPr id="295" name="Shape 6"/>
             <p:cNvSpPr/>
             <p:nvPr/>
           </p:nvSpPr>
@@ -14866,7 +14995,7 @@
         </p:sp>
         <p:sp>
           <p:nvSpPr>
-            <p:cNvPr id="293" name="Shape 7"/>
+            <p:cNvPr id="296" name="Shape 7"/>
             <p:cNvSpPr/>
             <p:nvPr/>
           </p:nvSpPr>
@@ -14910,7 +15039,7 @@
         </p:sp>
         <p:sp>
           <p:nvSpPr>
-            <p:cNvPr id="294" name="Shape 8"/>
+            <p:cNvPr id="297" name="Shape 8"/>
             <p:cNvSpPr/>
             <p:nvPr/>
           </p:nvSpPr>
@@ -14954,7 +15083,7 @@
         </p:sp>
         <p:sp>
           <p:nvSpPr>
-            <p:cNvPr id="295" name="Shape 9"/>
+            <p:cNvPr id="298" name="Shape 9"/>
             <p:cNvSpPr/>
             <p:nvPr/>
           </p:nvSpPr>
@@ -14998,7 +15127,7 @@
         </p:sp>
         <p:sp>
           <p:nvSpPr>
-            <p:cNvPr id="296" name="Shape 10"/>
+            <p:cNvPr id="299" name="Shape 10"/>
             <p:cNvSpPr/>
             <p:nvPr/>
           </p:nvSpPr>
@@ -15042,7 +15171,7 @@
         </p:sp>
         <p:sp>
           <p:nvSpPr>
-            <p:cNvPr id="297" name="Shape 11"/>
+            <p:cNvPr id="300" name="Shape 11"/>
             <p:cNvSpPr/>
             <p:nvPr/>
           </p:nvSpPr>
@@ -15086,7 +15215,7 @@
         </p:sp>
         <p:sp>
           <p:nvSpPr>
-            <p:cNvPr id="298" name="Shape 12"/>
+            <p:cNvPr id="301" name="Shape 12"/>
             <p:cNvSpPr/>
             <p:nvPr/>
           </p:nvSpPr>
@@ -15130,7 +15259,7 @@
         </p:sp>
         <p:sp>
           <p:nvSpPr>
-            <p:cNvPr id="299" name="Shape 13"/>
+            <p:cNvPr id="302" name="Shape 13"/>
             <p:cNvSpPr/>
             <p:nvPr/>
           </p:nvSpPr>
@@ -15174,7 +15303,7 @@
         </p:sp>
         <p:sp>
           <p:nvSpPr>
-            <p:cNvPr id="300" name="Shape 14"/>
+            <p:cNvPr id="303" name="Shape 14"/>
             <p:cNvSpPr/>
             <p:nvPr/>
           </p:nvSpPr>
@@ -15220,7 +15349,7 @@
         </p:sp>
         <p:sp>
           <p:nvSpPr>
-            <p:cNvPr id="301" name="Text 15"/>
+            <p:cNvPr id="304" name="Text 15"/>
             <p:cNvSpPr txBox="1"/>
             <p:nvPr/>
           </p:nvSpPr>
@@ -15285,7 +15414,7 @@
       </p:grpSp>
       <p:grpSp>
         <p:nvGrpSpPr>
-          <p:cNvPr id="302" name="Step 4 arrows"/>
+          <p:cNvPr id="305" name="Step 4 arrows"/>
           <p:cNvGrpSpPr/>
           <p:nvPr/>
         </p:nvGrpSpPr>
@@ -15299,7 +15428,7 @@
         </p:grpSpPr>
         <p:cxnSp>
           <p:nvCxnSpPr>
-            <p:cNvPr id="303" name="Arrow 1"/>
+            <p:cNvPr id="306" name="Arrow 1"/>
             <p:cNvCxnSpPr/>
             <p:nvPr/>
           </p:nvCxnSpPr>
@@ -15335,7 +15464,7 @@
         </p:cxnSp>
         <p:cxnSp>
           <p:nvCxnSpPr>
-            <p:cNvPr id="304" name="Arrow 2"/>
+            <p:cNvPr id="307" name="Arrow 2"/>
             <p:cNvCxnSpPr/>
             <p:nvPr/>
           </p:nvCxnSpPr>
@@ -15372,7 +15501,7 @@
       </p:grpSp>
       <p:grpSp>
         <p:nvGrpSpPr>
-          <p:cNvPr id="305" name="Step 5 highlight"/>
+          <p:cNvPr id="308" name="Step 5 highlight"/>
           <p:cNvGrpSpPr/>
           <p:nvPr/>
         </p:nvGrpSpPr>
@@ -15386,7 +15515,7 @@
         </p:grpSpPr>
         <p:sp>
           <p:nvSpPr>
-            <p:cNvPr id="306" name="Shape 1"/>
+            <p:cNvPr id="309" name="Shape 1"/>
             <p:cNvSpPr/>
             <p:nvPr/>
           </p:nvSpPr>
@@ -15430,7 +15559,7 @@
         </p:sp>
         <p:sp>
           <p:nvSpPr>
-            <p:cNvPr id="307" name="Shape 2"/>
+            <p:cNvPr id="310" name="Shape 2"/>
             <p:cNvSpPr/>
             <p:nvPr/>
           </p:nvSpPr>
@@ -15474,7 +15603,7 @@
         </p:sp>
         <p:sp>
           <p:nvSpPr>
-            <p:cNvPr id="308" name="Shape 3"/>
+            <p:cNvPr id="311" name="Shape 3"/>
             <p:cNvSpPr/>
             <p:nvPr/>
           </p:nvSpPr>
@@ -15518,7 +15647,7 @@
         </p:sp>
         <p:sp>
           <p:nvSpPr>
-            <p:cNvPr id="309" name="Shape 4"/>
+            <p:cNvPr id="312" name="Shape 4"/>
             <p:cNvSpPr/>
             <p:nvPr/>
           </p:nvSpPr>
@@ -15562,7 +15691,7 @@
         </p:sp>
         <p:sp>
           <p:nvSpPr>
-            <p:cNvPr id="310" name="Shape 5"/>
+            <p:cNvPr id="313" name="Shape 5"/>
             <p:cNvSpPr/>
             <p:nvPr/>
           </p:nvSpPr>
@@ -15606,7 +15735,7 @@
         </p:sp>
         <p:sp>
           <p:nvSpPr>
-            <p:cNvPr id="311" name="Shape 6"/>
+            <p:cNvPr id="314" name="Shape 6"/>
             <p:cNvSpPr/>
             <p:nvPr/>
           </p:nvSpPr>
@@ -15650,7 +15779,7 @@
         </p:sp>
         <p:sp>
           <p:nvSpPr>
-            <p:cNvPr id="312" name="Shape 7"/>
+            <p:cNvPr id="315" name="Shape 7"/>
             <p:cNvSpPr/>
             <p:nvPr/>
           </p:nvSpPr>
@@ -15696,7 +15825,7 @@
         </p:sp>
         <p:sp>
           <p:nvSpPr>
-            <p:cNvPr id="313" name="Text 8"/>
+            <p:cNvPr id="316" name="Text 8"/>
             <p:cNvSpPr txBox="1"/>
             <p:nvPr/>
           </p:nvSpPr>
@@ -15761,7 +15890,7 @@
       </p:grpSp>
       <p:grpSp>
         <p:nvGrpSpPr>
-          <p:cNvPr id="314" name="Step 5 arrows"/>
+          <p:cNvPr id="317" name="Step 5 arrows"/>
           <p:cNvGrpSpPr/>
           <p:nvPr/>
         </p:nvGrpSpPr>
@@ -15775,7 +15904,7 @@
         </p:grpSpPr>
         <p:cxnSp>
           <p:nvCxnSpPr>
-            <p:cNvPr id="315" name="Arrow 1"/>
+            <p:cNvPr id="318" name="Arrow 1"/>
             <p:cNvCxnSpPr/>
             <p:nvPr/>
           </p:nvCxnSpPr>
@@ -15811,7 +15940,7 @@
         </p:cxnSp>
         <p:cxnSp>
           <p:nvCxnSpPr>
-            <p:cNvPr id="316" name="Arrow 2"/>
+            <p:cNvPr id="319" name="Arrow 2"/>
             <p:cNvCxnSpPr/>
             <p:nvPr/>
           </p:nvCxnSpPr>
@@ -15847,7 +15976,7 @@
         </p:cxnSp>
         <p:sp>
           <p:nvSpPr>
-            <p:cNvPr id="317" name="Shape 3"/>
+            <p:cNvPr id="320" name="Shape 3"/>
             <p:cNvSpPr/>
             <p:nvPr/>
           </p:nvSpPr>
@@ -15891,7 +16020,7 @@
         </p:sp>
         <p:sp>
           <p:nvSpPr>
-            <p:cNvPr id="318" name="Text 4"/>
+            <p:cNvPr id="321" name="Text 4"/>
             <p:cNvSpPr txBox="1"/>
             <p:nvPr/>
           </p:nvSpPr>
@@ -15927,7 +16056,7 @@
       </p:grpSp>
       <p:grpSp>
         <p:nvGrpSpPr>
-          <p:cNvPr id="319" name="Step 6 highlight"/>
+          <p:cNvPr id="322" name="Step 6 highlight"/>
           <p:cNvGrpSpPr/>
           <p:nvPr/>
         </p:nvGrpSpPr>
@@ -15941,7 +16070,7 @@
         </p:grpSpPr>
         <p:sp>
           <p:nvSpPr>
-            <p:cNvPr id="320" name="Shape 1"/>
+            <p:cNvPr id="323" name="Shape 1"/>
             <p:cNvSpPr/>
             <p:nvPr/>
           </p:nvSpPr>
@@ -15985,7 +16114,7 @@
         </p:sp>
         <p:sp>
           <p:nvSpPr>
-            <p:cNvPr id="321" name="Shape 2"/>
+            <p:cNvPr id="324" name="Shape 2"/>
             <p:cNvSpPr/>
             <p:nvPr/>
           </p:nvSpPr>
@@ -16029,7 +16158,7 @@
         </p:sp>
         <p:sp>
           <p:nvSpPr>
-            <p:cNvPr id="322" name="Shape 3"/>
+            <p:cNvPr id="325" name="Shape 3"/>
             <p:cNvSpPr/>
             <p:nvPr/>
           </p:nvSpPr>
@@ -16073,7 +16202,7 @@
         </p:sp>
         <p:sp>
           <p:nvSpPr>
-            <p:cNvPr id="323" name="Shape 4"/>
+            <p:cNvPr id="326" name="Shape 4"/>
             <p:cNvSpPr/>
             <p:nvPr/>
           </p:nvSpPr>
@@ -16117,7 +16246,7 @@
         </p:sp>
         <p:sp>
           <p:nvSpPr>
-            <p:cNvPr id="324" name="Shape 5"/>
+            <p:cNvPr id="327" name="Shape 5"/>
             <p:cNvSpPr/>
             <p:nvPr/>
           </p:nvSpPr>
@@ -16161,7 +16290,7 @@
         </p:sp>
         <p:sp>
           <p:nvSpPr>
-            <p:cNvPr id="325" name="Shape 6"/>
+            <p:cNvPr id="328" name="Shape 6"/>
             <p:cNvSpPr/>
             <p:nvPr/>
           </p:nvSpPr>
@@ -16205,7 +16334,7 @@
         </p:sp>
         <p:sp>
           <p:nvSpPr>
-            <p:cNvPr id="326" name="Shape 7"/>
+            <p:cNvPr id="329" name="Shape 7"/>
             <p:cNvSpPr/>
             <p:nvPr/>
           </p:nvSpPr>
@@ -16251,7 +16380,7 @@
         </p:sp>
         <p:sp>
           <p:nvSpPr>
-            <p:cNvPr id="327" name="Text 8"/>
+            <p:cNvPr id="330" name="Text 8"/>
             <p:cNvSpPr txBox="1"/>
             <p:nvPr/>
           </p:nvSpPr>
@@ -16316,7 +16445,7 @@
       </p:grpSp>
       <p:grpSp>
         <p:nvGrpSpPr>
-          <p:cNvPr id="328" name="Step 6 arrows"/>
+          <p:cNvPr id="331" name="Step 6 arrows"/>
           <p:cNvGrpSpPr/>
           <p:nvPr/>
         </p:nvGrpSpPr>
@@ -16330,7 +16459,7 @@
         </p:grpSpPr>
         <p:cxnSp>
           <p:nvCxnSpPr>
-            <p:cNvPr id="329" name="Arrow 1"/>
+            <p:cNvPr id="332" name="Arrow 1"/>
             <p:cNvCxnSpPr/>
             <p:nvPr/>
           </p:nvCxnSpPr>
@@ -16365,7 +16494,7 @@
         </p:cxnSp>
         <p:cxnSp>
           <p:nvCxnSpPr>
-            <p:cNvPr id="330" name="Arrow 2"/>
+            <p:cNvPr id="333" name="Arrow 2"/>
             <p:cNvCxnSpPr/>
             <p:nvPr/>
           </p:nvCxnSpPr>
@@ -16400,7 +16529,7 @@
         </p:cxnSp>
         <p:cxnSp>
           <p:nvCxnSpPr>
-            <p:cNvPr id="331" name="Arrow 3"/>
+            <p:cNvPr id="334" name="Arrow 3"/>
             <p:cNvCxnSpPr/>
             <p:nvPr/>
           </p:nvCxnSpPr>
@@ -16436,7 +16565,7 @@
         </p:cxnSp>
         <p:cxnSp>
           <p:nvCxnSpPr>
-            <p:cNvPr id="332" name="Arrow 4"/>
+            <p:cNvPr id="335" name="Arrow 4"/>
             <p:cNvCxnSpPr/>
             <p:nvPr/>
           </p:nvCxnSpPr>
@@ -16472,7 +16601,7 @@
         </p:cxnSp>
         <p:sp>
           <p:nvSpPr>
-            <p:cNvPr id="333" name="Shape 5"/>
+            <p:cNvPr id="336" name="Shape 5"/>
             <p:cNvSpPr/>
             <p:nvPr/>
           </p:nvSpPr>
@@ -16516,7 +16645,7 @@
         </p:sp>
         <p:sp>
           <p:nvSpPr>
-            <p:cNvPr id="334" name="Text 6"/>
+            <p:cNvPr id="337" name="Text 6"/>
             <p:cNvSpPr txBox="1"/>
             <p:nvPr/>
           </p:nvSpPr>
@@ -16551,7 +16680,7 @@
         </p:sp>
         <p:sp>
           <p:nvSpPr>
-            <p:cNvPr id="335" name="Shape 7"/>
+            <p:cNvPr id="338" name="Shape 7"/>
             <p:cNvSpPr/>
             <p:nvPr/>
           </p:nvSpPr>
@@ -16595,7 +16724,7 @@
         </p:sp>
         <p:sp>
           <p:nvSpPr>
-            <p:cNvPr id="336" name="Text 8"/>
+            <p:cNvPr id="339" name="Text 8"/>
             <p:cNvSpPr txBox="1"/>
             <p:nvPr/>
           </p:nvSpPr>
@@ -16631,7 +16760,7 @@
       </p:grpSp>
       <p:grpSp>
         <p:nvGrpSpPr>
-          <p:cNvPr id="337" name="Step 7 highlight"/>
+          <p:cNvPr id="340" name="Step 7 highlight"/>
           <p:cNvGrpSpPr/>
           <p:nvPr/>
         </p:nvGrpSpPr>
@@ -16645,7 +16774,7 @@
         </p:grpSpPr>
         <p:sp>
           <p:nvSpPr>
-            <p:cNvPr id="338" name="Shape 1"/>
+            <p:cNvPr id="341" name="Shape 1"/>
             <p:cNvSpPr/>
             <p:nvPr/>
           </p:nvSpPr>
@@ -16689,7 +16818,7 @@
         </p:sp>
         <p:sp>
           <p:nvSpPr>
-            <p:cNvPr id="339" name="Shape 2"/>
+            <p:cNvPr id="342" name="Shape 2"/>
             <p:cNvSpPr/>
             <p:nvPr/>
           </p:nvSpPr>
@@ -16733,7 +16862,7 @@
         </p:sp>
         <p:sp>
           <p:nvSpPr>
-            <p:cNvPr id="340" name="Shape 3"/>
+            <p:cNvPr id="343" name="Shape 3"/>
             <p:cNvSpPr/>
             <p:nvPr/>
           </p:nvSpPr>
@@ -16777,7 +16906,7 @@
         </p:sp>
         <p:sp>
           <p:nvSpPr>
-            <p:cNvPr id="341" name="Shape 4"/>
+            <p:cNvPr id="344" name="Shape 4"/>
             <p:cNvSpPr/>
             <p:nvPr/>
           </p:nvSpPr>
@@ -16821,7 +16950,7 @@
         </p:sp>
         <p:sp>
           <p:nvSpPr>
-            <p:cNvPr id="342" name="Shape 5"/>
+            <p:cNvPr id="345" name="Shape 5"/>
             <p:cNvSpPr/>
             <p:nvPr/>
           </p:nvSpPr>
@@ -16865,7 +16994,7 @@
         </p:sp>
         <p:sp>
           <p:nvSpPr>
-            <p:cNvPr id="343" name="Shape 6"/>
+            <p:cNvPr id="346" name="Shape 6"/>
             <p:cNvSpPr/>
             <p:nvPr/>
           </p:nvSpPr>
@@ -16909,7 +17038,7 @@
         </p:sp>
         <p:sp>
           <p:nvSpPr>
-            <p:cNvPr id="344" name="Shape 7"/>
+            <p:cNvPr id="347" name="Shape 7"/>
             <p:cNvSpPr/>
             <p:nvPr/>
           </p:nvSpPr>
@@ -16953,7 +17082,7 @@
         </p:sp>
         <p:sp>
           <p:nvSpPr>
-            <p:cNvPr id="345" name="Shape 8"/>
+            <p:cNvPr id="348" name="Shape 8"/>
             <p:cNvSpPr/>
             <p:nvPr/>
           </p:nvSpPr>
@@ -16997,7 +17126,7 @@
         </p:sp>
         <p:sp>
           <p:nvSpPr>
-            <p:cNvPr id="346" name="Shape 9"/>
+            <p:cNvPr id="349" name="Shape 9"/>
             <p:cNvSpPr/>
             <p:nvPr/>
           </p:nvSpPr>
@@ -17041,7 +17170,7 @@
         </p:sp>
         <p:sp>
           <p:nvSpPr>
-            <p:cNvPr id="347" name="Shape 10"/>
+            <p:cNvPr id="350" name="Shape 10"/>
             <p:cNvSpPr/>
             <p:nvPr/>
           </p:nvSpPr>
@@ -17085,7 +17214,7 @@
         </p:sp>
         <p:sp>
           <p:nvSpPr>
-            <p:cNvPr id="348" name="Shape 11"/>
+            <p:cNvPr id="351" name="Shape 11"/>
             <p:cNvSpPr/>
             <p:nvPr/>
           </p:nvSpPr>
@@ -17129,14 +17258,14 @@
         </p:sp>
         <p:sp>
           <p:nvSpPr>
-            <p:cNvPr id="349" name="Shape 12"/>
+            <p:cNvPr id="352" name="Shape 12"/>
             <p:cNvSpPr/>
             <p:nvPr/>
           </p:nvSpPr>
           <p:spPr>
             <a:xfrm>
-              <a:off x="2990087" y="5513832"/>
-              <a:ext cx="8833104" cy="457200"/>
+              <a:off x="2880360" y="5513832"/>
+              <a:ext cx="8942832" cy="457200"/>
             </a:xfrm>
             <a:prstGeom prst="rect">
               <a:avLst/>
@@ -17173,7 +17302,7 @@
         </p:sp>
         <p:sp>
           <p:nvSpPr>
-            <p:cNvPr id="350" name="Shape 13"/>
+            <p:cNvPr id="353" name="Shape 13"/>
             <p:cNvSpPr/>
             <p:nvPr/>
           </p:nvSpPr>
@@ -17217,7 +17346,7 @@
         </p:sp>
         <p:sp>
           <p:nvSpPr>
-            <p:cNvPr id="351" name="Shape 14"/>
+            <p:cNvPr id="354" name="Shape 14"/>
             <p:cNvSpPr/>
             <p:nvPr/>
           </p:nvSpPr>
@@ -17261,7 +17390,7 @@
         </p:sp>
         <p:sp>
           <p:nvSpPr>
-            <p:cNvPr id="352" name="Shape 15"/>
+            <p:cNvPr id="355" name="Shape 15"/>
             <p:cNvSpPr/>
             <p:nvPr/>
           </p:nvSpPr>
@@ -17305,14 +17434,14 @@
         </p:sp>
         <p:sp>
           <p:nvSpPr>
-            <p:cNvPr id="353" name="Shape 16"/>
+            <p:cNvPr id="356" name="Shape 16"/>
             <p:cNvSpPr/>
             <p:nvPr/>
           </p:nvSpPr>
           <p:spPr>
             <a:xfrm>
               <a:off x="1417320" y="5550408"/>
-              <a:ext cx="1545336" cy="420624"/>
+              <a:ext cx="1435608" cy="420624"/>
             </a:xfrm>
             <a:prstGeom prst="roundRect">
               <a:avLst>
@@ -17349,7 +17478,7 @@
         </p:sp>
         <p:sp>
           <p:nvSpPr>
-            <p:cNvPr id="354" name="Shape 17"/>
+            <p:cNvPr id="357" name="Shape 17"/>
             <p:cNvSpPr/>
             <p:nvPr/>
           </p:nvSpPr>
@@ -17393,7 +17522,7 @@
         </p:sp>
         <p:sp>
           <p:nvSpPr>
-            <p:cNvPr id="355" name="Shape 18"/>
+            <p:cNvPr id="358" name="Shape 18"/>
             <p:cNvSpPr/>
             <p:nvPr/>
           </p:nvSpPr>
@@ -17439,7 +17568,7 @@
         </p:sp>
         <p:sp>
           <p:nvSpPr>
-            <p:cNvPr id="356" name="Text 19"/>
+            <p:cNvPr id="359" name="Text 19"/>
             <p:cNvSpPr txBox="1"/>
             <p:nvPr/>
           </p:nvSpPr>
@@ -17504,21 +17633,21 @@
       </p:grpSp>
       <p:grpSp>
         <p:nvGrpSpPr>
-          <p:cNvPr id="357" name="Step 7 arrows"/>
+          <p:cNvPr id="360" name="Step 7 arrows"/>
           <p:cNvGrpSpPr/>
           <p:nvPr/>
         </p:nvGrpSpPr>
         <p:grpSpPr>
           <a:xfrm>
-            <a:off x="1856232" y="4453128"/>
-            <a:ext cx="1764792" cy="1700784"/>
-            <a:chOff x="1856232" y="4453128"/>
-            <a:chExt cx="1764792" cy="1700784"/>
+            <a:off x="1773936" y="4453128"/>
+            <a:ext cx="1847088" cy="1700784"/>
+            <a:chOff x="1773936" y="4453128"/>
+            <a:chExt cx="1847088" cy="1700784"/>
           </a:xfrm>
         </p:grpSpPr>
         <p:cxnSp>
           <p:nvCxnSpPr>
-            <p:cNvPr id="358" name="Arrow 1"/>
+            <p:cNvPr id="361" name="Arrow 1"/>
             <p:cNvCxnSpPr/>
             <p:nvPr/>
           </p:nvCxnSpPr>
@@ -17553,14 +17682,14 @@
         </p:cxnSp>
         <p:cxnSp>
           <p:nvCxnSpPr>
-            <p:cNvPr id="359" name="Arrow 2"/>
+            <p:cNvPr id="362" name="Arrow 2"/>
             <p:cNvCxnSpPr/>
             <p:nvPr/>
           </p:nvCxnSpPr>
           <p:spPr>
             <a:xfrm flipH="1">
-              <a:off x="2587752" y="5449824"/>
-              <a:ext cx="1033272" cy="0"/>
+              <a:off x="2505456" y="5449824"/>
+              <a:ext cx="1115568" cy="0"/>
             </a:xfrm>
             <a:prstGeom prst="line">
               <a:avLst/>
@@ -17588,13 +17717,13 @@
         </p:cxnSp>
         <p:cxnSp>
           <p:nvCxnSpPr>
-            <p:cNvPr id="360" name="Arrow 3"/>
+            <p:cNvPr id="363" name="Arrow 3"/>
             <p:cNvCxnSpPr/>
             <p:nvPr/>
           </p:nvCxnSpPr>
           <p:spPr>
             <a:xfrm>
-              <a:off x="2587752" y="5449824"/>
+              <a:off x="2505456" y="5449824"/>
               <a:ext cx="0" cy="100584"/>
             </a:xfrm>
             <a:prstGeom prst="line">
@@ -17624,13 +17753,13 @@
         </p:cxnSp>
         <p:sp>
           <p:nvSpPr>
-            <p:cNvPr id="361" name="Shape 4"/>
+            <p:cNvPr id="364" name="Shape 4"/>
             <p:cNvSpPr/>
             <p:nvPr/>
           </p:nvSpPr>
           <p:spPr>
             <a:xfrm>
-              <a:off x="1856232" y="5971032"/>
+              <a:off x="1773936" y="5971032"/>
               <a:ext cx="1463040" cy="182880"/>
             </a:xfrm>
             <a:prstGeom prst="roundRect">
@@ -17668,13 +17797,13 @@
         </p:sp>
         <p:sp>
           <p:nvSpPr>
-            <p:cNvPr id="362" name="Text 5"/>
+            <p:cNvPr id="365" name="Text 5"/>
             <p:cNvSpPr txBox="1"/>
             <p:nvPr/>
           </p:nvSpPr>
           <p:spPr>
             <a:xfrm>
-              <a:off x="1856232" y="5971032"/>
+              <a:off x="1773936" y="5971032"/>
               <a:ext cx="1463040" cy="182880"/>
             </a:xfrm>
             <a:prstGeom prst="rect">
@@ -17704,7 +17833,7 @@
       </p:grpSp>
       <p:grpSp>
         <p:nvGrpSpPr>
-          <p:cNvPr id="363" name="Step 8 highlight"/>
+          <p:cNvPr id="366" name="Step 8 highlight"/>
           <p:cNvGrpSpPr/>
           <p:nvPr/>
         </p:nvGrpSpPr>
@@ -17718,7 +17847,7 @@
         </p:grpSpPr>
         <p:sp>
           <p:nvSpPr>
-            <p:cNvPr id="364" name="Shape 1"/>
+            <p:cNvPr id="367" name="Shape 1"/>
             <p:cNvSpPr/>
             <p:nvPr/>
           </p:nvSpPr>
@@ -17762,7 +17891,7 @@
         </p:sp>
         <p:sp>
           <p:nvSpPr>
-            <p:cNvPr id="365" name="Shape 2"/>
+            <p:cNvPr id="368" name="Shape 2"/>
             <p:cNvSpPr/>
             <p:nvPr/>
           </p:nvSpPr>
@@ -17806,7 +17935,7 @@
         </p:sp>
         <p:sp>
           <p:nvSpPr>
-            <p:cNvPr id="366" name="Shape 3"/>
+            <p:cNvPr id="369" name="Shape 3"/>
             <p:cNvSpPr/>
             <p:nvPr/>
           </p:nvSpPr>
@@ -17850,7 +17979,7 @@
         </p:sp>
         <p:sp>
           <p:nvSpPr>
-            <p:cNvPr id="367" name="Shape 4"/>
+            <p:cNvPr id="370" name="Shape 4"/>
             <p:cNvSpPr/>
             <p:nvPr/>
           </p:nvSpPr>
@@ -17894,7 +18023,7 @@
         </p:sp>
         <p:sp>
           <p:nvSpPr>
-            <p:cNvPr id="368" name="Shape 5"/>
+            <p:cNvPr id="371" name="Shape 5"/>
             <p:cNvSpPr/>
             <p:nvPr/>
           </p:nvSpPr>
@@ -17938,7 +18067,7 @@
         </p:sp>
         <p:sp>
           <p:nvSpPr>
-            <p:cNvPr id="369" name="Shape 6"/>
+            <p:cNvPr id="372" name="Shape 6"/>
             <p:cNvSpPr/>
             <p:nvPr/>
           </p:nvSpPr>
@@ -17982,7 +18111,7 @@
         </p:sp>
         <p:sp>
           <p:nvSpPr>
-            <p:cNvPr id="370" name="Shape 7"/>
+            <p:cNvPr id="373" name="Shape 7"/>
             <p:cNvSpPr/>
             <p:nvPr/>
           </p:nvSpPr>
@@ -18026,7 +18155,7 @@
         </p:sp>
         <p:sp>
           <p:nvSpPr>
-            <p:cNvPr id="371" name="Shape 8"/>
+            <p:cNvPr id="374" name="Shape 8"/>
             <p:cNvSpPr/>
             <p:nvPr/>
           </p:nvSpPr>
@@ -18070,7 +18199,7 @@
         </p:sp>
         <p:sp>
           <p:nvSpPr>
-            <p:cNvPr id="372" name="Shape 9"/>
+            <p:cNvPr id="375" name="Shape 9"/>
             <p:cNvSpPr/>
             <p:nvPr/>
           </p:nvSpPr>
@@ -18114,7 +18243,7 @@
         </p:sp>
         <p:sp>
           <p:nvSpPr>
-            <p:cNvPr id="373" name="Shape 10"/>
+            <p:cNvPr id="376" name="Shape 10"/>
             <p:cNvSpPr/>
             <p:nvPr/>
           </p:nvSpPr>
@@ -18158,7 +18287,7 @@
         </p:sp>
         <p:sp>
           <p:nvSpPr>
-            <p:cNvPr id="374" name="Shape 11"/>
+            <p:cNvPr id="377" name="Shape 11"/>
             <p:cNvSpPr/>
             <p:nvPr/>
           </p:nvSpPr>
@@ -18202,7 +18331,7 @@
         </p:sp>
         <p:sp>
           <p:nvSpPr>
-            <p:cNvPr id="375" name="Shape 12"/>
+            <p:cNvPr id="378" name="Shape 12"/>
             <p:cNvSpPr/>
             <p:nvPr/>
           </p:nvSpPr>
@@ -18246,7 +18375,7 @@
         </p:sp>
         <p:sp>
           <p:nvSpPr>
-            <p:cNvPr id="376" name="Shape 13"/>
+            <p:cNvPr id="379" name="Shape 13"/>
             <p:cNvSpPr/>
             <p:nvPr/>
           </p:nvSpPr>
@@ -18290,7 +18419,7 @@
         </p:sp>
         <p:sp>
           <p:nvSpPr>
-            <p:cNvPr id="377" name="Shape 14"/>
+            <p:cNvPr id="380" name="Shape 14"/>
             <p:cNvSpPr/>
             <p:nvPr/>
           </p:nvSpPr>
@@ -18334,7 +18463,7 @@
         </p:sp>
         <p:sp>
           <p:nvSpPr>
-            <p:cNvPr id="378" name="Shape 15"/>
+            <p:cNvPr id="381" name="Shape 15"/>
             <p:cNvSpPr/>
             <p:nvPr/>
           </p:nvSpPr>
@@ -18378,14 +18507,14 @@
         </p:sp>
         <p:sp>
           <p:nvSpPr>
-            <p:cNvPr id="379" name="Shape 16"/>
+            <p:cNvPr id="382" name="Shape 16"/>
             <p:cNvSpPr/>
             <p:nvPr/>
           </p:nvSpPr>
           <p:spPr>
             <a:xfrm>
               <a:off x="365760" y="5513832"/>
-              <a:ext cx="2615184" cy="457200"/>
+              <a:ext cx="2505456" cy="457200"/>
             </a:xfrm>
             <a:prstGeom prst="rect">
               <a:avLst/>
@@ -18422,14 +18551,14 @@
         </p:sp>
         <p:sp>
           <p:nvSpPr>
-            <p:cNvPr id="380" name="Shape 17"/>
+            <p:cNvPr id="383" name="Shape 17"/>
             <p:cNvSpPr/>
             <p:nvPr/>
           </p:nvSpPr>
           <p:spPr>
             <a:xfrm>
-              <a:off x="4581144" y="5513832"/>
-              <a:ext cx="7242047" cy="457200"/>
+              <a:off x="4361688" y="5513832"/>
+              <a:ext cx="7461504" cy="457200"/>
             </a:xfrm>
             <a:prstGeom prst="rect">
               <a:avLst/>
@@ -18466,7 +18595,7 @@
         </p:sp>
         <p:sp>
           <p:nvSpPr>
-            <p:cNvPr id="381" name="Shape 18"/>
+            <p:cNvPr id="384" name="Shape 18"/>
             <p:cNvSpPr/>
             <p:nvPr/>
           </p:nvSpPr>
@@ -18510,7 +18639,7 @@
         </p:sp>
         <p:sp>
           <p:nvSpPr>
-            <p:cNvPr id="382" name="Shape 19"/>
+            <p:cNvPr id="385" name="Shape 19"/>
             <p:cNvSpPr/>
             <p:nvPr/>
           </p:nvSpPr>
@@ -18554,7 +18683,7 @@
         </p:sp>
         <p:sp>
           <p:nvSpPr>
-            <p:cNvPr id="383" name="Shape 20"/>
+            <p:cNvPr id="386" name="Shape 20"/>
             <p:cNvSpPr/>
             <p:nvPr/>
           </p:nvSpPr>
@@ -18598,14 +18727,14 @@
         </p:sp>
         <p:sp>
           <p:nvSpPr>
-            <p:cNvPr id="384" name="Shape 21"/>
+            <p:cNvPr id="387" name="Shape 21"/>
             <p:cNvSpPr/>
             <p:nvPr/>
           </p:nvSpPr>
           <p:spPr>
             <a:xfrm>
-              <a:off x="3008376" y="5550408"/>
-              <a:ext cx="1545336" cy="420624"/>
+              <a:off x="2898648" y="5550408"/>
+              <a:ext cx="1435608" cy="420624"/>
             </a:xfrm>
             <a:prstGeom prst="roundRect">
               <a:avLst>
@@ -18642,7 +18771,7 @@
         </p:sp>
         <p:sp>
           <p:nvSpPr>
-            <p:cNvPr id="385" name="Shape 22"/>
+            <p:cNvPr id="388" name="Shape 22"/>
             <p:cNvSpPr/>
             <p:nvPr/>
           </p:nvSpPr>
@@ -18686,7 +18815,7 @@
         </p:sp>
         <p:sp>
           <p:nvSpPr>
-            <p:cNvPr id="386" name="Shape 23"/>
+            <p:cNvPr id="389" name="Shape 23"/>
             <p:cNvSpPr/>
             <p:nvPr/>
           </p:nvSpPr>
@@ -18730,7 +18859,7 @@
         </p:sp>
         <p:sp>
           <p:nvSpPr>
-            <p:cNvPr id="387" name="Shape 24"/>
+            <p:cNvPr id="390" name="Shape 24"/>
             <p:cNvSpPr/>
             <p:nvPr/>
           </p:nvSpPr>
@@ -18776,7 +18905,7 @@
         </p:sp>
         <p:sp>
           <p:nvSpPr>
-            <p:cNvPr id="388" name="Text 25"/>
+            <p:cNvPr id="391" name="Text 25"/>
             <p:cNvSpPr txBox="1"/>
             <p:nvPr/>
           </p:nvSpPr>
@@ -18841,21 +18970,21 @@
       </p:grpSp>
       <p:grpSp>
         <p:nvGrpSpPr>
-          <p:cNvPr id="389" name="Step 8 arrows"/>
+          <p:cNvPr id="392" name="Step 8 arrows"/>
           <p:cNvGrpSpPr/>
           <p:nvPr/>
         </p:nvGrpSpPr>
         <p:grpSpPr>
           <a:xfrm>
-            <a:off x="3447288" y="4453128"/>
+            <a:off x="3255264" y="4453128"/>
             <a:ext cx="1463040" cy="1700784"/>
-            <a:chOff x="3447288" y="4453128"/>
+            <a:chOff x="3255264" y="4453128"/>
             <a:chExt cx="1463040" cy="1700784"/>
           </a:xfrm>
         </p:grpSpPr>
         <p:cxnSp>
           <p:nvCxnSpPr>
-            <p:cNvPr id="390" name="Arrow 1"/>
+            <p:cNvPr id="393" name="Arrow 1"/>
             <p:cNvCxnSpPr/>
             <p:nvPr/>
           </p:nvCxnSpPr>
@@ -18890,14 +19019,14 @@
         </p:cxnSp>
         <p:cxnSp>
           <p:nvCxnSpPr>
-            <p:cNvPr id="391" name="Arrow 2"/>
+            <p:cNvPr id="394" name="Arrow 2"/>
             <p:cNvCxnSpPr/>
             <p:nvPr/>
           </p:nvCxnSpPr>
           <p:spPr>
             <a:xfrm>
               <a:off x="3621024" y="5449824"/>
-              <a:ext cx="557784" cy="0"/>
+              <a:ext cx="365760" cy="0"/>
             </a:xfrm>
             <a:prstGeom prst="line">
               <a:avLst/>
@@ -18925,13 +19054,13 @@
         </p:cxnSp>
         <p:cxnSp>
           <p:nvCxnSpPr>
-            <p:cNvPr id="392" name="Arrow 3"/>
+            <p:cNvPr id="395" name="Arrow 3"/>
             <p:cNvCxnSpPr/>
             <p:nvPr/>
           </p:nvCxnSpPr>
           <p:spPr>
             <a:xfrm>
-              <a:off x="4178808" y="5449824"/>
+              <a:off x="3986784" y="5449824"/>
               <a:ext cx="0" cy="100584"/>
             </a:xfrm>
             <a:prstGeom prst="line">
@@ -18961,13 +19090,13 @@
         </p:cxnSp>
         <p:sp>
           <p:nvSpPr>
-            <p:cNvPr id="393" name="Shape 4"/>
+            <p:cNvPr id="396" name="Shape 4"/>
             <p:cNvSpPr/>
             <p:nvPr/>
           </p:nvSpPr>
           <p:spPr>
             <a:xfrm>
-              <a:off x="3447288" y="5971032"/>
+              <a:off x="3255264" y="5971032"/>
               <a:ext cx="1463040" cy="182880"/>
             </a:xfrm>
             <a:prstGeom prst="roundRect">
@@ -19005,13 +19134,13 @@
         </p:sp>
         <p:sp>
           <p:nvSpPr>
-            <p:cNvPr id="394" name="Text 5"/>
+            <p:cNvPr id="397" name="Text 5"/>
             <p:cNvSpPr txBox="1"/>
             <p:nvPr/>
           </p:nvSpPr>
           <p:spPr>
             <a:xfrm>
-              <a:off x="3447288" y="5971032"/>
+              <a:off x="3255264" y="5971032"/>
               <a:ext cx="1463040" cy="182880"/>
             </a:xfrm>
             <a:prstGeom prst="rect">
@@ -19041,7 +19170,7 @@
       </p:grpSp>
       <p:grpSp>
         <p:nvGrpSpPr>
-          <p:cNvPr id="395" name="Step 9 highlight"/>
+          <p:cNvPr id="398" name="Step 9 highlight"/>
           <p:cNvGrpSpPr/>
           <p:nvPr/>
         </p:nvGrpSpPr>
@@ -19055,7 +19184,7 @@
         </p:grpSpPr>
         <p:sp>
           <p:nvSpPr>
-            <p:cNvPr id="396" name="Shape 1"/>
+            <p:cNvPr id="399" name="Shape 1"/>
             <p:cNvSpPr/>
             <p:nvPr/>
           </p:nvSpPr>
@@ -19099,7 +19228,7 @@
         </p:sp>
         <p:sp>
           <p:nvSpPr>
-            <p:cNvPr id="397" name="Shape 2"/>
+            <p:cNvPr id="400" name="Shape 2"/>
             <p:cNvSpPr/>
             <p:nvPr/>
           </p:nvSpPr>
@@ -19143,7 +19272,7 @@
         </p:sp>
         <p:sp>
           <p:nvSpPr>
-            <p:cNvPr id="398" name="Shape 3"/>
+            <p:cNvPr id="401" name="Shape 3"/>
             <p:cNvSpPr/>
             <p:nvPr/>
           </p:nvSpPr>
@@ -19187,7 +19316,7 @@
         </p:sp>
         <p:sp>
           <p:nvSpPr>
-            <p:cNvPr id="399" name="Shape 4"/>
+            <p:cNvPr id="402" name="Shape 4"/>
             <p:cNvSpPr/>
             <p:nvPr/>
           </p:nvSpPr>
@@ -19231,7 +19360,7 @@
         </p:sp>
         <p:sp>
           <p:nvSpPr>
-            <p:cNvPr id="400" name="Shape 5"/>
+            <p:cNvPr id="403" name="Shape 5"/>
             <p:cNvSpPr/>
             <p:nvPr/>
           </p:nvSpPr>
@@ -19275,7 +19404,7 @@
         </p:sp>
         <p:sp>
           <p:nvSpPr>
-            <p:cNvPr id="401" name="Shape 6"/>
+            <p:cNvPr id="404" name="Shape 6"/>
             <p:cNvSpPr/>
             <p:nvPr/>
           </p:nvSpPr>
@@ -19319,7 +19448,7 @@
         </p:sp>
         <p:sp>
           <p:nvSpPr>
-            <p:cNvPr id="402" name="Shape 7"/>
+            <p:cNvPr id="405" name="Shape 7"/>
             <p:cNvSpPr/>
             <p:nvPr/>
           </p:nvSpPr>
@@ -19363,7 +19492,7 @@
         </p:sp>
         <p:sp>
           <p:nvSpPr>
-            <p:cNvPr id="403" name="Shape 8"/>
+            <p:cNvPr id="406" name="Shape 8"/>
             <p:cNvSpPr/>
             <p:nvPr/>
           </p:nvSpPr>
@@ -19407,7 +19536,7 @@
         </p:sp>
         <p:sp>
           <p:nvSpPr>
-            <p:cNvPr id="404" name="Shape 9"/>
+            <p:cNvPr id="407" name="Shape 9"/>
             <p:cNvSpPr/>
             <p:nvPr/>
           </p:nvSpPr>
@@ -19451,7 +19580,7 @@
         </p:sp>
         <p:sp>
           <p:nvSpPr>
-            <p:cNvPr id="405" name="Shape 10"/>
+            <p:cNvPr id="408" name="Shape 10"/>
             <p:cNvSpPr/>
             <p:nvPr/>
           </p:nvSpPr>
@@ -19495,7 +19624,7 @@
         </p:sp>
         <p:sp>
           <p:nvSpPr>
-            <p:cNvPr id="406" name="Shape 11"/>
+            <p:cNvPr id="409" name="Shape 11"/>
             <p:cNvSpPr/>
             <p:nvPr/>
           </p:nvSpPr>
@@ -19539,7 +19668,7 @@
         </p:sp>
         <p:sp>
           <p:nvSpPr>
-            <p:cNvPr id="407" name="Shape 12"/>
+            <p:cNvPr id="410" name="Shape 12"/>
             <p:cNvSpPr/>
             <p:nvPr/>
           </p:nvSpPr>
@@ -19583,7 +19712,7 @@
         </p:sp>
         <p:sp>
           <p:nvSpPr>
-            <p:cNvPr id="408" name="Shape 13"/>
+            <p:cNvPr id="411" name="Shape 13"/>
             <p:cNvSpPr/>
             <p:nvPr/>
           </p:nvSpPr>
@@ -19627,7 +19756,7 @@
         </p:sp>
         <p:sp>
           <p:nvSpPr>
-            <p:cNvPr id="409" name="Shape 14"/>
+            <p:cNvPr id="412" name="Shape 14"/>
             <p:cNvSpPr/>
             <p:nvPr/>
           </p:nvSpPr>
@@ -19671,7 +19800,7 @@
         </p:sp>
         <p:sp>
           <p:nvSpPr>
-            <p:cNvPr id="410" name="Shape 15"/>
+            <p:cNvPr id="413" name="Shape 15"/>
             <p:cNvSpPr/>
             <p:nvPr/>
           </p:nvSpPr>
@@ -19715,7 +19844,7 @@
         </p:sp>
         <p:sp>
           <p:nvSpPr>
-            <p:cNvPr id="411" name="Shape 16"/>
+            <p:cNvPr id="414" name="Shape 16"/>
             <p:cNvSpPr/>
             <p:nvPr/>
           </p:nvSpPr>
@@ -19759,7 +19888,7 @@
         </p:sp>
         <p:sp>
           <p:nvSpPr>
-            <p:cNvPr id="412" name="Shape 17"/>
+            <p:cNvPr id="415" name="Shape 17"/>
             <p:cNvSpPr/>
             <p:nvPr/>
           </p:nvSpPr>
@@ -19803,7 +19932,7 @@
         </p:sp>
         <p:sp>
           <p:nvSpPr>
-            <p:cNvPr id="413" name="Shape 18"/>
+            <p:cNvPr id="416" name="Shape 18"/>
             <p:cNvSpPr/>
             <p:nvPr/>
           </p:nvSpPr>
@@ -19847,7 +19976,7 @@
         </p:sp>
         <p:sp>
           <p:nvSpPr>
-            <p:cNvPr id="414" name="Shape 19"/>
+            <p:cNvPr id="417" name="Shape 19"/>
             <p:cNvSpPr/>
             <p:nvPr/>
           </p:nvSpPr>
@@ -19891,7 +20020,7 @@
         </p:sp>
         <p:sp>
           <p:nvSpPr>
-            <p:cNvPr id="415" name="Shape 20"/>
+            <p:cNvPr id="418" name="Shape 20"/>
             <p:cNvSpPr/>
             <p:nvPr/>
           </p:nvSpPr>
@@ -19935,7 +20064,7 @@
         </p:sp>
         <p:sp>
           <p:nvSpPr>
-            <p:cNvPr id="416" name="Shape 21"/>
+            <p:cNvPr id="419" name="Shape 21"/>
             <p:cNvSpPr/>
             <p:nvPr/>
           </p:nvSpPr>
@@ -19979,14 +20108,14 @@
         </p:sp>
         <p:sp>
           <p:nvSpPr>
-            <p:cNvPr id="417" name="Shape 22"/>
+            <p:cNvPr id="420" name="Shape 22"/>
             <p:cNvSpPr/>
             <p:nvPr/>
           </p:nvSpPr>
           <p:spPr>
             <a:xfrm>
               <a:off x="365760" y="5513832"/>
-              <a:ext cx="4206240" cy="457200"/>
+              <a:ext cx="3986783" cy="457200"/>
             </a:xfrm>
             <a:prstGeom prst="rect">
               <a:avLst/>
@@ -20023,14 +20152,14 @@
         </p:sp>
         <p:sp>
           <p:nvSpPr>
-            <p:cNvPr id="418" name="Shape 23"/>
+            <p:cNvPr id="421" name="Shape 23"/>
             <p:cNvSpPr/>
             <p:nvPr/>
           </p:nvSpPr>
           <p:spPr>
             <a:xfrm>
-              <a:off x="6967727" y="5513832"/>
-              <a:ext cx="4855464" cy="457200"/>
+              <a:off x="6583679" y="5513832"/>
+              <a:ext cx="5239512" cy="457200"/>
             </a:xfrm>
             <a:prstGeom prst="rect">
               <a:avLst/>
@@ -20067,7 +20196,7 @@
         </p:sp>
         <p:sp>
           <p:nvSpPr>
-            <p:cNvPr id="419" name="Shape 24"/>
+            <p:cNvPr id="422" name="Shape 24"/>
             <p:cNvSpPr/>
             <p:nvPr/>
           </p:nvSpPr>
@@ -20111,7 +20240,7 @@
         </p:sp>
         <p:sp>
           <p:nvSpPr>
-            <p:cNvPr id="420" name="Shape 25"/>
+            <p:cNvPr id="423" name="Shape 25"/>
             <p:cNvSpPr/>
             <p:nvPr/>
           </p:nvSpPr>
@@ -20155,7 +20284,7 @@
         </p:sp>
         <p:sp>
           <p:nvSpPr>
-            <p:cNvPr id="421" name="Shape 26"/>
+            <p:cNvPr id="424" name="Shape 26"/>
             <p:cNvSpPr/>
             <p:nvPr/>
           </p:nvSpPr>
@@ -20199,7 +20328,7 @@
         </p:sp>
         <p:sp>
           <p:nvSpPr>
-            <p:cNvPr id="422" name="Shape 27"/>
+            <p:cNvPr id="425" name="Shape 27"/>
             <p:cNvSpPr/>
             <p:nvPr/>
           </p:nvSpPr>
@@ -20243,7 +20372,7 @@
         </p:sp>
         <p:sp>
           <p:nvSpPr>
-            <p:cNvPr id="423" name="Shape 28"/>
+            <p:cNvPr id="426" name="Shape 28"/>
             <p:cNvSpPr/>
             <p:nvPr/>
           </p:nvSpPr>
@@ -20287,14 +20416,14 @@
         </p:sp>
         <p:sp>
           <p:nvSpPr>
-            <p:cNvPr id="424" name="Shape 29"/>
+            <p:cNvPr id="427" name="Shape 29"/>
             <p:cNvSpPr/>
             <p:nvPr/>
           </p:nvSpPr>
           <p:spPr>
             <a:xfrm>
-              <a:off x="4599432" y="5550408"/>
-              <a:ext cx="2340863" cy="420624"/>
+              <a:off x="4379976" y="5550408"/>
+              <a:ext cx="2176272" cy="420624"/>
             </a:xfrm>
             <a:prstGeom prst="roundRect">
               <a:avLst>
@@ -20331,7 +20460,7 @@
         </p:sp>
         <p:sp>
           <p:nvSpPr>
-            <p:cNvPr id="425" name="Shape 30"/>
+            <p:cNvPr id="428" name="Shape 30"/>
             <p:cNvSpPr/>
             <p:nvPr/>
           </p:nvSpPr>
@@ -20375,7 +20504,7 @@
         </p:sp>
         <p:sp>
           <p:nvSpPr>
-            <p:cNvPr id="426" name="Shape 31"/>
+            <p:cNvPr id="429" name="Shape 31"/>
             <p:cNvSpPr/>
             <p:nvPr/>
           </p:nvSpPr>
@@ -20419,7 +20548,7 @@
         </p:sp>
         <p:sp>
           <p:nvSpPr>
-            <p:cNvPr id="427" name="Shape 32"/>
+            <p:cNvPr id="430" name="Shape 32"/>
             <p:cNvSpPr/>
             <p:nvPr/>
           </p:nvSpPr>
@@ -20465,7 +20594,7 @@
         </p:sp>
         <p:sp>
           <p:nvSpPr>
-            <p:cNvPr id="428" name="Text 33"/>
+            <p:cNvPr id="431" name="Text 33"/>
             <p:cNvSpPr txBox="1"/>
             <p:nvPr/>
           </p:nvSpPr>
@@ -20530,21 +20659,21 @@
       </p:grpSp>
       <p:grpSp>
         <p:nvGrpSpPr>
-          <p:cNvPr id="429" name="Step 9 arrows"/>
+          <p:cNvPr id="432" name="Step 9 arrows"/>
           <p:cNvGrpSpPr/>
           <p:nvPr/>
         </p:nvGrpSpPr>
         <p:grpSpPr>
           <a:xfrm>
             <a:off x="3621024" y="4453128"/>
-            <a:ext cx="3675888" cy="1700784"/>
+            <a:ext cx="3319272" cy="1700784"/>
             <a:chOff x="3621024" y="4453128"/>
-            <a:chExt cx="3675888" cy="1700784"/>
+            <a:chExt cx="3319272" cy="1700784"/>
           </a:xfrm>
         </p:grpSpPr>
         <p:cxnSp>
           <p:nvCxnSpPr>
-            <p:cNvPr id="430" name="Arrow 1"/>
+            <p:cNvPr id="433" name="Arrow 1"/>
             <p:cNvCxnSpPr/>
             <p:nvPr/>
           </p:nvCxnSpPr>
@@ -20579,14 +20708,14 @@
         </p:cxnSp>
         <p:cxnSp>
           <p:nvCxnSpPr>
-            <p:cNvPr id="431" name="Arrow 2"/>
+            <p:cNvPr id="434" name="Arrow 2"/>
             <p:cNvCxnSpPr/>
             <p:nvPr/>
           </p:nvCxnSpPr>
           <p:spPr>
             <a:xfrm>
               <a:off x="3621024" y="5449824"/>
-              <a:ext cx="2944368" cy="0"/>
+              <a:ext cx="2587752" cy="0"/>
             </a:xfrm>
             <a:prstGeom prst="line">
               <a:avLst/>
@@ -20614,13 +20743,13 @@
         </p:cxnSp>
         <p:cxnSp>
           <p:nvCxnSpPr>
-            <p:cNvPr id="432" name="Arrow 3"/>
+            <p:cNvPr id="435" name="Arrow 3"/>
             <p:cNvCxnSpPr/>
             <p:nvPr/>
           </p:nvCxnSpPr>
           <p:spPr>
             <a:xfrm>
-              <a:off x="6565392" y="5449824"/>
+              <a:off x="6208776" y="5449824"/>
               <a:ext cx="0" cy="100584"/>
             </a:xfrm>
             <a:prstGeom prst="line">
@@ -20650,13 +20779,13 @@
         </p:cxnSp>
         <p:sp>
           <p:nvSpPr>
-            <p:cNvPr id="433" name="Shape 4"/>
+            <p:cNvPr id="436" name="Shape 4"/>
             <p:cNvSpPr/>
             <p:nvPr/>
           </p:nvSpPr>
           <p:spPr>
             <a:xfrm>
-              <a:off x="5833872" y="5971032"/>
+              <a:off x="5477256" y="5971032"/>
               <a:ext cx="1463040" cy="182880"/>
             </a:xfrm>
             <a:prstGeom prst="roundRect">
@@ -20694,13 +20823,13 @@
         </p:sp>
         <p:sp>
           <p:nvSpPr>
-            <p:cNvPr id="434" name="Text 5"/>
+            <p:cNvPr id="437" name="Text 5"/>
             <p:cNvSpPr txBox="1"/>
             <p:nvPr/>
           </p:nvSpPr>
           <p:spPr>
             <a:xfrm>
-              <a:off x="5833872" y="5971032"/>
+              <a:off x="5477256" y="5971032"/>
               <a:ext cx="1463040" cy="182880"/>
             </a:xfrm>
             <a:prstGeom prst="rect">
@@ -20730,7 +20859,7 @@
       </p:grpSp>
       <p:grpSp>
         <p:nvGrpSpPr>
-          <p:cNvPr id="435" name="Step 10 highlight"/>
+          <p:cNvPr id="438" name="Step 10 highlight"/>
           <p:cNvGrpSpPr/>
           <p:nvPr/>
         </p:nvGrpSpPr>
@@ -20744,7 +20873,7 @@
         </p:grpSpPr>
         <p:sp>
           <p:nvSpPr>
-            <p:cNvPr id="436" name="Shape 1"/>
+            <p:cNvPr id="439" name="Shape 1"/>
             <p:cNvSpPr/>
             <p:nvPr/>
           </p:nvSpPr>
@@ -20788,7 +20917,7 @@
         </p:sp>
         <p:sp>
           <p:nvSpPr>
-            <p:cNvPr id="437" name="Shape 2"/>
+            <p:cNvPr id="440" name="Shape 2"/>
             <p:cNvSpPr/>
             <p:nvPr/>
           </p:nvSpPr>
@@ -20832,7 +20961,7 @@
         </p:sp>
         <p:sp>
           <p:nvSpPr>
-            <p:cNvPr id="438" name="Shape 3"/>
+            <p:cNvPr id="441" name="Shape 3"/>
             <p:cNvSpPr/>
             <p:nvPr/>
           </p:nvSpPr>
@@ -20876,7 +21005,7 @@
         </p:sp>
         <p:sp>
           <p:nvSpPr>
-            <p:cNvPr id="439" name="Shape 4"/>
+            <p:cNvPr id="442" name="Shape 4"/>
             <p:cNvSpPr/>
             <p:nvPr/>
           </p:nvSpPr>
@@ -20920,7 +21049,7 @@
         </p:sp>
         <p:sp>
           <p:nvSpPr>
-            <p:cNvPr id="440" name="Shape 5"/>
+            <p:cNvPr id="443" name="Shape 5"/>
             <p:cNvSpPr/>
             <p:nvPr/>
           </p:nvSpPr>
@@ -20964,7 +21093,7 @@
         </p:sp>
         <p:sp>
           <p:nvSpPr>
-            <p:cNvPr id="441" name="Shape 6"/>
+            <p:cNvPr id="444" name="Shape 6"/>
             <p:cNvSpPr/>
             <p:nvPr/>
           </p:nvSpPr>
@@ -21008,7 +21137,7 @@
         </p:sp>
         <p:sp>
           <p:nvSpPr>
-            <p:cNvPr id="442" name="Shape 7"/>
+            <p:cNvPr id="445" name="Shape 7"/>
             <p:cNvSpPr/>
             <p:nvPr/>
           </p:nvSpPr>
@@ -21052,7 +21181,7 @@
         </p:sp>
         <p:sp>
           <p:nvSpPr>
-            <p:cNvPr id="443" name="Shape 8"/>
+            <p:cNvPr id="446" name="Shape 8"/>
             <p:cNvSpPr/>
             <p:nvPr/>
           </p:nvSpPr>
@@ -21096,7 +21225,7 @@
         </p:sp>
         <p:sp>
           <p:nvSpPr>
-            <p:cNvPr id="444" name="Shape 9"/>
+            <p:cNvPr id="447" name="Shape 9"/>
             <p:cNvSpPr/>
             <p:nvPr/>
           </p:nvSpPr>
@@ -21140,7 +21269,7 @@
         </p:sp>
         <p:sp>
           <p:nvSpPr>
-            <p:cNvPr id="445" name="Shape 10"/>
+            <p:cNvPr id="448" name="Shape 10"/>
             <p:cNvSpPr/>
             <p:nvPr/>
           </p:nvSpPr>
@@ -21184,7 +21313,7 @@
         </p:sp>
         <p:sp>
           <p:nvSpPr>
-            <p:cNvPr id="446" name="Shape 11"/>
+            <p:cNvPr id="449" name="Shape 11"/>
             <p:cNvSpPr/>
             <p:nvPr/>
           </p:nvSpPr>
@@ -21228,7 +21357,7 @@
         </p:sp>
         <p:sp>
           <p:nvSpPr>
-            <p:cNvPr id="447" name="Shape 12"/>
+            <p:cNvPr id="450" name="Shape 12"/>
             <p:cNvSpPr/>
             <p:nvPr/>
           </p:nvSpPr>
@@ -21272,14 +21401,14 @@
         </p:sp>
         <p:sp>
           <p:nvSpPr>
-            <p:cNvPr id="448" name="Shape 13"/>
+            <p:cNvPr id="451" name="Shape 13"/>
             <p:cNvSpPr/>
             <p:nvPr/>
           </p:nvSpPr>
           <p:spPr>
             <a:xfrm>
               <a:off x="365760" y="5513832"/>
-              <a:ext cx="6592823" cy="457200"/>
+              <a:ext cx="6208775" cy="457200"/>
             </a:xfrm>
             <a:prstGeom prst="rect">
               <a:avLst/>
@@ -21316,14 +21445,14 @@
         </p:sp>
         <p:sp>
           <p:nvSpPr>
-            <p:cNvPr id="449" name="Shape 14"/>
+            <p:cNvPr id="452" name="Shape 14"/>
             <p:cNvSpPr/>
             <p:nvPr/>
           </p:nvSpPr>
           <p:spPr>
             <a:xfrm>
-              <a:off x="8558784" y="5513832"/>
-              <a:ext cx="3264408" cy="457200"/>
+              <a:off x="8805672" y="5513832"/>
+              <a:ext cx="3017519" cy="457200"/>
             </a:xfrm>
             <a:prstGeom prst="rect">
               <a:avLst/>
@@ -21360,7 +21489,7 @@
         </p:sp>
         <p:sp>
           <p:nvSpPr>
-            <p:cNvPr id="450" name="Shape 15"/>
+            <p:cNvPr id="453" name="Shape 15"/>
             <p:cNvSpPr/>
             <p:nvPr/>
           </p:nvSpPr>
@@ -21404,7 +21533,7 @@
         </p:sp>
         <p:sp>
           <p:nvSpPr>
-            <p:cNvPr id="451" name="Shape 16"/>
+            <p:cNvPr id="454" name="Shape 16"/>
             <p:cNvSpPr/>
             <p:nvPr/>
           </p:nvSpPr>
@@ -21448,7 +21577,7 @@
         </p:sp>
         <p:sp>
           <p:nvSpPr>
-            <p:cNvPr id="452" name="Shape 17"/>
+            <p:cNvPr id="455" name="Shape 17"/>
             <p:cNvSpPr/>
             <p:nvPr/>
           </p:nvSpPr>
@@ -21492,14 +21621,14 @@
         </p:sp>
         <p:sp>
           <p:nvSpPr>
-            <p:cNvPr id="453" name="Shape 18"/>
+            <p:cNvPr id="456" name="Shape 18"/>
             <p:cNvSpPr/>
             <p:nvPr/>
           </p:nvSpPr>
           <p:spPr>
             <a:xfrm>
-              <a:off x="6986016" y="5550408"/>
-              <a:ext cx="1545336" cy="420624"/>
+              <a:off x="6601968" y="5550408"/>
+              <a:ext cx="2176272" cy="420624"/>
             </a:xfrm>
             <a:prstGeom prst="roundRect">
               <a:avLst>
@@ -21536,7 +21665,7 @@
         </p:sp>
         <p:sp>
           <p:nvSpPr>
-            <p:cNvPr id="454" name="Shape 19"/>
+            <p:cNvPr id="457" name="Shape 19"/>
             <p:cNvSpPr/>
             <p:nvPr/>
           </p:nvSpPr>
@@ -21580,7 +21709,7 @@
         </p:sp>
         <p:sp>
           <p:nvSpPr>
-            <p:cNvPr id="455" name="Shape 20"/>
+            <p:cNvPr id="458" name="Shape 20"/>
             <p:cNvSpPr/>
             <p:nvPr/>
           </p:nvSpPr>
@@ -21626,7 +21755,7 @@
         </p:sp>
         <p:sp>
           <p:nvSpPr>
-            <p:cNvPr id="456" name="Text 21"/>
+            <p:cNvPr id="459" name="Text 21"/>
             <p:cNvSpPr txBox="1"/>
             <p:nvPr/>
           </p:nvSpPr>
@@ -21667,7 +21796,7 @@
                   </a:solidFill>
                   <a:latin typeface="Trenda IG Text"/>
                 </a:rPr>
-                <a:t>H4 · BUSINESS UAT SIGNED (STEP 06)</a:t>
+                <a:t>06 UAT, THEN H4 · BUSINESS SIGN-OFF</a:t>
               </a:r>
             </a:p>
             <a:p>
@@ -21691,21 +21820,21 @@
       </p:grpSp>
       <p:grpSp>
         <p:nvGrpSpPr>
-          <p:cNvPr id="457" name="Step 10 arrows"/>
+          <p:cNvPr id="460" name="Step 10 arrows"/>
           <p:cNvGrpSpPr/>
           <p:nvPr/>
         </p:nvGrpSpPr>
         <p:grpSpPr>
           <a:xfrm>
             <a:off x="3621024" y="4453128"/>
-            <a:ext cx="5266943" cy="1700784"/>
+            <a:ext cx="5541264" cy="1700784"/>
             <a:chOff x="3621024" y="4453128"/>
-            <a:chExt cx="5266943" cy="1700784"/>
+            <a:chExt cx="5541264" cy="1700784"/>
           </a:xfrm>
         </p:grpSpPr>
         <p:cxnSp>
           <p:nvCxnSpPr>
-            <p:cNvPr id="458" name="Arrow 1"/>
+            <p:cNvPr id="461" name="Arrow 1"/>
             <p:cNvCxnSpPr/>
             <p:nvPr/>
           </p:nvCxnSpPr>
@@ -21740,14 +21869,14 @@
         </p:cxnSp>
         <p:cxnSp>
           <p:nvCxnSpPr>
-            <p:cNvPr id="459" name="Arrow 2"/>
+            <p:cNvPr id="462" name="Arrow 2"/>
             <p:cNvCxnSpPr/>
             <p:nvPr/>
           </p:nvCxnSpPr>
           <p:spPr>
             <a:xfrm>
               <a:off x="3621024" y="5449824"/>
-              <a:ext cx="4535424" cy="0"/>
+              <a:ext cx="4809744" cy="0"/>
             </a:xfrm>
             <a:prstGeom prst="line">
               <a:avLst/>
@@ -21775,13 +21904,13 @@
         </p:cxnSp>
         <p:cxnSp>
           <p:nvCxnSpPr>
-            <p:cNvPr id="460" name="Arrow 3"/>
+            <p:cNvPr id="463" name="Arrow 3"/>
             <p:cNvCxnSpPr/>
             <p:nvPr/>
           </p:nvCxnSpPr>
           <p:spPr>
             <a:xfrm>
-              <a:off x="8156448" y="5449824"/>
+              <a:off x="8430768" y="5449824"/>
               <a:ext cx="0" cy="100584"/>
             </a:xfrm>
             <a:prstGeom prst="line">
@@ -21811,13 +21940,13 @@
         </p:cxnSp>
         <p:sp>
           <p:nvSpPr>
-            <p:cNvPr id="461" name="Shape 4"/>
+            <p:cNvPr id="464" name="Shape 4"/>
             <p:cNvSpPr/>
             <p:nvPr/>
           </p:nvSpPr>
           <p:spPr>
             <a:xfrm>
-              <a:off x="7424927" y="5971032"/>
+              <a:off x="7699248" y="5971032"/>
               <a:ext cx="1463040" cy="182880"/>
             </a:xfrm>
             <a:prstGeom prst="roundRect">
@@ -21855,13 +21984,13 @@
         </p:sp>
         <p:sp>
           <p:nvSpPr>
-            <p:cNvPr id="462" name="Text 5"/>
+            <p:cNvPr id="465" name="Text 5"/>
             <p:cNvSpPr txBox="1"/>
             <p:nvPr/>
           </p:nvSpPr>
           <p:spPr>
             <a:xfrm>
-              <a:off x="7424927" y="5971032"/>
+              <a:off x="7699248" y="5971032"/>
               <a:ext cx="1463040" cy="182880"/>
             </a:xfrm>
             <a:prstGeom prst="rect">
@@ -21891,7 +22020,7 @@
       </p:grpSp>
       <p:grpSp>
         <p:nvGrpSpPr>
-          <p:cNvPr id="463" name="Step 11 highlight"/>
+          <p:cNvPr id="466" name="Step 11 highlight"/>
           <p:cNvGrpSpPr/>
           <p:nvPr/>
         </p:nvGrpSpPr>
@@ -21905,7 +22034,7 @@
         </p:grpSpPr>
         <p:sp>
           <p:nvSpPr>
-            <p:cNvPr id="464" name="Shape 1"/>
+            <p:cNvPr id="467" name="Shape 1"/>
             <p:cNvSpPr/>
             <p:nvPr/>
           </p:nvSpPr>
@@ -21949,7 +22078,7 @@
         </p:sp>
         <p:sp>
           <p:nvSpPr>
-            <p:cNvPr id="465" name="Shape 2"/>
+            <p:cNvPr id="468" name="Shape 2"/>
             <p:cNvSpPr/>
             <p:nvPr/>
           </p:nvSpPr>
@@ -21993,7 +22122,7 @@
         </p:sp>
         <p:sp>
           <p:nvSpPr>
-            <p:cNvPr id="466" name="Shape 3"/>
+            <p:cNvPr id="469" name="Shape 3"/>
             <p:cNvSpPr/>
             <p:nvPr/>
           </p:nvSpPr>
@@ -22037,7 +22166,7 @@
         </p:sp>
         <p:sp>
           <p:nvSpPr>
-            <p:cNvPr id="467" name="Shape 4"/>
+            <p:cNvPr id="470" name="Shape 4"/>
             <p:cNvSpPr/>
             <p:nvPr/>
           </p:nvSpPr>
@@ -22081,7 +22210,7 @@
         </p:sp>
         <p:sp>
           <p:nvSpPr>
-            <p:cNvPr id="468" name="Shape 5"/>
+            <p:cNvPr id="471" name="Shape 5"/>
             <p:cNvSpPr/>
             <p:nvPr/>
           </p:nvSpPr>
@@ -22125,7 +22254,7 @@
         </p:sp>
         <p:sp>
           <p:nvSpPr>
-            <p:cNvPr id="469" name="Shape 6"/>
+            <p:cNvPr id="472" name="Shape 6"/>
             <p:cNvSpPr/>
             <p:nvPr/>
           </p:nvSpPr>
@@ -22169,7 +22298,7 @@
         </p:sp>
         <p:sp>
           <p:nvSpPr>
-            <p:cNvPr id="470" name="Shape 7"/>
+            <p:cNvPr id="473" name="Shape 7"/>
             <p:cNvSpPr/>
             <p:nvPr/>
           </p:nvSpPr>
@@ -22213,7 +22342,7 @@
         </p:sp>
         <p:sp>
           <p:nvSpPr>
-            <p:cNvPr id="471" name="Shape 8"/>
+            <p:cNvPr id="474" name="Shape 8"/>
             <p:cNvSpPr/>
             <p:nvPr/>
           </p:nvSpPr>
@@ -22257,7 +22386,7 @@
         </p:sp>
         <p:sp>
           <p:nvSpPr>
-            <p:cNvPr id="472" name="Shape 9"/>
+            <p:cNvPr id="475" name="Shape 9"/>
             <p:cNvSpPr/>
             <p:nvPr/>
           </p:nvSpPr>
@@ -22301,7 +22430,7 @@
         </p:sp>
         <p:sp>
           <p:nvSpPr>
-            <p:cNvPr id="473" name="Shape 10"/>
+            <p:cNvPr id="476" name="Shape 10"/>
             <p:cNvSpPr/>
             <p:nvPr/>
           </p:nvSpPr>
@@ -22345,14 +22474,14 @@
         </p:sp>
         <p:sp>
           <p:nvSpPr>
-            <p:cNvPr id="474" name="Shape 11"/>
+            <p:cNvPr id="477" name="Shape 11"/>
             <p:cNvSpPr/>
             <p:nvPr/>
           </p:nvSpPr>
           <p:spPr>
             <a:xfrm>
               <a:off x="365760" y="5513832"/>
-              <a:ext cx="8183880" cy="457200"/>
+              <a:ext cx="8430768" cy="457200"/>
             </a:xfrm>
             <a:prstGeom prst="rect">
               <a:avLst/>
@@ -22389,14 +22518,14 @@
         </p:sp>
         <p:sp>
           <p:nvSpPr>
-            <p:cNvPr id="475" name="Shape 12"/>
+            <p:cNvPr id="478" name="Shape 12"/>
             <p:cNvSpPr/>
             <p:nvPr/>
           </p:nvSpPr>
           <p:spPr>
             <a:xfrm>
-              <a:off x="10149840" y="5513832"/>
-              <a:ext cx="1673351" cy="457200"/>
+              <a:off x="10287000" y="5513832"/>
+              <a:ext cx="1536191" cy="457200"/>
             </a:xfrm>
             <a:prstGeom prst="rect">
               <a:avLst/>
@@ -22433,7 +22562,7 @@
         </p:sp>
         <p:sp>
           <p:nvSpPr>
-            <p:cNvPr id="476" name="Shape 13"/>
+            <p:cNvPr id="479" name="Shape 13"/>
             <p:cNvSpPr/>
             <p:nvPr/>
           </p:nvSpPr>
@@ -22477,7 +22606,7 @@
         </p:sp>
         <p:sp>
           <p:nvSpPr>
-            <p:cNvPr id="477" name="Shape 14"/>
+            <p:cNvPr id="480" name="Shape 14"/>
             <p:cNvSpPr/>
             <p:nvPr/>
           </p:nvSpPr>
@@ -22521,14 +22650,14 @@
         </p:sp>
         <p:sp>
           <p:nvSpPr>
-            <p:cNvPr id="478" name="Shape 15"/>
+            <p:cNvPr id="481" name="Shape 15"/>
             <p:cNvSpPr/>
             <p:nvPr/>
           </p:nvSpPr>
           <p:spPr>
             <a:xfrm>
-              <a:off x="8577072" y="5550408"/>
-              <a:ext cx="1545335" cy="420624"/>
+              <a:off x="8823960" y="5550408"/>
+              <a:ext cx="1435607" cy="420624"/>
             </a:xfrm>
             <a:prstGeom prst="roundRect">
               <a:avLst>
@@ -22565,7 +22694,7 @@
         </p:sp>
         <p:sp>
           <p:nvSpPr>
-            <p:cNvPr id="479" name="Shape 16"/>
+            <p:cNvPr id="482" name="Shape 16"/>
             <p:cNvSpPr/>
             <p:nvPr/>
           </p:nvSpPr>
@@ -22609,7 +22738,7 @@
         </p:sp>
         <p:sp>
           <p:nvSpPr>
-            <p:cNvPr id="480" name="Shape 17"/>
+            <p:cNvPr id="483" name="Shape 17"/>
             <p:cNvSpPr/>
             <p:nvPr/>
           </p:nvSpPr>
@@ -22653,7 +22782,7 @@
         </p:sp>
         <p:sp>
           <p:nvSpPr>
-            <p:cNvPr id="481" name="Shape 18"/>
+            <p:cNvPr id="484" name="Shape 18"/>
             <p:cNvSpPr/>
             <p:nvPr/>
           </p:nvSpPr>
@@ -22699,7 +22828,7 @@
         </p:sp>
         <p:sp>
           <p:nvSpPr>
-            <p:cNvPr id="482" name="Text 19"/>
+            <p:cNvPr id="485" name="Text 19"/>
             <p:cNvSpPr txBox="1"/>
             <p:nvPr/>
           </p:nvSpPr>
@@ -22764,21 +22893,21 @@
       </p:grpSp>
       <p:grpSp>
         <p:nvGrpSpPr>
-          <p:cNvPr id="483" name="Step 11 arrows"/>
+          <p:cNvPr id="486" name="Step 11 arrows"/>
           <p:cNvGrpSpPr/>
           <p:nvPr/>
         </p:nvGrpSpPr>
         <p:grpSpPr>
           <a:xfrm>
             <a:off x="3621024" y="4453128"/>
-            <a:ext cx="6858000" cy="1700784"/>
+            <a:ext cx="7022592" cy="1700784"/>
             <a:chOff x="3621024" y="4453128"/>
-            <a:chExt cx="6858000" cy="1700784"/>
+            <a:chExt cx="7022592" cy="1700784"/>
           </a:xfrm>
         </p:grpSpPr>
         <p:cxnSp>
           <p:nvCxnSpPr>
-            <p:cNvPr id="484" name="Arrow 1"/>
+            <p:cNvPr id="487" name="Arrow 1"/>
             <p:cNvCxnSpPr/>
             <p:nvPr/>
           </p:nvCxnSpPr>
@@ -22813,14 +22942,14 @@
         </p:cxnSp>
         <p:cxnSp>
           <p:nvCxnSpPr>
-            <p:cNvPr id="485" name="Arrow 2"/>
+            <p:cNvPr id="488" name="Arrow 2"/>
             <p:cNvCxnSpPr/>
             <p:nvPr/>
           </p:nvCxnSpPr>
           <p:spPr>
             <a:xfrm>
               <a:off x="3621024" y="5449824"/>
-              <a:ext cx="6126480" cy="0"/>
+              <a:ext cx="6291072" cy="0"/>
             </a:xfrm>
             <a:prstGeom prst="line">
               <a:avLst/>
@@ -22848,13 +22977,13 @@
         </p:cxnSp>
         <p:cxnSp>
           <p:nvCxnSpPr>
-            <p:cNvPr id="486" name="Arrow 3"/>
+            <p:cNvPr id="489" name="Arrow 3"/>
             <p:cNvCxnSpPr/>
             <p:nvPr/>
           </p:nvCxnSpPr>
           <p:spPr>
             <a:xfrm>
-              <a:off x="9747504" y="5449824"/>
+              <a:off x="9912096" y="5449824"/>
               <a:ext cx="0" cy="100584"/>
             </a:xfrm>
             <a:prstGeom prst="line">
@@ -22884,13 +23013,13 @@
         </p:cxnSp>
         <p:sp>
           <p:nvSpPr>
-            <p:cNvPr id="487" name="Shape 4"/>
+            <p:cNvPr id="490" name="Shape 4"/>
             <p:cNvSpPr/>
             <p:nvPr/>
           </p:nvSpPr>
           <p:spPr>
             <a:xfrm>
-              <a:off x="9015984" y="5971032"/>
+              <a:off x="9180576" y="5971032"/>
               <a:ext cx="1463040" cy="182880"/>
             </a:xfrm>
             <a:prstGeom prst="roundRect">
@@ -22928,13 +23057,13 @@
         </p:sp>
         <p:sp>
           <p:nvSpPr>
-            <p:cNvPr id="488" name="Text 5"/>
+            <p:cNvPr id="491" name="Text 5"/>
             <p:cNvSpPr txBox="1"/>
             <p:nvPr/>
           </p:nvSpPr>
           <p:spPr>
             <a:xfrm>
-              <a:off x="9015984" y="5971032"/>
+              <a:off x="9180576" y="5971032"/>
               <a:ext cx="1463040" cy="182880"/>
             </a:xfrm>
             <a:prstGeom prst="rect">
@@ -22964,7 +23093,7 @@
       </p:grpSp>
       <p:grpSp>
         <p:nvGrpSpPr>
-          <p:cNvPr id="489" name="Step 12 highlight"/>
+          <p:cNvPr id="492" name="Step 12 highlight"/>
           <p:cNvGrpSpPr/>
           <p:nvPr/>
         </p:nvGrpSpPr>
@@ -22978,7 +23107,7 @@
         </p:grpSpPr>
         <p:sp>
           <p:nvSpPr>
-            <p:cNvPr id="490" name="Shape 1"/>
+            <p:cNvPr id="493" name="Shape 1"/>
             <p:cNvSpPr/>
             <p:nvPr/>
           </p:nvSpPr>
@@ -23022,7 +23151,7 @@
         </p:sp>
         <p:sp>
           <p:nvSpPr>
-            <p:cNvPr id="491" name="Shape 2"/>
+            <p:cNvPr id="494" name="Shape 2"/>
             <p:cNvSpPr/>
             <p:nvPr/>
           </p:nvSpPr>
@@ -23066,7 +23195,7 @@
         </p:sp>
         <p:sp>
           <p:nvSpPr>
-            <p:cNvPr id="492" name="Shape 3"/>
+            <p:cNvPr id="495" name="Shape 3"/>
             <p:cNvSpPr/>
             <p:nvPr/>
           </p:nvSpPr>
@@ -23110,7 +23239,7 @@
         </p:sp>
         <p:sp>
           <p:nvSpPr>
-            <p:cNvPr id="493" name="Shape 4"/>
+            <p:cNvPr id="496" name="Shape 4"/>
             <p:cNvSpPr/>
             <p:nvPr/>
           </p:nvSpPr>
@@ -23154,7 +23283,7 @@
         </p:sp>
         <p:sp>
           <p:nvSpPr>
-            <p:cNvPr id="494" name="Shape 5"/>
+            <p:cNvPr id="497" name="Shape 5"/>
             <p:cNvSpPr/>
             <p:nvPr/>
           </p:nvSpPr>
@@ -23198,7 +23327,7 @@
         </p:sp>
         <p:sp>
           <p:nvSpPr>
-            <p:cNvPr id="495" name="Shape 6"/>
+            <p:cNvPr id="498" name="Shape 6"/>
             <p:cNvSpPr/>
             <p:nvPr/>
           </p:nvSpPr>
@@ -23242,7 +23371,7 @@
         </p:sp>
         <p:sp>
           <p:nvSpPr>
-            <p:cNvPr id="496" name="Shape 7"/>
+            <p:cNvPr id="499" name="Shape 7"/>
             <p:cNvSpPr/>
             <p:nvPr/>
           </p:nvSpPr>
@@ -23286,14 +23415,14 @@
         </p:sp>
         <p:sp>
           <p:nvSpPr>
-            <p:cNvPr id="497" name="Shape 8"/>
+            <p:cNvPr id="500" name="Shape 8"/>
             <p:cNvSpPr/>
             <p:nvPr/>
           </p:nvSpPr>
           <p:spPr>
             <a:xfrm>
               <a:off x="365760" y="5513832"/>
-              <a:ext cx="9774936" cy="457200"/>
+              <a:ext cx="9912096" cy="457200"/>
             </a:xfrm>
             <a:prstGeom prst="rect">
               <a:avLst/>
@@ -23330,14 +23459,14 @@
         </p:sp>
         <p:sp>
           <p:nvSpPr>
-            <p:cNvPr id="498" name="Shape 9"/>
+            <p:cNvPr id="501" name="Shape 9"/>
             <p:cNvSpPr/>
             <p:nvPr/>
           </p:nvSpPr>
           <p:spPr>
             <a:xfrm>
-              <a:off x="11740896" y="5513832"/>
-              <a:ext cx="82295" cy="457200"/>
+              <a:off x="11768328" y="5513832"/>
+              <a:ext cx="54863" cy="457200"/>
             </a:xfrm>
             <a:prstGeom prst="rect">
               <a:avLst/>
@@ -23374,7 +23503,7 @@
         </p:sp>
         <p:sp>
           <p:nvSpPr>
-            <p:cNvPr id="499" name="Shape 10"/>
+            <p:cNvPr id="502" name="Shape 10"/>
             <p:cNvSpPr/>
             <p:nvPr/>
           </p:nvSpPr>
@@ -23418,14 +23547,14 @@
         </p:sp>
         <p:sp>
           <p:nvSpPr>
-            <p:cNvPr id="500" name="Shape 11"/>
+            <p:cNvPr id="503" name="Shape 11"/>
             <p:cNvSpPr/>
             <p:nvPr/>
           </p:nvSpPr>
           <p:spPr>
             <a:xfrm>
-              <a:off x="10131552" y="5513832"/>
-              <a:ext cx="1618488" cy="457200"/>
+              <a:off x="10268712" y="5513832"/>
+              <a:ext cx="1508760" cy="457200"/>
             </a:xfrm>
             <a:prstGeom prst="roundRect">
               <a:avLst>
@@ -23462,7 +23591,7 @@
         </p:sp>
         <p:sp>
           <p:nvSpPr>
-            <p:cNvPr id="501" name="Shape 12"/>
+            <p:cNvPr id="504" name="Shape 12"/>
             <p:cNvSpPr/>
             <p:nvPr/>
           </p:nvSpPr>
@@ -23506,7 +23635,7 @@
         </p:sp>
         <p:sp>
           <p:nvSpPr>
-            <p:cNvPr id="502" name="Shape 13"/>
+            <p:cNvPr id="505" name="Shape 13"/>
             <p:cNvSpPr/>
             <p:nvPr/>
           </p:nvSpPr>
@@ -23550,7 +23679,7 @@
         </p:sp>
         <p:sp>
           <p:nvSpPr>
-            <p:cNvPr id="503" name="Shape 14"/>
+            <p:cNvPr id="506" name="Shape 14"/>
             <p:cNvSpPr/>
             <p:nvPr/>
           </p:nvSpPr>
@@ -23596,7 +23725,7 @@
         </p:sp>
         <p:sp>
           <p:nvSpPr>
-            <p:cNvPr id="504" name="Text 15"/>
+            <p:cNvPr id="507" name="Text 15"/>
             <p:cNvSpPr txBox="1"/>
             <p:nvPr/>
           </p:nvSpPr>
@@ -23661,27 +23790,27 @@
       </p:grpSp>
       <p:grpSp>
         <p:nvGrpSpPr>
-          <p:cNvPr id="505" name="Step 12 arrows"/>
+          <p:cNvPr id="508" name="Step 12 arrows"/>
           <p:cNvGrpSpPr/>
           <p:nvPr/>
         </p:nvGrpSpPr>
         <p:grpSpPr>
           <a:xfrm>
-            <a:off x="10543032" y="5404104"/>
+            <a:off x="10652760" y="5404104"/>
             <a:ext cx="0" cy="146304"/>
-            <a:chOff x="10543032" y="5404104"/>
+            <a:chOff x="10652760" y="5404104"/>
             <a:chExt cx="0" cy="146304"/>
           </a:xfrm>
         </p:grpSpPr>
         <p:cxnSp>
           <p:nvCxnSpPr>
-            <p:cNvPr id="506" name="Arrow 1"/>
+            <p:cNvPr id="509" name="Arrow 1"/>
             <p:cNvCxnSpPr/>
             <p:nvPr/>
           </p:nvCxnSpPr>
           <p:spPr>
             <a:xfrm flipV="1">
-              <a:off x="10543032" y="5404104"/>
+              <a:off x="10652760" y="5404104"/>
               <a:ext cx="0" cy="146304"/>
             </a:xfrm>
             <a:prstGeom prst="line">
@@ -23712,7 +23841,7 @@
       </p:grpSp>
       <p:grpSp>
         <p:nvGrpSpPr>
-          <p:cNvPr id="507" name="Step 13 highlight"/>
+          <p:cNvPr id="510" name="Step 13 highlight"/>
           <p:cNvGrpSpPr/>
           <p:nvPr/>
         </p:nvGrpSpPr>
@@ -23726,7 +23855,7 @@
         </p:grpSpPr>
         <p:sp>
           <p:nvSpPr>
-            <p:cNvPr id="508" name="Shape 1"/>
+            <p:cNvPr id="511" name="Shape 1"/>
             <p:cNvSpPr/>
             <p:nvPr/>
           </p:nvSpPr>
@@ -23770,7 +23899,7 @@
         </p:sp>
         <p:sp>
           <p:nvSpPr>
-            <p:cNvPr id="509" name="Shape 2"/>
+            <p:cNvPr id="512" name="Shape 2"/>
             <p:cNvSpPr/>
             <p:nvPr/>
           </p:nvSpPr>
@@ -23814,7 +23943,7 @@
         </p:sp>
         <p:sp>
           <p:nvSpPr>
-            <p:cNvPr id="510" name="Shape 3"/>
+            <p:cNvPr id="513" name="Shape 3"/>
             <p:cNvSpPr/>
             <p:nvPr/>
           </p:nvSpPr>
@@ -23858,7 +23987,7 @@
         </p:sp>
         <p:sp>
           <p:nvSpPr>
-            <p:cNvPr id="511" name="Shape 4"/>
+            <p:cNvPr id="514" name="Shape 4"/>
             <p:cNvSpPr/>
             <p:nvPr/>
           </p:nvSpPr>
@@ -23902,7 +24031,7 @@
         </p:sp>
         <p:sp>
           <p:nvSpPr>
-            <p:cNvPr id="512" name="Shape 5"/>
+            <p:cNvPr id="515" name="Shape 5"/>
             <p:cNvSpPr/>
             <p:nvPr/>
           </p:nvSpPr>
@@ -23946,7 +24075,7 @@
         </p:sp>
         <p:sp>
           <p:nvSpPr>
-            <p:cNvPr id="513" name="Shape 6"/>
+            <p:cNvPr id="516" name="Shape 6"/>
             <p:cNvSpPr/>
             <p:nvPr/>
           </p:nvSpPr>
@@ -23990,7 +24119,7 @@
         </p:sp>
         <p:sp>
           <p:nvSpPr>
-            <p:cNvPr id="514" name="Shape 7"/>
+            <p:cNvPr id="517" name="Shape 7"/>
             <p:cNvSpPr/>
             <p:nvPr/>
           </p:nvSpPr>
@@ -24036,7 +24165,7 @@
         </p:sp>
         <p:sp>
           <p:nvSpPr>
-            <p:cNvPr id="515" name="Text 8"/>
+            <p:cNvPr id="518" name="Text 8"/>
             <p:cNvSpPr txBox="1"/>
             <p:nvPr/>
           </p:nvSpPr>
@@ -24138,7 +24267,7 @@
                                           </p:stCondLst>
                                         </p:cTn>
                                         <p:tgtEl>
-                                          <p:spTgt spid="235"/>
+                                          <p:spTgt spid="238"/>
                                         </p:tgtEl>
                                         <p:attrNameLst>
                                           <p:attrName>style.visibility</p:attrName>
@@ -24152,7 +24281,7 @@
                                       <p:cBhvr>
                                         <p:cTn id="7" dur="350"/>
                                         <p:tgtEl>
-                                          <p:spTgt spid="235"/>
+                                          <p:spTgt spid="238"/>
                                         </p:tgtEl>
                                       </p:cBhvr>
                                     </p:animEffect>
@@ -24182,7 +24311,7 @@
                                           </p:stCondLst>
                                         </p:cTn>
                                         <p:tgtEl>
-                                          <p:spTgt spid="248"/>
+                                          <p:spTgt spid="251"/>
                                         </p:tgtEl>
                                         <p:attrNameLst>
                                           <p:attrName>style.visibility</p:attrName>
@@ -24196,7 +24325,7 @@
                                       <p:cBhvr>
                                         <p:cTn id="11" dur="600"/>
                                         <p:tgtEl>
-                                          <p:spTgt spid="248"/>
+                                          <p:spTgt spid="251"/>
                                         </p:tgtEl>
                                       </p:cBhvr>
                                     </p:animEffect>
@@ -24231,7 +24360,7 @@
                                       <p:cBhvr>
                                         <p:cTn id="15" dur="250"/>
                                         <p:tgtEl>
-                                          <p:spTgt spid="235"/>
+                                          <p:spTgt spid="238"/>
                                         </p:tgtEl>
                                       </p:cBhvr>
                                     </p:animEffect>
@@ -24243,7 +24372,7 @@
                                           </p:stCondLst>
                                         </p:cTn>
                                         <p:tgtEl>
-                                          <p:spTgt spid="235"/>
+                                          <p:spTgt spid="238"/>
                                         </p:tgtEl>
                                         <p:attrNameLst>
                                           <p:attrName>style.visibility</p:attrName>
@@ -24266,7 +24395,7 @@
                                       <p:cBhvr>
                                         <p:cTn id="18" dur="250"/>
                                         <p:tgtEl>
-                                          <p:spTgt spid="248"/>
+                                          <p:spTgt spid="251"/>
                                         </p:tgtEl>
                                       </p:cBhvr>
                                     </p:animEffect>
@@ -24278,7 +24407,7 @@
                                           </p:stCondLst>
                                         </p:cTn>
                                         <p:tgtEl>
-                                          <p:spTgt spid="248"/>
+                                          <p:spTgt spid="251"/>
                                         </p:tgtEl>
                                         <p:attrNameLst>
                                           <p:attrName>style.visibility</p:attrName>
@@ -24305,7 +24434,7 @@
                                           </p:stCondLst>
                                         </p:cTn>
                                         <p:tgtEl>
-                                          <p:spTgt spid="251"/>
+                                          <p:spTgt spid="254"/>
                                         </p:tgtEl>
                                         <p:attrNameLst>
                                           <p:attrName>style.visibility</p:attrName>
@@ -24319,7 +24448,7 @@
                                       <p:cBhvr>
                                         <p:cTn id="22" dur="350"/>
                                         <p:tgtEl>
-                                          <p:spTgt spid="251"/>
+                                          <p:spTgt spid="254"/>
                                         </p:tgtEl>
                                       </p:cBhvr>
                                     </p:animEffect>
@@ -24349,7 +24478,7 @@
                                           </p:stCondLst>
                                         </p:cTn>
                                         <p:tgtEl>
-                                          <p:spTgt spid="272"/>
+                                          <p:spTgt spid="275"/>
                                         </p:tgtEl>
                                         <p:attrNameLst>
                                           <p:attrName>style.visibility</p:attrName>
@@ -24363,7 +24492,7 @@
                                       <p:cBhvr>
                                         <p:cTn id="26" dur="600"/>
                                         <p:tgtEl>
-                                          <p:spTgt spid="272"/>
+                                          <p:spTgt spid="275"/>
                                         </p:tgtEl>
                                       </p:cBhvr>
                                     </p:animEffect>
@@ -24398,7 +24527,7 @@
                                       <p:cBhvr>
                                         <p:cTn id="30" dur="250"/>
                                         <p:tgtEl>
-                                          <p:spTgt spid="251"/>
+                                          <p:spTgt spid="254"/>
                                         </p:tgtEl>
                                       </p:cBhvr>
                                     </p:animEffect>
@@ -24410,7 +24539,7 @@
                                           </p:stCondLst>
                                         </p:cTn>
                                         <p:tgtEl>
-                                          <p:spTgt spid="251"/>
+                                          <p:spTgt spid="254"/>
                                         </p:tgtEl>
                                         <p:attrNameLst>
                                           <p:attrName>style.visibility</p:attrName>
@@ -24433,7 +24562,7 @@
                                       <p:cBhvr>
                                         <p:cTn id="33" dur="250"/>
                                         <p:tgtEl>
-                                          <p:spTgt spid="272"/>
+                                          <p:spTgt spid="275"/>
                                         </p:tgtEl>
                                       </p:cBhvr>
                                     </p:animEffect>
@@ -24445,7 +24574,7 @@
                                           </p:stCondLst>
                                         </p:cTn>
                                         <p:tgtEl>
-                                          <p:spTgt spid="272"/>
+                                          <p:spTgt spid="275"/>
                                         </p:tgtEl>
                                         <p:attrNameLst>
                                           <p:attrName>style.visibility</p:attrName>
@@ -24472,7 +24601,7 @@
                                           </p:stCondLst>
                                         </p:cTn>
                                         <p:tgtEl>
-                                          <p:spTgt spid="275"/>
+                                          <p:spTgt spid="278"/>
                                         </p:tgtEl>
                                         <p:attrNameLst>
                                           <p:attrName>style.visibility</p:attrName>
@@ -24486,7 +24615,7 @@
                                       <p:cBhvr>
                                         <p:cTn id="37" dur="350"/>
                                         <p:tgtEl>
-                                          <p:spTgt spid="275"/>
+                                          <p:spTgt spid="278"/>
                                         </p:tgtEl>
                                       </p:cBhvr>
                                     </p:animEffect>
@@ -24516,7 +24645,7 @@
                                           </p:stCondLst>
                                         </p:cTn>
                                         <p:tgtEl>
-                                          <p:spTgt spid="284"/>
+                                          <p:spTgt spid="287"/>
                                         </p:tgtEl>
                                         <p:attrNameLst>
                                           <p:attrName>style.visibility</p:attrName>
@@ -24530,7 +24659,7 @@
                                       <p:cBhvr>
                                         <p:cTn id="41" dur="600"/>
                                         <p:tgtEl>
-                                          <p:spTgt spid="284"/>
+                                          <p:spTgt spid="287"/>
                                         </p:tgtEl>
                                       </p:cBhvr>
                                     </p:animEffect>
@@ -24565,7 +24694,7 @@
                                       <p:cBhvr>
                                         <p:cTn id="45" dur="250"/>
                                         <p:tgtEl>
-                                          <p:spTgt spid="275"/>
+                                          <p:spTgt spid="278"/>
                                         </p:tgtEl>
                                       </p:cBhvr>
                                     </p:animEffect>
@@ -24577,7 +24706,7 @@
                                           </p:stCondLst>
                                         </p:cTn>
                                         <p:tgtEl>
-                                          <p:spTgt spid="275"/>
+                                          <p:spTgt spid="278"/>
                                         </p:tgtEl>
                                         <p:attrNameLst>
                                           <p:attrName>style.visibility</p:attrName>
@@ -24600,7 +24729,7 @@
                                       <p:cBhvr>
                                         <p:cTn id="48" dur="250"/>
                                         <p:tgtEl>
-                                          <p:spTgt spid="284"/>
+                                          <p:spTgt spid="287"/>
                                         </p:tgtEl>
                                       </p:cBhvr>
                                     </p:animEffect>
@@ -24612,7 +24741,7 @@
                                           </p:stCondLst>
                                         </p:cTn>
                                         <p:tgtEl>
-                                          <p:spTgt spid="284"/>
+                                          <p:spTgt spid="287"/>
                                         </p:tgtEl>
                                         <p:attrNameLst>
                                           <p:attrName>style.visibility</p:attrName>
@@ -24639,7 +24768,7 @@
                                           </p:stCondLst>
                                         </p:cTn>
                                         <p:tgtEl>
-                                          <p:spTgt spid="286"/>
+                                          <p:spTgt spid="289"/>
                                         </p:tgtEl>
                                         <p:attrNameLst>
                                           <p:attrName>style.visibility</p:attrName>
@@ -24653,7 +24782,7 @@
                                       <p:cBhvr>
                                         <p:cTn id="52" dur="350"/>
                                         <p:tgtEl>
-                                          <p:spTgt spid="286"/>
+                                          <p:spTgt spid="289"/>
                                         </p:tgtEl>
                                       </p:cBhvr>
                                     </p:animEffect>
@@ -24683,7 +24812,7 @@
                                           </p:stCondLst>
                                         </p:cTn>
                                         <p:tgtEl>
-                                          <p:spTgt spid="302"/>
+                                          <p:spTgt spid="305"/>
                                         </p:tgtEl>
                                         <p:attrNameLst>
                                           <p:attrName>style.visibility</p:attrName>
@@ -24697,7 +24826,7 @@
                                       <p:cBhvr>
                                         <p:cTn id="56" dur="600"/>
                                         <p:tgtEl>
-                                          <p:spTgt spid="302"/>
+                                          <p:spTgt spid="305"/>
                                         </p:tgtEl>
                                       </p:cBhvr>
                                     </p:animEffect>
@@ -24732,7 +24861,7 @@
                                       <p:cBhvr>
                                         <p:cTn id="60" dur="250"/>
                                         <p:tgtEl>
-                                          <p:spTgt spid="286"/>
+                                          <p:spTgt spid="289"/>
                                         </p:tgtEl>
                                       </p:cBhvr>
                                     </p:animEffect>
@@ -24744,7 +24873,7 @@
                                           </p:stCondLst>
                                         </p:cTn>
                                         <p:tgtEl>
-                                          <p:spTgt spid="286"/>
+                                          <p:spTgt spid="289"/>
                                         </p:tgtEl>
                                         <p:attrNameLst>
                                           <p:attrName>style.visibility</p:attrName>
@@ -24767,7 +24896,7 @@
                                       <p:cBhvr>
                                         <p:cTn id="63" dur="250"/>
                                         <p:tgtEl>
-                                          <p:spTgt spid="302"/>
+                                          <p:spTgt spid="305"/>
                                         </p:tgtEl>
                                       </p:cBhvr>
                                     </p:animEffect>
@@ -24779,7 +24908,7 @@
                                           </p:stCondLst>
                                         </p:cTn>
                                         <p:tgtEl>
-                                          <p:spTgt spid="302"/>
+                                          <p:spTgt spid="305"/>
                                         </p:tgtEl>
                                         <p:attrNameLst>
                                           <p:attrName>style.visibility</p:attrName>
@@ -24806,7 +24935,7 @@
                                           </p:stCondLst>
                                         </p:cTn>
                                         <p:tgtEl>
-                                          <p:spTgt spid="305"/>
+                                          <p:spTgt spid="308"/>
                                         </p:tgtEl>
                                         <p:attrNameLst>
                                           <p:attrName>style.visibility</p:attrName>
@@ -24820,7 +24949,7 @@
                                       <p:cBhvr>
                                         <p:cTn id="67" dur="350"/>
                                         <p:tgtEl>
-                                          <p:spTgt spid="305"/>
+                                          <p:spTgt spid="308"/>
                                         </p:tgtEl>
                                       </p:cBhvr>
                                     </p:animEffect>
@@ -24850,7 +24979,7 @@
                                           </p:stCondLst>
                                         </p:cTn>
                                         <p:tgtEl>
-                                          <p:spTgt spid="314"/>
+                                          <p:spTgt spid="317"/>
                                         </p:tgtEl>
                                         <p:attrNameLst>
                                           <p:attrName>style.visibility</p:attrName>
@@ -24864,7 +24993,7 @@
                                       <p:cBhvr>
                                         <p:cTn id="71" dur="600"/>
                                         <p:tgtEl>
-                                          <p:spTgt spid="314"/>
+                                          <p:spTgt spid="317"/>
                                         </p:tgtEl>
                                       </p:cBhvr>
                                     </p:animEffect>
@@ -24899,7 +25028,7 @@
                                       <p:cBhvr>
                                         <p:cTn id="75" dur="250"/>
                                         <p:tgtEl>
-                                          <p:spTgt spid="305"/>
+                                          <p:spTgt spid="308"/>
                                         </p:tgtEl>
                                       </p:cBhvr>
                                     </p:animEffect>
@@ -24911,7 +25040,7 @@
                                           </p:stCondLst>
                                         </p:cTn>
                                         <p:tgtEl>
-                                          <p:spTgt spid="305"/>
+                                          <p:spTgt spid="308"/>
                                         </p:tgtEl>
                                         <p:attrNameLst>
                                           <p:attrName>style.visibility</p:attrName>
@@ -24934,7 +25063,7 @@
                                       <p:cBhvr>
                                         <p:cTn id="78" dur="250"/>
                                         <p:tgtEl>
-                                          <p:spTgt spid="314"/>
+                                          <p:spTgt spid="317"/>
                                         </p:tgtEl>
                                       </p:cBhvr>
                                     </p:animEffect>
@@ -24946,7 +25075,7 @@
                                           </p:stCondLst>
                                         </p:cTn>
                                         <p:tgtEl>
-                                          <p:spTgt spid="314"/>
+                                          <p:spTgt spid="317"/>
                                         </p:tgtEl>
                                         <p:attrNameLst>
                                           <p:attrName>style.visibility</p:attrName>
@@ -24973,7 +25102,7 @@
                                           </p:stCondLst>
                                         </p:cTn>
                                         <p:tgtEl>
-                                          <p:spTgt spid="319"/>
+                                          <p:spTgt spid="322"/>
                                         </p:tgtEl>
                                         <p:attrNameLst>
                                           <p:attrName>style.visibility</p:attrName>
@@ -24987,7 +25116,7 @@
                                       <p:cBhvr>
                                         <p:cTn id="82" dur="350"/>
                                         <p:tgtEl>
-                                          <p:spTgt spid="319"/>
+                                          <p:spTgt spid="322"/>
                                         </p:tgtEl>
                                       </p:cBhvr>
                                     </p:animEffect>
@@ -25017,7 +25146,7 @@
                                           </p:stCondLst>
                                         </p:cTn>
                                         <p:tgtEl>
-                                          <p:spTgt spid="328"/>
+                                          <p:spTgt spid="331"/>
                                         </p:tgtEl>
                                         <p:attrNameLst>
                                           <p:attrName>style.visibility</p:attrName>
@@ -25031,7 +25160,7 @@
                                       <p:cBhvr>
                                         <p:cTn id="86" dur="600"/>
                                         <p:tgtEl>
-                                          <p:spTgt spid="328"/>
+                                          <p:spTgt spid="331"/>
                                         </p:tgtEl>
                                       </p:cBhvr>
                                     </p:animEffect>
@@ -25066,7 +25195,7 @@
                                       <p:cBhvr>
                                         <p:cTn id="90" dur="250"/>
                                         <p:tgtEl>
-                                          <p:spTgt spid="319"/>
+                                          <p:spTgt spid="322"/>
                                         </p:tgtEl>
                                       </p:cBhvr>
                                     </p:animEffect>
@@ -25078,7 +25207,7 @@
                                           </p:stCondLst>
                                         </p:cTn>
                                         <p:tgtEl>
-                                          <p:spTgt spid="319"/>
+                                          <p:spTgt spid="322"/>
                                         </p:tgtEl>
                                         <p:attrNameLst>
                                           <p:attrName>style.visibility</p:attrName>
@@ -25101,7 +25230,7 @@
                                       <p:cBhvr>
                                         <p:cTn id="93" dur="250"/>
                                         <p:tgtEl>
-                                          <p:spTgt spid="328"/>
+                                          <p:spTgt spid="331"/>
                                         </p:tgtEl>
                                       </p:cBhvr>
                                     </p:animEffect>
@@ -25113,7 +25242,7 @@
                                           </p:stCondLst>
                                         </p:cTn>
                                         <p:tgtEl>
-                                          <p:spTgt spid="328"/>
+                                          <p:spTgt spid="331"/>
                                         </p:tgtEl>
                                         <p:attrNameLst>
                                           <p:attrName>style.visibility</p:attrName>
@@ -25140,7 +25269,7 @@
                                           </p:stCondLst>
                                         </p:cTn>
                                         <p:tgtEl>
-                                          <p:spTgt spid="337"/>
+                                          <p:spTgt spid="340"/>
                                         </p:tgtEl>
                                         <p:attrNameLst>
                                           <p:attrName>style.visibility</p:attrName>
@@ -25154,7 +25283,7 @@
                                       <p:cBhvr>
                                         <p:cTn id="97" dur="350"/>
                                         <p:tgtEl>
-                                          <p:spTgt spid="337"/>
+                                          <p:spTgt spid="340"/>
                                         </p:tgtEl>
                                       </p:cBhvr>
                                     </p:animEffect>
@@ -25184,7 +25313,7 @@
                                           </p:stCondLst>
                                         </p:cTn>
                                         <p:tgtEl>
-                                          <p:spTgt spid="357"/>
+                                          <p:spTgt spid="360"/>
                                         </p:tgtEl>
                                         <p:attrNameLst>
                                           <p:attrName>style.visibility</p:attrName>
@@ -25198,7 +25327,7 @@
                                       <p:cBhvr>
                                         <p:cTn id="101" dur="600"/>
                                         <p:tgtEl>
-                                          <p:spTgt spid="357"/>
+                                          <p:spTgt spid="360"/>
                                         </p:tgtEl>
                                       </p:cBhvr>
                                     </p:animEffect>
@@ -25233,7 +25362,7 @@
                                       <p:cBhvr>
                                         <p:cTn id="105" dur="250"/>
                                         <p:tgtEl>
-                                          <p:spTgt spid="337"/>
+                                          <p:spTgt spid="340"/>
                                         </p:tgtEl>
                                       </p:cBhvr>
                                     </p:animEffect>
@@ -25245,7 +25374,7 @@
                                           </p:stCondLst>
                                         </p:cTn>
                                         <p:tgtEl>
-                                          <p:spTgt spid="337"/>
+                                          <p:spTgt spid="340"/>
                                         </p:tgtEl>
                                         <p:attrNameLst>
                                           <p:attrName>style.visibility</p:attrName>
@@ -25268,7 +25397,7 @@
                                       <p:cBhvr>
                                         <p:cTn id="108" dur="250"/>
                                         <p:tgtEl>
-                                          <p:spTgt spid="357"/>
+                                          <p:spTgt spid="360"/>
                                         </p:tgtEl>
                                       </p:cBhvr>
                                     </p:animEffect>
@@ -25280,7 +25409,7 @@
                                           </p:stCondLst>
                                         </p:cTn>
                                         <p:tgtEl>
-                                          <p:spTgt spid="357"/>
+                                          <p:spTgt spid="360"/>
                                         </p:tgtEl>
                                         <p:attrNameLst>
                                           <p:attrName>style.visibility</p:attrName>
@@ -25307,7 +25436,7 @@
                                           </p:stCondLst>
                                         </p:cTn>
                                         <p:tgtEl>
-                                          <p:spTgt spid="363"/>
+                                          <p:spTgt spid="366"/>
                                         </p:tgtEl>
                                         <p:attrNameLst>
                                           <p:attrName>style.visibility</p:attrName>
@@ -25321,7 +25450,7 @@
                                       <p:cBhvr>
                                         <p:cTn id="112" dur="350"/>
                                         <p:tgtEl>
-                                          <p:spTgt spid="363"/>
+                                          <p:spTgt spid="366"/>
                                         </p:tgtEl>
                                       </p:cBhvr>
                                     </p:animEffect>
@@ -25351,7 +25480,7 @@
                                           </p:stCondLst>
                                         </p:cTn>
                                         <p:tgtEl>
-                                          <p:spTgt spid="389"/>
+                                          <p:spTgt spid="392"/>
                                         </p:tgtEl>
                                         <p:attrNameLst>
                                           <p:attrName>style.visibility</p:attrName>
@@ -25365,7 +25494,7 @@
                                       <p:cBhvr>
                                         <p:cTn id="116" dur="600"/>
                                         <p:tgtEl>
-                                          <p:spTgt spid="389"/>
+                                          <p:spTgt spid="392"/>
                                         </p:tgtEl>
                                       </p:cBhvr>
                                     </p:animEffect>
@@ -25400,7 +25529,7 @@
                                       <p:cBhvr>
                                         <p:cTn id="120" dur="250"/>
                                         <p:tgtEl>
-                                          <p:spTgt spid="363"/>
+                                          <p:spTgt spid="366"/>
                                         </p:tgtEl>
                                       </p:cBhvr>
                                     </p:animEffect>
@@ -25412,7 +25541,7 @@
                                           </p:stCondLst>
                                         </p:cTn>
                                         <p:tgtEl>
-                                          <p:spTgt spid="363"/>
+                                          <p:spTgt spid="366"/>
                                         </p:tgtEl>
                                         <p:attrNameLst>
                                           <p:attrName>style.visibility</p:attrName>
@@ -25435,7 +25564,7 @@
                                       <p:cBhvr>
                                         <p:cTn id="123" dur="250"/>
                                         <p:tgtEl>
-                                          <p:spTgt spid="389"/>
+                                          <p:spTgt spid="392"/>
                                         </p:tgtEl>
                                       </p:cBhvr>
                                     </p:animEffect>
@@ -25447,7 +25576,7 @@
                                           </p:stCondLst>
                                         </p:cTn>
                                         <p:tgtEl>
-                                          <p:spTgt spid="389"/>
+                                          <p:spTgt spid="392"/>
                                         </p:tgtEl>
                                         <p:attrNameLst>
                                           <p:attrName>style.visibility</p:attrName>
@@ -25474,7 +25603,7 @@
                                           </p:stCondLst>
                                         </p:cTn>
                                         <p:tgtEl>
-                                          <p:spTgt spid="395"/>
+                                          <p:spTgt spid="398"/>
                                         </p:tgtEl>
                                         <p:attrNameLst>
                                           <p:attrName>style.visibility</p:attrName>
@@ -25488,7 +25617,7 @@
                                       <p:cBhvr>
                                         <p:cTn id="127" dur="350"/>
                                         <p:tgtEl>
-                                          <p:spTgt spid="395"/>
+                                          <p:spTgt spid="398"/>
                                         </p:tgtEl>
                                       </p:cBhvr>
                                     </p:animEffect>
@@ -25518,7 +25647,7 @@
                                           </p:stCondLst>
                                         </p:cTn>
                                         <p:tgtEl>
-                                          <p:spTgt spid="429"/>
+                                          <p:spTgt spid="432"/>
                                         </p:tgtEl>
                                         <p:attrNameLst>
                                           <p:attrName>style.visibility</p:attrName>
@@ -25532,7 +25661,7 @@
                                       <p:cBhvr>
                                         <p:cTn id="131" dur="600"/>
                                         <p:tgtEl>
-                                          <p:spTgt spid="429"/>
+                                          <p:spTgt spid="432"/>
                                         </p:tgtEl>
                                       </p:cBhvr>
                                     </p:animEffect>
@@ -25567,7 +25696,7 @@
                                       <p:cBhvr>
                                         <p:cTn id="135" dur="250"/>
                                         <p:tgtEl>
-                                          <p:spTgt spid="395"/>
+                                          <p:spTgt spid="398"/>
                                         </p:tgtEl>
                                       </p:cBhvr>
                                     </p:animEffect>
@@ -25579,7 +25708,7 @@
                                           </p:stCondLst>
                                         </p:cTn>
                                         <p:tgtEl>
-                                          <p:spTgt spid="395"/>
+                                          <p:spTgt spid="398"/>
                                         </p:tgtEl>
                                         <p:attrNameLst>
                                           <p:attrName>style.visibility</p:attrName>
@@ -25602,7 +25731,7 @@
                                       <p:cBhvr>
                                         <p:cTn id="138" dur="250"/>
                                         <p:tgtEl>
-                                          <p:spTgt spid="429"/>
+                                          <p:spTgt spid="432"/>
                                         </p:tgtEl>
                                       </p:cBhvr>
                                     </p:animEffect>
@@ -25614,7 +25743,7 @@
                                           </p:stCondLst>
                                         </p:cTn>
                                         <p:tgtEl>
-                                          <p:spTgt spid="429"/>
+                                          <p:spTgt spid="432"/>
                                         </p:tgtEl>
                                         <p:attrNameLst>
                                           <p:attrName>style.visibility</p:attrName>
@@ -25641,7 +25770,7 @@
                                           </p:stCondLst>
                                         </p:cTn>
                                         <p:tgtEl>
-                                          <p:spTgt spid="435"/>
+                                          <p:spTgt spid="438"/>
                                         </p:tgtEl>
                                         <p:attrNameLst>
                                           <p:attrName>style.visibility</p:attrName>
@@ -25655,7 +25784,7 @@
                                       <p:cBhvr>
                                         <p:cTn id="142" dur="350"/>
                                         <p:tgtEl>
-                                          <p:spTgt spid="435"/>
+                                          <p:spTgt spid="438"/>
                                         </p:tgtEl>
                                       </p:cBhvr>
                                     </p:animEffect>
@@ -25685,7 +25814,7 @@
                                           </p:stCondLst>
                                         </p:cTn>
                                         <p:tgtEl>
-                                          <p:spTgt spid="457"/>
+                                          <p:spTgt spid="460"/>
                                         </p:tgtEl>
                                         <p:attrNameLst>
                                           <p:attrName>style.visibility</p:attrName>
@@ -25699,7 +25828,7 @@
                                       <p:cBhvr>
                                         <p:cTn id="146" dur="600"/>
                                         <p:tgtEl>
-                                          <p:spTgt spid="457"/>
+                                          <p:spTgt spid="460"/>
                                         </p:tgtEl>
                                       </p:cBhvr>
                                     </p:animEffect>
@@ -25734,7 +25863,7 @@
                                       <p:cBhvr>
                                         <p:cTn id="150" dur="250"/>
                                         <p:tgtEl>
-                                          <p:spTgt spid="435"/>
+                                          <p:spTgt spid="438"/>
                                         </p:tgtEl>
                                       </p:cBhvr>
                                     </p:animEffect>
@@ -25746,7 +25875,7 @@
                                           </p:stCondLst>
                                         </p:cTn>
                                         <p:tgtEl>
-                                          <p:spTgt spid="435"/>
+                                          <p:spTgt spid="438"/>
                                         </p:tgtEl>
                                         <p:attrNameLst>
                                           <p:attrName>style.visibility</p:attrName>
@@ -25769,7 +25898,7 @@
                                       <p:cBhvr>
                                         <p:cTn id="153" dur="250"/>
                                         <p:tgtEl>
-                                          <p:spTgt spid="457"/>
+                                          <p:spTgt spid="460"/>
                                         </p:tgtEl>
                                       </p:cBhvr>
                                     </p:animEffect>
@@ -25781,7 +25910,7 @@
                                           </p:stCondLst>
                                         </p:cTn>
                                         <p:tgtEl>
-                                          <p:spTgt spid="457"/>
+                                          <p:spTgt spid="460"/>
                                         </p:tgtEl>
                                         <p:attrNameLst>
                                           <p:attrName>style.visibility</p:attrName>
@@ -25808,7 +25937,7 @@
                                           </p:stCondLst>
                                         </p:cTn>
                                         <p:tgtEl>
-                                          <p:spTgt spid="463"/>
+                                          <p:spTgt spid="466"/>
                                         </p:tgtEl>
                                         <p:attrNameLst>
                                           <p:attrName>style.visibility</p:attrName>
@@ -25822,7 +25951,7 @@
                                       <p:cBhvr>
                                         <p:cTn id="157" dur="350"/>
                                         <p:tgtEl>
-                                          <p:spTgt spid="463"/>
+                                          <p:spTgt spid="466"/>
                                         </p:tgtEl>
                                       </p:cBhvr>
                                     </p:animEffect>
@@ -25852,7 +25981,7 @@
                                           </p:stCondLst>
                                         </p:cTn>
                                         <p:tgtEl>
-                                          <p:spTgt spid="483"/>
+                                          <p:spTgt spid="486"/>
                                         </p:tgtEl>
                                         <p:attrNameLst>
                                           <p:attrName>style.visibility</p:attrName>
@@ -25866,7 +25995,7 @@
                                       <p:cBhvr>
                                         <p:cTn id="161" dur="600"/>
                                         <p:tgtEl>
-                                          <p:spTgt spid="483"/>
+                                          <p:spTgt spid="486"/>
                                         </p:tgtEl>
                                       </p:cBhvr>
                                     </p:animEffect>
@@ -25901,7 +26030,7 @@
                                       <p:cBhvr>
                                         <p:cTn id="165" dur="250"/>
                                         <p:tgtEl>
-                                          <p:spTgt spid="463"/>
+                                          <p:spTgt spid="466"/>
                                         </p:tgtEl>
                                       </p:cBhvr>
                                     </p:animEffect>
@@ -25913,7 +26042,7 @@
                                           </p:stCondLst>
                                         </p:cTn>
                                         <p:tgtEl>
-                                          <p:spTgt spid="463"/>
+                                          <p:spTgt spid="466"/>
                                         </p:tgtEl>
                                         <p:attrNameLst>
                                           <p:attrName>style.visibility</p:attrName>
@@ -25936,7 +26065,7 @@
                                       <p:cBhvr>
                                         <p:cTn id="168" dur="250"/>
                                         <p:tgtEl>
-                                          <p:spTgt spid="483"/>
+                                          <p:spTgt spid="486"/>
                                         </p:tgtEl>
                                       </p:cBhvr>
                                     </p:animEffect>
@@ -25948,7 +26077,7 @@
                                           </p:stCondLst>
                                         </p:cTn>
                                         <p:tgtEl>
-                                          <p:spTgt spid="483"/>
+                                          <p:spTgt spid="486"/>
                                         </p:tgtEl>
                                         <p:attrNameLst>
                                           <p:attrName>style.visibility</p:attrName>
@@ -25975,7 +26104,7 @@
                                           </p:stCondLst>
                                         </p:cTn>
                                         <p:tgtEl>
-                                          <p:spTgt spid="489"/>
+                                          <p:spTgt spid="492"/>
                                         </p:tgtEl>
                                         <p:attrNameLst>
                                           <p:attrName>style.visibility</p:attrName>
@@ -25989,7 +26118,7 @@
                                       <p:cBhvr>
                                         <p:cTn id="172" dur="350"/>
                                         <p:tgtEl>
-                                          <p:spTgt spid="489"/>
+                                          <p:spTgt spid="492"/>
                                         </p:tgtEl>
                                       </p:cBhvr>
                                     </p:animEffect>
@@ -26019,7 +26148,7 @@
                                           </p:stCondLst>
                                         </p:cTn>
                                         <p:tgtEl>
-                                          <p:spTgt spid="505"/>
+                                          <p:spTgt spid="508"/>
                                         </p:tgtEl>
                                         <p:attrNameLst>
                                           <p:attrName>style.visibility</p:attrName>
@@ -26033,7 +26162,7 @@
                                       <p:cBhvr>
                                         <p:cTn id="176" dur="600"/>
                                         <p:tgtEl>
-                                          <p:spTgt spid="505"/>
+                                          <p:spTgt spid="508"/>
                                         </p:tgtEl>
                                       </p:cBhvr>
                                     </p:animEffect>
@@ -26068,7 +26197,7 @@
                                       <p:cBhvr>
                                         <p:cTn id="180" dur="250"/>
                                         <p:tgtEl>
-                                          <p:spTgt spid="489"/>
+                                          <p:spTgt spid="492"/>
                                         </p:tgtEl>
                                       </p:cBhvr>
                                     </p:animEffect>
@@ -26080,7 +26209,7 @@
                                           </p:stCondLst>
                                         </p:cTn>
                                         <p:tgtEl>
-                                          <p:spTgt spid="489"/>
+                                          <p:spTgt spid="492"/>
                                         </p:tgtEl>
                                         <p:attrNameLst>
                                           <p:attrName>style.visibility</p:attrName>
@@ -26103,7 +26232,7 @@
                                       <p:cBhvr>
                                         <p:cTn id="183" dur="250"/>
                                         <p:tgtEl>
-                                          <p:spTgt spid="505"/>
+                                          <p:spTgt spid="508"/>
                                         </p:tgtEl>
                                       </p:cBhvr>
                                     </p:animEffect>
@@ -26115,7 +26244,7 @@
                                           </p:stCondLst>
                                         </p:cTn>
                                         <p:tgtEl>
-                                          <p:spTgt spid="505"/>
+                                          <p:spTgt spid="508"/>
                                         </p:tgtEl>
                                         <p:attrNameLst>
                                           <p:attrName>style.visibility</p:attrName>
@@ -26142,7 +26271,7 @@
                                           </p:stCondLst>
                                         </p:cTn>
                                         <p:tgtEl>
-                                          <p:spTgt spid="507"/>
+                                          <p:spTgt spid="510"/>
                                         </p:tgtEl>
                                         <p:attrNameLst>
                                           <p:attrName>style.visibility</p:attrName>
@@ -26156,7 +26285,7 @@
                                       <p:cBhvr>
                                         <p:cTn id="187" dur="350"/>
                                         <p:tgtEl>
-                                          <p:spTgt spid="507"/>
+                                          <p:spTgt spid="510"/>
                                         </p:tgtEl>
                                       </p:cBhvr>
                                     </p:animEffect>
@@ -26191,7 +26320,7 @@
                                       <p:cBhvr>
                                         <p:cTn id="191" dur="250"/>
                                         <p:tgtEl>
-                                          <p:spTgt spid="507"/>
+                                          <p:spTgt spid="510"/>
                                         </p:tgtEl>
                                       </p:cBhvr>
                                     </p:animEffect>
@@ -26203,7 +26332,7 @@
                                           </p:stCondLst>
                                         </p:cTn>
                                         <p:tgtEl>
-                                          <p:spTgt spid="507"/>
+                                          <p:spTgt spid="510"/>
                                         </p:tgtEl>
                                         <p:attrNameLst>
                                           <p:attrName>style.visibility</p:attrName>

--- a/poc/deck/assets/review/Slide 4 interactive - test.pptx
+++ b/poc/deck/assets/review/Slide 4 interactive - test.pptx
@@ -1459,7 +1459,7 @@
           <a:p/>
           <a:p>
             <a:r>
-              <a:t>[CLICK 5  Evals: pass] Every output is scored before it moves on. A pass goes to the gate, with the evidence.</a:t>
+              <a:t>[CLICK 5  Evals: pass] Every output is scored before it moves on. Look at the EVALS tags along the bottom: each agent step is evaluated and its score updated, run by run. A pass goes to the gate, with the evidence.</a:t>
             </a:r>
           </a:p>
           <a:p/>
@@ -15508,9 +15508,9 @@
         <p:grpSpPr>
           <a:xfrm>
             <a:off x="365760" y="1115568"/>
-            <a:ext cx="11457432" cy="5239512"/>
+            <a:ext cx="11457432" cy="5239511"/>
             <a:chOff x="365760" y="1115568"/>
-            <a:chExt cx="11457432" cy="5239512"/>
+            <a:chExt cx="11457432" cy="5239511"/>
           </a:xfrm>
         </p:grpSpPr>
         <p:sp>
@@ -15654,7 +15654,7 @@
           <p:spPr>
             <a:xfrm>
               <a:off x="365760" y="4498848"/>
-              <a:ext cx="11457432" cy="1856232"/>
+              <a:ext cx="11457432" cy="1426464"/>
             </a:xfrm>
             <a:prstGeom prst="rect">
               <a:avLst/>
@@ -15692,6 +15692,314 @@
         <p:sp>
           <p:nvSpPr>
             <p:cNvPr id="313" name="Shape 5"/>
+            <p:cNvSpPr/>
+            <p:nvPr/>
+          </p:nvSpPr>
+          <p:spPr>
+            <a:xfrm>
+              <a:off x="365760" y="5925312"/>
+              <a:ext cx="9198864" cy="9143"/>
+            </a:xfrm>
+            <a:prstGeom prst="rect">
+              <a:avLst/>
+            </a:prstGeom>
+            <a:solidFill>
+              <a:srgbClr val="FFFFFF">
+                <a:alpha val="72000"/>
+              </a:srgbClr>
+            </a:solidFill>
+            <a:ln>
+              <a:noFill/>
+            </a:ln>
+            <a:effectLst/>
+          </p:spPr>
+          <p:style>
+            <a:lnRef idx="1">
+              <a:schemeClr val="accent1"/>
+            </a:lnRef>
+            <a:fillRef idx="3">
+              <a:schemeClr val="accent1"/>
+            </a:fillRef>
+            <a:effectRef idx="2">
+              <a:schemeClr val="accent1"/>
+            </a:effectRef>
+            <a:fontRef idx="minor">
+              <a:schemeClr val="lt1"/>
+            </a:fontRef>
+          </p:style>
+          <p:txBody>
+            <a:bodyPr rtlCol="0" anchor="ctr"/>
+            <a:lstStyle/>
+            <a:p/>
+          </p:txBody>
+        </p:sp>
+        <p:sp>
+          <p:nvSpPr>
+            <p:cNvPr id="314" name="Shape 6"/>
+            <p:cNvSpPr/>
+            <p:nvPr/>
+          </p:nvSpPr>
+          <p:spPr>
+            <a:xfrm>
+              <a:off x="11786616" y="5925312"/>
+              <a:ext cx="36575" cy="9143"/>
+            </a:xfrm>
+            <a:prstGeom prst="rect">
+              <a:avLst/>
+            </a:prstGeom>
+            <a:solidFill>
+              <a:srgbClr val="FFFFFF">
+                <a:alpha val="72000"/>
+              </a:srgbClr>
+            </a:solidFill>
+            <a:ln>
+              <a:noFill/>
+            </a:ln>
+            <a:effectLst/>
+          </p:spPr>
+          <p:style>
+            <a:lnRef idx="1">
+              <a:schemeClr val="accent1"/>
+            </a:lnRef>
+            <a:fillRef idx="3">
+              <a:schemeClr val="accent1"/>
+            </a:fillRef>
+            <a:effectRef idx="2">
+              <a:schemeClr val="accent1"/>
+            </a:effectRef>
+            <a:fontRef idx="minor">
+              <a:schemeClr val="lt1"/>
+            </a:fontRef>
+          </p:style>
+          <p:txBody>
+            <a:bodyPr rtlCol="0" anchor="ctr"/>
+            <a:lstStyle/>
+            <a:p/>
+          </p:txBody>
+        </p:sp>
+        <p:sp>
+          <p:nvSpPr>
+            <p:cNvPr id="315" name="Shape 7"/>
+            <p:cNvSpPr/>
+            <p:nvPr/>
+          </p:nvSpPr>
+          <p:spPr>
+            <a:xfrm>
+              <a:off x="365760" y="5934456"/>
+              <a:ext cx="1005840" cy="246887"/>
+            </a:xfrm>
+            <a:prstGeom prst="rect">
+              <a:avLst/>
+            </a:prstGeom>
+            <a:solidFill>
+              <a:srgbClr val="FFFFFF">
+                <a:alpha val="72000"/>
+              </a:srgbClr>
+            </a:solidFill>
+            <a:ln>
+              <a:noFill/>
+            </a:ln>
+            <a:effectLst/>
+          </p:spPr>
+          <p:style>
+            <a:lnRef idx="1">
+              <a:schemeClr val="accent1"/>
+            </a:lnRef>
+            <a:fillRef idx="3">
+              <a:schemeClr val="accent1"/>
+            </a:fillRef>
+            <a:effectRef idx="2">
+              <a:schemeClr val="accent1"/>
+            </a:effectRef>
+            <a:fontRef idx="minor">
+              <a:schemeClr val="lt1"/>
+            </a:fontRef>
+          </p:style>
+          <p:txBody>
+            <a:bodyPr rtlCol="0" anchor="ctr"/>
+            <a:lstStyle/>
+            <a:p/>
+          </p:txBody>
+        </p:sp>
+        <p:sp>
+          <p:nvSpPr>
+            <p:cNvPr id="316" name="Shape 8"/>
+            <p:cNvSpPr/>
+            <p:nvPr/>
+          </p:nvSpPr>
+          <p:spPr>
+            <a:xfrm>
+              <a:off x="11786616" y="5934456"/>
+              <a:ext cx="36575" cy="246887"/>
+            </a:xfrm>
+            <a:prstGeom prst="rect">
+              <a:avLst/>
+            </a:prstGeom>
+            <a:solidFill>
+              <a:srgbClr val="FFFFFF">
+                <a:alpha val="72000"/>
+              </a:srgbClr>
+            </a:solidFill>
+            <a:ln>
+              <a:noFill/>
+            </a:ln>
+            <a:effectLst/>
+          </p:spPr>
+          <p:style>
+            <a:lnRef idx="1">
+              <a:schemeClr val="accent1"/>
+            </a:lnRef>
+            <a:fillRef idx="3">
+              <a:schemeClr val="accent1"/>
+            </a:fillRef>
+            <a:effectRef idx="2">
+              <a:schemeClr val="accent1"/>
+            </a:effectRef>
+            <a:fontRef idx="minor">
+              <a:schemeClr val="lt1"/>
+            </a:fontRef>
+          </p:style>
+          <p:txBody>
+            <a:bodyPr rtlCol="0" anchor="ctr"/>
+            <a:lstStyle/>
+            <a:p/>
+          </p:txBody>
+        </p:sp>
+        <p:sp>
+          <p:nvSpPr>
+            <p:cNvPr id="317" name="Shape 9"/>
+            <p:cNvSpPr/>
+            <p:nvPr/>
+          </p:nvSpPr>
+          <p:spPr>
+            <a:xfrm>
+              <a:off x="365760" y="6181344"/>
+              <a:ext cx="1005840" cy="0"/>
+            </a:xfrm>
+            <a:prstGeom prst="rect">
+              <a:avLst/>
+            </a:prstGeom>
+            <a:solidFill>
+              <a:srgbClr val="FFFFFF">
+                <a:alpha val="72000"/>
+              </a:srgbClr>
+            </a:solidFill>
+            <a:ln>
+              <a:noFill/>
+            </a:ln>
+            <a:effectLst/>
+          </p:spPr>
+          <p:style>
+            <a:lnRef idx="1">
+              <a:schemeClr val="accent1"/>
+            </a:lnRef>
+            <a:fillRef idx="3">
+              <a:schemeClr val="accent1"/>
+            </a:fillRef>
+            <a:effectRef idx="2">
+              <a:schemeClr val="accent1"/>
+            </a:effectRef>
+            <a:fontRef idx="minor">
+              <a:schemeClr val="lt1"/>
+            </a:fontRef>
+          </p:style>
+          <p:txBody>
+            <a:bodyPr rtlCol="0" anchor="ctr"/>
+            <a:lstStyle/>
+            <a:p/>
+          </p:txBody>
+        </p:sp>
+        <p:sp>
+          <p:nvSpPr>
+            <p:cNvPr id="318" name="Shape 10"/>
+            <p:cNvSpPr/>
+            <p:nvPr/>
+          </p:nvSpPr>
+          <p:spPr>
+            <a:xfrm>
+              <a:off x="11786616" y="6181344"/>
+              <a:ext cx="36575" cy="0"/>
+            </a:xfrm>
+            <a:prstGeom prst="rect">
+              <a:avLst/>
+            </a:prstGeom>
+            <a:solidFill>
+              <a:srgbClr val="FFFFFF">
+                <a:alpha val="72000"/>
+              </a:srgbClr>
+            </a:solidFill>
+            <a:ln>
+              <a:noFill/>
+            </a:ln>
+            <a:effectLst/>
+          </p:spPr>
+          <p:style>
+            <a:lnRef idx="1">
+              <a:schemeClr val="accent1"/>
+            </a:lnRef>
+            <a:fillRef idx="3">
+              <a:schemeClr val="accent1"/>
+            </a:fillRef>
+            <a:effectRef idx="2">
+              <a:schemeClr val="accent1"/>
+            </a:effectRef>
+            <a:fontRef idx="minor">
+              <a:schemeClr val="lt1"/>
+            </a:fontRef>
+          </p:style>
+          <p:txBody>
+            <a:bodyPr rtlCol="0" anchor="ctr"/>
+            <a:lstStyle/>
+            <a:p/>
+          </p:txBody>
+        </p:sp>
+        <p:sp>
+          <p:nvSpPr>
+            <p:cNvPr id="319" name="Shape 11"/>
+            <p:cNvSpPr/>
+            <p:nvPr/>
+          </p:nvSpPr>
+          <p:spPr>
+            <a:xfrm>
+              <a:off x="365760" y="6181344"/>
+              <a:ext cx="11457432" cy="173735"/>
+            </a:xfrm>
+            <a:prstGeom prst="rect">
+              <a:avLst/>
+            </a:prstGeom>
+            <a:solidFill>
+              <a:srgbClr val="FFFFFF">
+                <a:alpha val="72000"/>
+              </a:srgbClr>
+            </a:solidFill>
+            <a:ln>
+              <a:noFill/>
+            </a:ln>
+            <a:effectLst/>
+          </p:spPr>
+          <p:style>
+            <a:lnRef idx="1">
+              <a:schemeClr val="accent1"/>
+            </a:lnRef>
+            <a:fillRef idx="3">
+              <a:schemeClr val="accent1"/>
+            </a:fillRef>
+            <a:effectRef idx="2">
+              <a:schemeClr val="accent1"/>
+            </a:effectRef>
+            <a:fontRef idx="minor">
+              <a:schemeClr val="lt1"/>
+            </a:fontRef>
+          </p:style>
+          <p:txBody>
+            <a:bodyPr rtlCol="0" anchor="ctr"/>
+            <a:lstStyle/>
+            <a:p/>
+          </p:txBody>
+        </p:sp>
+        <p:sp>
+          <p:nvSpPr>
+            <p:cNvPr id="320" name="Shape 12"/>
             <p:cNvSpPr/>
             <p:nvPr/>
           </p:nvSpPr>
@@ -15735,7 +16043,7 @@
         </p:sp>
         <p:sp>
           <p:nvSpPr>
-            <p:cNvPr id="314" name="Shape 6"/>
+            <p:cNvPr id="321" name="Shape 13"/>
             <p:cNvSpPr/>
             <p:nvPr/>
           </p:nvSpPr>
@@ -15779,7 +16087,271 @@
         </p:sp>
         <p:sp>
           <p:nvSpPr>
-            <p:cNvPr id="315" name="Shape 7"/>
+            <p:cNvPr id="322" name="Shape 14"/>
+            <p:cNvSpPr/>
+            <p:nvPr/>
+          </p:nvSpPr>
+          <p:spPr>
+            <a:xfrm>
+              <a:off x="1517904" y="5943600"/>
+              <a:ext cx="493776" cy="219456"/>
+            </a:xfrm>
+            <a:prstGeom prst="roundRect">
+              <a:avLst>
+                <a:gd name="adj" fmla="val 8000"/>
+              </a:avLst>
+            </a:prstGeom>
+            <a:noFill/>
+            <a:ln w="38100">
+              <a:solidFill>
+                <a:srgbClr val="FA8B35"/>
+              </a:solidFill>
+            </a:ln>
+            <a:effectLst/>
+          </p:spPr>
+          <p:style>
+            <a:lnRef idx="1">
+              <a:schemeClr val="accent1"/>
+            </a:lnRef>
+            <a:fillRef idx="3">
+              <a:schemeClr val="accent1"/>
+            </a:fillRef>
+            <a:effectRef idx="2">
+              <a:schemeClr val="accent1"/>
+            </a:effectRef>
+            <a:fontRef idx="minor">
+              <a:schemeClr val="lt1"/>
+            </a:fontRef>
+          </p:style>
+          <p:txBody>
+            <a:bodyPr rtlCol="0" anchor="ctr"/>
+            <a:lstStyle/>
+            <a:p/>
+          </p:txBody>
+        </p:sp>
+        <p:sp>
+          <p:nvSpPr>
+            <p:cNvPr id="323" name="Shape 15"/>
+            <p:cNvSpPr/>
+            <p:nvPr/>
+          </p:nvSpPr>
+          <p:spPr>
+            <a:xfrm>
+              <a:off x="2999232" y="5943600"/>
+              <a:ext cx="493776" cy="219456"/>
+            </a:xfrm>
+            <a:prstGeom prst="roundRect">
+              <a:avLst>
+                <a:gd name="adj" fmla="val 8000"/>
+              </a:avLst>
+            </a:prstGeom>
+            <a:noFill/>
+            <a:ln w="38100">
+              <a:solidFill>
+                <a:srgbClr val="FA8B35"/>
+              </a:solidFill>
+            </a:ln>
+            <a:effectLst/>
+          </p:spPr>
+          <p:style>
+            <a:lnRef idx="1">
+              <a:schemeClr val="accent1"/>
+            </a:lnRef>
+            <a:fillRef idx="3">
+              <a:schemeClr val="accent1"/>
+            </a:fillRef>
+            <a:effectRef idx="2">
+              <a:schemeClr val="accent1"/>
+            </a:effectRef>
+            <a:fontRef idx="minor">
+              <a:schemeClr val="lt1"/>
+            </a:fontRef>
+          </p:style>
+          <p:txBody>
+            <a:bodyPr rtlCol="0" anchor="ctr"/>
+            <a:lstStyle/>
+            <a:p/>
+          </p:txBody>
+        </p:sp>
+        <p:sp>
+          <p:nvSpPr>
+            <p:cNvPr id="324" name="Shape 16"/>
+            <p:cNvSpPr/>
+            <p:nvPr/>
+          </p:nvSpPr>
+          <p:spPr>
+            <a:xfrm>
+              <a:off x="4480560" y="5943600"/>
+              <a:ext cx="493776" cy="219456"/>
+            </a:xfrm>
+            <a:prstGeom prst="roundRect">
+              <a:avLst>
+                <a:gd name="adj" fmla="val 8000"/>
+              </a:avLst>
+            </a:prstGeom>
+            <a:noFill/>
+            <a:ln w="38100">
+              <a:solidFill>
+                <a:srgbClr val="FA8B35"/>
+              </a:solidFill>
+            </a:ln>
+            <a:effectLst/>
+          </p:spPr>
+          <p:style>
+            <a:lnRef idx="1">
+              <a:schemeClr val="accent1"/>
+            </a:lnRef>
+            <a:fillRef idx="3">
+              <a:schemeClr val="accent1"/>
+            </a:fillRef>
+            <a:effectRef idx="2">
+              <a:schemeClr val="accent1"/>
+            </a:effectRef>
+            <a:fontRef idx="minor">
+              <a:schemeClr val="lt1"/>
+            </a:fontRef>
+          </p:style>
+          <p:txBody>
+            <a:bodyPr rtlCol="0" anchor="ctr"/>
+            <a:lstStyle/>
+            <a:p/>
+          </p:txBody>
+        </p:sp>
+        <p:sp>
+          <p:nvSpPr>
+            <p:cNvPr id="325" name="Shape 17"/>
+            <p:cNvSpPr/>
+            <p:nvPr/>
+          </p:nvSpPr>
+          <p:spPr>
+            <a:xfrm>
+              <a:off x="5221224" y="5943600"/>
+              <a:ext cx="493776" cy="219456"/>
+            </a:xfrm>
+            <a:prstGeom prst="roundRect">
+              <a:avLst>
+                <a:gd name="adj" fmla="val 8000"/>
+              </a:avLst>
+            </a:prstGeom>
+            <a:noFill/>
+            <a:ln w="38100">
+              <a:solidFill>
+                <a:srgbClr val="FA8B35"/>
+              </a:solidFill>
+            </a:ln>
+            <a:effectLst/>
+          </p:spPr>
+          <p:style>
+            <a:lnRef idx="1">
+              <a:schemeClr val="accent1"/>
+            </a:lnRef>
+            <a:fillRef idx="3">
+              <a:schemeClr val="accent1"/>
+            </a:fillRef>
+            <a:effectRef idx="2">
+              <a:schemeClr val="accent1"/>
+            </a:effectRef>
+            <a:fontRef idx="minor">
+              <a:schemeClr val="lt1"/>
+            </a:fontRef>
+          </p:style>
+          <p:txBody>
+            <a:bodyPr rtlCol="0" anchor="ctr"/>
+            <a:lstStyle/>
+            <a:p/>
+          </p:txBody>
+        </p:sp>
+        <p:sp>
+          <p:nvSpPr>
+            <p:cNvPr id="326" name="Shape 18"/>
+            <p:cNvSpPr/>
+            <p:nvPr/>
+          </p:nvSpPr>
+          <p:spPr>
+            <a:xfrm>
+              <a:off x="6702552" y="5943600"/>
+              <a:ext cx="493776" cy="219456"/>
+            </a:xfrm>
+            <a:prstGeom prst="roundRect">
+              <a:avLst>
+                <a:gd name="adj" fmla="val 8000"/>
+              </a:avLst>
+            </a:prstGeom>
+            <a:noFill/>
+            <a:ln w="38100">
+              <a:solidFill>
+                <a:srgbClr val="FA8B35"/>
+              </a:solidFill>
+            </a:ln>
+            <a:effectLst/>
+          </p:spPr>
+          <p:style>
+            <a:lnRef idx="1">
+              <a:schemeClr val="accent1"/>
+            </a:lnRef>
+            <a:fillRef idx="3">
+              <a:schemeClr val="accent1"/>
+            </a:fillRef>
+            <a:effectRef idx="2">
+              <a:schemeClr val="accent1"/>
+            </a:effectRef>
+            <a:fontRef idx="minor">
+              <a:schemeClr val="lt1"/>
+            </a:fontRef>
+          </p:style>
+          <p:txBody>
+            <a:bodyPr rtlCol="0" anchor="ctr"/>
+            <a:lstStyle/>
+            <a:p/>
+          </p:txBody>
+        </p:sp>
+        <p:sp>
+          <p:nvSpPr>
+            <p:cNvPr id="327" name="Shape 19"/>
+            <p:cNvSpPr/>
+            <p:nvPr/>
+          </p:nvSpPr>
+          <p:spPr>
+            <a:xfrm>
+              <a:off x="8924544" y="5943600"/>
+              <a:ext cx="493776" cy="219456"/>
+            </a:xfrm>
+            <a:prstGeom prst="roundRect">
+              <a:avLst>
+                <a:gd name="adj" fmla="val 8000"/>
+              </a:avLst>
+            </a:prstGeom>
+            <a:noFill/>
+            <a:ln w="38100">
+              <a:solidFill>
+                <a:srgbClr val="FA8B35"/>
+              </a:solidFill>
+            </a:ln>
+            <a:effectLst/>
+          </p:spPr>
+          <p:style>
+            <a:lnRef idx="1">
+              <a:schemeClr val="accent1"/>
+            </a:lnRef>
+            <a:fillRef idx="3">
+              <a:schemeClr val="accent1"/>
+            </a:fillRef>
+            <a:effectRef idx="2">
+              <a:schemeClr val="accent1"/>
+            </a:effectRef>
+            <a:fontRef idx="minor">
+              <a:schemeClr val="lt1"/>
+            </a:fontRef>
+          </p:style>
+          <p:txBody>
+            <a:bodyPr rtlCol="0" anchor="ctr"/>
+            <a:lstStyle/>
+            <a:p/>
+          </p:txBody>
+        </p:sp>
+        <p:sp>
+          <p:nvSpPr>
+            <p:cNvPr id="328" name="Shape 20"/>
             <p:cNvSpPr/>
             <p:nvPr/>
           </p:nvSpPr>
@@ -15825,7 +16397,7 @@
         </p:sp>
         <p:sp>
           <p:nvSpPr>
-            <p:cNvPr id="316" name="Text 8"/>
+            <p:cNvPr id="329" name="Text 21"/>
             <p:cNvSpPr txBox="1"/>
             <p:nvPr/>
           </p:nvSpPr>
@@ -15882,7 +16454,7 @@
                   </a:solidFill>
                   <a:latin typeface="Trenda IG Text"/>
                 </a:rPr>
-                <a:t>Every output is scored before it moves on: does the journey match the brief, is every field real, are consent and STOP checks in place. A pass goes to the gate with the evidence.</a:t>
+                <a:t>Every output is scored before it moves on: does the journey match the brief, is every field real, are consent and STOP checks in place. Each step is evaluated and its score updated (the EVALS tags below); a pass goes to the gate with the evidence.</a:t>
               </a:r>
             </a:p>
           </p:txBody>
@@ -15890,21 +16462,21 @@
       </p:grpSp>
       <p:grpSp>
         <p:nvGrpSpPr>
-          <p:cNvPr id="317" name="Step 5 arrows"/>
+          <p:cNvPr id="330" name="Step 5 arrows"/>
           <p:cNvGrpSpPr/>
           <p:nvPr/>
         </p:nvGrpSpPr>
         <p:grpSpPr>
           <a:xfrm>
             <a:off x="4069080" y="3685032"/>
-            <a:ext cx="1801368" cy="484631"/>
+            <a:ext cx="7680960" cy="2459736"/>
             <a:chOff x="4069080" y="3685032"/>
-            <a:chExt cx="1801368" cy="484631"/>
+            <a:chExt cx="7680960" cy="2459736"/>
           </a:xfrm>
         </p:grpSpPr>
         <p:cxnSp>
           <p:nvCxnSpPr>
-            <p:cNvPr id="318" name="Arrow 1"/>
+            <p:cNvPr id="331" name="Arrow 1"/>
             <p:cNvCxnSpPr/>
             <p:nvPr/>
           </p:nvCxnSpPr>
@@ -15940,7 +16512,7 @@
         </p:cxnSp>
         <p:cxnSp>
           <p:nvCxnSpPr>
-            <p:cNvPr id="319" name="Arrow 2"/>
+            <p:cNvPr id="332" name="Arrow 2"/>
             <p:cNvCxnSpPr/>
             <p:nvPr/>
           </p:nvCxnSpPr>
@@ -15976,7 +16548,7 @@
         </p:cxnSp>
         <p:sp>
           <p:nvSpPr>
-            <p:cNvPr id="320" name="Shape 3"/>
+            <p:cNvPr id="333" name="Shape 3"/>
             <p:cNvSpPr/>
             <p:nvPr/>
           </p:nvSpPr>
@@ -16020,7 +16592,7 @@
         </p:sp>
         <p:sp>
           <p:nvSpPr>
-            <p:cNvPr id="321" name="Text 4"/>
+            <p:cNvPr id="334" name="Text 4"/>
             <p:cNvSpPr txBox="1"/>
             <p:nvPr/>
           </p:nvSpPr>
@@ -16053,24 +16625,103 @@
             </a:p>
           </p:txBody>
         </p:sp>
+        <p:sp>
+          <p:nvSpPr>
+            <p:cNvPr id="335" name="Shape 5"/>
+            <p:cNvSpPr/>
+            <p:nvPr/>
+          </p:nvSpPr>
+          <p:spPr>
+            <a:xfrm>
+              <a:off x="9601200" y="5961888"/>
+              <a:ext cx="2148840" cy="182880"/>
+            </a:xfrm>
+            <a:prstGeom prst="roundRect">
+              <a:avLst>
+                <a:gd name="adj" fmla="val 50000"/>
+              </a:avLst>
+            </a:prstGeom>
+            <a:solidFill>
+              <a:srgbClr val="000000"/>
+            </a:solidFill>
+            <a:ln>
+              <a:noFill/>
+            </a:ln>
+            <a:effectLst/>
+          </p:spPr>
+          <p:style>
+            <a:lnRef idx="1">
+              <a:schemeClr val="accent1"/>
+            </a:lnRef>
+            <a:fillRef idx="3">
+              <a:schemeClr val="accent1"/>
+            </a:fillRef>
+            <a:effectRef idx="2">
+              <a:schemeClr val="accent1"/>
+            </a:effectRef>
+            <a:fontRef idx="minor">
+              <a:schemeClr val="lt1"/>
+            </a:fontRef>
+          </p:style>
+          <p:txBody>
+            <a:bodyPr rtlCol="0" anchor="ctr"/>
+            <a:lstStyle/>
+            <a:p/>
+          </p:txBody>
+        </p:sp>
+        <p:sp>
+          <p:nvSpPr>
+            <p:cNvPr id="336" name="Text 6"/>
+            <p:cNvSpPr txBox="1"/>
+            <p:nvPr/>
+          </p:nvSpPr>
+          <p:spPr>
+            <a:xfrm>
+              <a:off x="9601200" y="5961888"/>
+              <a:ext cx="2148840" cy="182880"/>
+            </a:xfrm>
+            <a:prstGeom prst="rect">
+              <a:avLst/>
+            </a:prstGeom>
+            <a:noFill/>
+          </p:spPr>
+          <p:txBody>
+            <a:bodyPr wrap="square" lIns="0" rIns="0" tIns="0" bIns="0" anchor="ctr">
+              <a:spAutoFit/>
+            </a:bodyPr>
+            <a:lstStyle/>
+            <a:p>
+              <a:pPr algn="ctr"/>
+              <a:r>
+                <a:rPr sz="650" b="1" i="0" spc="60">
+                  <a:solidFill>
+                    <a:srgbClr val="FFFFFF"/>
+                  </a:solidFill>
+                  <a:latin typeface="Trenda IG Text"/>
+                </a:rPr>
+                <a:t>EVERY STEP SCORED · SCORE UPDATED</a:t>
+              </a:r>
+            </a:p>
+          </p:txBody>
+        </p:sp>
       </p:grpSp>
       <p:grpSp>
         <p:nvGrpSpPr>
-          <p:cNvPr id="322" name="Step 6 highlight"/>
+          <p:cNvPr id="337" name="Step 6 highlight"/>
           <p:cNvGrpSpPr/>
           <p:nvPr/>
         </p:nvGrpSpPr>
         <p:grpSpPr>
           <a:xfrm>
             <a:off x="365760" y="1115568"/>
-            <a:ext cx="11457432" cy="5239512"/>
+            <a:ext cx="11457432" cy="5239511"/>
             <a:chOff x="365760" y="1115568"/>
-            <a:chExt cx="11457432" cy="5239512"/>
+            <a:chExt cx="11457432" cy="5239511"/>
           </a:xfrm>
         </p:grpSpPr>
         <p:sp>
           <p:nvSpPr>
-            <p:cNvPr id="323" name="Shape 1"/>
+            <p:cNvPr id="338" name="Shape 1"/>
             <p:cNvSpPr/>
             <p:nvPr/>
           </p:nvSpPr>
@@ -16114,7 +16765,7 @@
         </p:sp>
         <p:sp>
           <p:nvSpPr>
-            <p:cNvPr id="324" name="Shape 2"/>
+            <p:cNvPr id="339" name="Shape 2"/>
             <p:cNvSpPr/>
             <p:nvPr/>
           </p:nvSpPr>
@@ -16158,7 +16809,7 @@
         </p:sp>
         <p:sp>
           <p:nvSpPr>
-            <p:cNvPr id="325" name="Shape 3"/>
+            <p:cNvPr id="340" name="Shape 3"/>
             <p:cNvSpPr/>
             <p:nvPr/>
           </p:nvSpPr>
@@ -16202,14 +16853,14 @@
         </p:sp>
         <p:sp>
           <p:nvSpPr>
-            <p:cNvPr id="326" name="Shape 4"/>
+            <p:cNvPr id="341" name="Shape 4"/>
             <p:cNvSpPr/>
             <p:nvPr/>
           </p:nvSpPr>
           <p:spPr>
             <a:xfrm>
               <a:off x="365760" y="4498848"/>
-              <a:ext cx="11457432" cy="1856232"/>
+              <a:ext cx="11457432" cy="1426464"/>
             </a:xfrm>
             <a:prstGeom prst="rect">
               <a:avLst/>
@@ -16246,7 +16897,315 @@
         </p:sp>
         <p:sp>
           <p:nvSpPr>
-            <p:cNvPr id="327" name="Shape 5"/>
+            <p:cNvPr id="342" name="Shape 5"/>
+            <p:cNvSpPr/>
+            <p:nvPr/>
+          </p:nvSpPr>
+          <p:spPr>
+            <a:xfrm>
+              <a:off x="365760" y="5925312"/>
+              <a:ext cx="9198864" cy="9143"/>
+            </a:xfrm>
+            <a:prstGeom prst="rect">
+              <a:avLst/>
+            </a:prstGeom>
+            <a:solidFill>
+              <a:srgbClr val="FFFFFF">
+                <a:alpha val="72000"/>
+              </a:srgbClr>
+            </a:solidFill>
+            <a:ln>
+              <a:noFill/>
+            </a:ln>
+            <a:effectLst/>
+          </p:spPr>
+          <p:style>
+            <a:lnRef idx="1">
+              <a:schemeClr val="accent1"/>
+            </a:lnRef>
+            <a:fillRef idx="3">
+              <a:schemeClr val="accent1"/>
+            </a:fillRef>
+            <a:effectRef idx="2">
+              <a:schemeClr val="accent1"/>
+            </a:effectRef>
+            <a:fontRef idx="minor">
+              <a:schemeClr val="lt1"/>
+            </a:fontRef>
+          </p:style>
+          <p:txBody>
+            <a:bodyPr rtlCol="0" anchor="ctr"/>
+            <a:lstStyle/>
+            <a:p/>
+          </p:txBody>
+        </p:sp>
+        <p:sp>
+          <p:nvSpPr>
+            <p:cNvPr id="343" name="Shape 6"/>
+            <p:cNvSpPr/>
+            <p:nvPr/>
+          </p:nvSpPr>
+          <p:spPr>
+            <a:xfrm>
+              <a:off x="11786616" y="5925312"/>
+              <a:ext cx="36575" cy="9143"/>
+            </a:xfrm>
+            <a:prstGeom prst="rect">
+              <a:avLst/>
+            </a:prstGeom>
+            <a:solidFill>
+              <a:srgbClr val="FFFFFF">
+                <a:alpha val="72000"/>
+              </a:srgbClr>
+            </a:solidFill>
+            <a:ln>
+              <a:noFill/>
+            </a:ln>
+            <a:effectLst/>
+          </p:spPr>
+          <p:style>
+            <a:lnRef idx="1">
+              <a:schemeClr val="accent1"/>
+            </a:lnRef>
+            <a:fillRef idx="3">
+              <a:schemeClr val="accent1"/>
+            </a:fillRef>
+            <a:effectRef idx="2">
+              <a:schemeClr val="accent1"/>
+            </a:effectRef>
+            <a:fontRef idx="minor">
+              <a:schemeClr val="lt1"/>
+            </a:fontRef>
+          </p:style>
+          <p:txBody>
+            <a:bodyPr rtlCol="0" anchor="ctr"/>
+            <a:lstStyle/>
+            <a:p/>
+          </p:txBody>
+        </p:sp>
+        <p:sp>
+          <p:nvSpPr>
+            <p:cNvPr id="344" name="Shape 7"/>
+            <p:cNvSpPr/>
+            <p:nvPr/>
+          </p:nvSpPr>
+          <p:spPr>
+            <a:xfrm>
+              <a:off x="365760" y="5934456"/>
+              <a:ext cx="1005840" cy="246887"/>
+            </a:xfrm>
+            <a:prstGeom prst="rect">
+              <a:avLst/>
+            </a:prstGeom>
+            <a:solidFill>
+              <a:srgbClr val="FFFFFF">
+                <a:alpha val="72000"/>
+              </a:srgbClr>
+            </a:solidFill>
+            <a:ln>
+              <a:noFill/>
+            </a:ln>
+            <a:effectLst/>
+          </p:spPr>
+          <p:style>
+            <a:lnRef idx="1">
+              <a:schemeClr val="accent1"/>
+            </a:lnRef>
+            <a:fillRef idx="3">
+              <a:schemeClr val="accent1"/>
+            </a:fillRef>
+            <a:effectRef idx="2">
+              <a:schemeClr val="accent1"/>
+            </a:effectRef>
+            <a:fontRef idx="minor">
+              <a:schemeClr val="lt1"/>
+            </a:fontRef>
+          </p:style>
+          <p:txBody>
+            <a:bodyPr rtlCol="0" anchor="ctr"/>
+            <a:lstStyle/>
+            <a:p/>
+          </p:txBody>
+        </p:sp>
+        <p:sp>
+          <p:nvSpPr>
+            <p:cNvPr id="345" name="Shape 8"/>
+            <p:cNvSpPr/>
+            <p:nvPr/>
+          </p:nvSpPr>
+          <p:spPr>
+            <a:xfrm>
+              <a:off x="11786616" y="5934456"/>
+              <a:ext cx="36575" cy="246887"/>
+            </a:xfrm>
+            <a:prstGeom prst="rect">
+              <a:avLst/>
+            </a:prstGeom>
+            <a:solidFill>
+              <a:srgbClr val="FFFFFF">
+                <a:alpha val="72000"/>
+              </a:srgbClr>
+            </a:solidFill>
+            <a:ln>
+              <a:noFill/>
+            </a:ln>
+            <a:effectLst/>
+          </p:spPr>
+          <p:style>
+            <a:lnRef idx="1">
+              <a:schemeClr val="accent1"/>
+            </a:lnRef>
+            <a:fillRef idx="3">
+              <a:schemeClr val="accent1"/>
+            </a:fillRef>
+            <a:effectRef idx="2">
+              <a:schemeClr val="accent1"/>
+            </a:effectRef>
+            <a:fontRef idx="minor">
+              <a:schemeClr val="lt1"/>
+            </a:fontRef>
+          </p:style>
+          <p:txBody>
+            <a:bodyPr rtlCol="0" anchor="ctr"/>
+            <a:lstStyle/>
+            <a:p/>
+          </p:txBody>
+        </p:sp>
+        <p:sp>
+          <p:nvSpPr>
+            <p:cNvPr id="346" name="Shape 9"/>
+            <p:cNvSpPr/>
+            <p:nvPr/>
+          </p:nvSpPr>
+          <p:spPr>
+            <a:xfrm>
+              <a:off x="365760" y="6181344"/>
+              <a:ext cx="1005840" cy="0"/>
+            </a:xfrm>
+            <a:prstGeom prst="rect">
+              <a:avLst/>
+            </a:prstGeom>
+            <a:solidFill>
+              <a:srgbClr val="FFFFFF">
+                <a:alpha val="72000"/>
+              </a:srgbClr>
+            </a:solidFill>
+            <a:ln>
+              <a:noFill/>
+            </a:ln>
+            <a:effectLst/>
+          </p:spPr>
+          <p:style>
+            <a:lnRef idx="1">
+              <a:schemeClr val="accent1"/>
+            </a:lnRef>
+            <a:fillRef idx="3">
+              <a:schemeClr val="accent1"/>
+            </a:fillRef>
+            <a:effectRef idx="2">
+              <a:schemeClr val="accent1"/>
+            </a:effectRef>
+            <a:fontRef idx="minor">
+              <a:schemeClr val="lt1"/>
+            </a:fontRef>
+          </p:style>
+          <p:txBody>
+            <a:bodyPr rtlCol="0" anchor="ctr"/>
+            <a:lstStyle/>
+            <a:p/>
+          </p:txBody>
+        </p:sp>
+        <p:sp>
+          <p:nvSpPr>
+            <p:cNvPr id="347" name="Shape 10"/>
+            <p:cNvSpPr/>
+            <p:nvPr/>
+          </p:nvSpPr>
+          <p:spPr>
+            <a:xfrm>
+              <a:off x="11786616" y="6181344"/>
+              <a:ext cx="36575" cy="0"/>
+            </a:xfrm>
+            <a:prstGeom prst="rect">
+              <a:avLst/>
+            </a:prstGeom>
+            <a:solidFill>
+              <a:srgbClr val="FFFFFF">
+                <a:alpha val="72000"/>
+              </a:srgbClr>
+            </a:solidFill>
+            <a:ln>
+              <a:noFill/>
+            </a:ln>
+            <a:effectLst/>
+          </p:spPr>
+          <p:style>
+            <a:lnRef idx="1">
+              <a:schemeClr val="accent1"/>
+            </a:lnRef>
+            <a:fillRef idx="3">
+              <a:schemeClr val="accent1"/>
+            </a:fillRef>
+            <a:effectRef idx="2">
+              <a:schemeClr val="accent1"/>
+            </a:effectRef>
+            <a:fontRef idx="minor">
+              <a:schemeClr val="lt1"/>
+            </a:fontRef>
+          </p:style>
+          <p:txBody>
+            <a:bodyPr rtlCol="0" anchor="ctr"/>
+            <a:lstStyle/>
+            <a:p/>
+          </p:txBody>
+        </p:sp>
+        <p:sp>
+          <p:nvSpPr>
+            <p:cNvPr id="348" name="Shape 11"/>
+            <p:cNvSpPr/>
+            <p:nvPr/>
+          </p:nvSpPr>
+          <p:spPr>
+            <a:xfrm>
+              <a:off x="365760" y="6181344"/>
+              <a:ext cx="11457432" cy="173735"/>
+            </a:xfrm>
+            <a:prstGeom prst="rect">
+              <a:avLst/>
+            </a:prstGeom>
+            <a:solidFill>
+              <a:srgbClr val="FFFFFF">
+                <a:alpha val="72000"/>
+              </a:srgbClr>
+            </a:solidFill>
+            <a:ln>
+              <a:noFill/>
+            </a:ln>
+            <a:effectLst/>
+          </p:spPr>
+          <p:style>
+            <a:lnRef idx="1">
+              <a:schemeClr val="accent1"/>
+            </a:lnRef>
+            <a:fillRef idx="3">
+              <a:schemeClr val="accent1"/>
+            </a:fillRef>
+            <a:effectRef idx="2">
+              <a:schemeClr val="accent1"/>
+            </a:effectRef>
+            <a:fontRef idx="minor">
+              <a:schemeClr val="lt1"/>
+            </a:fontRef>
+          </p:style>
+          <p:txBody>
+            <a:bodyPr rtlCol="0" anchor="ctr"/>
+            <a:lstStyle/>
+            <a:p/>
+          </p:txBody>
+        </p:sp>
+        <p:sp>
+          <p:nvSpPr>
+            <p:cNvPr id="349" name="Shape 12"/>
             <p:cNvSpPr/>
             <p:nvPr/>
           </p:nvSpPr>
@@ -16290,7 +17249,7 @@
         </p:sp>
         <p:sp>
           <p:nvSpPr>
-            <p:cNvPr id="328" name="Shape 6"/>
+            <p:cNvPr id="350" name="Shape 13"/>
             <p:cNvSpPr/>
             <p:nvPr/>
           </p:nvSpPr>
@@ -16334,7 +17293,271 @@
         </p:sp>
         <p:sp>
           <p:nvSpPr>
-            <p:cNvPr id="329" name="Shape 7"/>
+            <p:cNvPr id="351" name="Shape 14"/>
+            <p:cNvSpPr/>
+            <p:nvPr/>
+          </p:nvSpPr>
+          <p:spPr>
+            <a:xfrm>
+              <a:off x="1517904" y="5943600"/>
+              <a:ext cx="493776" cy="219456"/>
+            </a:xfrm>
+            <a:prstGeom prst="roundRect">
+              <a:avLst>
+                <a:gd name="adj" fmla="val 8000"/>
+              </a:avLst>
+            </a:prstGeom>
+            <a:noFill/>
+            <a:ln w="38100">
+              <a:solidFill>
+                <a:srgbClr val="FA8B35"/>
+              </a:solidFill>
+            </a:ln>
+            <a:effectLst/>
+          </p:spPr>
+          <p:style>
+            <a:lnRef idx="1">
+              <a:schemeClr val="accent1"/>
+            </a:lnRef>
+            <a:fillRef idx="3">
+              <a:schemeClr val="accent1"/>
+            </a:fillRef>
+            <a:effectRef idx="2">
+              <a:schemeClr val="accent1"/>
+            </a:effectRef>
+            <a:fontRef idx="minor">
+              <a:schemeClr val="lt1"/>
+            </a:fontRef>
+          </p:style>
+          <p:txBody>
+            <a:bodyPr rtlCol="0" anchor="ctr"/>
+            <a:lstStyle/>
+            <a:p/>
+          </p:txBody>
+        </p:sp>
+        <p:sp>
+          <p:nvSpPr>
+            <p:cNvPr id="352" name="Shape 15"/>
+            <p:cNvSpPr/>
+            <p:nvPr/>
+          </p:nvSpPr>
+          <p:spPr>
+            <a:xfrm>
+              <a:off x="2999232" y="5943600"/>
+              <a:ext cx="493776" cy="219456"/>
+            </a:xfrm>
+            <a:prstGeom prst="roundRect">
+              <a:avLst>
+                <a:gd name="adj" fmla="val 8000"/>
+              </a:avLst>
+            </a:prstGeom>
+            <a:noFill/>
+            <a:ln w="38100">
+              <a:solidFill>
+                <a:srgbClr val="FA8B35"/>
+              </a:solidFill>
+            </a:ln>
+            <a:effectLst/>
+          </p:spPr>
+          <p:style>
+            <a:lnRef idx="1">
+              <a:schemeClr val="accent1"/>
+            </a:lnRef>
+            <a:fillRef idx="3">
+              <a:schemeClr val="accent1"/>
+            </a:fillRef>
+            <a:effectRef idx="2">
+              <a:schemeClr val="accent1"/>
+            </a:effectRef>
+            <a:fontRef idx="minor">
+              <a:schemeClr val="lt1"/>
+            </a:fontRef>
+          </p:style>
+          <p:txBody>
+            <a:bodyPr rtlCol="0" anchor="ctr"/>
+            <a:lstStyle/>
+            <a:p/>
+          </p:txBody>
+        </p:sp>
+        <p:sp>
+          <p:nvSpPr>
+            <p:cNvPr id="353" name="Shape 16"/>
+            <p:cNvSpPr/>
+            <p:nvPr/>
+          </p:nvSpPr>
+          <p:spPr>
+            <a:xfrm>
+              <a:off x="4480560" y="5943600"/>
+              <a:ext cx="493776" cy="219456"/>
+            </a:xfrm>
+            <a:prstGeom prst="roundRect">
+              <a:avLst>
+                <a:gd name="adj" fmla="val 8000"/>
+              </a:avLst>
+            </a:prstGeom>
+            <a:noFill/>
+            <a:ln w="38100">
+              <a:solidFill>
+                <a:srgbClr val="FA8B35"/>
+              </a:solidFill>
+            </a:ln>
+            <a:effectLst/>
+          </p:spPr>
+          <p:style>
+            <a:lnRef idx="1">
+              <a:schemeClr val="accent1"/>
+            </a:lnRef>
+            <a:fillRef idx="3">
+              <a:schemeClr val="accent1"/>
+            </a:fillRef>
+            <a:effectRef idx="2">
+              <a:schemeClr val="accent1"/>
+            </a:effectRef>
+            <a:fontRef idx="minor">
+              <a:schemeClr val="lt1"/>
+            </a:fontRef>
+          </p:style>
+          <p:txBody>
+            <a:bodyPr rtlCol="0" anchor="ctr"/>
+            <a:lstStyle/>
+            <a:p/>
+          </p:txBody>
+        </p:sp>
+        <p:sp>
+          <p:nvSpPr>
+            <p:cNvPr id="354" name="Shape 17"/>
+            <p:cNvSpPr/>
+            <p:nvPr/>
+          </p:nvSpPr>
+          <p:spPr>
+            <a:xfrm>
+              <a:off x="5221224" y="5943600"/>
+              <a:ext cx="493776" cy="219456"/>
+            </a:xfrm>
+            <a:prstGeom prst="roundRect">
+              <a:avLst>
+                <a:gd name="adj" fmla="val 8000"/>
+              </a:avLst>
+            </a:prstGeom>
+            <a:noFill/>
+            <a:ln w="38100">
+              <a:solidFill>
+                <a:srgbClr val="FA8B35"/>
+              </a:solidFill>
+            </a:ln>
+            <a:effectLst/>
+          </p:spPr>
+          <p:style>
+            <a:lnRef idx="1">
+              <a:schemeClr val="accent1"/>
+            </a:lnRef>
+            <a:fillRef idx="3">
+              <a:schemeClr val="accent1"/>
+            </a:fillRef>
+            <a:effectRef idx="2">
+              <a:schemeClr val="accent1"/>
+            </a:effectRef>
+            <a:fontRef idx="minor">
+              <a:schemeClr val="lt1"/>
+            </a:fontRef>
+          </p:style>
+          <p:txBody>
+            <a:bodyPr rtlCol="0" anchor="ctr"/>
+            <a:lstStyle/>
+            <a:p/>
+          </p:txBody>
+        </p:sp>
+        <p:sp>
+          <p:nvSpPr>
+            <p:cNvPr id="355" name="Shape 18"/>
+            <p:cNvSpPr/>
+            <p:nvPr/>
+          </p:nvSpPr>
+          <p:spPr>
+            <a:xfrm>
+              <a:off x="6702552" y="5943600"/>
+              <a:ext cx="493776" cy="219456"/>
+            </a:xfrm>
+            <a:prstGeom prst="roundRect">
+              <a:avLst>
+                <a:gd name="adj" fmla="val 8000"/>
+              </a:avLst>
+            </a:prstGeom>
+            <a:noFill/>
+            <a:ln w="38100">
+              <a:solidFill>
+                <a:srgbClr val="FA8B35"/>
+              </a:solidFill>
+            </a:ln>
+            <a:effectLst/>
+          </p:spPr>
+          <p:style>
+            <a:lnRef idx="1">
+              <a:schemeClr val="accent1"/>
+            </a:lnRef>
+            <a:fillRef idx="3">
+              <a:schemeClr val="accent1"/>
+            </a:fillRef>
+            <a:effectRef idx="2">
+              <a:schemeClr val="accent1"/>
+            </a:effectRef>
+            <a:fontRef idx="minor">
+              <a:schemeClr val="lt1"/>
+            </a:fontRef>
+          </p:style>
+          <p:txBody>
+            <a:bodyPr rtlCol="0" anchor="ctr"/>
+            <a:lstStyle/>
+            <a:p/>
+          </p:txBody>
+        </p:sp>
+        <p:sp>
+          <p:nvSpPr>
+            <p:cNvPr id="356" name="Shape 19"/>
+            <p:cNvSpPr/>
+            <p:nvPr/>
+          </p:nvSpPr>
+          <p:spPr>
+            <a:xfrm>
+              <a:off x="8924544" y="5943600"/>
+              <a:ext cx="493776" cy="219456"/>
+            </a:xfrm>
+            <a:prstGeom prst="roundRect">
+              <a:avLst>
+                <a:gd name="adj" fmla="val 8000"/>
+              </a:avLst>
+            </a:prstGeom>
+            <a:noFill/>
+            <a:ln w="38100">
+              <a:solidFill>
+                <a:srgbClr val="FA8B35"/>
+              </a:solidFill>
+            </a:ln>
+            <a:effectLst/>
+          </p:spPr>
+          <p:style>
+            <a:lnRef idx="1">
+              <a:schemeClr val="accent1"/>
+            </a:lnRef>
+            <a:fillRef idx="3">
+              <a:schemeClr val="accent1"/>
+            </a:fillRef>
+            <a:effectRef idx="2">
+              <a:schemeClr val="accent1"/>
+            </a:effectRef>
+            <a:fontRef idx="minor">
+              <a:schemeClr val="lt1"/>
+            </a:fontRef>
+          </p:style>
+          <p:txBody>
+            <a:bodyPr rtlCol="0" anchor="ctr"/>
+            <a:lstStyle/>
+            <a:p/>
+          </p:txBody>
+        </p:sp>
+        <p:sp>
+          <p:nvSpPr>
+            <p:cNvPr id="357" name="Shape 20"/>
             <p:cNvSpPr/>
             <p:nvPr/>
           </p:nvSpPr>
@@ -16380,7 +17603,7 @@
         </p:sp>
         <p:sp>
           <p:nvSpPr>
-            <p:cNvPr id="330" name="Text 8"/>
+            <p:cNvPr id="358" name="Text 21"/>
             <p:cNvSpPr txBox="1"/>
             <p:nvPr/>
           </p:nvSpPr>
@@ -16445,21 +17668,21 @@
       </p:grpSp>
       <p:grpSp>
         <p:nvGrpSpPr>
-          <p:cNvPr id="331" name="Step 6 arrows"/>
+          <p:cNvPr id="359" name="Step 6 arrows"/>
           <p:cNvGrpSpPr/>
           <p:nvPr/>
         </p:nvGrpSpPr>
         <p:grpSpPr>
           <a:xfrm>
             <a:off x="4892040" y="3310128"/>
-            <a:ext cx="3959352" cy="1499616"/>
+            <a:ext cx="6858000" cy="2834640"/>
             <a:chOff x="4892040" y="3310128"/>
-            <a:chExt cx="3959352" cy="1499616"/>
+            <a:chExt cx="6858000" cy="2834640"/>
           </a:xfrm>
         </p:grpSpPr>
         <p:cxnSp>
           <p:nvCxnSpPr>
-            <p:cNvPr id="332" name="Arrow 1"/>
+            <p:cNvPr id="360" name="Arrow 1"/>
             <p:cNvCxnSpPr/>
             <p:nvPr/>
           </p:nvCxnSpPr>
@@ -16494,7 +17717,7 @@
         </p:cxnSp>
         <p:cxnSp>
           <p:nvCxnSpPr>
-            <p:cNvPr id="333" name="Arrow 2"/>
+            <p:cNvPr id="361" name="Arrow 2"/>
             <p:cNvCxnSpPr/>
             <p:nvPr/>
           </p:nvCxnSpPr>
@@ -16529,7 +17752,7 @@
         </p:cxnSp>
         <p:cxnSp>
           <p:nvCxnSpPr>
-            <p:cNvPr id="334" name="Arrow 3"/>
+            <p:cNvPr id="362" name="Arrow 3"/>
             <p:cNvCxnSpPr/>
             <p:nvPr/>
           </p:nvCxnSpPr>
@@ -16565,7 +17788,7 @@
         </p:cxnSp>
         <p:cxnSp>
           <p:nvCxnSpPr>
-            <p:cNvPr id="335" name="Arrow 4"/>
+            <p:cNvPr id="363" name="Arrow 4"/>
             <p:cNvCxnSpPr/>
             <p:nvPr/>
           </p:nvCxnSpPr>
@@ -16601,7 +17824,7 @@
         </p:cxnSp>
         <p:sp>
           <p:nvSpPr>
-            <p:cNvPr id="336" name="Shape 5"/>
+            <p:cNvPr id="364" name="Shape 5"/>
             <p:cNvSpPr/>
             <p:nvPr/>
           </p:nvSpPr>
@@ -16645,7 +17868,7 @@
         </p:sp>
         <p:sp>
           <p:nvSpPr>
-            <p:cNvPr id="337" name="Text 6"/>
+            <p:cNvPr id="365" name="Text 6"/>
             <p:cNvSpPr txBox="1"/>
             <p:nvPr/>
           </p:nvSpPr>
@@ -16680,7 +17903,7 @@
         </p:sp>
         <p:sp>
           <p:nvSpPr>
-            <p:cNvPr id="338" name="Shape 7"/>
+            <p:cNvPr id="366" name="Shape 7"/>
             <p:cNvSpPr/>
             <p:nvPr/>
           </p:nvSpPr>
@@ -16724,7 +17947,7 @@
         </p:sp>
         <p:sp>
           <p:nvSpPr>
-            <p:cNvPr id="339" name="Text 8"/>
+            <p:cNvPr id="367" name="Text 8"/>
             <p:cNvSpPr txBox="1"/>
             <p:nvPr/>
           </p:nvSpPr>
@@ -16757,10 +17980,89 @@
             </a:p>
           </p:txBody>
         </p:sp>
+        <p:sp>
+          <p:nvSpPr>
+            <p:cNvPr id="368" name="Shape 9"/>
+            <p:cNvSpPr/>
+            <p:nvPr/>
+          </p:nvSpPr>
+          <p:spPr>
+            <a:xfrm>
+              <a:off x="9601200" y="5961888"/>
+              <a:ext cx="2148840" cy="182880"/>
+            </a:xfrm>
+            <a:prstGeom prst="roundRect">
+              <a:avLst>
+                <a:gd name="adj" fmla="val 50000"/>
+              </a:avLst>
+            </a:prstGeom>
+            <a:solidFill>
+              <a:srgbClr val="000000"/>
+            </a:solidFill>
+            <a:ln>
+              <a:noFill/>
+            </a:ln>
+            <a:effectLst/>
+          </p:spPr>
+          <p:style>
+            <a:lnRef idx="1">
+              <a:schemeClr val="accent1"/>
+            </a:lnRef>
+            <a:fillRef idx="3">
+              <a:schemeClr val="accent1"/>
+            </a:fillRef>
+            <a:effectRef idx="2">
+              <a:schemeClr val="accent1"/>
+            </a:effectRef>
+            <a:fontRef idx="minor">
+              <a:schemeClr val="lt1"/>
+            </a:fontRef>
+          </p:style>
+          <p:txBody>
+            <a:bodyPr rtlCol="0" anchor="ctr"/>
+            <a:lstStyle/>
+            <a:p/>
+          </p:txBody>
+        </p:sp>
+        <p:sp>
+          <p:nvSpPr>
+            <p:cNvPr id="369" name="Text 10"/>
+            <p:cNvSpPr txBox="1"/>
+            <p:nvPr/>
+          </p:nvSpPr>
+          <p:spPr>
+            <a:xfrm>
+              <a:off x="9601200" y="5961888"/>
+              <a:ext cx="2148840" cy="182880"/>
+            </a:xfrm>
+            <a:prstGeom prst="rect">
+              <a:avLst/>
+            </a:prstGeom>
+            <a:noFill/>
+          </p:spPr>
+          <p:txBody>
+            <a:bodyPr wrap="square" lIns="0" rIns="0" tIns="0" bIns="0" anchor="ctr">
+              <a:spAutoFit/>
+            </a:bodyPr>
+            <a:lstStyle/>
+            <a:p>
+              <a:pPr algn="ctr"/>
+              <a:r>
+                <a:rPr sz="650" b="1" i="0" spc="60">
+                  <a:solidFill>
+                    <a:srgbClr val="FFFFFF"/>
+                  </a:solidFill>
+                  <a:latin typeface="Trenda IG Text"/>
+                </a:rPr>
+                <a:t>FAIL SCORED · RETRY RE-SCORED</a:t>
+              </a:r>
+            </a:p>
+          </p:txBody>
+        </p:sp>
       </p:grpSp>
       <p:grpSp>
         <p:nvGrpSpPr>
-          <p:cNvPr id="340" name="Step 7 highlight"/>
+          <p:cNvPr id="370" name="Step 7 highlight"/>
           <p:cNvGrpSpPr/>
           <p:nvPr/>
         </p:nvGrpSpPr>
@@ -16774,7 +18076,7 @@
         </p:grpSpPr>
         <p:sp>
           <p:nvSpPr>
-            <p:cNvPr id="341" name="Shape 1"/>
+            <p:cNvPr id="371" name="Shape 1"/>
             <p:cNvSpPr/>
             <p:nvPr/>
           </p:nvSpPr>
@@ -16818,7 +18120,7 @@
         </p:sp>
         <p:sp>
           <p:nvSpPr>
-            <p:cNvPr id="342" name="Shape 2"/>
+            <p:cNvPr id="372" name="Shape 2"/>
             <p:cNvSpPr/>
             <p:nvPr/>
           </p:nvSpPr>
@@ -16862,7 +18164,7 @@
         </p:sp>
         <p:sp>
           <p:nvSpPr>
-            <p:cNvPr id="343" name="Shape 3"/>
+            <p:cNvPr id="373" name="Shape 3"/>
             <p:cNvSpPr/>
             <p:nvPr/>
           </p:nvSpPr>
@@ -16906,7 +18208,7 @@
         </p:sp>
         <p:sp>
           <p:nvSpPr>
-            <p:cNvPr id="344" name="Shape 4"/>
+            <p:cNvPr id="374" name="Shape 4"/>
             <p:cNvSpPr/>
             <p:nvPr/>
           </p:nvSpPr>
@@ -16950,7 +18252,7 @@
         </p:sp>
         <p:sp>
           <p:nvSpPr>
-            <p:cNvPr id="345" name="Shape 5"/>
+            <p:cNvPr id="375" name="Shape 5"/>
             <p:cNvSpPr/>
             <p:nvPr/>
           </p:nvSpPr>
@@ -16994,7 +18296,7 @@
         </p:sp>
         <p:sp>
           <p:nvSpPr>
-            <p:cNvPr id="346" name="Shape 6"/>
+            <p:cNvPr id="376" name="Shape 6"/>
             <p:cNvSpPr/>
             <p:nvPr/>
           </p:nvSpPr>
@@ -17038,7 +18340,7 @@
         </p:sp>
         <p:sp>
           <p:nvSpPr>
-            <p:cNvPr id="347" name="Shape 7"/>
+            <p:cNvPr id="377" name="Shape 7"/>
             <p:cNvSpPr/>
             <p:nvPr/>
           </p:nvSpPr>
@@ -17082,7 +18384,7 @@
         </p:sp>
         <p:sp>
           <p:nvSpPr>
-            <p:cNvPr id="348" name="Shape 8"/>
+            <p:cNvPr id="378" name="Shape 8"/>
             <p:cNvSpPr/>
             <p:nvPr/>
           </p:nvSpPr>
@@ -17126,7 +18428,7 @@
         </p:sp>
         <p:sp>
           <p:nvSpPr>
-            <p:cNvPr id="349" name="Shape 9"/>
+            <p:cNvPr id="379" name="Shape 9"/>
             <p:cNvSpPr/>
             <p:nvPr/>
           </p:nvSpPr>
@@ -17170,7 +18472,7 @@
         </p:sp>
         <p:sp>
           <p:nvSpPr>
-            <p:cNvPr id="350" name="Shape 10"/>
+            <p:cNvPr id="380" name="Shape 10"/>
             <p:cNvSpPr/>
             <p:nvPr/>
           </p:nvSpPr>
@@ -17214,7 +18516,7 @@
         </p:sp>
         <p:sp>
           <p:nvSpPr>
-            <p:cNvPr id="351" name="Shape 11"/>
+            <p:cNvPr id="381" name="Shape 11"/>
             <p:cNvSpPr/>
             <p:nvPr/>
           </p:nvSpPr>
@@ -17258,7 +18560,7 @@
         </p:sp>
         <p:sp>
           <p:nvSpPr>
-            <p:cNvPr id="352" name="Shape 12"/>
+            <p:cNvPr id="382" name="Shape 12"/>
             <p:cNvSpPr/>
             <p:nvPr/>
           </p:nvSpPr>
@@ -17302,7 +18604,7 @@
         </p:sp>
         <p:sp>
           <p:nvSpPr>
-            <p:cNvPr id="353" name="Shape 13"/>
+            <p:cNvPr id="383" name="Shape 13"/>
             <p:cNvSpPr/>
             <p:nvPr/>
           </p:nvSpPr>
@@ -17346,7 +18648,7 @@
         </p:sp>
         <p:sp>
           <p:nvSpPr>
-            <p:cNvPr id="354" name="Shape 14"/>
+            <p:cNvPr id="384" name="Shape 14"/>
             <p:cNvSpPr/>
             <p:nvPr/>
           </p:nvSpPr>
@@ -17390,7 +18692,7 @@
         </p:sp>
         <p:sp>
           <p:nvSpPr>
-            <p:cNvPr id="355" name="Shape 15"/>
+            <p:cNvPr id="385" name="Shape 15"/>
             <p:cNvSpPr/>
             <p:nvPr/>
           </p:nvSpPr>
@@ -17434,7 +18736,7 @@
         </p:sp>
         <p:sp>
           <p:nvSpPr>
-            <p:cNvPr id="356" name="Shape 16"/>
+            <p:cNvPr id="386" name="Shape 16"/>
             <p:cNvSpPr/>
             <p:nvPr/>
           </p:nvSpPr>
@@ -17478,7 +18780,7 @@
         </p:sp>
         <p:sp>
           <p:nvSpPr>
-            <p:cNvPr id="357" name="Shape 17"/>
+            <p:cNvPr id="387" name="Shape 17"/>
             <p:cNvSpPr/>
             <p:nvPr/>
           </p:nvSpPr>
@@ -17522,7 +18824,7 @@
         </p:sp>
         <p:sp>
           <p:nvSpPr>
-            <p:cNvPr id="358" name="Shape 18"/>
+            <p:cNvPr id="388" name="Shape 18"/>
             <p:cNvSpPr/>
             <p:nvPr/>
           </p:nvSpPr>
@@ -17568,7 +18870,7 @@
         </p:sp>
         <p:sp>
           <p:nvSpPr>
-            <p:cNvPr id="359" name="Text 19"/>
+            <p:cNvPr id="389" name="Text 19"/>
             <p:cNvSpPr txBox="1"/>
             <p:nvPr/>
           </p:nvSpPr>
@@ -17633,7 +18935,7 @@
       </p:grpSp>
       <p:grpSp>
         <p:nvGrpSpPr>
-          <p:cNvPr id="360" name="Step 7 arrows"/>
+          <p:cNvPr id="390" name="Step 7 arrows"/>
           <p:cNvGrpSpPr/>
           <p:nvPr/>
         </p:nvGrpSpPr>
@@ -17647,7 +18949,7 @@
         </p:grpSpPr>
         <p:cxnSp>
           <p:nvCxnSpPr>
-            <p:cNvPr id="361" name="Arrow 1"/>
+            <p:cNvPr id="391" name="Arrow 1"/>
             <p:cNvCxnSpPr/>
             <p:nvPr/>
           </p:nvCxnSpPr>
@@ -17682,7 +18984,7 @@
         </p:cxnSp>
         <p:cxnSp>
           <p:nvCxnSpPr>
-            <p:cNvPr id="362" name="Arrow 2"/>
+            <p:cNvPr id="392" name="Arrow 2"/>
             <p:cNvCxnSpPr/>
             <p:nvPr/>
           </p:nvCxnSpPr>
@@ -17717,7 +19019,7 @@
         </p:cxnSp>
         <p:cxnSp>
           <p:nvCxnSpPr>
-            <p:cNvPr id="363" name="Arrow 3"/>
+            <p:cNvPr id="393" name="Arrow 3"/>
             <p:cNvCxnSpPr/>
             <p:nvPr/>
           </p:nvCxnSpPr>
@@ -17753,7 +19055,7 @@
         </p:cxnSp>
         <p:sp>
           <p:nvSpPr>
-            <p:cNvPr id="364" name="Shape 4"/>
+            <p:cNvPr id="394" name="Shape 4"/>
             <p:cNvSpPr/>
             <p:nvPr/>
           </p:nvSpPr>
@@ -17797,7 +19099,7 @@
         </p:sp>
         <p:sp>
           <p:nvSpPr>
-            <p:cNvPr id="365" name="Text 5"/>
+            <p:cNvPr id="395" name="Text 5"/>
             <p:cNvSpPr txBox="1"/>
             <p:nvPr/>
           </p:nvSpPr>
@@ -17833,7 +19135,7 @@
       </p:grpSp>
       <p:grpSp>
         <p:nvGrpSpPr>
-          <p:cNvPr id="366" name="Step 8 highlight"/>
+          <p:cNvPr id="396" name="Step 8 highlight"/>
           <p:cNvGrpSpPr/>
           <p:nvPr/>
         </p:nvGrpSpPr>
@@ -17847,7 +19149,7 @@
         </p:grpSpPr>
         <p:sp>
           <p:nvSpPr>
-            <p:cNvPr id="367" name="Shape 1"/>
+            <p:cNvPr id="397" name="Shape 1"/>
             <p:cNvSpPr/>
             <p:nvPr/>
           </p:nvSpPr>
@@ -17891,7 +19193,7 @@
         </p:sp>
         <p:sp>
           <p:nvSpPr>
-            <p:cNvPr id="368" name="Shape 2"/>
+            <p:cNvPr id="398" name="Shape 2"/>
             <p:cNvSpPr/>
             <p:nvPr/>
           </p:nvSpPr>
@@ -17935,7 +19237,7 @@
         </p:sp>
         <p:sp>
           <p:nvSpPr>
-            <p:cNvPr id="369" name="Shape 3"/>
+            <p:cNvPr id="399" name="Shape 3"/>
             <p:cNvSpPr/>
             <p:nvPr/>
           </p:nvSpPr>
@@ -17979,7 +19281,7 @@
         </p:sp>
         <p:sp>
           <p:nvSpPr>
-            <p:cNvPr id="370" name="Shape 4"/>
+            <p:cNvPr id="400" name="Shape 4"/>
             <p:cNvSpPr/>
             <p:nvPr/>
           </p:nvSpPr>
@@ -18023,7 +19325,7 @@
         </p:sp>
         <p:sp>
           <p:nvSpPr>
-            <p:cNvPr id="371" name="Shape 5"/>
+            <p:cNvPr id="401" name="Shape 5"/>
             <p:cNvSpPr/>
             <p:nvPr/>
           </p:nvSpPr>
@@ -18067,7 +19369,7 @@
         </p:sp>
         <p:sp>
           <p:nvSpPr>
-            <p:cNvPr id="372" name="Shape 6"/>
+            <p:cNvPr id="402" name="Shape 6"/>
             <p:cNvSpPr/>
             <p:nvPr/>
           </p:nvSpPr>
@@ -18111,7 +19413,7 @@
         </p:sp>
         <p:sp>
           <p:nvSpPr>
-            <p:cNvPr id="373" name="Shape 7"/>
+            <p:cNvPr id="403" name="Shape 7"/>
             <p:cNvSpPr/>
             <p:nvPr/>
           </p:nvSpPr>
@@ -18155,7 +19457,7 @@
         </p:sp>
         <p:sp>
           <p:nvSpPr>
-            <p:cNvPr id="374" name="Shape 8"/>
+            <p:cNvPr id="404" name="Shape 8"/>
             <p:cNvSpPr/>
             <p:nvPr/>
           </p:nvSpPr>
@@ -18199,7 +19501,7 @@
         </p:sp>
         <p:sp>
           <p:nvSpPr>
-            <p:cNvPr id="375" name="Shape 9"/>
+            <p:cNvPr id="405" name="Shape 9"/>
             <p:cNvSpPr/>
             <p:nvPr/>
           </p:nvSpPr>
@@ -18243,7 +19545,7 @@
         </p:sp>
         <p:sp>
           <p:nvSpPr>
-            <p:cNvPr id="376" name="Shape 10"/>
+            <p:cNvPr id="406" name="Shape 10"/>
             <p:cNvSpPr/>
             <p:nvPr/>
           </p:nvSpPr>
@@ -18287,7 +19589,7 @@
         </p:sp>
         <p:sp>
           <p:nvSpPr>
-            <p:cNvPr id="377" name="Shape 11"/>
+            <p:cNvPr id="407" name="Shape 11"/>
             <p:cNvSpPr/>
             <p:nvPr/>
           </p:nvSpPr>
@@ -18331,7 +19633,7 @@
         </p:sp>
         <p:sp>
           <p:nvSpPr>
-            <p:cNvPr id="378" name="Shape 12"/>
+            <p:cNvPr id="408" name="Shape 12"/>
             <p:cNvSpPr/>
             <p:nvPr/>
           </p:nvSpPr>
@@ -18375,7 +19677,7 @@
         </p:sp>
         <p:sp>
           <p:nvSpPr>
-            <p:cNvPr id="379" name="Shape 13"/>
+            <p:cNvPr id="409" name="Shape 13"/>
             <p:cNvSpPr/>
             <p:nvPr/>
           </p:nvSpPr>
@@ -18419,7 +19721,7 @@
         </p:sp>
         <p:sp>
           <p:nvSpPr>
-            <p:cNvPr id="380" name="Shape 14"/>
+            <p:cNvPr id="410" name="Shape 14"/>
             <p:cNvSpPr/>
             <p:nvPr/>
           </p:nvSpPr>
@@ -18463,7 +19765,7 @@
         </p:sp>
         <p:sp>
           <p:nvSpPr>
-            <p:cNvPr id="381" name="Shape 15"/>
+            <p:cNvPr id="411" name="Shape 15"/>
             <p:cNvSpPr/>
             <p:nvPr/>
           </p:nvSpPr>
@@ -18507,7 +19809,7 @@
         </p:sp>
         <p:sp>
           <p:nvSpPr>
-            <p:cNvPr id="382" name="Shape 16"/>
+            <p:cNvPr id="412" name="Shape 16"/>
             <p:cNvSpPr/>
             <p:nvPr/>
           </p:nvSpPr>
@@ -18551,7 +19853,7 @@
         </p:sp>
         <p:sp>
           <p:nvSpPr>
-            <p:cNvPr id="383" name="Shape 17"/>
+            <p:cNvPr id="413" name="Shape 17"/>
             <p:cNvSpPr/>
             <p:nvPr/>
           </p:nvSpPr>
@@ -18595,7 +19897,7 @@
         </p:sp>
         <p:sp>
           <p:nvSpPr>
-            <p:cNvPr id="384" name="Shape 18"/>
+            <p:cNvPr id="414" name="Shape 18"/>
             <p:cNvSpPr/>
             <p:nvPr/>
           </p:nvSpPr>
@@ -18639,7 +19941,7 @@
         </p:sp>
         <p:sp>
           <p:nvSpPr>
-            <p:cNvPr id="385" name="Shape 19"/>
+            <p:cNvPr id="415" name="Shape 19"/>
             <p:cNvSpPr/>
             <p:nvPr/>
           </p:nvSpPr>
@@ -18683,7 +19985,7 @@
         </p:sp>
         <p:sp>
           <p:nvSpPr>
-            <p:cNvPr id="386" name="Shape 20"/>
+            <p:cNvPr id="416" name="Shape 20"/>
             <p:cNvSpPr/>
             <p:nvPr/>
           </p:nvSpPr>
@@ -18727,7 +20029,7 @@
         </p:sp>
         <p:sp>
           <p:nvSpPr>
-            <p:cNvPr id="387" name="Shape 21"/>
+            <p:cNvPr id="417" name="Shape 21"/>
             <p:cNvSpPr/>
             <p:nvPr/>
           </p:nvSpPr>
@@ -18771,7 +20073,7 @@
         </p:sp>
         <p:sp>
           <p:nvSpPr>
-            <p:cNvPr id="388" name="Shape 22"/>
+            <p:cNvPr id="418" name="Shape 22"/>
             <p:cNvSpPr/>
             <p:nvPr/>
           </p:nvSpPr>
@@ -18815,7 +20117,7 @@
         </p:sp>
         <p:sp>
           <p:nvSpPr>
-            <p:cNvPr id="389" name="Shape 23"/>
+            <p:cNvPr id="419" name="Shape 23"/>
             <p:cNvSpPr/>
             <p:nvPr/>
           </p:nvSpPr>
@@ -18859,7 +20161,7 @@
         </p:sp>
         <p:sp>
           <p:nvSpPr>
-            <p:cNvPr id="390" name="Shape 24"/>
+            <p:cNvPr id="420" name="Shape 24"/>
             <p:cNvSpPr/>
             <p:nvPr/>
           </p:nvSpPr>
@@ -18905,7 +20207,7 @@
         </p:sp>
         <p:sp>
           <p:nvSpPr>
-            <p:cNvPr id="391" name="Text 25"/>
+            <p:cNvPr id="421" name="Text 25"/>
             <p:cNvSpPr txBox="1"/>
             <p:nvPr/>
           </p:nvSpPr>
@@ -18970,7 +20272,7 @@
       </p:grpSp>
       <p:grpSp>
         <p:nvGrpSpPr>
-          <p:cNvPr id="392" name="Step 8 arrows"/>
+          <p:cNvPr id="422" name="Step 8 arrows"/>
           <p:cNvGrpSpPr/>
           <p:nvPr/>
         </p:nvGrpSpPr>
@@ -18984,7 +20286,7 @@
         </p:grpSpPr>
         <p:cxnSp>
           <p:nvCxnSpPr>
-            <p:cNvPr id="393" name="Arrow 1"/>
+            <p:cNvPr id="423" name="Arrow 1"/>
             <p:cNvCxnSpPr/>
             <p:nvPr/>
           </p:nvCxnSpPr>
@@ -19019,7 +20321,7 @@
         </p:cxnSp>
         <p:cxnSp>
           <p:nvCxnSpPr>
-            <p:cNvPr id="394" name="Arrow 2"/>
+            <p:cNvPr id="424" name="Arrow 2"/>
             <p:cNvCxnSpPr/>
             <p:nvPr/>
           </p:nvCxnSpPr>
@@ -19054,7 +20356,7 @@
         </p:cxnSp>
         <p:cxnSp>
           <p:nvCxnSpPr>
-            <p:cNvPr id="395" name="Arrow 3"/>
+            <p:cNvPr id="425" name="Arrow 3"/>
             <p:cNvCxnSpPr/>
             <p:nvPr/>
           </p:nvCxnSpPr>
@@ -19090,7 +20392,7 @@
         </p:cxnSp>
         <p:sp>
           <p:nvSpPr>
-            <p:cNvPr id="396" name="Shape 4"/>
+            <p:cNvPr id="426" name="Shape 4"/>
             <p:cNvSpPr/>
             <p:nvPr/>
           </p:nvSpPr>
@@ -19134,7 +20436,7 @@
         </p:sp>
         <p:sp>
           <p:nvSpPr>
-            <p:cNvPr id="397" name="Text 5"/>
+            <p:cNvPr id="427" name="Text 5"/>
             <p:cNvSpPr txBox="1"/>
             <p:nvPr/>
           </p:nvSpPr>
@@ -19170,7 +20472,7 @@
       </p:grpSp>
       <p:grpSp>
         <p:nvGrpSpPr>
-          <p:cNvPr id="398" name="Step 9 highlight"/>
+          <p:cNvPr id="428" name="Step 9 highlight"/>
           <p:cNvGrpSpPr/>
           <p:nvPr/>
         </p:nvGrpSpPr>
@@ -19184,7 +20486,7 @@
         </p:grpSpPr>
         <p:sp>
           <p:nvSpPr>
-            <p:cNvPr id="399" name="Shape 1"/>
+            <p:cNvPr id="429" name="Shape 1"/>
             <p:cNvSpPr/>
             <p:nvPr/>
           </p:nvSpPr>
@@ -19228,7 +20530,7 @@
         </p:sp>
         <p:sp>
           <p:nvSpPr>
-            <p:cNvPr id="400" name="Shape 2"/>
+            <p:cNvPr id="430" name="Shape 2"/>
             <p:cNvSpPr/>
             <p:nvPr/>
           </p:nvSpPr>
@@ -19272,7 +20574,7 @@
         </p:sp>
         <p:sp>
           <p:nvSpPr>
-            <p:cNvPr id="401" name="Shape 3"/>
+            <p:cNvPr id="431" name="Shape 3"/>
             <p:cNvSpPr/>
             <p:nvPr/>
           </p:nvSpPr>
@@ -19316,7 +20618,7 @@
         </p:sp>
         <p:sp>
           <p:nvSpPr>
-            <p:cNvPr id="402" name="Shape 4"/>
+            <p:cNvPr id="432" name="Shape 4"/>
             <p:cNvSpPr/>
             <p:nvPr/>
           </p:nvSpPr>
@@ -19360,7 +20662,7 @@
         </p:sp>
         <p:sp>
           <p:nvSpPr>
-            <p:cNvPr id="403" name="Shape 5"/>
+            <p:cNvPr id="433" name="Shape 5"/>
             <p:cNvSpPr/>
             <p:nvPr/>
           </p:nvSpPr>
@@ -19404,7 +20706,7 @@
         </p:sp>
         <p:sp>
           <p:nvSpPr>
-            <p:cNvPr id="404" name="Shape 6"/>
+            <p:cNvPr id="434" name="Shape 6"/>
             <p:cNvSpPr/>
             <p:nvPr/>
           </p:nvSpPr>
@@ -19448,7 +20750,7 @@
         </p:sp>
         <p:sp>
           <p:nvSpPr>
-            <p:cNvPr id="405" name="Shape 7"/>
+            <p:cNvPr id="435" name="Shape 7"/>
             <p:cNvSpPr/>
             <p:nvPr/>
           </p:nvSpPr>
@@ -19492,7 +20794,7 @@
         </p:sp>
         <p:sp>
           <p:nvSpPr>
-            <p:cNvPr id="406" name="Shape 8"/>
+            <p:cNvPr id="436" name="Shape 8"/>
             <p:cNvSpPr/>
             <p:nvPr/>
           </p:nvSpPr>
@@ -19536,7 +20838,7 @@
         </p:sp>
         <p:sp>
           <p:nvSpPr>
-            <p:cNvPr id="407" name="Shape 9"/>
+            <p:cNvPr id="437" name="Shape 9"/>
             <p:cNvSpPr/>
             <p:nvPr/>
           </p:nvSpPr>
@@ -19580,7 +20882,7 @@
         </p:sp>
         <p:sp>
           <p:nvSpPr>
-            <p:cNvPr id="408" name="Shape 10"/>
+            <p:cNvPr id="438" name="Shape 10"/>
             <p:cNvSpPr/>
             <p:nvPr/>
           </p:nvSpPr>
@@ -19624,7 +20926,7 @@
         </p:sp>
         <p:sp>
           <p:nvSpPr>
-            <p:cNvPr id="409" name="Shape 11"/>
+            <p:cNvPr id="439" name="Shape 11"/>
             <p:cNvSpPr/>
             <p:nvPr/>
           </p:nvSpPr>
@@ -19668,7 +20970,7 @@
         </p:sp>
         <p:sp>
           <p:nvSpPr>
-            <p:cNvPr id="410" name="Shape 12"/>
+            <p:cNvPr id="440" name="Shape 12"/>
             <p:cNvSpPr/>
             <p:nvPr/>
           </p:nvSpPr>
@@ -19712,7 +21014,7 @@
         </p:sp>
         <p:sp>
           <p:nvSpPr>
-            <p:cNvPr id="411" name="Shape 13"/>
+            <p:cNvPr id="441" name="Shape 13"/>
             <p:cNvSpPr/>
             <p:nvPr/>
           </p:nvSpPr>
@@ -19756,7 +21058,7 @@
         </p:sp>
         <p:sp>
           <p:nvSpPr>
-            <p:cNvPr id="412" name="Shape 14"/>
+            <p:cNvPr id="442" name="Shape 14"/>
             <p:cNvSpPr/>
             <p:nvPr/>
           </p:nvSpPr>
@@ -19800,7 +21102,7 @@
         </p:sp>
         <p:sp>
           <p:nvSpPr>
-            <p:cNvPr id="413" name="Shape 15"/>
+            <p:cNvPr id="443" name="Shape 15"/>
             <p:cNvSpPr/>
             <p:nvPr/>
           </p:nvSpPr>
@@ -19844,7 +21146,7 @@
         </p:sp>
         <p:sp>
           <p:nvSpPr>
-            <p:cNvPr id="414" name="Shape 16"/>
+            <p:cNvPr id="444" name="Shape 16"/>
             <p:cNvSpPr/>
             <p:nvPr/>
           </p:nvSpPr>
@@ -19888,7 +21190,7 @@
         </p:sp>
         <p:sp>
           <p:nvSpPr>
-            <p:cNvPr id="415" name="Shape 17"/>
+            <p:cNvPr id="445" name="Shape 17"/>
             <p:cNvSpPr/>
             <p:nvPr/>
           </p:nvSpPr>
@@ -19932,7 +21234,7 @@
         </p:sp>
         <p:sp>
           <p:nvSpPr>
-            <p:cNvPr id="416" name="Shape 18"/>
+            <p:cNvPr id="446" name="Shape 18"/>
             <p:cNvSpPr/>
             <p:nvPr/>
           </p:nvSpPr>
@@ -19976,7 +21278,7 @@
         </p:sp>
         <p:sp>
           <p:nvSpPr>
-            <p:cNvPr id="417" name="Shape 19"/>
+            <p:cNvPr id="447" name="Shape 19"/>
             <p:cNvSpPr/>
             <p:nvPr/>
           </p:nvSpPr>
@@ -20020,7 +21322,7 @@
         </p:sp>
         <p:sp>
           <p:nvSpPr>
-            <p:cNvPr id="418" name="Shape 20"/>
+            <p:cNvPr id="448" name="Shape 20"/>
             <p:cNvSpPr/>
             <p:nvPr/>
           </p:nvSpPr>
@@ -20064,7 +21366,7 @@
         </p:sp>
         <p:sp>
           <p:nvSpPr>
-            <p:cNvPr id="419" name="Shape 21"/>
+            <p:cNvPr id="449" name="Shape 21"/>
             <p:cNvSpPr/>
             <p:nvPr/>
           </p:nvSpPr>
@@ -20108,7 +21410,7 @@
         </p:sp>
         <p:sp>
           <p:nvSpPr>
-            <p:cNvPr id="420" name="Shape 22"/>
+            <p:cNvPr id="450" name="Shape 22"/>
             <p:cNvSpPr/>
             <p:nvPr/>
           </p:nvSpPr>
@@ -20152,7 +21454,7 @@
         </p:sp>
         <p:sp>
           <p:nvSpPr>
-            <p:cNvPr id="421" name="Shape 23"/>
+            <p:cNvPr id="451" name="Shape 23"/>
             <p:cNvSpPr/>
             <p:nvPr/>
           </p:nvSpPr>
@@ -20196,7 +21498,7 @@
         </p:sp>
         <p:sp>
           <p:nvSpPr>
-            <p:cNvPr id="422" name="Shape 24"/>
+            <p:cNvPr id="452" name="Shape 24"/>
             <p:cNvSpPr/>
             <p:nvPr/>
           </p:nvSpPr>
@@ -20240,7 +21542,7 @@
         </p:sp>
         <p:sp>
           <p:nvSpPr>
-            <p:cNvPr id="423" name="Shape 25"/>
+            <p:cNvPr id="453" name="Shape 25"/>
             <p:cNvSpPr/>
             <p:nvPr/>
           </p:nvSpPr>
@@ -20284,7 +21586,7 @@
         </p:sp>
         <p:sp>
           <p:nvSpPr>
-            <p:cNvPr id="424" name="Shape 26"/>
+            <p:cNvPr id="454" name="Shape 26"/>
             <p:cNvSpPr/>
             <p:nvPr/>
           </p:nvSpPr>
@@ -20328,7 +21630,7 @@
         </p:sp>
         <p:sp>
           <p:nvSpPr>
-            <p:cNvPr id="425" name="Shape 27"/>
+            <p:cNvPr id="455" name="Shape 27"/>
             <p:cNvSpPr/>
             <p:nvPr/>
           </p:nvSpPr>
@@ -20372,7 +21674,7 @@
         </p:sp>
         <p:sp>
           <p:nvSpPr>
-            <p:cNvPr id="426" name="Shape 28"/>
+            <p:cNvPr id="456" name="Shape 28"/>
             <p:cNvSpPr/>
             <p:nvPr/>
           </p:nvSpPr>
@@ -20416,7 +21718,7 @@
         </p:sp>
         <p:sp>
           <p:nvSpPr>
-            <p:cNvPr id="427" name="Shape 29"/>
+            <p:cNvPr id="457" name="Shape 29"/>
             <p:cNvSpPr/>
             <p:nvPr/>
           </p:nvSpPr>
@@ -20460,7 +21762,7 @@
         </p:sp>
         <p:sp>
           <p:nvSpPr>
-            <p:cNvPr id="428" name="Shape 30"/>
+            <p:cNvPr id="458" name="Shape 30"/>
             <p:cNvSpPr/>
             <p:nvPr/>
           </p:nvSpPr>
@@ -20504,7 +21806,7 @@
         </p:sp>
         <p:sp>
           <p:nvSpPr>
-            <p:cNvPr id="429" name="Shape 31"/>
+            <p:cNvPr id="459" name="Shape 31"/>
             <p:cNvSpPr/>
             <p:nvPr/>
           </p:nvSpPr>
@@ -20548,7 +21850,7 @@
         </p:sp>
         <p:sp>
           <p:nvSpPr>
-            <p:cNvPr id="430" name="Shape 32"/>
+            <p:cNvPr id="460" name="Shape 32"/>
             <p:cNvSpPr/>
             <p:nvPr/>
           </p:nvSpPr>
@@ -20594,7 +21896,7 @@
         </p:sp>
         <p:sp>
           <p:nvSpPr>
-            <p:cNvPr id="431" name="Text 33"/>
+            <p:cNvPr id="461" name="Text 33"/>
             <p:cNvSpPr txBox="1"/>
             <p:nvPr/>
           </p:nvSpPr>
@@ -20659,7 +21961,7 @@
       </p:grpSp>
       <p:grpSp>
         <p:nvGrpSpPr>
-          <p:cNvPr id="432" name="Step 9 arrows"/>
+          <p:cNvPr id="462" name="Step 9 arrows"/>
           <p:cNvGrpSpPr/>
           <p:nvPr/>
         </p:nvGrpSpPr>
@@ -20673,7 +21975,7 @@
         </p:grpSpPr>
         <p:cxnSp>
           <p:nvCxnSpPr>
-            <p:cNvPr id="433" name="Arrow 1"/>
+            <p:cNvPr id="463" name="Arrow 1"/>
             <p:cNvCxnSpPr/>
             <p:nvPr/>
           </p:nvCxnSpPr>
@@ -20708,7 +22010,7 @@
         </p:cxnSp>
         <p:cxnSp>
           <p:nvCxnSpPr>
-            <p:cNvPr id="434" name="Arrow 2"/>
+            <p:cNvPr id="464" name="Arrow 2"/>
             <p:cNvCxnSpPr/>
             <p:nvPr/>
           </p:nvCxnSpPr>
@@ -20743,7 +22045,7 @@
         </p:cxnSp>
         <p:cxnSp>
           <p:nvCxnSpPr>
-            <p:cNvPr id="435" name="Arrow 3"/>
+            <p:cNvPr id="465" name="Arrow 3"/>
             <p:cNvCxnSpPr/>
             <p:nvPr/>
           </p:nvCxnSpPr>
@@ -20779,7 +22081,7 @@
         </p:cxnSp>
         <p:sp>
           <p:nvSpPr>
-            <p:cNvPr id="436" name="Shape 4"/>
+            <p:cNvPr id="466" name="Shape 4"/>
             <p:cNvSpPr/>
             <p:nvPr/>
           </p:nvSpPr>
@@ -20823,7 +22125,7 @@
         </p:sp>
         <p:sp>
           <p:nvSpPr>
-            <p:cNvPr id="437" name="Text 5"/>
+            <p:cNvPr id="467" name="Text 5"/>
             <p:cNvSpPr txBox="1"/>
             <p:nvPr/>
           </p:nvSpPr>
@@ -20859,7 +22161,7 @@
       </p:grpSp>
       <p:grpSp>
         <p:nvGrpSpPr>
-          <p:cNvPr id="438" name="Step 10 highlight"/>
+          <p:cNvPr id="468" name="Step 10 highlight"/>
           <p:cNvGrpSpPr/>
           <p:nvPr/>
         </p:nvGrpSpPr>
@@ -20873,7 +22175,7 @@
         </p:grpSpPr>
         <p:sp>
           <p:nvSpPr>
-            <p:cNvPr id="439" name="Shape 1"/>
+            <p:cNvPr id="469" name="Shape 1"/>
             <p:cNvSpPr/>
             <p:nvPr/>
           </p:nvSpPr>
@@ -20917,7 +22219,7 @@
         </p:sp>
         <p:sp>
           <p:nvSpPr>
-            <p:cNvPr id="440" name="Shape 2"/>
+            <p:cNvPr id="470" name="Shape 2"/>
             <p:cNvSpPr/>
             <p:nvPr/>
           </p:nvSpPr>
@@ -20961,7 +22263,7 @@
         </p:sp>
         <p:sp>
           <p:nvSpPr>
-            <p:cNvPr id="441" name="Shape 3"/>
+            <p:cNvPr id="471" name="Shape 3"/>
             <p:cNvSpPr/>
             <p:nvPr/>
           </p:nvSpPr>
@@ -21005,7 +22307,7 @@
         </p:sp>
         <p:sp>
           <p:nvSpPr>
-            <p:cNvPr id="442" name="Shape 4"/>
+            <p:cNvPr id="472" name="Shape 4"/>
             <p:cNvSpPr/>
             <p:nvPr/>
           </p:nvSpPr>
@@ -21049,7 +22351,7 @@
         </p:sp>
         <p:sp>
           <p:nvSpPr>
-            <p:cNvPr id="443" name="Shape 5"/>
+            <p:cNvPr id="473" name="Shape 5"/>
             <p:cNvSpPr/>
             <p:nvPr/>
           </p:nvSpPr>
@@ -21093,7 +22395,7 @@
         </p:sp>
         <p:sp>
           <p:nvSpPr>
-            <p:cNvPr id="444" name="Shape 6"/>
+            <p:cNvPr id="474" name="Shape 6"/>
             <p:cNvSpPr/>
             <p:nvPr/>
           </p:nvSpPr>
@@ -21137,7 +22439,7 @@
         </p:sp>
         <p:sp>
           <p:nvSpPr>
-            <p:cNvPr id="445" name="Shape 7"/>
+            <p:cNvPr id="475" name="Shape 7"/>
             <p:cNvSpPr/>
             <p:nvPr/>
           </p:nvSpPr>
@@ -21181,7 +22483,7 @@
         </p:sp>
         <p:sp>
           <p:nvSpPr>
-            <p:cNvPr id="446" name="Shape 8"/>
+            <p:cNvPr id="476" name="Shape 8"/>
             <p:cNvSpPr/>
             <p:nvPr/>
           </p:nvSpPr>
@@ -21225,7 +22527,7 @@
         </p:sp>
         <p:sp>
           <p:nvSpPr>
-            <p:cNvPr id="447" name="Shape 9"/>
+            <p:cNvPr id="477" name="Shape 9"/>
             <p:cNvSpPr/>
             <p:nvPr/>
           </p:nvSpPr>
@@ -21269,7 +22571,7 @@
         </p:sp>
         <p:sp>
           <p:nvSpPr>
-            <p:cNvPr id="448" name="Shape 10"/>
+            <p:cNvPr id="478" name="Shape 10"/>
             <p:cNvSpPr/>
             <p:nvPr/>
           </p:nvSpPr>
@@ -21313,7 +22615,7 @@
         </p:sp>
         <p:sp>
           <p:nvSpPr>
-            <p:cNvPr id="449" name="Shape 11"/>
+            <p:cNvPr id="479" name="Shape 11"/>
             <p:cNvSpPr/>
             <p:nvPr/>
           </p:nvSpPr>
@@ -21357,7 +22659,7 @@
         </p:sp>
         <p:sp>
           <p:nvSpPr>
-            <p:cNvPr id="450" name="Shape 12"/>
+            <p:cNvPr id="480" name="Shape 12"/>
             <p:cNvSpPr/>
             <p:nvPr/>
           </p:nvSpPr>
@@ -21401,7 +22703,7 @@
         </p:sp>
         <p:sp>
           <p:nvSpPr>
-            <p:cNvPr id="451" name="Shape 13"/>
+            <p:cNvPr id="481" name="Shape 13"/>
             <p:cNvSpPr/>
             <p:nvPr/>
           </p:nvSpPr>
@@ -21445,7 +22747,7 @@
         </p:sp>
         <p:sp>
           <p:nvSpPr>
-            <p:cNvPr id="452" name="Shape 14"/>
+            <p:cNvPr id="482" name="Shape 14"/>
             <p:cNvSpPr/>
             <p:nvPr/>
           </p:nvSpPr>
@@ -21489,7 +22791,7 @@
         </p:sp>
         <p:sp>
           <p:nvSpPr>
-            <p:cNvPr id="453" name="Shape 15"/>
+            <p:cNvPr id="483" name="Shape 15"/>
             <p:cNvSpPr/>
             <p:nvPr/>
           </p:nvSpPr>
@@ -21533,7 +22835,7 @@
         </p:sp>
         <p:sp>
           <p:nvSpPr>
-            <p:cNvPr id="454" name="Shape 16"/>
+            <p:cNvPr id="484" name="Shape 16"/>
             <p:cNvSpPr/>
             <p:nvPr/>
           </p:nvSpPr>
@@ -21577,7 +22879,7 @@
         </p:sp>
         <p:sp>
           <p:nvSpPr>
-            <p:cNvPr id="455" name="Shape 17"/>
+            <p:cNvPr id="485" name="Shape 17"/>
             <p:cNvSpPr/>
             <p:nvPr/>
           </p:nvSpPr>
@@ -21621,7 +22923,7 @@
         </p:sp>
         <p:sp>
           <p:nvSpPr>
-            <p:cNvPr id="456" name="Shape 18"/>
+            <p:cNvPr id="486" name="Shape 18"/>
             <p:cNvSpPr/>
             <p:nvPr/>
           </p:nvSpPr>
@@ -21665,7 +22967,7 @@
         </p:sp>
         <p:sp>
           <p:nvSpPr>
-            <p:cNvPr id="457" name="Shape 19"/>
+            <p:cNvPr id="487" name="Shape 19"/>
             <p:cNvSpPr/>
             <p:nvPr/>
           </p:nvSpPr>
@@ -21709,7 +23011,7 @@
         </p:sp>
         <p:sp>
           <p:nvSpPr>
-            <p:cNvPr id="458" name="Shape 20"/>
+            <p:cNvPr id="488" name="Shape 20"/>
             <p:cNvSpPr/>
             <p:nvPr/>
           </p:nvSpPr>
@@ -21755,7 +23057,7 @@
         </p:sp>
         <p:sp>
           <p:nvSpPr>
-            <p:cNvPr id="459" name="Text 21"/>
+            <p:cNvPr id="489" name="Text 21"/>
             <p:cNvSpPr txBox="1"/>
             <p:nvPr/>
           </p:nvSpPr>
@@ -21820,7 +23122,7 @@
       </p:grpSp>
       <p:grpSp>
         <p:nvGrpSpPr>
-          <p:cNvPr id="460" name="Step 10 arrows"/>
+          <p:cNvPr id="490" name="Step 10 arrows"/>
           <p:cNvGrpSpPr/>
           <p:nvPr/>
         </p:nvGrpSpPr>
@@ -21834,7 +23136,7 @@
         </p:grpSpPr>
         <p:cxnSp>
           <p:nvCxnSpPr>
-            <p:cNvPr id="461" name="Arrow 1"/>
+            <p:cNvPr id="491" name="Arrow 1"/>
             <p:cNvCxnSpPr/>
             <p:nvPr/>
           </p:nvCxnSpPr>
@@ -21869,7 +23171,7 @@
         </p:cxnSp>
         <p:cxnSp>
           <p:nvCxnSpPr>
-            <p:cNvPr id="462" name="Arrow 2"/>
+            <p:cNvPr id="492" name="Arrow 2"/>
             <p:cNvCxnSpPr/>
             <p:nvPr/>
           </p:nvCxnSpPr>
@@ -21904,7 +23206,7 @@
         </p:cxnSp>
         <p:cxnSp>
           <p:nvCxnSpPr>
-            <p:cNvPr id="463" name="Arrow 3"/>
+            <p:cNvPr id="493" name="Arrow 3"/>
             <p:cNvCxnSpPr/>
             <p:nvPr/>
           </p:nvCxnSpPr>
@@ -21940,7 +23242,7 @@
         </p:cxnSp>
         <p:sp>
           <p:nvSpPr>
-            <p:cNvPr id="464" name="Shape 4"/>
+            <p:cNvPr id="494" name="Shape 4"/>
             <p:cNvSpPr/>
             <p:nvPr/>
           </p:nvSpPr>
@@ -21984,7 +23286,7 @@
         </p:sp>
         <p:sp>
           <p:nvSpPr>
-            <p:cNvPr id="465" name="Text 5"/>
+            <p:cNvPr id="495" name="Text 5"/>
             <p:cNvSpPr txBox="1"/>
             <p:nvPr/>
           </p:nvSpPr>
@@ -22020,7 +23322,7 @@
       </p:grpSp>
       <p:grpSp>
         <p:nvGrpSpPr>
-          <p:cNvPr id="466" name="Step 11 highlight"/>
+          <p:cNvPr id="496" name="Step 11 highlight"/>
           <p:cNvGrpSpPr/>
           <p:nvPr/>
         </p:nvGrpSpPr>
@@ -22034,7 +23336,7 @@
         </p:grpSpPr>
         <p:sp>
           <p:nvSpPr>
-            <p:cNvPr id="467" name="Shape 1"/>
+            <p:cNvPr id="497" name="Shape 1"/>
             <p:cNvSpPr/>
             <p:nvPr/>
           </p:nvSpPr>
@@ -22078,7 +23380,7 @@
         </p:sp>
         <p:sp>
           <p:nvSpPr>
-            <p:cNvPr id="468" name="Shape 2"/>
+            <p:cNvPr id="498" name="Shape 2"/>
             <p:cNvSpPr/>
             <p:nvPr/>
           </p:nvSpPr>
@@ -22122,7 +23424,7 @@
         </p:sp>
         <p:sp>
           <p:nvSpPr>
-            <p:cNvPr id="469" name="Shape 3"/>
+            <p:cNvPr id="499" name="Shape 3"/>
             <p:cNvSpPr/>
             <p:nvPr/>
           </p:nvSpPr>
@@ -22166,7 +23468,7 @@
         </p:sp>
         <p:sp>
           <p:nvSpPr>
-            <p:cNvPr id="470" name="Shape 4"/>
+            <p:cNvPr id="500" name="Shape 4"/>
             <p:cNvSpPr/>
             <p:nvPr/>
           </p:nvSpPr>
@@ -22210,7 +23512,7 @@
         </p:sp>
         <p:sp>
           <p:nvSpPr>
-            <p:cNvPr id="471" name="Shape 5"/>
+            <p:cNvPr id="501" name="Shape 5"/>
             <p:cNvSpPr/>
             <p:nvPr/>
           </p:nvSpPr>
@@ -22254,7 +23556,7 @@
         </p:sp>
         <p:sp>
           <p:nvSpPr>
-            <p:cNvPr id="472" name="Shape 6"/>
+            <p:cNvPr id="502" name="Shape 6"/>
             <p:cNvSpPr/>
             <p:nvPr/>
           </p:nvSpPr>
@@ -22298,7 +23600,7 @@
         </p:sp>
         <p:sp>
           <p:nvSpPr>
-            <p:cNvPr id="473" name="Shape 7"/>
+            <p:cNvPr id="503" name="Shape 7"/>
             <p:cNvSpPr/>
             <p:nvPr/>
           </p:nvSpPr>
@@ -22342,7 +23644,7 @@
         </p:sp>
         <p:sp>
           <p:nvSpPr>
-            <p:cNvPr id="474" name="Shape 8"/>
+            <p:cNvPr id="504" name="Shape 8"/>
             <p:cNvSpPr/>
             <p:nvPr/>
           </p:nvSpPr>
@@ -22386,7 +23688,7 @@
         </p:sp>
         <p:sp>
           <p:nvSpPr>
-            <p:cNvPr id="475" name="Shape 9"/>
+            <p:cNvPr id="505" name="Shape 9"/>
             <p:cNvSpPr/>
             <p:nvPr/>
           </p:nvSpPr>
@@ -22430,7 +23732,7 @@
         </p:sp>
         <p:sp>
           <p:nvSpPr>
-            <p:cNvPr id="476" name="Shape 10"/>
+            <p:cNvPr id="506" name="Shape 10"/>
             <p:cNvSpPr/>
             <p:nvPr/>
           </p:nvSpPr>
@@ -22474,7 +23776,7 @@
         </p:sp>
         <p:sp>
           <p:nvSpPr>
-            <p:cNvPr id="477" name="Shape 11"/>
+            <p:cNvPr id="507" name="Shape 11"/>
             <p:cNvSpPr/>
             <p:nvPr/>
           </p:nvSpPr>
@@ -22518,7 +23820,7 @@
         </p:sp>
         <p:sp>
           <p:nvSpPr>
-            <p:cNvPr id="478" name="Shape 12"/>
+            <p:cNvPr id="508" name="Shape 12"/>
             <p:cNvSpPr/>
             <p:nvPr/>
           </p:nvSpPr>
@@ -22562,7 +23864,7 @@
         </p:sp>
         <p:sp>
           <p:nvSpPr>
-            <p:cNvPr id="479" name="Shape 13"/>
+            <p:cNvPr id="509" name="Shape 13"/>
             <p:cNvSpPr/>
             <p:nvPr/>
           </p:nvSpPr>
@@ -22606,7 +23908,7 @@
         </p:sp>
         <p:sp>
           <p:nvSpPr>
-            <p:cNvPr id="480" name="Shape 14"/>
+            <p:cNvPr id="510" name="Shape 14"/>
             <p:cNvSpPr/>
             <p:nvPr/>
           </p:nvSpPr>
@@ -22650,7 +23952,7 @@
         </p:sp>
         <p:sp>
           <p:nvSpPr>
-            <p:cNvPr id="481" name="Shape 15"/>
+            <p:cNvPr id="511" name="Shape 15"/>
             <p:cNvSpPr/>
             <p:nvPr/>
           </p:nvSpPr>
@@ -22694,7 +23996,7 @@
         </p:sp>
         <p:sp>
           <p:nvSpPr>
-            <p:cNvPr id="482" name="Shape 16"/>
+            <p:cNvPr id="512" name="Shape 16"/>
             <p:cNvSpPr/>
             <p:nvPr/>
           </p:nvSpPr>
@@ -22738,7 +24040,7 @@
         </p:sp>
         <p:sp>
           <p:nvSpPr>
-            <p:cNvPr id="483" name="Shape 17"/>
+            <p:cNvPr id="513" name="Shape 17"/>
             <p:cNvSpPr/>
             <p:nvPr/>
           </p:nvSpPr>
@@ -22782,7 +24084,7 @@
         </p:sp>
         <p:sp>
           <p:nvSpPr>
-            <p:cNvPr id="484" name="Shape 18"/>
+            <p:cNvPr id="514" name="Shape 18"/>
             <p:cNvSpPr/>
             <p:nvPr/>
           </p:nvSpPr>
@@ -22828,7 +24130,7 @@
         </p:sp>
         <p:sp>
           <p:nvSpPr>
-            <p:cNvPr id="485" name="Text 19"/>
+            <p:cNvPr id="515" name="Text 19"/>
             <p:cNvSpPr txBox="1"/>
             <p:nvPr/>
           </p:nvSpPr>
@@ -22893,7 +24195,7 @@
       </p:grpSp>
       <p:grpSp>
         <p:nvGrpSpPr>
-          <p:cNvPr id="486" name="Step 11 arrows"/>
+          <p:cNvPr id="516" name="Step 11 arrows"/>
           <p:cNvGrpSpPr/>
           <p:nvPr/>
         </p:nvGrpSpPr>
@@ -22907,7 +24209,7 @@
         </p:grpSpPr>
         <p:cxnSp>
           <p:nvCxnSpPr>
-            <p:cNvPr id="487" name="Arrow 1"/>
+            <p:cNvPr id="517" name="Arrow 1"/>
             <p:cNvCxnSpPr/>
             <p:nvPr/>
           </p:nvCxnSpPr>
@@ -22942,7 +24244,7 @@
         </p:cxnSp>
         <p:cxnSp>
           <p:nvCxnSpPr>
-            <p:cNvPr id="488" name="Arrow 2"/>
+            <p:cNvPr id="518" name="Arrow 2"/>
             <p:cNvCxnSpPr/>
             <p:nvPr/>
           </p:nvCxnSpPr>
@@ -22977,7 +24279,7 @@
         </p:cxnSp>
         <p:cxnSp>
           <p:nvCxnSpPr>
-            <p:cNvPr id="489" name="Arrow 3"/>
+            <p:cNvPr id="519" name="Arrow 3"/>
             <p:cNvCxnSpPr/>
             <p:nvPr/>
           </p:nvCxnSpPr>
@@ -23013,7 +24315,7 @@
         </p:cxnSp>
         <p:sp>
           <p:nvSpPr>
-            <p:cNvPr id="490" name="Shape 4"/>
+            <p:cNvPr id="520" name="Shape 4"/>
             <p:cNvSpPr/>
             <p:nvPr/>
           </p:nvSpPr>
@@ -23057,7 +24359,7 @@
         </p:sp>
         <p:sp>
           <p:nvSpPr>
-            <p:cNvPr id="491" name="Text 5"/>
+            <p:cNvPr id="521" name="Text 5"/>
             <p:cNvSpPr txBox="1"/>
             <p:nvPr/>
           </p:nvSpPr>
@@ -23093,7 +24395,7 @@
       </p:grpSp>
       <p:grpSp>
         <p:nvGrpSpPr>
-          <p:cNvPr id="492" name="Step 12 highlight"/>
+          <p:cNvPr id="522" name="Step 12 highlight"/>
           <p:cNvGrpSpPr/>
           <p:nvPr/>
         </p:nvGrpSpPr>
@@ -23107,7 +24409,7 @@
         </p:grpSpPr>
         <p:sp>
           <p:nvSpPr>
-            <p:cNvPr id="493" name="Shape 1"/>
+            <p:cNvPr id="523" name="Shape 1"/>
             <p:cNvSpPr/>
             <p:nvPr/>
           </p:nvSpPr>
@@ -23151,7 +24453,7 @@
         </p:sp>
         <p:sp>
           <p:nvSpPr>
-            <p:cNvPr id="494" name="Shape 2"/>
+            <p:cNvPr id="524" name="Shape 2"/>
             <p:cNvSpPr/>
             <p:nvPr/>
           </p:nvSpPr>
@@ -23195,7 +24497,7 @@
         </p:sp>
         <p:sp>
           <p:nvSpPr>
-            <p:cNvPr id="495" name="Shape 3"/>
+            <p:cNvPr id="525" name="Shape 3"/>
             <p:cNvSpPr/>
             <p:nvPr/>
           </p:nvSpPr>
@@ -23239,7 +24541,7 @@
         </p:sp>
         <p:sp>
           <p:nvSpPr>
-            <p:cNvPr id="496" name="Shape 4"/>
+            <p:cNvPr id="526" name="Shape 4"/>
             <p:cNvSpPr/>
             <p:nvPr/>
           </p:nvSpPr>
@@ -23283,7 +24585,7 @@
         </p:sp>
         <p:sp>
           <p:nvSpPr>
-            <p:cNvPr id="497" name="Shape 5"/>
+            <p:cNvPr id="527" name="Shape 5"/>
             <p:cNvSpPr/>
             <p:nvPr/>
           </p:nvSpPr>
@@ -23327,7 +24629,7 @@
         </p:sp>
         <p:sp>
           <p:nvSpPr>
-            <p:cNvPr id="498" name="Shape 6"/>
+            <p:cNvPr id="528" name="Shape 6"/>
             <p:cNvSpPr/>
             <p:nvPr/>
           </p:nvSpPr>
@@ -23371,7 +24673,7 @@
         </p:sp>
         <p:sp>
           <p:nvSpPr>
-            <p:cNvPr id="499" name="Shape 7"/>
+            <p:cNvPr id="529" name="Shape 7"/>
             <p:cNvSpPr/>
             <p:nvPr/>
           </p:nvSpPr>
@@ -23415,7 +24717,7 @@
         </p:sp>
         <p:sp>
           <p:nvSpPr>
-            <p:cNvPr id="500" name="Shape 8"/>
+            <p:cNvPr id="530" name="Shape 8"/>
             <p:cNvSpPr/>
             <p:nvPr/>
           </p:nvSpPr>
@@ -23459,7 +24761,7 @@
         </p:sp>
         <p:sp>
           <p:nvSpPr>
-            <p:cNvPr id="501" name="Shape 9"/>
+            <p:cNvPr id="531" name="Shape 9"/>
             <p:cNvSpPr/>
             <p:nvPr/>
           </p:nvSpPr>
@@ -23503,7 +24805,7 @@
         </p:sp>
         <p:sp>
           <p:nvSpPr>
-            <p:cNvPr id="502" name="Shape 10"/>
+            <p:cNvPr id="532" name="Shape 10"/>
             <p:cNvSpPr/>
             <p:nvPr/>
           </p:nvSpPr>
@@ -23547,7 +24849,7 @@
         </p:sp>
         <p:sp>
           <p:nvSpPr>
-            <p:cNvPr id="503" name="Shape 11"/>
+            <p:cNvPr id="533" name="Shape 11"/>
             <p:cNvSpPr/>
             <p:nvPr/>
           </p:nvSpPr>
@@ -23591,7 +24893,7 @@
         </p:sp>
         <p:sp>
           <p:nvSpPr>
-            <p:cNvPr id="504" name="Shape 12"/>
+            <p:cNvPr id="534" name="Shape 12"/>
             <p:cNvSpPr/>
             <p:nvPr/>
           </p:nvSpPr>
@@ -23635,7 +24937,7 @@
         </p:sp>
         <p:sp>
           <p:nvSpPr>
-            <p:cNvPr id="505" name="Shape 13"/>
+            <p:cNvPr id="535" name="Shape 13"/>
             <p:cNvSpPr/>
             <p:nvPr/>
           </p:nvSpPr>
@@ -23679,7 +24981,7 @@
         </p:sp>
         <p:sp>
           <p:nvSpPr>
-            <p:cNvPr id="506" name="Shape 14"/>
+            <p:cNvPr id="536" name="Shape 14"/>
             <p:cNvSpPr/>
             <p:nvPr/>
           </p:nvSpPr>
@@ -23725,7 +25027,7 @@
         </p:sp>
         <p:sp>
           <p:nvSpPr>
-            <p:cNvPr id="507" name="Text 15"/>
+            <p:cNvPr id="537" name="Text 15"/>
             <p:cNvSpPr txBox="1"/>
             <p:nvPr/>
           </p:nvSpPr>
@@ -23790,7 +25092,7 @@
       </p:grpSp>
       <p:grpSp>
         <p:nvGrpSpPr>
-          <p:cNvPr id="508" name="Step 12 arrows"/>
+          <p:cNvPr id="538" name="Step 12 arrows"/>
           <p:cNvGrpSpPr/>
           <p:nvPr/>
         </p:nvGrpSpPr>
@@ -23804,7 +25106,7 @@
         </p:grpSpPr>
         <p:cxnSp>
           <p:nvCxnSpPr>
-            <p:cNvPr id="509" name="Arrow 1"/>
+            <p:cNvPr id="539" name="Arrow 1"/>
             <p:cNvCxnSpPr/>
             <p:nvPr/>
           </p:nvCxnSpPr>
@@ -23841,7 +25143,7 @@
       </p:grpSp>
       <p:grpSp>
         <p:nvGrpSpPr>
-          <p:cNvPr id="510" name="Step 13 highlight"/>
+          <p:cNvPr id="540" name="Step 13 highlight"/>
           <p:cNvGrpSpPr/>
           <p:nvPr/>
         </p:nvGrpSpPr>
@@ -23855,7 +25157,7 @@
         </p:grpSpPr>
         <p:sp>
           <p:nvSpPr>
-            <p:cNvPr id="511" name="Shape 1"/>
+            <p:cNvPr id="541" name="Shape 1"/>
             <p:cNvSpPr/>
             <p:nvPr/>
           </p:nvSpPr>
@@ -23899,7 +25201,7 @@
         </p:sp>
         <p:sp>
           <p:nvSpPr>
-            <p:cNvPr id="512" name="Shape 2"/>
+            <p:cNvPr id="542" name="Shape 2"/>
             <p:cNvSpPr/>
             <p:nvPr/>
           </p:nvSpPr>
@@ -23943,7 +25245,7 @@
         </p:sp>
         <p:sp>
           <p:nvSpPr>
-            <p:cNvPr id="513" name="Shape 3"/>
+            <p:cNvPr id="543" name="Shape 3"/>
             <p:cNvSpPr/>
             <p:nvPr/>
           </p:nvSpPr>
@@ -23987,7 +25289,7 @@
         </p:sp>
         <p:sp>
           <p:nvSpPr>
-            <p:cNvPr id="514" name="Shape 4"/>
+            <p:cNvPr id="544" name="Shape 4"/>
             <p:cNvSpPr/>
             <p:nvPr/>
           </p:nvSpPr>
@@ -24031,7 +25333,7 @@
         </p:sp>
         <p:sp>
           <p:nvSpPr>
-            <p:cNvPr id="515" name="Shape 5"/>
+            <p:cNvPr id="545" name="Shape 5"/>
             <p:cNvSpPr/>
             <p:nvPr/>
           </p:nvSpPr>
@@ -24075,7 +25377,7 @@
         </p:sp>
         <p:sp>
           <p:nvSpPr>
-            <p:cNvPr id="516" name="Shape 6"/>
+            <p:cNvPr id="546" name="Shape 6"/>
             <p:cNvSpPr/>
             <p:nvPr/>
           </p:nvSpPr>
@@ -24119,7 +25421,7 @@
         </p:sp>
         <p:sp>
           <p:nvSpPr>
-            <p:cNvPr id="517" name="Shape 7"/>
+            <p:cNvPr id="547" name="Shape 7"/>
             <p:cNvSpPr/>
             <p:nvPr/>
           </p:nvSpPr>
@@ -24165,7 +25467,7 @@
         </p:sp>
         <p:sp>
           <p:nvSpPr>
-            <p:cNvPr id="518" name="Text 8"/>
+            <p:cNvPr id="548" name="Text 8"/>
             <p:cNvSpPr txBox="1"/>
             <p:nvPr/>
           </p:nvSpPr>
@@ -24979,7 +26281,7 @@
                                           </p:stCondLst>
                                         </p:cTn>
                                         <p:tgtEl>
-                                          <p:spTgt spid="317"/>
+                                          <p:spTgt spid="330"/>
                                         </p:tgtEl>
                                         <p:attrNameLst>
                                           <p:attrName>style.visibility</p:attrName>
@@ -24993,7 +26295,7 @@
                                       <p:cBhvr>
                                         <p:cTn id="71" dur="600"/>
                                         <p:tgtEl>
-                                          <p:spTgt spid="317"/>
+                                          <p:spTgt spid="330"/>
                                         </p:tgtEl>
                                       </p:cBhvr>
                                     </p:animEffect>
@@ -25063,7 +26365,7 @@
                                       <p:cBhvr>
                                         <p:cTn id="78" dur="250"/>
                                         <p:tgtEl>
-                                          <p:spTgt spid="317"/>
+                                          <p:spTgt spid="330"/>
                                         </p:tgtEl>
                                       </p:cBhvr>
                                     </p:animEffect>
@@ -25075,7 +26377,7 @@
                                           </p:stCondLst>
                                         </p:cTn>
                                         <p:tgtEl>
-                                          <p:spTgt spid="317"/>
+                                          <p:spTgt spid="330"/>
                                         </p:tgtEl>
                                         <p:attrNameLst>
                                           <p:attrName>style.visibility</p:attrName>
@@ -25102,7 +26404,7 @@
                                           </p:stCondLst>
                                         </p:cTn>
                                         <p:tgtEl>
-                                          <p:spTgt spid="322"/>
+                                          <p:spTgt spid="337"/>
                                         </p:tgtEl>
                                         <p:attrNameLst>
                                           <p:attrName>style.visibility</p:attrName>
@@ -25116,7 +26418,7 @@
                                       <p:cBhvr>
                                         <p:cTn id="82" dur="350"/>
                                         <p:tgtEl>
-                                          <p:spTgt spid="322"/>
+                                          <p:spTgt spid="337"/>
                                         </p:tgtEl>
                                       </p:cBhvr>
                                     </p:animEffect>
@@ -25146,7 +26448,7 @@
                                           </p:stCondLst>
                                         </p:cTn>
                                         <p:tgtEl>
-                                          <p:spTgt spid="331"/>
+                                          <p:spTgt spid="359"/>
                                         </p:tgtEl>
                                         <p:attrNameLst>
                                           <p:attrName>style.visibility</p:attrName>
@@ -25160,7 +26462,7 @@
                                       <p:cBhvr>
                                         <p:cTn id="86" dur="600"/>
                                         <p:tgtEl>
-                                          <p:spTgt spid="331"/>
+                                          <p:spTgt spid="359"/>
                                         </p:tgtEl>
                                       </p:cBhvr>
                                     </p:animEffect>
@@ -25195,7 +26497,7 @@
                                       <p:cBhvr>
                                         <p:cTn id="90" dur="250"/>
                                         <p:tgtEl>
-                                          <p:spTgt spid="322"/>
+                                          <p:spTgt spid="337"/>
                                         </p:tgtEl>
                                       </p:cBhvr>
                                     </p:animEffect>
@@ -25207,7 +26509,7 @@
                                           </p:stCondLst>
                                         </p:cTn>
                                         <p:tgtEl>
-                                          <p:spTgt spid="322"/>
+                                          <p:spTgt spid="337"/>
                                         </p:tgtEl>
                                         <p:attrNameLst>
                                           <p:attrName>style.visibility</p:attrName>
@@ -25230,7 +26532,7 @@
                                       <p:cBhvr>
                                         <p:cTn id="93" dur="250"/>
                                         <p:tgtEl>
-                                          <p:spTgt spid="331"/>
+                                          <p:spTgt spid="359"/>
                                         </p:tgtEl>
                                       </p:cBhvr>
                                     </p:animEffect>
@@ -25242,7 +26544,7 @@
                                           </p:stCondLst>
                                         </p:cTn>
                                         <p:tgtEl>
-                                          <p:spTgt spid="331"/>
+                                          <p:spTgt spid="359"/>
                                         </p:tgtEl>
                                         <p:attrNameLst>
                                           <p:attrName>style.visibility</p:attrName>
@@ -25269,7 +26571,7 @@
                                           </p:stCondLst>
                                         </p:cTn>
                                         <p:tgtEl>
-                                          <p:spTgt spid="340"/>
+                                          <p:spTgt spid="370"/>
                                         </p:tgtEl>
                                         <p:attrNameLst>
                                           <p:attrName>style.visibility</p:attrName>
@@ -25283,7 +26585,7 @@
                                       <p:cBhvr>
                                         <p:cTn id="97" dur="350"/>
                                         <p:tgtEl>
-                                          <p:spTgt spid="340"/>
+                                          <p:spTgt spid="370"/>
                                         </p:tgtEl>
                                       </p:cBhvr>
                                     </p:animEffect>
@@ -25313,7 +26615,7 @@
                                           </p:stCondLst>
                                         </p:cTn>
                                         <p:tgtEl>
-                                          <p:spTgt spid="360"/>
+                                          <p:spTgt spid="390"/>
                                         </p:tgtEl>
                                         <p:attrNameLst>
                                           <p:attrName>style.visibility</p:attrName>
@@ -25327,7 +26629,7 @@
                                       <p:cBhvr>
                                         <p:cTn id="101" dur="600"/>
                                         <p:tgtEl>
-                                          <p:spTgt spid="360"/>
+                                          <p:spTgt spid="390"/>
                                         </p:tgtEl>
                                       </p:cBhvr>
                                     </p:animEffect>
@@ -25362,7 +26664,7 @@
                                       <p:cBhvr>
                                         <p:cTn id="105" dur="250"/>
                                         <p:tgtEl>
-                                          <p:spTgt spid="340"/>
+                                          <p:spTgt spid="370"/>
                                         </p:tgtEl>
                                       </p:cBhvr>
                                     </p:animEffect>
@@ -25374,7 +26676,7 @@
                                           </p:stCondLst>
                                         </p:cTn>
                                         <p:tgtEl>
-                                          <p:spTgt spid="340"/>
+                                          <p:spTgt spid="370"/>
                                         </p:tgtEl>
                                         <p:attrNameLst>
                                           <p:attrName>style.visibility</p:attrName>
@@ -25397,7 +26699,7 @@
                                       <p:cBhvr>
                                         <p:cTn id="108" dur="250"/>
                                         <p:tgtEl>
-                                          <p:spTgt spid="360"/>
+                                          <p:spTgt spid="390"/>
                                         </p:tgtEl>
                                       </p:cBhvr>
                                     </p:animEffect>
@@ -25409,7 +26711,7 @@
                                           </p:stCondLst>
                                         </p:cTn>
                                         <p:tgtEl>
-                                          <p:spTgt spid="360"/>
+                                          <p:spTgt spid="390"/>
                                         </p:tgtEl>
                                         <p:attrNameLst>
                                           <p:attrName>style.visibility</p:attrName>
@@ -25436,7 +26738,7 @@
                                           </p:stCondLst>
                                         </p:cTn>
                                         <p:tgtEl>
-                                          <p:spTgt spid="366"/>
+                                          <p:spTgt spid="396"/>
                                         </p:tgtEl>
                                         <p:attrNameLst>
                                           <p:attrName>style.visibility</p:attrName>
@@ -25450,7 +26752,7 @@
                                       <p:cBhvr>
                                         <p:cTn id="112" dur="350"/>
                                         <p:tgtEl>
-                                          <p:spTgt spid="366"/>
+                                          <p:spTgt spid="396"/>
                                         </p:tgtEl>
                                       </p:cBhvr>
                                     </p:animEffect>
@@ -25480,7 +26782,7 @@
                                           </p:stCondLst>
                                         </p:cTn>
                                         <p:tgtEl>
-                                          <p:spTgt spid="392"/>
+                                          <p:spTgt spid="422"/>
                                         </p:tgtEl>
                                         <p:attrNameLst>
                                           <p:attrName>style.visibility</p:attrName>
@@ -25494,7 +26796,7 @@
                                       <p:cBhvr>
                                         <p:cTn id="116" dur="600"/>
                                         <p:tgtEl>
-                                          <p:spTgt spid="392"/>
+                                          <p:spTgt spid="422"/>
                                         </p:tgtEl>
                                       </p:cBhvr>
                                     </p:animEffect>
@@ -25529,7 +26831,7 @@
                                       <p:cBhvr>
                                         <p:cTn id="120" dur="250"/>
                                         <p:tgtEl>
-                                          <p:spTgt spid="366"/>
+                                          <p:spTgt spid="396"/>
                                         </p:tgtEl>
                                       </p:cBhvr>
                                     </p:animEffect>
@@ -25541,7 +26843,7 @@
                                           </p:stCondLst>
                                         </p:cTn>
                                         <p:tgtEl>
-                                          <p:spTgt spid="366"/>
+                                          <p:spTgt spid="396"/>
                                         </p:tgtEl>
                                         <p:attrNameLst>
                                           <p:attrName>style.visibility</p:attrName>
@@ -25564,7 +26866,7 @@
                                       <p:cBhvr>
                                         <p:cTn id="123" dur="250"/>
                                         <p:tgtEl>
-                                          <p:spTgt spid="392"/>
+                                          <p:spTgt spid="422"/>
                                         </p:tgtEl>
                                       </p:cBhvr>
                                     </p:animEffect>
@@ -25576,7 +26878,7 @@
                                           </p:stCondLst>
                                         </p:cTn>
                                         <p:tgtEl>
-                                          <p:spTgt spid="392"/>
+                                          <p:spTgt spid="422"/>
                                         </p:tgtEl>
                                         <p:attrNameLst>
                                           <p:attrName>style.visibility</p:attrName>
@@ -25603,7 +26905,7 @@
                                           </p:stCondLst>
                                         </p:cTn>
                                         <p:tgtEl>
-                                          <p:spTgt spid="398"/>
+                                          <p:spTgt spid="428"/>
                                         </p:tgtEl>
                                         <p:attrNameLst>
                                           <p:attrName>style.visibility</p:attrName>
@@ -25617,7 +26919,7 @@
                                       <p:cBhvr>
                                         <p:cTn id="127" dur="350"/>
                                         <p:tgtEl>
-                                          <p:spTgt spid="398"/>
+                                          <p:spTgt spid="428"/>
                                         </p:tgtEl>
                                       </p:cBhvr>
                                     </p:animEffect>
@@ -25647,7 +26949,7 @@
                                           </p:stCondLst>
                                         </p:cTn>
                                         <p:tgtEl>
-                                          <p:spTgt spid="432"/>
+                                          <p:spTgt spid="462"/>
                                         </p:tgtEl>
                                         <p:attrNameLst>
                                           <p:attrName>style.visibility</p:attrName>
@@ -25661,7 +26963,7 @@
                                       <p:cBhvr>
                                         <p:cTn id="131" dur="600"/>
                                         <p:tgtEl>
-                                          <p:spTgt spid="432"/>
+                                          <p:spTgt spid="462"/>
                                         </p:tgtEl>
                                       </p:cBhvr>
                                     </p:animEffect>
@@ -25696,7 +26998,7 @@
                                       <p:cBhvr>
                                         <p:cTn id="135" dur="250"/>
                                         <p:tgtEl>
-                                          <p:spTgt spid="398"/>
+                                          <p:spTgt spid="428"/>
                                         </p:tgtEl>
                                       </p:cBhvr>
                                     </p:animEffect>
@@ -25708,7 +27010,7 @@
                                           </p:stCondLst>
                                         </p:cTn>
                                         <p:tgtEl>
-                                          <p:spTgt spid="398"/>
+                                          <p:spTgt spid="428"/>
                                         </p:tgtEl>
                                         <p:attrNameLst>
                                           <p:attrName>style.visibility</p:attrName>
@@ -25731,7 +27033,7 @@
                                       <p:cBhvr>
                                         <p:cTn id="138" dur="250"/>
                                         <p:tgtEl>
-                                          <p:spTgt spid="432"/>
+                                          <p:spTgt spid="462"/>
                                         </p:tgtEl>
                                       </p:cBhvr>
                                     </p:animEffect>
@@ -25743,7 +27045,7 @@
                                           </p:stCondLst>
                                         </p:cTn>
                                         <p:tgtEl>
-                                          <p:spTgt spid="432"/>
+                                          <p:spTgt spid="462"/>
                                         </p:tgtEl>
                                         <p:attrNameLst>
                                           <p:attrName>style.visibility</p:attrName>
@@ -25770,7 +27072,7 @@
                                           </p:stCondLst>
                                         </p:cTn>
                                         <p:tgtEl>
-                                          <p:spTgt spid="438"/>
+                                          <p:spTgt spid="468"/>
                                         </p:tgtEl>
                                         <p:attrNameLst>
                                           <p:attrName>style.visibility</p:attrName>
@@ -25784,7 +27086,7 @@
                                       <p:cBhvr>
                                         <p:cTn id="142" dur="350"/>
                                         <p:tgtEl>
-                                          <p:spTgt spid="438"/>
+                                          <p:spTgt spid="468"/>
                                         </p:tgtEl>
                                       </p:cBhvr>
                                     </p:animEffect>
@@ -25814,7 +27116,7 @@
                                           </p:stCondLst>
                                         </p:cTn>
                                         <p:tgtEl>
-                                          <p:spTgt spid="460"/>
+                                          <p:spTgt spid="490"/>
                                         </p:tgtEl>
                                         <p:attrNameLst>
                                           <p:attrName>style.visibility</p:attrName>
@@ -25828,7 +27130,7 @@
                                       <p:cBhvr>
                                         <p:cTn id="146" dur="600"/>
                                         <p:tgtEl>
-                                          <p:spTgt spid="460"/>
+                                          <p:spTgt spid="490"/>
                                         </p:tgtEl>
                                       </p:cBhvr>
                                     </p:animEffect>
@@ -25863,7 +27165,7 @@
                                       <p:cBhvr>
                                         <p:cTn id="150" dur="250"/>
                                         <p:tgtEl>
-                                          <p:spTgt spid="438"/>
+                                          <p:spTgt spid="468"/>
                                         </p:tgtEl>
                                       </p:cBhvr>
                                     </p:animEffect>
@@ -25875,7 +27177,7 @@
                                           </p:stCondLst>
                                         </p:cTn>
                                         <p:tgtEl>
-                                          <p:spTgt spid="438"/>
+                                          <p:spTgt spid="468"/>
                                         </p:tgtEl>
                                         <p:attrNameLst>
                                           <p:attrName>style.visibility</p:attrName>
@@ -25898,7 +27200,7 @@
                                       <p:cBhvr>
                                         <p:cTn id="153" dur="250"/>
                                         <p:tgtEl>
-                                          <p:spTgt spid="460"/>
+                                          <p:spTgt spid="490"/>
                                         </p:tgtEl>
                                       </p:cBhvr>
                                     </p:animEffect>
@@ -25910,7 +27212,7 @@
                                           </p:stCondLst>
                                         </p:cTn>
                                         <p:tgtEl>
-                                          <p:spTgt spid="460"/>
+                                          <p:spTgt spid="490"/>
                                         </p:tgtEl>
                                         <p:attrNameLst>
                                           <p:attrName>style.visibility</p:attrName>
@@ -25937,7 +27239,7 @@
                                           </p:stCondLst>
                                         </p:cTn>
                                         <p:tgtEl>
-                                          <p:spTgt spid="466"/>
+                                          <p:spTgt spid="496"/>
                                         </p:tgtEl>
                                         <p:attrNameLst>
                                           <p:attrName>style.visibility</p:attrName>
@@ -25951,7 +27253,7 @@
                                       <p:cBhvr>
                                         <p:cTn id="157" dur="350"/>
                                         <p:tgtEl>
-                                          <p:spTgt spid="466"/>
+                                          <p:spTgt spid="496"/>
                                         </p:tgtEl>
                                       </p:cBhvr>
                                     </p:animEffect>
@@ -25981,7 +27283,7 @@
                                           </p:stCondLst>
                                         </p:cTn>
                                         <p:tgtEl>
-                                          <p:spTgt spid="486"/>
+                                          <p:spTgt spid="516"/>
                                         </p:tgtEl>
                                         <p:attrNameLst>
                                           <p:attrName>style.visibility</p:attrName>
@@ -25995,7 +27297,7 @@
                                       <p:cBhvr>
                                         <p:cTn id="161" dur="600"/>
                                         <p:tgtEl>
-                                          <p:spTgt spid="486"/>
+                                          <p:spTgt spid="516"/>
                                         </p:tgtEl>
                                       </p:cBhvr>
                                     </p:animEffect>
@@ -26030,7 +27332,7 @@
                                       <p:cBhvr>
                                         <p:cTn id="165" dur="250"/>
                                         <p:tgtEl>
-                                          <p:spTgt spid="466"/>
+                                          <p:spTgt spid="496"/>
                                         </p:tgtEl>
                                       </p:cBhvr>
                                     </p:animEffect>
@@ -26042,7 +27344,7 @@
                                           </p:stCondLst>
                                         </p:cTn>
                                         <p:tgtEl>
-                                          <p:spTgt spid="466"/>
+                                          <p:spTgt spid="496"/>
                                         </p:tgtEl>
                                         <p:attrNameLst>
                                           <p:attrName>style.visibility</p:attrName>
@@ -26065,7 +27367,7 @@
                                       <p:cBhvr>
                                         <p:cTn id="168" dur="250"/>
                                         <p:tgtEl>
-                                          <p:spTgt spid="486"/>
+                                          <p:spTgt spid="516"/>
                                         </p:tgtEl>
                                       </p:cBhvr>
                                     </p:animEffect>
@@ -26077,7 +27379,7 @@
                                           </p:stCondLst>
                                         </p:cTn>
                                         <p:tgtEl>
-                                          <p:spTgt spid="486"/>
+                                          <p:spTgt spid="516"/>
                                         </p:tgtEl>
                                         <p:attrNameLst>
                                           <p:attrName>style.visibility</p:attrName>
@@ -26104,7 +27406,7 @@
                                           </p:stCondLst>
                                         </p:cTn>
                                         <p:tgtEl>
-                                          <p:spTgt spid="492"/>
+                                          <p:spTgt spid="522"/>
                                         </p:tgtEl>
                                         <p:attrNameLst>
                                           <p:attrName>style.visibility</p:attrName>
@@ -26118,7 +27420,7 @@
                                       <p:cBhvr>
                                         <p:cTn id="172" dur="350"/>
                                         <p:tgtEl>
-                                          <p:spTgt spid="492"/>
+                                          <p:spTgt spid="522"/>
                                         </p:tgtEl>
                                       </p:cBhvr>
                                     </p:animEffect>
@@ -26148,7 +27450,7 @@
                                           </p:stCondLst>
                                         </p:cTn>
                                         <p:tgtEl>
-                                          <p:spTgt spid="508"/>
+                                          <p:spTgt spid="538"/>
                                         </p:tgtEl>
                                         <p:attrNameLst>
                                           <p:attrName>style.visibility</p:attrName>
@@ -26162,7 +27464,7 @@
                                       <p:cBhvr>
                                         <p:cTn id="176" dur="600"/>
                                         <p:tgtEl>
-                                          <p:spTgt spid="508"/>
+                                          <p:spTgt spid="538"/>
                                         </p:tgtEl>
                                       </p:cBhvr>
                                     </p:animEffect>
@@ -26197,7 +27499,7 @@
                                       <p:cBhvr>
                                         <p:cTn id="180" dur="250"/>
                                         <p:tgtEl>
-                                          <p:spTgt spid="492"/>
+                                          <p:spTgt spid="522"/>
                                         </p:tgtEl>
                                       </p:cBhvr>
                                     </p:animEffect>
@@ -26209,7 +27511,7 @@
                                           </p:stCondLst>
                                         </p:cTn>
                                         <p:tgtEl>
-                                          <p:spTgt spid="492"/>
+                                          <p:spTgt spid="522"/>
                                         </p:tgtEl>
                                         <p:attrNameLst>
                                           <p:attrName>style.visibility</p:attrName>
@@ -26232,7 +27534,7 @@
                                       <p:cBhvr>
                                         <p:cTn id="183" dur="250"/>
                                         <p:tgtEl>
-                                          <p:spTgt spid="508"/>
+                                          <p:spTgt spid="538"/>
                                         </p:tgtEl>
                                       </p:cBhvr>
                                     </p:animEffect>
@@ -26244,7 +27546,7 @@
                                           </p:stCondLst>
                                         </p:cTn>
                                         <p:tgtEl>
-                                          <p:spTgt spid="508"/>
+                                          <p:spTgt spid="538"/>
                                         </p:tgtEl>
                                         <p:attrNameLst>
                                           <p:attrName>style.visibility</p:attrName>
@@ -26271,7 +27573,7 @@
                                           </p:stCondLst>
                                         </p:cTn>
                                         <p:tgtEl>
-                                          <p:spTgt spid="510"/>
+                                          <p:spTgt spid="540"/>
                                         </p:tgtEl>
                                         <p:attrNameLst>
                                           <p:attrName>style.visibility</p:attrName>
@@ -26285,7 +27587,7 @@
                                       <p:cBhvr>
                                         <p:cTn id="187" dur="350"/>
                                         <p:tgtEl>
-                                          <p:spTgt spid="510"/>
+                                          <p:spTgt spid="540"/>
                                         </p:tgtEl>
                                       </p:cBhvr>
                                     </p:animEffect>
@@ -26320,7 +27622,7 @@
                                       <p:cBhvr>
                                         <p:cTn id="191" dur="250"/>
                                         <p:tgtEl>
-                                          <p:spTgt spid="510"/>
+                                          <p:spTgt spid="540"/>
                                         </p:tgtEl>
                                       </p:cBhvr>
                                     </p:animEffect>
@@ -26332,7 +27634,7 @@
                                           </p:stCondLst>
                                         </p:cTn>
                                         <p:tgtEl>
-                                          <p:spTgt spid="510"/>
+                                          <p:spTgt spid="540"/>
                                         </p:tgtEl>
                                         <p:attrNameLst>
                                           <p:attrName>style.visibility</p:attrName>
